--- a/panel_control_TOP_P1/Panel_Control_TOP_P1.pptx
+++ b/panel_control_TOP_P1/Panel_Control_TOP_P1.pptx
@@ -687,13 +687,13 @@
               <c:numCache>
                 <c:ptCount val="3"/>
                 <c:pt idx="0">
-                  <c:v>1189</c:v>
+                  <c:v>1222</c:v>
                 </c:pt>
                 <c:pt idx="1">
-                  <c:v>779</c:v>
+                  <c:v>755</c:v>
                 </c:pt>
                 <c:pt idx="2">
-                  <c:v>20</c:v>
+                  <c:v>13</c:v>
                 </c:pt>
               </c:numCache>
             </c:numRef>
@@ -1638,7 +1638,7 @@
                   <c:v/>
                 </c:pt>
                 <c:pt idx="2">
-                  <c:v>2</c:v>
+                  <c:v/>
                 </c:pt>
                 <c:pt idx="3">
                   <c:v/>
@@ -1647,7 +1647,7 @@
                   <c:v/>
                 </c:pt>
                 <c:pt idx="5">
-                  <c:v>7</c:v>
+                  <c:v>4</c:v>
                 </c:pt>
                 <c:pt idx="6">
                   <c:v/>
@@ -1668,6 +1668,126 @@
           <c:tx>
             <c:strRef>
               <c:f>Sheet1!$D$1</c:f>
+              <c:strCache>
+                <c:ptCount val="1"/>
+                <c:pt idx="0">
+                  <c:v>Agenda vencida</c:v>
+                </c:pt>
+              </c:strCache>
+            </c:strRef>
+          </c:tx>
+          <c:spPr>
+            <a:solidFill>
+              <a:srgbClr val="9A6B0F"/>
+            </a:solidFill>
+            <a:effectLst/>
+          </c:spPr>
+          <c:invertIfNegative val="0"/>
+          <c:dLbls>
+            <c:numFmt formatCode="#,##0" sourceLinked="0"/>
+            <c:txPr>
+              <a:bodyPr/>
+              <a:lstStyle/>
+              <a:p>
+                <a:pPr>
+                  <a:defRPr b="1" i="0" strike="noStrike" sz="1100" u="none">
+                    <a:solidFill>
+                      <a:srgbClr val="FFFFFF"/>
+                    </a:solidFill>
+                    <a:latin typeface="Calibri"/>
+                  </a:defRPr>
+                </a:pPr>
+              </a:p>
+            </c:txPr>
+            <c:dLblPos val="ctr"/>
+            <c:showLegendKey val="0"/>
+            <c:showVal val="1"/>
+            <c:showCatName val="0"/>
+            <c:showSerName val="0"/>
+            <c:showPercent val="0"/>
+            <c:showBubbleSize val="0"/>
+            <c:showLeaderLines val="0"/>
+          </c:dLbls>
+          <c:cat>
+            <c:multiLvlStrRef>
+              <c:f>Sheet1!$A$2:$A$10</c:f>
+              <c:multiLvlStrCache>
+                <c:ptCount val="9"/>
+                <c:lvl>
+                  <c:pt idx="0">
+                    <c:v>CERRO VERDE/PS2</c:v>
+                  </c:pt>
+                  <c:pt idx="1">
+                    <c:v>EBMP</c:v>
+                  </c:pt>
+                  <c:pt idx="2">
+                    <c:v>EBMS</c:v>
+                  </c:pt>
+                  <c:pt idx="3">
+                    <c:v>IMPULSIÓN ADUCCIÓN</c:v>
+                  </c:pt>
+                  <c:pt idx="4">
+                    <c:v>LÍNEAS IMPULSIÓN</c:v>
+                  </c:pt>
+                  <c:pt idx="5">
+                    <c:v>PISCINAS Y SEDIMENTADOR</c:v>
+                  </c:pt>
+                  <c:pt idx="6">
+                    <c:v>POZOS</c:v>
+                  </c:pt>
+                  <c:pt idx="7">
+                    <c:v>PQS</c:v>
+                  </c:pt>
+                  <c:pt idx="8">
+                    <c:v>SALA GAR</c:v>
+                  </c:pt>
+                </c:lvl>
+              </c:multiLvlStrCache>
+            </c:multiLvlStrRef>
+          </c:cat>
+          <c:val>
+            <c:numRef>
+              <c:f>Sheet1!$D$2:$D$10</c:f>
+              <c:numCache>
+                <c:formatCode>General</c:formatCode>
+                <c:ptCount val="9"/>
+                <c:pt idx="0">
+                  <c:v/>
+                </c:pt>
+                <c:pt idx="1">
+                  <c:v/>
+                </c:pt>
+                <c:pt idx="2">
+                  <c:v>2</c:v>
+                </c:pt>
+                <c:pt idx="3">
+                  <c:v/>
+                </c:pt>
+                <c:pt idx="4">
+                  <c:v/>
+                </c:pt>
+                <c:pt idx="5">
+                  <c:v>3</c:v>
+                </c:pt>
+                <c:pt idx="6">
+                  <c:v/>
+                </c:pt>
+                <c:pt idx="7">
+                  <c:v/>
+                </c:pt>
+                <c:pt idx="8">
+                  <c:v/>
+                </c:pt>
+              </c:numCache>
+            </c:numRef>
+          </c:val>
+        </c:ser>
+        <c:ser>
+          <c:idx val="3"/>
+          <c:order val="3"/>
+          <c:tx>
+            <c:strRef>
+              <c:f>Sheet1!$E$1</c:f>
               <c:strCache>
                 <c:ptCount val="1"/>
                 <c:pt idx="0">
@@ -1747,7 +1867,7 @@
           </c:cat>
           <c:val>
             <c:numRef>
-              <c:f>Sheet1!$D$2:$D$10</c:f>
+              <c:f>Sheet1!$E$2:$E$10</c:f>
               <c:numCache>
                 <c:formatCode>General</c:formatCode>
                 <c:ptCount val="9"/>
@@ -2073,10 +2193,10 @@
                   <c:v>2</c:v>
                 </c:pt>
                 <c:pt idx="1">
-                  <c:v>18</c:v>
+                  <c:v>20</c:v>
                 </c:pt>
                 <c:pt idx="2">
-                  <c:v>16</c:v>
+                  <c:v>17</c:v>
                 </c:pt>
                 <c:pt idx="3">
                   <c:v>3</c:v>
@@ -2085,7 +2205,7 @@
                   <c:v>10</c:v>
                 </c:pt>
                 <c:pt idx="5">
-                  <c:v>10</c:v>
+                  <c:v>15</c:v>
                 </c:pt>
                 <c:pt idx="6">
                   <c:v>110</c:v>
@@ -2193,10 +2313,10 @@
                   <c:v/>
                 </c:pt>
                 <c:pt idx="1">
-                  <c:v>2</c:v>
+                  <c:v/>
                 </c:pt>
                 <c:pt idx="2">
-                  <c:v>9</c:v>
+                  <c:v>8</c:v>
                 </c:pt>
                 <c:pt idx="3">
                   <c:v/>
@@ -2205,7 +2325,7 @@
                   <c:v>3</c:v>
                 </c:pt>
                 <c:pt idx="5">
-                  <c:v>11</c:v>
+                  <c:v>6</c:v>
                 </c:pt>
                 <c:pt idx="6">
                   <c:v/>
@@ -2616,13 +2736,13 @@
                 <c:formatCode>General</c:formatCode>
                 <c:ptCount val="5"/>
                 <c:pt idx="0">
-                  <c:v>5</c:v>
+                  <c:v>6</c:v>
                 </c:pt>
                 <c:pt idx="1">
                   <c:v>61</c:v>
                 </c:pt>
                 <c:pt idx="2">
-                  <c:v>23</c:v>
+                  <c:v>32</c:v>
                 </c:pt>
                 <c:pt idx="3">
                   <c:v>12</c:v>
@@ -2724,7 +2844,7 @@
                   <c:v>13</c:v>
                 </c:pt>
                 <c:pt idx="4">
-                  <c:v>5</c:v>
+                  <c:v>6</c:v>
                 </c:pt>
               </c:numCache>
             </c:numRef>
@@ -3012,7 +3132,7 @@
                   <c:v>19</c:v>
                 </c:pt>
                 <c:pt idx="3">
-                  <c:v>1</c:v>
+                  <c:v>2</c:v>
                 </c:pt>
               </c:numCache>
             </c:numRef>
@@ -3102,7 +3222,7 @@
                   <c:v>3</c:v>
                 </c:pt>
                 <c:pt idx="3">
-                  <c:v>1</c:v>
+                  <c:v/>
                 </c:pt>
               </c:numCache>
             </c:numRef>
@@ -3471,7 +3591,7 @@
                 <c:formatCode>General</c:formatCode>
                 <c:ptCount val="4"/>
                 <c:pt idx="0">
-                  <c:v>9</c:v>
+                  <c:v>10</c:v>
                 </c:pt>
                 <c:pt idx="1">
                   <c:v/>
@@ -3651,7 +3771,7 @@
                 <c:formatCode>General</c:formatCode>
                 <c:ptCount val="4"/>
                 <c:pt idx="0">
-                  <c:v>9</c:v>
+                  <c:v>11</c:v>
                 </c:pt>
                 <c:pt idx="1">
                   <c:v>7</c:v>
@@ -3741,7 +3861,7 @@
                 <c:formatCode>General</c:formatCode>
                 <c:ptCount val="4"/>
                 <c:pt idx="0">
-                  <c:v>17</c:v>
+                  <c:v>14</c:v>
                 </c:pt>
                 <c:pt idx="1">
                   <c:v>69</c:v>
@@ -4035,19 +4155,19 @@
                 <c:formatCode>General</c:formatCode>
                 <c:ptCount val="6"/>
                 <c:pt idx="0">
-                  <c:v>206</c:v>
+                  <c:v>203</c:v>
                 </c:pt>
                 <c:pt idx="1">
-                  <c:v>171</c:v>
+                  <c:v>170</c:v>
                 </c:pt>
                 <c:pt idx="2">
-                  <c:v>149</c:v>
+                  <c:v>147</c:v>
                 </c:pt>
                 <c:pt idx="3">
-                  <c:v>104</c:v>
+                  <c:v>97</c:v>
                 </c:pt>
                 <c:pt idx="4">
-                  <c:v>15</c:v>
+                  <c:v>13</c:v>
                 </c:pt>
                 <c:pt idx="5">
                   <c:v/>
@@ -4137,19 +4257,19 @@
                 <c:formatCode>General</c:formatCode>
                 <c:ptCount val="6"/>
                 <c:pt idx="0">
-                  <c:v>26</c:v>
+                  <c:v>24</c:v>
                 </c:pt>
                 <c:pt idx="1">
                   <c:v>34</c:v>
                 </c:pt>
                 <c:pt idx="2">
-                  <c:v>25</c:v>
+                  <c:v>23</c:v>
                 </c:pt>
                 <c:pt idx="3">
                   <c:v>12</c:v>
                 </c:pt>
                 <c:pt idx="4">
-                  <c:v>17</c:v>
+                  <c:v>12</c:v>
                 </c:pt>
                 <c:pt idx="5">
                   <c:v>20</c:v>
@@ -7431,7 +7551,7 @@
                 <a:ea typeface="Calibri" pitchFamily="34" charset="-122"/>
                 <a:cs typeface="Calibri" pitchFamily="34" charset="-120"/>
               </a:rPr>
-              <a:t>Recuperar los 101 DT atrasados</a:t>
+              <a:t>Recuperar los 111 DT atrasados</a:t>
             </a:r>
             <a:endParaRPr lang="en-US" sz="1350" dirty="0"/>
           </a:p>
@@ -7473,7 +7593,7 @@
                 <a:ea typeface="Calibri" pitchFamily="34" charset="-122"/>
                 <a:cs typeface="Calibri" pitchFamily="34" charset="-120"/>
               </a:rPr>
-              <a:t>81 son P2 y 17 son P1. La mediana de atraso es de 33 días y 9 superan los 90 días.</a:t>
+              <a:t>83 son P2 y 25 son P1. La mediana de atraso es de 38 días y 12 superan los 90 días.</a:t>
             </a:r>
             <a:endParaRPr lang="en-US" sz="1100" dirty="0"/>
           </a:p>
@@ -7615,7 +7735,7 @@
                 <a:ea typeface="Calibri" pitchFamily="34" charset="-122"/>
                 <a:cs typeface="Calibri" pitchFamily="34" charset="-120"/>
               </a:rPr>
-              <a:t>CERRO VERDE/PS2: 0/3 (0%). A nivel proyecto la caminata 2 va 94% con 13 ya agendadas.</a:t>
+              <a:t>CERRO VERDE/PS2: 0/3 (0%). A nivel proyecto la caminata 2 va 94% con 8 ya agendadas.</a:t>
             </a:r>
             <a:endParaRPr lang="en-US" sz="1100" dirty="0"/>
           </a:p>
@@ -7899,7 +8019,7 @@
                 <a:ea typeface="Calibri" pitchFamily="34" charset="-122"/>
                 <a:cs typeface="Calibri" pitchFamily="34" charset="-120"/>
               </a:rPr>
-              <a:t>Concentra 110 de los 332 DT abiertos (33,1%), con 4 atrasados. Además hay 4 carpetas bajo 80% de avance que conviene cerrar en paralelo.</a:t>
+              <a:t>Concentra 110 de los 343 DT abiertos (32,1%), con 4 atrasados. Además hay 4 carpetas bajo 80% de avance que conviene cerrar en paralelo.</a:t>
             </a:r>
             <a:endParaRPr lang="en-US" sz="1100" dirty="0"/>
           </a:p>
@@ -7938,7 +8058,7 @@
                 <a:ea typeface="Calibri" pitchFamily="34" charset="-122"/>
                 <a:cs typeface="Calibri" pitchFamily="34" charset="-120"/>
               </a:rPr>
-              <a:t>Fuente: STATUS_SUBSISTEMAS_TALABRE + Detalle_de_Terminaciones · 218 subsistemas · 2.101 DT · Atrasos al 07-09-2026</a:t>
+              <a:t>Fuente: STATUS_SUBSISTEMAS_TALABRE + Detalle_de_Terminaciones · 218 subsistemas · 2.111 DT · Atrasos al 13-09-2026</a:t>
             </a:r>
             <a:endParaRPr lang="en-US" sz="850" dirty="0"/>
           </a:p>
@@ -8291,7 +8411,7 @@
                 <a:ea typeface="Calibri" pitchFamily="34" charset="-122"/>
                 <a:cs typeface="Calibri" pitchFamily="34" charset="-120"/>
               </a:rPr>
-              <a:t>136 subsistemas en 4 áreas (2000 · 3000 · 4000 · 8000) · 2.963 detalles de terminación levantados.</a:t>
+              <a:t>136 subsistemas en 4 áreas (2000 · 3000 · 4000 · 8000) · 2.967 detalles de terminación levantados.</a:t>
             </a:r>
             <a:endParaRPr lang="en-US" sz="1350" dirty="0"/>
           </a:p>
@@ -8428,7 +8548,7 @@
                 <a:ea typeface="Cambria" pitchFamily="34" charset="-122"/>
                 <a:cs typeface="Cambria" pitchFamily="34" charset="-120"/>
               </a:rPr>
-              <a:t>67,6%</a:t>
+              <a:t>68,4%</a:t>
             </a:r>
             <a:endParaRPr lang="en-US" sz="3400" dirty="0"/>
           </a:p>
@@ -8506,7 +8626,7 @@
                 <a:ea typeface="Cambria" pitchFamily="34" charset="-122"/>
                 <a:cs typeface="Cambria" pitchFamily="34" charset="-120"/>
               </a:rPr>
-              <a:t>20,6%</a:t>
+              <a:t>22,8%</a:t>
             </a:r>
             <a:endParaRPr lang="en-US" sz="3400" dirty="0"/>
           </a:p>
@@ -8584,7 +8704,7 @@
                 <a:ea typeface="Cambria" pitchFamily="34" charset="-122"/>
                 <a:cs typeface="Cambria" pitchFamily="34" charset="-120"/>
               </a:rPr>
-              <a:t>59,8%</a:t>
+              <a:t>61,4%</a:t>
             </a:r>
             <a:endParaRPr lang="en-US" sz="3400" dirty="0"/>
           </a:p>
@@ -8662,7 +8782,7 @@
                 <a:ea typeface="Calibri" pitchFamily="34" charset="-122"/>
                 <a:cs typeface="Calibri" pitchFamily="34" charset="-120"/>
               </a:rPr>
-              <a:t>Corte: 07-09-2026   ·   Corte anterior: 24-08-2026</a:t>
+              <a:t>Corte: 10-09-2026   ·   Corte anterior: 07-09-2026</a:t>
             </a:r>
             <a:endParaRPr lang="en-US" sz="1100" dirty="0"/>
           </a:p>
@@ -8701,7 +8821,7 @@
                 <a:ea typeface="Calibri" pitchFamily="34" charset="-122"/>
                 <a:cs typeface="Calibri" pitchFamily="34" charset="-120"/>
               </a:rPr>
-              <a:t>Fuente: Estatus_Resumen_General_QAQC.xlsx · Corte 07-09-2026 · Áreas 2000/3000/4000/8000</a:t>
+              <a:t>Fuente: Estatus_Resumen_General_QAQC.xlsx · Corte 10-09-2026 · Áreas 2000/3000/4000/8000</a:t>
             </a:r>
             <a:endParaRPr lang="en-US" sz="850" dirty="0"/>
           </a:p>
@@ -9177,7 +9297,7 @@
                 <a:ea typeface="Cambria" pitchFamily="34" charset="-122"/>
                 <a:cs typeface="Cambria" pitchFamily="34" charset="-120"/>
               </a:rPr>
-              <a:t>67,6%</a:t>
+              <a:t>68,4%</a:t>
             </a:r>
             <a:endParaRPr lang="en-US" sz="4000" dirty="0"/>
           </a:p>
@@ -9216,7 +9336,7 @@
                 <a:ea typeface="Calibri" pitchFamily="34" charset="-122"/>
                 <a:cs typeface="Calibri" pitchFamily="34" charset="-120"/>
               </a:rPr>
-              <a:t>92/136</a:t>
+              <a:t>93/136</a:t>
             </a:r>
             <a:endParaRPr lang="en-US" sz="1400" dirty="0"/>
           </a:p>
@@ -9294,7 +9414,7 @@
                 <a:ea typeface="Calibri" pitchFamily="34" charset="-122"/>
                 <a:cs typeface="Calibri" pitchFamily="34" charset="-120"/>
               </a:rPr>
-              <a:t>44 próximas · 0 por programar</a:t>
+              <a:t>43 próximas · 0 por programar</a:t>
             </a:r>
             <a:endParaRPr lang="en-US" sz="950" dirty="0"/>
           </a:p>
@@ -9333,7 +9453,7 @@
                 <a:ea typeface="Calibri" pitchFamily="34" charset="-122"/>
                 <a:cs typeface="Calibri" pitchFamily="34" charset="-120"/>
               </a:rPr>
-              <a:t>▲ +2 vs. corte anterior</a:t>
+              <a:t>▲ +1 vs. corte anterior</a:t>
             </a:r>
             <a:endParaRPr lang="en-US" sz="900" dirty="0"/>
           </a:p>
@@ -9426,7 +9546,7 @@
                 <a:ea typeface="Cambria" pitchFamily="34" charset="-122"/>
                 <a:cs typeface="Cambria" pitchFamily="34" charset="-120"/>
               </a:rPr>
-              <a:t>20,6%</a:t>
+              <a:t>22,8%</a:t>
             </a:r>
             <a:endParaRPr lang="en-US" sz="4000" dirty="0"/>
           </a:p>
@@ -9465,7 +9585,7 @@
                 <a:ea typeface="Calibri" pitchFamily="34" charset="-122"/>
                 <a:cs typeface="Calibri" pitchFamily="34" charset="-120"/>
               </a:rPr>
-              <a:t>28/136</a:t>
+              <a:t>31/136</a:t>
             </a:r>
             <a:endParaRPr lang="en-US" sz="1400" dirty="0"/>
           </a:p>
@@ -9543,7 +9663,7 @@
                 <a:ea typeface="Calibri" pitchFamily="34" charset="-122"/>
                 <a:cs typeface="Calibri" pitchFamily="34" charset="-120"/>
               </a:rPr>
-              <a:t>0 aprobadas · 17 rechazadas · 10 en revisión · 1 observadas</a:t>
+              <a:t>0 aprobadas · 19 rechazadas · 11 en revisión · 1 observadas</a:t>
             </a:r>
             <a:endParaRPr lang="en-US" sz="950" dirty="0"/>
           </a:p>
@@ -9576,13 +9696,13 @@
             <a:r>
               <a:rPr lang="en-US" sz="900" b="1" dirty="0">
                 <a:solidFill>
-                  <a:srgbClr val="56606E"/>
-                </a:solidFill>
-                <a:latin typeface="Calibri" pitchFamily="34" charset="0"/>
-                <a:ea typeface="Calibri" pitchFamily="34" charset="-122"/>
-                <a:cs typeface="Calibri" pitchFamily="34" charset="-120"/>
-              </a:rPr>
-              <a:t>= sin cambio vs. corte anterior</a:t>
+                  <a:srgbClr val="1F7A44"/>
+                </a:solidFill>
+                <a:latin typeface="Calibri" pitchFamily="34" charset="0"/>
+                <a:ea typeface="Calibri" pitchFamily="34" charset="-122"/>
+                <a:cs typeface="Calibri" pitchFamily="34" charset="-120"/>
+              </a:rPr>
+              <a:t>▲ +3 vs. corte anterior</a:t>
             </a:r>
             <a:endParaRPr lang="en-US" sz="900" dirty="0"/>
           </a:p>
@@ -9675,7 +9795,7 @@
                 <a:ea typeface="Cambria" pitchFamily="34" charset="-122"/>
                 <a:cs typeface="Cambria" pitchFamily="34" charset="-120"/>
               </a:rPr>
-              <a:t>59,8%</a:t>
+              <a:t>61,4%</a:t>
             </a:r>
             <a:endParaRPr lang="en-US" sz="4000" dirty="0"/>
           </a:p>
@@ -9714,7 +9834,7 @@
                 <a:ea typeface="Calibri" pitchFamily="34" charset="-122"/>
                 <a:cs typeface="Calibri" pitchFamily="34" charset="-120"/>
               </a:rPr>
-              <a:t>1.189/1.988</a:t>
+              <a:t>1.222/1.990</a:t>
             </a:r>
             <a:endParaRPr lang="en-US" sz="1400" dirty="0"/>
           </a:p>
@@ -9792,7 +9912,7 @@
                 <a:ea typeface="Calibri" pitchFamily="34" charset="-122"/>
                 <a:cs typeface="Calibri" pitchFamily="34" charset="-120"/>
               </a:rPr>
-              <a:t>779 abiertos · 645 vencidos · 20 en trámite</a:t>
+              <a:t>755 abiertos · 630 vencidos · 13 en trámite</a:t>
             </a:r>
             <a:endParaRPr lang="en-US" sz="950" dirty="0"/>
           </a:p>
@@ -9954,7 +10074,7 @@
                 <a:ea typeface="Calibri" pitchFamily="34" charset="-122"/>
                 <a:cs typeface="Calibri" pitchFamily="34" charset="-120"/>
               </a:rPr>
-              <a:t>Se destrabó la programación de caminatas, pero no la ejecución.  </a:t>
+              <a:t>Avance de caminatas al 100%.  </a:t>
             </a:r>
             <a:pPr indent="0" marL="0">
               <a:lnSpc>
@@ -9971,7 +10091,7 @@
                 <a:ea typeface="Calibri" pitchFamily="34" charset="-122"/>
                 <a:cs typeface="Calibri" pitchFamily="34" charset="-120"/>
               </a:rPr>
-              <a:t>Los subsistemas «por programar» bajaron de 1 a 0, mientras las realizadas al 100% se mantienen en 92 (67,6%).</a:t>
+              <a:t>93 de 136 realizadas (68,4%); 43 próximas y 0 por programar.</a:t>
             </a:r>
             <a:endParaRPr lang="en-US" sz="1250" dirty="0"/>
           </a:p>
@@ -10050,7 +10170,7 @@
                 <a:ea typeface="Calibri" pitchFamily="34" charset="-122"/>
                 <a:cs typeface="Calibri" pitchFamily="34" charset="-120"/>
               </a:rPr>
-              <a:t>28 entregadas de 136 (20,6%) y 0 aprobadas; las rechazadas pasaron de 12 a 17.</a:t>
+              <a:t>31 entregadas de 136 (22,8%) y 0 aprobadas; las rechazadas pasaron de 17 a 19.</a:t>
             </a:r>
             <a:endParaRPr lang="en-US" sz="1250" dirty="0"/>
           </a:p>
@@ -10129,7 +10249,7 @@
                 <a:ea typeface="Calibri" pitchFamily="34" charset="-122"/>
                 <a:cs typeface="Calibri" pitchFamily="34" charset="-120"/>
               </a:rPr>
-              <a:t>+33 P1 cerrado desde el corte anterior; 779 abiertos, de los cuales 645 superaron su fecha de vencimiento. El área 3000 concentra 687 (88,2%).</a:t>
+              <a:t>+33 P1 cerrado desde el corte anterior; 755 abiertos, de los cuales 630 superaron su fecha de vencimiento. El área 3000 concentra 678 (89,8%).</a:t>
             </a:r>
             <a:endParaRPr lang="en-US" sz="1250" dirty="0"/>
           </a:p>
@@ -10168,7 +10288,7 @@
                 <a:ea typeface="Calibri" pitchFamily="34" charset="-122"/>
                 <a:cs typeface="Calibri" pitchFamily="34" charset="-120"/>
               </a:rPr>
-              <a:t>Fuente: Estatus_Resumen_General_QAQC.xlsx · Corte 07-09-2026 · Áreas 2000/3000/4000/8000</a:t>
+              <a:t>Fuente: Estatus_Resumen_General_QAQC.xlsx · Corte 10-09-2026 · Áreas 2000/3000/4000/8000</a:t>
             </a:r>
             <a:endParaRPr lang="en-US" sz="850" dirty="0"/>
           </a:p>
@@ -10871,7 +10991,7 @@
                 <a:ea typeface="Calibri" pitchFamily="34" charset="-122"/>
                 <a:cs typeface="Calibri" pitchFamily="34" charset="-120"/>
               </a:rPr>
-              <a:t>18/35 · 51,4%</a:t>
+              <a:t>21/35 · 60%</a:t>
             </a:r>
             <a:endParaRPr lang="en-US" sz="1300" dirty="0"/>
           </a:p>
@@ -10910,7 +11030,7 @@
                 <a:ea typeface="Calibri" pitchFamily="34" charset="-122"/>
                 <a:cs typeface="Calibri" pitchFamily="34" charset="-120"/>
               </a:rPr>
-              <a:t>94,6%</a:t>
+              <a:t>96,5%</a:t>
             </a:r>
             <a:endParaRPr lang="en-US" sz="1300" dirty="0"/>
           </a:p>
@@ -10949,7 +11069,7 @@
                 <a:ea typeface="Calibri" pitchFamily="34" charset="-122"/>
                 <a:cs typeface="Calibri" pitchFamily="34" charset="-120"/>
               </a:rPr>
-              <a:t>25 (21)</a:t>
+              <a:t>18 (14)</a:t>
             </a:r>
             <a:endParaRPr lang="en-US" sz="1300" dirty="0"/>
           </a:p>
@@ -11287,7 +11407,7 @@
                 <a:ea typeface="Calibri" pitchFamily="34" charset="-122"/>
                 <a:cs typeface="Calibri" pitchFamily="34" charset="-120"/>
               </a:rPr>
-              <a:t>33,3%</a:t>
+              <a:t>34,5%</a:t>
             </a:r>
             <a:endParaRPr lang="en-US" sz="1300" dirty="0"/>
           </a:p>
@@ -11326,7 +11446,7 @@
                 <a:ea typeface="Calibri" pitchFamily="34" charset="-122"/>
                 <a:cs typeface="Calibri" pitchFamily="34" charset="-120"/>
               </a:rPr>
-              <a:t>687 (590)</a:t>
+              <a:t>678 (586)</a:t>
             </a:r>
             <a:endParaRPr lang="en-US" sz="1300" dirty="0"/>
           </a:p>
@@ -11644,7 +11764,7 @@
                 <a:ea typeface="Calibri" pitchFamily="34" charset="-122"/>
                 <a:cs typeface="Calibri" pitchFamily="34" charset="-120"/>
               </a:rPr>
-              <a:t>81,2%</a:t>
+              <a:t>83,5%</a:t>
             </a:r>
             <a:endParaRPr lang="en-US" sz="1300" dirty="0"/>
           </a:p>
@@ -11683,7 +11803,7 @@
                 <a:ea typeface="Calibri" pitchFamily="34" charset="-122"/>
                 <a:cs typeface="Calibri" pitchFamily="34" charset="-120"/>
               </a:rPr>
-              <a:t>66 (33)</a:t>
+              <a:t>57 (30)</a:t>
             </a:r>
             <a:endParaRPr lang="en-US" sz="1300" dirty="0"/>
           </a:p>
@@ -11943,7 +12063,7 @@
                 <a:ea typeface="Calibri" pitchFamily="34" charset="-122"/>
                 <a:cs typeface="Calibri" pitchFamily="34" charset="-120"/>
               </a:rPr>
-              <a:t>1/2 · 50%</a:t>
+              <a:t>2/2 · 100%</a:t>
             </a:r>
             <a:endParaRPr lang="en-US" sz="1300" dirty="0"/>
           </a:p>
@@ -12021,7 +12141,7 @@
                 <a:ea typeface="Calibri" pitchFamily="34" charset="-122"/>
                 <a:cs typeface="Calibri" pitchFamily="34" charset="-120"/>
               </a:rPr>
-              <a:t>91,7%</a:t>
+              <a:t>100%</a:t>
             </a:r>
             <a:endParaRPr lang="en-US" sz="1300" dirty="0"/>
           </a:p>
@@ -12060,7 +12180,7 @@
                 <a:ea typeface="Calibri" pitchFamily="34" charset="-122"/>
                 <a:cs typeface="Calibri" pitchFamily="34" charset="-120"/>
               </a:rPr>
-              <a:t>1 (1)</a:t>
+              <a:t>0 (0)</a:t>
             </a:r>
             <a:endParaRPr lang="en-US" sz="1300" dirty="0"/>
           </a:p>
@@ -12083,7 +12203,7 @@
             </a:avLst>
           </a:prstGeom>
           <a:solidFill>
-            <a:srgbClr val="C0392B"/>
+            <a:srgbClr val="2E9E5B"/>
           </a:solidFill>
           <a:ln/>
         </p:spPr>
@@ -12121,7 +12241,7 @@
                 <a:ea typeface="Calibri" pitchFamily="34" charset="-122"/>
                 <a:cs typeface="Calibri" pitchFamily="34" charset="-120"/>
               </a:rPr>
-              <a:t>Crítico</a:t>
+              <a:t>Al día</a:t>
             </a:r>
             <a:endParaRPr lang="en-US" sz="1050" dirty="0"/>
           </a:p>
@@ -12222,7 +12342,7 @@
                 <a:ea typeface="Calibri" pitchFamily="34" charset="-122"/>
                 <a:cs typeface="Calibri" pitchFamily="34" charset="-120"/>
               </a:rPr>
-              <a:t>Fuente: Estatus_Resumen_General_QAQC.xlsx · Corte 07-09-2026 · Áreas 2000/3000/4000/8000</a:t>
+              <a:t>Fuente: Estatus_Resumen_General_QAQC.xlsx · Corte 10-09-2026 · Áreas 2000/3000/4000/8000</a:t>
             </a:r>
             <a:endParaRPr lang="en-US" sz="850" dirty="0"/>
           </a:p>
@@ -12473,7 +12593,7 @@
                 <a:ea typeface="Calibri" pitchFamily="34" charset="-122"/>
                 <a:cs typeface="Calibri" pitchFamily="34" charset="-120"/>
               </a:rPr>
-              <a:t>Las caminatas al 80% están cerradas en todas las áreas (136/136). El hito 100% avanza a 67,6%, y el área 3000 concentra 40 de los 44 subsistemas pendientes.</a:t>
+              <a:t>Las caminatas al 80% están cerradas en todas las áreas (136/136). El hito 100% avanza a 68,4%, y el área 3000 concentra 40 de los 43 subsistemas pendientes.</a:t>
             </a:r>
             <a:endParaRPr lang="en-US" sz="1350" dirty="0"/>
           </a:p>
@@ -12729,7 +12849,7 @@
                 <a:ea typeface="Cambria" pitchFamily="34" charset="-122"/>
                 <a:cs typeface="Cambria" pitchFamily="34" charset="-120"/>
               </a:rPr>
-              <a:t>67,6%</a:t>
+              <a:t>68,4%</a:t>
             </a:r>
             <a:endParaRPr lang="en-US" sz="4000" dirty="0"/>
           </a:p>
@@ -12768,7 +12888,7 @@
                 <a:ea typeface="Calibri" pitchFamily="34" charset="-122"/>
                 <a:cs typeface="Calibri" pitchFamily="34" charset="-120"/>
               </a:rPr>
-              <a:t>92 realizadas · 44 pendientes</a:t>
+              <a:t>93 realizadas · 43 pendientes</a:t>
             </a:r>
             <a:endParaRPr lang="en-US" sz="1200" dirty="0"/>
           </a:p>
@@ -12827,7 +12947,7 @@
                 <a:ea typeface="Calibri" pitchFamily="34" charset="-122"/>
                 <a:cs typeface="Calibri" pitchFamily="34" charset="-120"/>
               </a:rPr>
-              <a:t>44 próximas a realizar y 0 por programar. Las «por programar» bajaron 1 en el período.</a:t>
+              <a:t>43 próximas a realizar y 0 por programar.</a:t>
             </a:r>
             <a:endParaRPr lang="en-US" sz="1150" dirty="0"/>
           </a:p>
@@ -12866,7 +12986,7 @@
                 <a:ea typeface="Calibri" pitchFamily="34" charset="-122"/>
                 <a:cs typeface="Calibri" pitchFamily="34" charset="-120"/>
               </a:rPr>
-              <a:t>Fuente: Estatus_Resumen_General_QAQC.xlsx · Corte 07-09-2026 · Áreas 2000/3000/4000/8000</a:t>
+              <a:t>Fuente: Estatus_Resumen_General_QAQC.xlsx · Corte 10-09-2026 · Áreas 2000/3000/4000/8000</a:t>
             </a:r>
             <a:endParaRPr lang="en-US" sz="850" dirty="0"/>
           </a:p>
@@ -13117,7 +13237,7 @@
                 <a:ea typeface="Calibri" pitchFamily="34" charset="-122"/>
                 <a:cs typeface="Calibri" pitchFamily="34" charset="-120"/>
               </a:rPr>
-              <a:t>28 carpetas entregadas de 136 (20,6%). Ninguna aprobada aún: el flujo se acumula en revisión y hay 17 rechazos que requieren rearmado.</a:t>
+              <a:t>31 carpetas entregadas de 136 (22,8%). Ninguna aprobada aún: el flujo se acumula en revisión y hay 19 rechazos que requieren rearmado.</a:t>
             </a:r>
             <a:endParaRPr lang="en-US" sz="1350" dirty="0"/>
           </a:p>
@@ -13294,6 +13414,45 @@
         </p:nvSpPr>
         <p:spPr>
           <a:xfrm>
+            <a:off x="9509760" y="2450592"/>
+            <a:ext cx="914400" cy="566928"/>
+          </a:xfrm>
+          <a:prstGeom prst="rect">
+            <a:avLst/>
+          </a:prstGeom>
+          <a:noFill/>
+          <a:ln/>
+        </p:spPr>
+        <p:txBody>
+          <a:bodyPr wrap="square" lIns="0" tIns="0" rIns="0" bIns="0" rtlCol="0" anchor="ctr"/>
+          <a:lstStyle/>
+          <a:p>
+            <a:pPr algn="r" indent="0" marL="0">
+              <a:buNone/>
+            </a:pPr>
+            <a:r>
+              <a:rPr lang="en-US" sz="950" b="1" dirty="0">
+                <a:solidFill>
+                  <a:srgbClr val="1F7A44"/>
+                </a:solidFill>
+                <a:latin typeface="Calibri" pitchFamily="34" charset="0"/>
+                <a:ea typeface="Calibri" pitchFamily="34" charset="-122"/>
+                <a:cs typeface="Calibri" pitchFamily="34" charset="-120"/>
+              </a:rPr>
+              <a:t>▲ +3</a:t>
+            </a:r>
+            <a:endParaRPr lang="en-US" sz="950" dirty="0"/>
+          </a:p>
+        </p:txBody>
+      </p:sp>
+      <p:sp>
+        <p:nvSpPr>
+          <p:cNvPr id="13" name="Text 9"/>
+          <p:cNvSpPr/>
+          <p:nvPr/>
+        </p:nvSpPr>
+        <p:spPr>
+          <a:xfrm>
             <a:off x="10469880" y="2450592"/>
             <a:ext cx="868680" cy="566928"/>
           </a:xfrm>
@@ -13319,7 +13478,7 @@
                 <a:ea typeface="Cambria" pitchFamily="34" charset="-122"/>
                 <a:cs typeface="Cambria" pitchFamily="34" charset="-120"/>
               </a:rPr>
-              <a:t>28</a:t>
+              <a:t>31</a:t>
             </a:r>
             <a:endParaRPr lang="en-US" sz="2200" dirty="0"/>
           </a:p>
@@ -13327,7 +13486,7 @@
       </p:sp>
       <p:sp>
         <p:nvSpPr>
-          <p:cNvPr id="13" name="Shape 9"/>
+          <p:cNvPr id="14" name="Shape 10"/>
           <p:cNvSpPr/>
           <p:nvPr/>
         </p:nvSpPr>
@@ -13349,7 +13508,7 @@
       </p:sp>
       <p:sp>
         <p:nvSpPr>
-          <p:cNvPr id="14" name="Shape 10"/>
+          <p:cNvPr id="15" name="Shape 11"/>
           <p:cNvSpPr/>
           <p:nvPr/>
         </p:nvSpPr>
@@ -13369,7 +13528,7 @@
       </p:sp>
       <p:sp>
         <p:nvSpPr>
-          <p:cNvPr id="15" name="Text 11"/>
+          <p:cNvPr id="16" name="Text 12"/>
           <p:cNvSpPr/>
           <p:nvPr/>
         </p:nvSpPr>
@@ -13408,7 +13567,7 @@
       </p:sp>
       <p:sp>
         <p:nvSpPr>
-          <p:cNvPr id="16" name="Text 12"/>
+          <p:cNvPr id="17" name="Text 13"/>
           <p:cNvSpPr/>
           <p:nvPr/>
         </p:nvSpPr>
@@ -13433,13 +13592,13 @@
             <a:r>
               <a:rPr lang="en-US" sz="950" b="1" dirty="0">
                 <a:solidFill>
-                  <a:srgbClr val="C0392B"/>
-                </a:solidFill>
-                <a:latin typeface="Calibri" pitchFamily="34" charset="0"/>
-                <a:ea typeface="Calibri" pitchFamily="34" charset="-122"/>
-                <a:cs typeface="Calibri" pitchFamily="34" charset="-120"/>
-              </a:rPr>
-              <a:t>▼ -5</a:t>
+                  <a:srgbClr val="1F7A44"/>
+                </a:solidFill>
+                <a:latin typeface="Calibri" pitchFamily="34" charset="0"/>
+                <a:ea typeface="Calibri" pitchFamily="34" charset="-122"/>
+                <a:cs typeface="Calibri" pitchFamily="34" charset="-120"/>
+              </a:rPr>
+              <a:t>▲ +1</a:t>
             </a:r>
             <a:endParaRPr lang="en-US" sz="950" dirty="0"/>
           </a:p>
@@ -13447,7 +13606,7 @@
       </p:sp>
       <p:sp>
         <p:nvSpPr>
-          <p:cNvPr id="17" name="Text 13"/>
+          <p:cNvPr id="18" name="Text 14"/>
           <p:cNvSpPr/>
           <p:nvPr/>
         </p:nvSpPr>
@@ -13478,7 +13637,7 @@
                 <a:ea typeface="Cambria" pitchFamily="34" charset="-122"/>
                 <a:cs typeface="Cambria" pitchFamily="34" charset="-120"/>
               </a:rPr>
-              <a:t>10</a:t>
+              <a:t>11</a:t>
             </a:r>
             <a:endParaRPr lang="en-US" sz="2200" dirty="0"/>
           </a:p>
@@ -13486,7 +13645,7 @@
       </p:sp>
       <p:sp>
         <p:nvSpPr>
-          <p:cNvPr id="18" name="Shape 14"/>
+          <p:cNvPr id="19" name="Shape 15"/>
           <p:cNvSpPr/>
           <p:nvPr/>
         </p:nvSpPr>
@@ -13508,7 +13667,7 @@
       </p:sp>
       <p:sp>
         <p:nvSpPr>
-          <p:cNvPr id="19" name="Shape 15"/>
+          <p:cNvPr id="20" name="Shape 16"/>
           <p:cNvSpPr/>
           <p:nvPr/>
         </p:nvSpPr>
@@ -13528,7 +13687,7 @@
       </p:sp>
       <p:sp>
         <p:nvSpPr>
-          <p:cNvPr id="20" name="Text 16"/>
+          <p:cNvPr id="21" name="Text 17"/>
           <p:cNvSpPr/>
           <p:nvPr/>
         </p:nvSpPr>
@@ -13567,7 +13726,7 @@
       </p:sp>
       <p:sp>
         <p:nvSpPr>
-          <p:cNvPr id="21" name="Text 17"/>
+          <p:cNvPr id="22" name="Text 18"/>
           <p:cNvSpPr/>
           <p:nvPr/>
         </p:nvSpPr>
@@ -13606,7 +13765,7 @@
       </p:sp>
       <p:sp>
         <p:nvSpPr>
-          <p:cNvPr id="22" name="Shape 18"/>
+          <p:cNvPr id="23" name="Shape 19"/>
           <p:cNvSpPr/>
           <p:nvPr/>
         </p:nvSpPr>
@@ -13628,7 +13787,7 @@
       </p:sp>
       <p:sp>
         <p:nvSpPr>
-          <p:cNvPr id="23" name="Shape 19"/>
+          <p:cNvPr id="24" name="Shape 20"/>
           <p:cNvSpPr/>
           <p:nvPr/>
         </p:nvSpPr>
@@ -13648,7 +13807,7 @@
       </p:sp>
       <p:sp>
         <p:nvSpPr>
-          <p:cNvPr id="24" name="Text 20"/>
+          <p:cNvPr id="25" name="Text 21"/>
           <p:cNvSpPr/>
           <p:nvPr/>
         </p:nvSpPr>
@@ -13687,7 +13846,7 @@
       </p:sp>
       <p:sp>
         <p:nvSpPr>
-          <p:cNvPr id="25" name="Text 21"/>
+          <p:cNvPr id="26" name="Text 22"/>
           <p:cNvSpPr/>
           <p:nvPr/>
         </p:nvSpPr>
@@ -13718,7 +13877,7 @@
                 <a:ea typeface="Calibri" pitchFamily="34" charset="-122"/>
                 <a:cs typeface="Calibri" pitchFamily="34" charset="-120"/>
               </a:rPr>
-              <a:t>▲ +5</a:t>
+              <a:t>▲ +2</a:t>
             </a:r>
             <a:endParaRPr lang="en-US" sz="950" dirty="0"/>
           </a:p>
@@ -13726,7 +13885,7 @@
       </p:sp>
       <p:sp>
         <p:nvSpPr>
-          <p:cNvPr id="26" name="Text 22"/>
+          <p:cNvPr id="27" name="Text 23"/>
           <p:cNvSpPr/>
           <p:nvPr/>
         </p:nvSpPr>
@@ -13757,7 +13916,7 @@
                 <a:ea typeface="Cambria" pitchFamily="34" charset="-122"/>
                 <a:cs typeface="Cambria" pitchFamily="34" charset="-120"/>
               </a:rPr>
-              <a:t>17</a:t>
+              <a:t>19</a:t>
             </a:r>
             <a:endParaRPr lang="en-US" sz="2200" dirty="0"/>
           </a:p>
@@ -13765,7 +13924,7 @@
       </p:sp>
       <p:sp>
         <p:nvSpPr>
-          <p:cNvPr id="27" name="Shape 23"/>
+          <p:cNvPr id="28" name="Shape 24"/>
           <p:cNvSpPr/>
           <p:nvPr/>
         </p:nvSpPr>
@@ -13787,7 +13946,7 @@
       </p:sp>
       <p:sp>
         <p:nvSpPr>
-          <p:cNvPr id="28" name="Shape 24"/>
+          <p:cNvPr id="29" name="Shape 25"/>
           <p:cNvSpPr/>
           <p:nvPr/>
         </p:nvSpPr>
@@ -13807,7 +13966,7 @@
       </p:sp>
       <p:sp>
         <p:nvSpPr>
-          <p:cNvPr id="29" name="Text 25"/>
+          <p:cNvPr id="30" name="Text 26"/>
           <p:cNvSpPr/>
           <p:nvPr/>
         </p:nvSpPr>
@@ -13846,7 +14005,7 @@
       </p:sp>
       <p:sp>
         <p:nvSpPr>
-          <p:cNvPr id="30" name="Text 26"/>
+          <p:cNvPr id="31" name="Text 27"/>
           <p:cNvSpPr/>
           <p:nvPr/>
         </p:nvSpPr>
@@ -13885,7 +14044,7 @@
       </p:sp>
       <p:sp>
         <p:nvSpPr>
-          <p:cNvPr id="31" name="Text 27"/>
+          <p:cNvPr id="32" name="Text 28"/>
           <p:cNvSpPr/>
           <p:nvPr/>
         </p:nvSpPr>
@@ -13924,7 +14083,7 @@
       </p:sp>
       <p:sp>
         <p:nvSpPr>
-          <p:cNvPr id="32" name="Text 28"/>
+          <p:cNvPr id="33" name="Text 29"/>
           <p:cNvSpPr/>
           <p:nvPr/>
         </p:nvSpPr>
@@ -13955,7 +14114,7 @@
                 <a:ea typeface="Calibri" pitchFamily="34" charset="-122"/>
                 <a:cs typeface="Calibri" pitchFamily="34" charset="-120"/>
               </a:rPr>
-              <a:t>Fuente: Estatus_Resumen_General_QAQC.xlsx · Corte 07-09-2026 · Áreas 2000/3000/4000/8000</a:t>
+              <a:t>Fuente: Estatus_Resumen_General_QAQC.xlsx · Corte 10-09-2026 · Áreas 2000/3000/4000/8000</a:t>
             </a:r>
             <a:endParaRPr lang="en-US" sz="850" dirty="0"/>
           </a:p>
@@ -13963,7 +14122,7 @@
       </p:sp>
       <p:sp>
         <p:nvSpPr>
-          <p:cNvPr id="33" name="Text 29"/>
+          <p:cNvPr id="34" name="Text 30"/>
           <p:cNvSpPr/>
           <p:nvPr/>
         </p:nvSpPr>
@@ -14002,7 +14161,7 @@
       </p:sp>
       <p:sp>
         <p:nvSpPr>
-          <p:cNvPr id="34" name="Text 30"/>
+          <p:cNvPr id="35" name="Text 31"/>
           <p:cNvSpPr/>
           <p:nvPr/>
         </p:nvSpPr>
@@ -14206,7 +14365,7 @@
                 <a:ea typeface="Calibri" pitchFamily="34" charset="-122"/>
                 <a:cs typeface="Calibri" pitchFamily="34" charset="-120"/>
               </a:rPr>
-              <a:t>1.988 P1 levantados; 59,8% cerrados. El pendiente se concentra en Piping, Eléctrica, Instrumentación y Control, y físicamente en el área 3000.</a:t>
+              <a:t>1.990 P1 levantados; 61,4% cerrados. El pendiente se concentra en Piping, Eléctrica, Instrumentación y Control, y físicamente en el área 3000.</a:t>
             </a:r>
             <a:endParaRPr lang="en-US" sz="1350" dirty="0"/>
           </a:p>
@@ -14338,7 +14497,7 @@
                 <a:ea typeface="Cambria" pitchFamily="34" charset="-122"/>
                 <a:cs typeface="Cambria" pitchFamily="34" charset="-120"/>
               </a:rPr>
-              <a:t>59,8%</a:t>
+              <a:t>61,4%</a:t>
             </a:r>
             <a:endParaRPr lang="en-US" sz="1900" dirty="0"/>
           </a:p>
@@ -14453,7 +14612,7 @@
                 <a:ea typeface="Calibri" pitchFamily="34" charset="-122"/>
                 <a:cs typeface="Calibri" pitchFamily="34" charset="-120"/>
               </a:rPr>
-              <a:t>1.189</a:t>
+              <a:t>1.222</a:t>
             </a:r>
             <a:endParaRPr lang="en-US" sz="1100" dirty="0"/>
           </a:p>
@@ -14551,7 +14710,7 @@
                 <a:ea typeface="Calibri" pitchFamily="34" charset="-122"/>
                 <a:cs typeface="Calibri" pitchFamily="34" charset="-120"/>
               </a:rPr>
-              <a:t>779</a:t>
+              <a:t>755</a:t>
             </a:r>
             <a:endParaRPr lang="en-US" sz="1100" dirty="0"/>
           </a:p>
@@ -14649,7 +14808,7 @@
                 <a:ea typeface="Calibri" pitchFamily="34" charset="-122"/>
                 <a:cs typeface="Calibri" pitchFamily="34" charset="-120"/>
               </a:rPr>
-              <a:t>20</a:t>
+              <a:t>13</a:t>
             </a:r>
             <a:endParaRPr lang="en-US" sz="1100" dirty="0"/>
           </a:p>
@@ -14732,7 +14891,7 @@
                 <a:ea typeface="Calibri" pitchFamily="34" charset="-122"/>
                 <a:cs typeface="Calibri" pitchFamily="34" charset="-120"/>
               </a:rPr>
-              <a:t>687 de 779 P1 abiertos (88,2%) están en el área 3000. Áreas 2000 y 8000 sobre 90% de cierre.</a:t>
+              <a:t>678 de 755 P1 abiertos (89,8%) están en el área 3000. Áreas 2000 y 8000 sobre 90% de cierre.</a:t>
             </a:r>
             <a:endParaRPr lang="en-US" sz="1150" dirty="0"/>
           </a:p>
@@ -14771,7 +14930,7 @@
                 <a:ea typeface="Calibri" pitchFamily="34" charset="-122"/>
                 <a:cs typeface="Calibri" pitchFamily="34" charset="-120"/>
               </a:rPr>
-              <a:t>Fuente: Estatus_Resumen_General_QAQC.xlsx · Corte 07-09-2026 · Áreas 2000/3000/4000/8000</a:t>
+              <a:t>Fuente: Estatus_Resumen_General_QAQC.xlsx · Corte 10-09-2026 · Áreas 2000/3000/4000/8000</a:t>
             </a:r>
             <a:endParaRPr lang="en-US" sz="850" dirty="0"/>
           </a:p>
@@ -15145,7 +15304,7 @@
                 <a:ea typeface="Calibri" pitchFamily="34" charset="-122"/>
                 <a:cs typeface="Calibri" pitchFamily="34" charset="-120"/>
               </a:rPr>
-              <a:t>0 aprobadas de 136. Priorizar el cierre de las 10 en revisión y el rearmado de las 17 rechazadas para convertir entregas en aprobaciones.</a:t>
+              <a:t>0 aprobadas de 136. Priorizar el cierre de las 11 en revisión y el rearmado de las 19 rechazadas para convertir entregas en aprobaciones.</a:t>
             </a:r>
             <a:endParaRPr lang="en-US" sz="1150" dirty="0"/>
           </a:p>
@@ -15287,7 +15446,7 @@
                 <a:ea typeface="Calibri" pitchFamily="34" charset="-122"/>
                 <a:cs typeface="Calibri" pitchFamily="34" charset="-120"/>
               </a:rPr>
-              <a:t>687 P1 abiertos (88,2% del total) y 40 caminatas 100% pendientes. Es la ruta crítica: sin esta área no mejora ningún indicador global.</a:t>
+              <a:t>678 P1 abiertos (89,8% del total) y 40 caminatas 100% pendientes. Es la ruta crítica: sin esta área no mejora ningún indicador global.</a:t>
             </a:r>
             <a:endParaRPr lang="en-US" sz="1150" dirty="0"/>
           </a:p>
@@ -15387,7 +15546,7 @@
                 <a:ea typeface="Calibri" pitchFamily="34" charset="-122"/>
                 <a:cs typeface="Calibri" pitchFamily="34" charset="-120"/>
               </a:rPr>
-              <a:t>Recuperar los 645 P1 vencidos</a:t>
+              <a:t>Recuperar los 630 P1 vencidos</a:t>
             </a:r>
             <a:endParaRPr lang="en-US" sz="1500" dirty="0"/>
           </a:p>
@@ -15429,7 +15588,7 @@
                 <a:ea typeface="Calibri" pitchFamily="34" charset="-122"/>
                 <a:cs typeface="Calibri" pitchFamily="34" charset="-120"/>
               </a:rPr>
-              <a:t>82,8% de los P1 abiertos superó su fecha de vencimiento. Foco en Piping (206), Eléctrica (171), Instrumentación y Control (149).</a:t>
+              <a:t>83,4% de los P1 abiertos superó su fecha de vencimiento. Foco en Piping (203), Eléctrica (170), Instrumentación y Control (147).</a:t>
             </a:r>
             <a:endParaRPr lang="en-US" sz="1150" dirty="0"/>
           </a:p>
@@ -15571,7 +15730,7 @@
                 <a:ea typeface="Calibri" pitchFamily="34" charset="-122"/>
                 <a:cs typeface="Calibri" pitchFamily="34" charset="-120"/>
               </a:rPr>
-              <a:t>44 subsistemas pendientes: 44 próximos a realizar y 0 por programar. La programación ya está hecha; falta ejecutarla para habilitar la entrega de carpetas.</a:t>
+              <a:t>43 subsistemas pendientes: 43 próximos a realizar y 0 por programar. La programación ya está hecha; falta ejecutarla para habilitar la entrega de carpetas.</a:t>
             </a:r>
             <a:endParaRPr lang="en-US" sz="1150" dirty="0"/>
           </a:p>
@@ -15610,7 +15769,7 @@
                 <a:ea typeface="Calibri" pitchFamily="34" charset="-122"/>
                 <a:cs typeface="Calibri" pitchFamily="34" charset="-120"/>
               </a:rPr>
-              <a:t>Fuente: Estatus_Resumen_General_QAQC.xlsx · Corte 07-09-2026 · Áreas 2000/3000/4000/8000</a:t>
+              <a:t>Fuente: Estatus_Resumen_General_QAQC.xlsx · Corte 10-09-2026 · Áreas 2000/3000/4000/8000</a:t>
             </a:r>
             <a:endParaRPr lang="en-US" sz="850" dirty="0"/>
           </a:p>
@@ -20307,7 +20466,7 @@
                 <a:ea typeface="Calibri" pitchFamily="34" charset="-122"/>
                 <a:cs typeface="Calibri" pitchFamily="34" charset="-120"/>
               </a:rPr>
-              <a:t>Contrato 4600029355 · 218 subsistemas en 9 áreas · 2.101 detalles de terminación levantados.</a:t>
+              <a:t>Contrato 4600029355 · 218 subsistemas en 9 áreas · 2.111 detalles de terminación levantados.</a:t>
             </a:r>
             <a:endParaRPr lang="en-US" sz="1350" dirty="0"/>
           </a:p>
@@ -20346,7 +20505,7 @@
                 <a:ea typeface="Cambria" pitchFamily="34" charset="-122"/>
                 <a:cs typeface="Cambria" pitchFamily="34" charset="-120"/>
               </a:rPr>
-              <a:t>100%</a:t>
+              <a:t>99,5%</a:t>
             </a:r>
             <a:endParaRPr lang="en-US" sz="3400" dirty="0"/>
           </a:p>
@@ -20424,7 +20583,7 @@
                 <a:ea typeface="Cambria" pitchFamily="34" charset="-122"/>
                 <a:cs typeface="Cambria" pitchFamily="34" charset="-120"/>
               </a:rPr>
-              <a:t>100%</a:t>
+              <a:t>97,6%</a:t>
             </a:r>
             <a:endParaRPr lang="en-US" sz="3400" dirty="0"/>
           </a:p>
@@ -20502,7 +20661,7 @@
                 <a:ea typeface="Cambria" pitchFamily="34" charset="-122"/>
                 <a:cs typeface="Cambria" pitchFamily="34" charset="-120"/>
               </a:rPr>
-              <a:t>94%</a:t>
+              <a:t>95%</a:t>
             </a:r>
             <a:endParaRPr lang="en-US" sz="3400" dirty="0"/>
           </a:p>
@@ -20580,7 +20739,7 @@
                 <a:ea typeface="Cambria" pitchFamily="34" charset="-122"/>
                 <a:cs typeface="Cambria" pitchFamily="34" charset="-120"/>
               </a:rPr>
-              <a:t>93,5%</a:t>
+              <a:t>92,9%</a:t>
             </a:r>
             <a:endParaRPr lang="en-US" sz="3400" dirty="0"/>
           </a:p>
@@ -20658,7 +20817,7 @@
                 <a:ea typeface="Calibri" pitchFamily="34" charset="-122"/>
                 <a:cs typeface="Calibri" pitchFamily="34" charset="-120"/>
               </a:rPr>
-              <a:t>Atrasos calculados al 07-09-2026</a:t>
+              <a:t>Atrasos calculados al 13-09-2026</a:t>
             </a:r>
             <a:endParaRPr lang="en-US" sz="1100" dirty="0"/>
           </a:p>
@@ -20697,7 +20856,7 @@
                 <a:ea typeface="Calibri" pitchFamily="34" charset="-122"/>
                 <a:cs typeface="Calibri" pitchFamily="34" charset="-120"/>
               </a:rPr>
-              <a:t>Fuente: STATUS_SUBSISTEMAS_TALABRE + Detalle_de_Terminaciones · 218 subsistemas · 2.101 DT · Atrasos al 07-09-2026</a:t>
+              <a:t>Fuente: STATUS_SUBSISTEMAS_TALABRE + Detalle_de_Terminaciones · 218 subsistemas · 2.111 DT · Atrasos al 13-09-2026</a:t>
             </a:r>
             <a:endParaRPr lang="en-US" sz="850" dirty="0"/>
           </a:p>
@@ -20963,7 +21122,7 @@
                 <a:ea typeface="Cambria" pitchFamily="34" charset="-122"/>
                 <a:cs typeface="Cambria" pitchFamily="34" charset="-120"/>
               </a:rPr>
-              <a:t>100%</a:t>
+              <a:t>99,5%</a:t>
             </a:r>
             <a:endParaRPr lang="en-US" sz="3800" dirty="0"/>
           </a:p>
@@ -21002,7 +21161,7 @@
                 <a:ea typeface="Calibri" pitchFamily="34" charset="-122"/>
                 <a:cs typeface="Calibri" pitchFamily="34" charset="-120"/>
               </a:rPr>
-              <a:t>215/215 exigibles</a:t>
+              <a:t>215/216 exigibles</a:t>
             </a:r>
             <a:endParaRPr lang="en-US" sz="1300" dirty="0"/>
           </a:p>
@@ -21083,7 +21242,7 @@
                 <a:ea typeface="Calibri" pitchFamily="34" charset="-122"/>
                 <a:cs typeface="Calibri" pitchFamily="34" charset="-120"/>
               </a:rPr>
-              <a:t>98,6% del universo · 3 programadas en plazo · 0 sin programar</a:t>
+              <a:t>98,6% del universo · 2 programadas en plazo · 1 con agenda vencida · 0 sin programar</a:t>
             </a:r>
             <a:endParaRPr lang="en-US" sz="950" dirty="0"/>
           </a:p>
@@ -21176,7 +21335,7 @@
                 <a:ea typeface="Cambria" pitchFamily="34" charset="-122"/>
                 <a:cs typeface="Cambria" pitchFamily="34" charset="-120"/>
               </a:rPr>
-              <a:t>100%</a:t>
+              <a:t>97,6%</a:t>
             </a:r>
             <a:endParaRPr lang="en-US" sz="3800" dirty="0"/>
           </a:p>
@@ -21215,7 +21374,7 @@
                 <a:ea typeface="Calibri" pitchFamily="34" charset="-122"/>
                 <a:cs typeface="Calibri" pitchFamily="34" charset="-120"/>
               </a:rPr>
-              <a:t>205/205 exigibles</a:t>
+              <a:t>205/210 exigibles</a:t>
             </a:r>
             <a:endParaRPr lang="en-US" sz="1300" dirty="0"/>
           </a:p>
@@ -21296,7 +21455,7 @@
                 <a:ea typeface="Calibri" pitchFamily="34" charset="-122"/>
                 <a:cs typeface="Calibri" pitchFamily="34" charset="-120"/>
               </a:rPr>
-              <a:t>94% del universo · 13 programadas en plazo · 0 sin programar</a:t>
+              <a:t>94% del universo · 8 programadas en plazo · 5 con agenda vencida · 0 sin programar</a:t>
             </a:r>
             <a:endParaRPr lang="en-US" sz="950" dirty="0"/>
           </a:p>
@@ -21389,7 +21548,7 @@
                 <a:ea typeface="Cambria" pitchFamily="34" charset="-122"/>
                 <a:cs typeface="Cambria" pitchFamily="34" charset="-120"/>
               </a:rPr>
-              <a:t>94%</a:t>
+              <a:t>95%</a:t>
             </a:r>
             <a:endParaRPr lang="en-US" sz="3800" dirty="0"/>
           </a:p>
@@ -21428,7 +21587,7 @@
                 <a:ea typeface="Calibri" pitchFamily="34" charset="-122"/>
                 <a:cs typeface="Calibri" pitchFamily="34" charset="-120"/>
               </a:rPr>
-              <a:t>185/218 sobre 95%</a:t>
+              <a:t>193/218 sobre 95%</a:t>
             </a:r>
             <a:endParaRPr lang="en-US" sz="1300" dirty="0"/>
           </a:p>
@@ -21602,7 +21761,7 @@
                 <a:ea typeface="Cambria" pitchFamily="34" charset="-122"/>
                 <a:cs typeface="Cambria" pitchFamily="34" charset="-120"/>
               </a:rPr>
-              <a:t>91,7%</a:t>
+              <a:t>89,7%</a:t>
             </a:r>
             <a:endParaRPr lang="en-US" sz="3800" dirty="0"/>
           </a:p>
@@ -21641,7 +21800,7 @@
                 <a:ea typeface="Calibri" pitchFamily="34" charset="-122"/>
                 <a:cs typeface="Calibri" pitchFamily="34" charset="-120"/>
               </a:rPr>
-              <a:t>365/398</a:t>
+              <a:t>365/407</a:t>
             </a:r>
             <a:endParaRPr lang="en-US" sz="1300" dirty="0"/>
           </a:p>
@@ -21722,7 +21881,7 @@
                 <a:ea typeface="Calibri" pitchFamily="34" charset="-122"/>
                 <a:cs typeface="Calibri" pitchFamily="34" charset="-120"/>
               </a:rPr>
-              <a:t>33 abiertos · 17 atrasados</a:t>
+              <a:t>42 abiertos · 25 atrasados</a:t>
             </a:r>
             <a:endParaRPr lang="en-US" sz="950" dirty="0"/>
           </a:p>
@@ -21862,7 +22021,7 @@
                 <a:ea typeface="Calibri" pitchFamily="34" charset="-122"/>
                 <a:cs typeface="Calibri" pitchFamily="34" charset="-120"/>
               </a:rPr>
-              <a:t>91,7% de cierre en P1 (33 abiertos), pero 299 DT abiertos entre P2, P3 y P4 sobre un total de 332.</a:t>
+              <a:t>89,7% de cierre en P1 (42 abiertos), pero 301 DT abiertos entre P2, P3 y P4 sobre un total de 343.</a:t>
             </a:r>
             <a:endParaRPr lang="en-US" sz="1150" dirty="0"/>
           </a:p>
@@ -21941,7 +22100,7 @@
                 <a:ea typeface="Calibri" pitchFamily="34" charset="-122"/>
                 <a:cs typeface="Calibri" pitchFamily="34" charset="-120"/>
               </a:rPr>
-              <a:t>101 DT con la fecha de compromiso vencida; mediana de 33 días y el más antiguo lleva 172. Los 211 abiertos sin fecha de compromiso no se cuentan como atrasados.</a:t>
+              <a:t>111 DT con la fecha de compromiso vencida; mediana de 38 días y el más antiguo lleva 178. Los 211 abiertos sin fecha de compromiso no se cuentan como atrasados.</a:t>
             </a:r>
             <a:endParaRPr lang="en-US" sz="1150" dirty="0"/>
           </a:p>
@@ -22003,7 +22162,7 @@
                 <a:ea typeface="Calibri" pitchFamily="34" charset="-122"/>
                 <a:cs typeface="Calibri" pitchFamily="34" charset="-120"/>
               </a:rPr>
-              <a:t>Caminatas: 100% y 100% de lo exigible (C1 y C2).  </a:t>
+              <a:t>Caminatas: 99,5% y 97,6% de lo exigible (C1 y C2).  </a:t>
             </a:r>
             <a:pPr indent="0" marL="0">
               <a:lnSpc>
@@ -22020,7 +22179,7 @@
                 <a:ea typeface="Calibri" pitchFamily="34" charset="-122"/>
                 <a:cs typeface="Calibri" pitchFamily="34" charset="-120"/>
               </a:rPr>
-              <a:t>Caminata 1: 215/215 exigibles. Caminata 2: 205/205, con 13 agendadas en plazo y 0 sin programar.</a:t>
+              <a:t>Caminata 1: 215/216 exigibles, 1 con agenda vencida. Caminata 2: 205/210, con 8 agendadas en plazo y 0 sin programar.</a:t>
             </a:r>
             <a:endParaRPr lang="en-US" sz="1150" dirty="0"/>
           </a:p>
@@ -22099,7 +22258,7 @@
                 <a:ea typeface="Calibri" pitchFamily="34" charset="-122"/>
                 <a:cs typeface="Calibri" pitchFamily="34" charset="-120"/>
               </a:rPr>
-              <a:t>Avance promedio 94%: 185 subsistemas sobre 95% y solo 4 bajo 80%.</a:t>
+              <a:t>Avance promedio 95%: 193 subsistemas sobre 95% y solo 4 bajo 80%.</a:t>
             </a:r>
             <a:endParaRPr lang="en-US" sz="1150" dirty="0"/>
           </a:p>
@@ -22138,7 +22297,7 @@
                 <a:ea typeface="Calibri" pitchFamily="34" charset="-122"/>
                 <a:cs typeface="Calibri" pitchFamily="34" charset="-120"/>
               </a:rPr>
-              <a:t>Fuente: STATUS_SUBSISTEMAS_TALABRE + Detalle_de_Terminaciones · 218 subsistemas · 2.101 DT · Atrasos al 07-09-2026</a:t>
+              <a:t>Fuente: STATUS_SUBSISTEMAS_TALABRE + Detalle_de_Terminaciones · 218 subsistemas · 2.111 DT · Atrasos al 13-09-2026</a:t>
             </a:r>
             <a:endParaRPr lang="en-US" sz="850" dirty="0"/>
           </a:p>
@@ -22389,7 +22548,7 @@
                 <a:ea typeface="Calibri" pitchFamily="34" charset="-122"/>
                 <a:cs typeface="Calibri" pitchFamily="34" charset="-120"/>
               </a:rPr>
-              <a:t>Caminata 2: 100% de lo exigible (205/205) — se descuentan 13 agendadas a fecha futura, que no son incumplimiento al corte. Talabre mide la carpeta como % de avance (PEC), no como estado de aprobación.</a:t>
+              <a:t>Caminata 2: 97,6% de lo exigible (205/210) — se descuentan 8 agendadas a fecha futura, que no son incumplimiento al corte. Talabre mide la carpeta como % de avance (PEC), no como estado de aprobación.</a:t>
             </a:r>
             <a:endParaRPr lang="en-US" sz="1350" dirty="0"/>
           </a:p>
@@ -22460,7 +22619,7 @@
                 <a:ea typeface="Calibri" pitchFamily="34" charset="-122"/>
                 <a:cs typeface="Calibri" pitchFamily="34" charset="-120"/>
               </a:rPr>
-              <a:t>Fuente: STATUS_SUBSISTEMAS_TALABRE + Detalle_de_Terminaciones · 218 subsistemas · 2.101 DT · Atrasos al 07-09-2026</a:t>
+              <a:t>Fuente: STATUS_SUBSISTEMAS_TALABRE + Detalle_de_Terminaciones · 218 subsistemas · 2.111 DT · Atrasos al 13-09-2026</a:t>
             </a:r>
             <a:endParaRPr lang="en-US" sz="850" dirty="0"/>
           </a:p>
@@ -22711,7 +22870,7 @@
                 <a:ea typeface="Calibri" pitchFamily="34" charset="-122"/>
                 <a:cs typeface="Calibri" pitchFamily="34" charset="-120"/>
               </a:rPr>
-              <a:t>2.101 DT levantados; 84,2% cerrados. Atrasado = DT abierto cuya fecha de compromiso de cierre ya venció al 07-09-2026.</a:t>
+              <a:t>2.111 DT levantados; 83,8% cerrados. Atrasado = DT abierto cuya fecha de compromiso de cierre ya venció al 13-09-2026.</a:t>
             </a:r>
             <a:endParaRPr lang="en-US" sz="1350" dirty="0"/>
           </a:p>
@@ -22866,7 +23025,7 @@
                 <a:ea typeface="Calibri" pitchFamily="34" charset="-122"/>
                 <a:cs typeface="Calibri" pitchFamily="34" charset="-120"/>
               </a:rPr>
-              <a:t>365/398</a:t>
+              <a:t>365/407</a:t>
             </a:r>
             <a:endParaRPr lang="en-US" sz="1050" dirty="0"/>
           </a:p>
@@ -22905,7 +23064,7 @@
                 <a:ea typeface="Calibri" pitchFamily="34" charset="-122"/>
                 <a:cs typeface="Calibri" pitchFamily="34" charset="-120"/>
               </a:rPr>
-              <a:t>91,7%</a:t>
+              <a:t>89,7%</a:t>
             </a:r>
             <a:endParaRPr lang="en-US" sz="1100" dirty="0"/>
           </a:p>
@@ -22940,13 +23099,13 @@
         <p:spPr>
           <a:xfrm>
             <a:off x="7936992" y="2688336"/>
-            <a:ext cx="3270169" cy="118872"/>
+            <a:ext cx="3198846" cy="118872"/>
           </a:xfrm>
           <a:prstGeom prst="rect">
             <a:avLst/>
           </a:prstGeom>
           <a:solidFill>
-            <a:srgbClr val="2E9E5B"/>
+            <a:srgbClr val="E3A55B"/>
           </a:solidFill>
           <a:ln/>
         </p:spPr>
@@ -23023,7 +23182,7 @@
                 <a:ea typeface="Calibri" pitchFamily="34" charset="-122"/>
                 <a:cs typeface="Calibri" pitchFamily="34" charset="-120"/>
               </a:rPr>
-              <a:t>1.320/1.405</a:t>
+              <a:t>1.319/1.406</a:t>
             </a:r>
             <a:endParaRPr lang="en-US" sz="1050" dirty="0"/>
           </a:p>
@@ -23062,7 +23221,7 @@
                 <a:ea typeface="Calibri" pitchFamily="34" charset="-122"/>
                 <a:cs typeface="Calibri" pitchFamily="34" charset="-120"/>
               </a:rPr>
-              <a:t>94%</a:t>
+              <a:t>93,8%</a:t>
             </a:r>
             <a:endParaRPr lang="en-US" sz="1100" dirty="0"/>
           </a:p>
@@ -23097,7 +23256,7 @@
         <p:spPr>
           <a:xfrm>
             <a:off x="7936992" y="3200400"/>
-            <a:ext cx="3352190" cy="118872"/>
+            <a:ext cx="3345058" cy="118872"/>
           </a:xfrm>
           <a:prstGeom prst="rect">
             <a:avLst/>
@@ -23636,7 +23795,7 @@
                 <a:ea typeface="Calibri" pitchFamily="34" charset="-122"/>
                 <a:cs typeface="Calibri" pitchFamily="34" charset="-120"/>
               </a:rPr>
-              <a:t>Mediana de 33 días vencidos; el más antiguo lleva 172. 21 entre 1-30 días, 71 entre 31-90 días, 9 entre 91-180 días.</a:t>
+              <a:t>Mediana de 38 días vencidos; el más antiguo lleva 178. 28 entre 1-30 días, 71 entre 31-90 días, 12 entre 91-180 días.</a:t>
             </a:r>
             <a:endParaRPr lang="en-US" sz="1150" dirty="0"/>
           </a:p>
@@ -23675,7 +23834,7 @@
                 <a:ea typeface="Calibri" pitchFamily="34" charset="-122"/>
                 <a:cs typeface="Calibri" pitchFamily="34" charset="-120"/>
               </a:rPr>
-              <a:t>Fuente: STATUS_SUBSISTEMAS_TALABRE + Detalle_de_Terminaciones · 218 subsistemas · 2.101 DT · Atrasos al 07-09-2026</a:t>
+              <a:t>Fuente: STATUS_SUBSISTEMAS_TALABRE + Detalle_de_Terminaciones · 218 subsistemas · 2.111 DT · Atrasos al 13-09-2026</a:t>
             </a:r>
             <a:endParaRPr lang="en-US" sz="850" dirty="0"/>
           </a:p>

--- a/panel_control_TOP_P1/Panel_Control_TOP_P1.pptx
+++ b/panel_control_TOP_P1/Panel_Control_TOP_P1.pptx
@@ -828,16 +828,16 @@
                     <c:v>Piping</c:v>
                   </c:pt>
                   <c:pt idx="2">
+                    <c:v>Mecánica</c:v>
+                  </c:pt>
+                  <c:pt idx="3">
                     <c:v>Obras Civiles</c:v>
                   </c:pt>
-                  <c:pt idx="3">
-                    <c:v>Estructura</c:v>
-                  </c:pt>
                   <c:pt idx="4">
-                    <c:v>Mecánica</c:v>
+                    <c:v>Instr. y Control</c:v>
                   </c:pt>
                   <c:pt idx="5">
-                    <c:v>Instr. y Control</c:v>
+                    <c:v>Estructura</c:v>
                   </c:pt>
                 </c:lvl>
               </c:multiLvlStrCache>
@@ -850,22 +850,22 @@
                 <c:formatCode>General</c:formatCode>
                 <c:ptCount val="6"/>
                 <c:pt idx="0">
-                  <c:v>119</c:v>
+                  <c:v>109</c:v>
                 </c:pt>
                 <c:pt idx="1">
-                  <c:v>35</c:v>
+                  <c:v>31</c:v>
                 </c:pt>
                 <c:pt idx="2">
-                  <c:v>13</c:v>
+                  <c:v>10</c:v>
                 </c:pt>
                 <c:pt idx="3">
-                  <c:v>7</c:v>
+                  <c:v>12</c:v>
                 </c:pt>
                 <c:pt idx="4">
-                  <c:v>10</c:v>
+                  <c:v/>
                 </c:pt>
                 <c:pt idx="5">
-                  <c:v/>
+                  <c:v>6</c:v>
                 </c:pt>
               </c:numCache>
             </c:numRef>
@@ -930,16 +930,16 @@
                     <c:v>Piping</c:v>
                   </c:pt>
                   <c:pt idx="2">
+                    <c:v>Mecánica</c:v>
+                  </c:pt>
+                  <c:pt idx="3">
                     <c:v>Obras Civiles</c:v>
                   </c:pt>
-                  <c:pt idx="3">
-                    <c:v>Estructura</c:v>
-                  </c:pt>
                   <c:pt idx="4">
-                    <c:v>Mecánica</c:v>
+                    <c:v>Instr. y Control</c:v>
                   </c:pt>
                   <c:pt idx="5">
-                    <c:v>Instr. y Control</c:v>
+                    <c:v>Estructura</c:v>
                   </c:pt>
                 </c:lvl>
               </c:multiLvlStrCache>
@@ -952,19 +952,19 @@
                 <c:formatCode>General</c:formatCode>
                 <c:ptCount val="6"/>
                 <c:pt idx="0">
-                  <c:v>52</c:v>
+                  <c:v>81</c:v>
                 </c:pt>
                 <c:pt idx="1">
-                  <c:v>91</c:v>
+                  <c:v>120</c:v>
                 </c:pt>
                 <c:pt idx="2">
-                  <c:v>8</c:v>
+                  <c:v>20</c:v>
                 </c:pt>
                 <c:pt idx="3">
-                  <c:v>7</c:v>
+                  <c:v>9</c:v>
                 </c:pt>
                 <c:pt idx="4">
-                  <c:v>1</c:v>
+                  <c:v>17</c:v>
                 </c:pt>
                 <c:pt idx="5">
                   <c:v>8</c:v>
@@ -1340,13 +1340,13 @@
               <c:numCache>
                 <c:ptCount val="3"/>
                 <c:pt idx="0">
-                  <c:v>794</c:v>
+                  <c:v>881</c:v>
                 </c:pt>
                 <c:pt idx="1">
-                  <c:v>184</c:v>
+                  <c:v>168</c:v>
                 </c:pt>
                 <c:pt idx="2">
-                  <c:v>167</c:v>
+                  <c:v>255</c:v>
                 </c:pt>
               </c:numCache>
             </c:numRef>
@@ -7141,7 +7141,7 @@
                 <a:ea typeface="Cambria" pitchFamily="34" charset="-122"/>
                 <a:cs typeface="Cambria" pitchFamily="34" charset="-120"/>
               </a:rPr>
-              <a:t>69,3%</a:t>
+              <a:t>67,6%</a:t>
             </a:r>
             <a:endParaRPr lang="en-US" sz="3400" dirty="0"/>
           </a:p>
@@ -7258,7 +7258,7 @@
                 <a:ea typeface="Calibri" pitchFamily="34" charset="-122"/>
                 <a:cs typeface="Calibri" pitchFamily="34" charset="-120"/>
               </a:rPr>
-              <a:t>Fuente: REPORTE_GERENCIAL + Listado de Puntos Punch Consolidado · Corte 01-09-2026 · Atrasos al 07-09-2026</a:t>
+              <a:t>Fuente: REPORTE_GERENCIAL + Listado de Puntos Punch Consolidado · Corte 01-09-2026 · Atrasos al 13-09-2026</a:t>
             </a:r>
             <a:endParaRPr lang="en-US" sz="850" dirty="0"/>
           </a:p>
@@ -16713,7 +16713,7 @@
                 <a:ea typeface="Cambria" pitchFamily="34" charset="-122"/>
                 <a:cs typeface="Cambria" pitchFamily="34" charset="-120"/>
               </a:rPr>
-              <a:t>69,3%</a:t>
+              <a:t>67,6%</a:t>
             </a:r>
             <a:endParaRPr lang="en-US" sz="3800" dirty="0"/>
           </a:p>
@@ -16752,7 +16752,7 @@
                 <a:ea typeface="Calibri" pitchFamily="34" charset="-122"/>
                 <a:cs typeface="Calibri" pitchFamily="34" charset="-120"/>
               </a:rPr>
-              <a:t>794/1.145</a:t>
+              <a:t>881/1.304</a:t>
             </a:r>
             <a:endParaRPr lang="en-US" sz="1400" dirty="0"/>
           </a:p>
@@ -16833,7 +16833,7 @@
                 <a:ea typeface="Calibri" pitchFamily="34" charset="-122"/>
                 <a:cs typeface="Calibri" pitchFamily="34" charset="-120"/>
               </a:rPr>
-              <a:t>351 abiertos · 184 atrasados</a:t>
+              <a:t>423 abiertos · 168 atrasados</a:t>
             </a:r>
             <a:endParaRPr lang="en-US" sz="950" dirty="0"/>
           </a:p>
@@ -16973,7 +16973,7 @@
                 <a:ea typeface="Calibri" pitchFamily="34" charset="-122"/>
                 <a:cs typeface="Calibri" pitchFamily="34" charset="-120"/>
               </a:rPr>
-              <a:t>1.294 de 1.855 ítems cerrados (69,8%); de los 561 abiertos, 318 ya pasaron su fecha requerida de cierre (56,7%).</a:t>
+              <a:t>1.408 de 2.186 ítems cerrados (64,4%); de los 778 abiertos, 293 ya pasaron su fecha requerida de cierre (37,7%).</a:t>
             </a:r>
             <a:endParaRPr lang="en-US" sz="1150" dirty="0"/>
           </a:p>
@@ -17210,7 +17210,7 @@
                 <a:ea typeface="Calibri" pitchFamily="34" charset="-122"/>
                 <a:cs typeface="Calibri" pitchFamily="34" charset="-120"/>
               </a:rPr>
-              <a:t>171 de los 351 P1 abiertos (48,7%), con 119 atrasados.</a:t>
+              <a:t>190 de los 423 P1 abiertos (44,9%), con 109 atrasados.</a:t>
             </a:r>
             <a:endParaRPr lang="en-US" sz="1150" dirty="0"/>
           </a:p>
@@ -17249,7 +17249,7 @@
                 <a:ea typeface="Calibri" pitchFamily="34" charset="-122"/>
                 <a:cs typeface="Calibri" pitchFamily="34" charset="-120"/>
               </a:rPr>
-              <a:t>Fuente: REPORTE_GERENCIAL + Listado de Puntos Punch Consolidado · Corte 01-09-2026 · Atrasos al 07-09-2026</a:t>
+              <a:t>Fuente: REPORTE_GERENCIAL + Listado de Puntos Punch Consolidado · Corte 01-09-2026 · Atrasos al 13-09-2026</a:t>
             </a:r>
             <a:endParaRPr lang="en-US" sz="850" dirty="0"/>
           </a:p>
@@ -18458,7 +18458,7 @@
                 <a:ea typeface="Calibri" pitchFamily="34" charset="-122"/>
                 <a:cs typeface="Calibri" pitchFamily="34" charset="-120"/>
               </a:rPr>
-              <a:t>Fuente: REPORTE_GERENCIAL + Listado de Puntos Punch Consolidado · Corte 01-09-2026 · Atrasos al 07-09-2026</a:t>
+              <a:t>Fuente: REPORTE_GERENCIAL + Listado de Puntos Punch Consolidado · Corte 01-09-2026 · Atrasos al 13-09-2026</a:t>
             </a:r>
             <a:endParaRPr lang="en-US" sz="850" dirty="0"/>
           </a:p>
@@ -18709,7 +18709,7 @@
                 <a:ea typeface="Calibri" pitchFamily="34" charset="-122"/>
                 <a:cs typeface="Calibri" pitchFamily="34" charset="-120"/>
               </a:rPr>
-              <a:t>1.145 P1 levantados; 69,3% cerrados. Atrasado = ítem abierto cuya fecha requerida de cierre ya venció al 07-09-2026.</a:t>
+              <a:t>1.304 P1 levantados; 67,6% cerrados. Atrasado = ítem abierto cuya fecha requerida de cierre ya venció al 13-09-2026.</a:t>
             </a:r>
             <a:endParaRPr lang="en-US" sz="1350" dirty="0"/>
           </a:p>
@@ -18841,7 +18841,7 @@
                 <a:ea typeface="Cambria" pitchFamily="34" charset="-122"/>
                 <a:cs typeface="Cambria" pitchFamily="34" charset="-120"/>
               </a:rPr>
-              <a:t>69,3%</a:t>
+              <a:t>67,6%</a:t>
             </a:r>
             <a:endParaRPr lang="en-US" sz="1900" dirty="0"/>
           </a:p>
@@ -18956,7 +18956,7 @@
                 <a:ea typeface="Calibri" pitchFamily="34" charset="-122"/>
                 <a:cs typeface="Calibri" pitchFamily="34" charset="-120"/>
               </a:rPr>
-              <a:t>794</a:t>
+              <a:t>881</a:t>
             </a:r>
             <a:endParaRPr lang="en-US" sz="1100" dirty="0"/>
           </a:p>
@@ -19054,7 +19054,7 @@
                 <a:ea typeface="Calibri" pitchFamily="34" charset="-122"/>
                 <a:cs typeface="Calibri" pitchFamily="34" charset="-120"/>
               </a:rPr>
-              <a:t>184</a:t>
+              <a:t>168</a:t>
             </a:r>
             <a:endParaRPr lang="en-US" sz="1100" dirty="0"/>
           </a:p>
@@ -19152,7 +19152,7 @@
                 <a:ea typeface="Calibri" pitchFamily="34" charset="-122"/>
                 <a:cs typeface="Calibri" pitchFamily="34" charset="-120"/>
               </a:rPr>
-              <a:t>167</a:t>
+              <a:t>255</a:t>
             </a:r>
             <a:endParaRPr lang="en-US" sz="1100" dirty="0"/>
           </a:p>
@@ -19235,7 +19235,7 @@
                 <a:ea typeface="Calibri" pitchFamily="34" charset="-122"/>
                 <a:cs typeface="Calibri" pitchFamily="34" charset="-120"/>
               </a:rPr>
-              <a:t>Mediana de 7 días vencidos; el más antiguo lleva 120. 192 entre 1-30 días, 112 entre 31-90 días, 14 entre 91-180 días.</a:t>
+              <a:t>Mediana de 13 días vencidos; el más antiguo lleva 126. 171 entre 1-30 días, 108 entre 31-90 días, 14 entre 91-180 días.</a:t>
             </a:r>
             <a:endParaRPr lang="en-US" sz="1150" dirty="0"/>
           </a:p>
@@ -19274,7 +19274,7 @@
                 <a:ea typeface="Calibri" pitchFamily="34" charset="-122"/>
                 <a:cs typeface="Calibri" pitchFamily="34" charset="-120"/>
               </a:rPr>
-              <a:t>Fuente: REPORTE_GERENCIAL + Listado de Puntos Punch Consolidado · Corte 01-09-2026 · Atrasos al 07-09-2026</a:t>
+              <a:t>Fuente: REPORTE_GERENCIAL + Listado de Puntos Punch Consolidado · Corte 01-09-2026 · Atrasos al 13-09-2026</a:t>
             </a:r>
             <a:endParaRPr lang="en-US" sz="850" dirty="0"/>
           </a:p>
@@ -19606,7 +19606,7 @@
                 <a:ea typeface="Calibri" pitchFamily="34" charset="-122"/>
                 <a:cs typeface="Calibri" pitchFamily="34" charset="-120"/>
               </a:rPr>
-              <a:t>Recuperar los 318 ítems atrasados</a:t>
+              <a:t>Recuperar los 293 ítems atrasados</a:t>
             </a:r>
             <a:endParaRPr lang="en-US" sz="1400" dirty="0"/>
           </a:p>
@@ -19648,7 +19648,7 @@
                 <a:ea typeface="Calibri" pitchFamily="34" charset="-122"/>
                 <a:cs typeface="Calibri" pitchFamily="34" charset="-120"/>
               </a:rPr>
-              <a:t>56,7% de los 561 abiertos ya venció su fecha requerida. Foco en Eléctrica (119), Piping (35), Obras Civiles (13).</a:t>
+              <a:t>37,7% de los 778 abiertos ya venció su fecha requerida. Foco en Eléctrica (109), Piping (31), Mecánica (10).</a:t>
             </a:r>
             <a:endParaRPr lang="en-US" sz="1100" dirty="0"/>
           </a:p>
@@ -20074,7 +20074,7 @@
                 <a:ea typeface="Calibri" pitchFamily="34" charset="-122"/>
                 <a:cs typeface="Calibri" pitchFamily="34" charset="-120"/>
               </a:rPr>
-              <a:t>Concentra 287 P1 abiertos y 138 atrasados sobre 74 subsistemas. Es la ruta crítica del proyecto.</a:t>
+              <a:t>Concentra 369 P1 abiertos y 125 atrasados sobre 74 subsistemas. Es la ruta crítica del proyecto.</a:t>
             </a:r>
             <a:endParaRPr lang="en-US" sz="1100" dirty="0"/>
           </a:p>
@@ -20113,7 +20113,7 @@
                 <a:ea typeface="Calibri" pitchFamily="34" charset="-122"/>
                 <a:cs typeface="Calibri" pitchFamily="34" charset="-120"/>
               </a:rPr>
-              <a:t>Fuente: REPORTE_GERENCIAL + Listado de Puntos Punch Consolidado · Corte 01-09-2026 · Atrasos al 07-09-2026</a:t>
+              <a:t>Fuente: REPORTE_GERENCIAL + Listado de Puntos Punch Consolidado · Corte 01-09-2026 · Atrasos al 13-09-2026</a:t>
             </a:r>
             <a:endParaRPr lang="en-US" sz="850" dirty="0"/>
           </a:p>

--- a/panel_control_TOP_P1/Panel_Control_TOP_P1.pptx
+++ b/panel_control_TOP_P1/Panel_Control_TOP_P1.pptx
@@ -233,7 +233,7 @@
                 <c:formatCode>General</c:formatCode>
                 <c:ptCount val="2"/>
                 <c:pt idx="0">
-                  <c:v>52</c:v>
+                  <c:v>60</c:v>
                 </c:pt>
                 <c:pt idx="1">
                   <c:v>12</c:v>
@@ -311,7 +311,7 @@
                 <c:formatCode>General</c:formatCode>
                 <c:ptCount val="2"/>
                 <c:pt idx="0">
-                  <c:v>28</c:v>
+                  <c:v>19</c:v>
                 </c:pt>
                 <c:pt idx="1">
                   <c:v>3</c:v>
@@ -687,13 +687,13 @@
               <c:numCache>
                 <c:ptCount val="3"/>
                 <c:pt idx="0">
-                  <c:v>1222</c:v>
+                  <c:v>1316</c:v>
                 </c:pt>
                 <c:pt idx="1">
-                  <c:v>755</c:v>
+                  <c:v>690</c:v>
                 </c:pt>
                 <c:pt idx="2">
-                  <c:v>13</c:v>
+                  <c:v>2</c:v>
                 </c:pt>
               </c:numCache>
             </c:numRef>
@@ -850,22 +850,22 @@
                 <c:formatCode>General</c:formatCode>
                 <c:ptCount val="6"/>
                 <c:pt idx="0">
-                  <c:v>109</c:v>
+                  <c:v>105</c:v>
                 </c:pt>
                 <c:pt idx="1">
-                  <c:v>31</c:v>
+                  <c:v>35</c:v>
                 </c:pt>
                 <c:pt idx="2">
-                  <c:v>10</c:v>
+                  <c:v>11</c:v>
                 </c:pt>
                 <c:pt idx="3">
-                  <c:v>12</c:v>
+                  <c:v>9</c:v>
                 </c:pt>
                 <c:pt idx="4">
                   <c:v/>
                 </c:pt>
                 <c:pt idx="5">
-                  <c:v>6</c:v>
+                  <c:v>8</c:v>
                 </c:pt>
               </c:numCache>
             </c:numRef>
@@ -952,13 +952,13 @@
                 <c:formatCode>General</c:formatCode>
                 <c:ptCount val="6"/>
                 <c:pt idx="0">
-                  <c:v>81</c:v>
+                  <c:v>80</c:v>
                 </c:pt>
                 <c:pt idx="1">
-                  <c:v>120</c:v>
+                  <c:v>126</c:v>
                 </c:pt>
                 <c:pt idx="2">
-                  <c:v>20</c:v>
+                  <c:v>19</c:v>
                 </c:pt>
                 <c:pt idx="3">
                   <c:v>9</c:v>
@@ -967,7 +967,7 @@
                   <c:v>17</c:v>
                 </c:pt>
                 <c:pt idx="5">
-                  <c:v>8</c:v>
+                  <c:v>4</c:v>
                 </c:pt>
               </c:numCache>
             </c:numRef>
@@ -1340,7 +1340,7 @@
               <c:numCache>
                 <c:ptCount val="3"/>
                 <c:pt idx="0">
-                  <c:v>881</c:v>
+                  <c:v>961</c:v>
                 </c:pt>
                 <c:pt idx="1">
                   <c:v>168</c:v>
@@ -1518,7 +1518,7 @@
                   <c:v>20</c:v>
                 </c:pt>
                 <c:pt idx="2">
-                  <c:v>23</c:v>
+                  <c:v>25</c:v>
                 </c:pt>
                 <c:pt idx="3">
                   <c:v>3</c:v>
@@ -1647,7 +1647,7 @@
                   <c:v/>
                 </c:pt>
                 <c:pt idx="5">
-                  <c:v>4</c:v>
+                  <c:v>7</c:v>
                 </c:pt>
                 <c:pt idx="6">
                   <c:v/>
@@ -1668,126 +1668,6 @@
           <c:tx>
             <c:strRef>
               <c:f>Sheet1!$D$1</c:f>
-              <c:strCache>
-                <c:ptCount val="1"/>
-                <c:pt idx="0">
-                  <c:v>Agenda vencida</c:v>
-                </c:pt>
-              </c:strCache>
-            </c:strRef>
-          </c:tx>
-          <c:spPr>
-            <a:solidFill>
-              <a:srgbClr val="9A6B0F"/>
-            </a:solidFill>
-            <a:effectLst/>
-          </c:spPr>
-          <c:invertIfNegative val="0"/>
-          <c:dLbls>
-            <c:numFmt formatCode="#,##0" sourceLinked="0"/>
-            <c:txPr>
-              <a:bodyPr/>
-              <a:lstStyle/>
-              <a:p>
-                <a:pPr>
-                  <a:defRPr b="1" i="0" strike="noStrike" sz="1100" u="none">
-                    <a:solidFill>
-                      <a:srgbClr val="FFFFFF"/>
-                    </a:solidFill>
-                    <a:latin typeface="Calibri"/>
-                  </a:defRPr>
-                </a:pPr>
-              </a:p>
-            </c:txPr>
-            <c:dLblPos val="ctr"/>
-            <c:showLegendKey val="0"/>
-            <c:showVal val="1"/>
-            <c:showCatName val="0"/>
-            <c:showSerName val="0"/>
-            <c:showPercent val="0"/>
-            <c:showBubbleSize val="0"/>
-            <c:showLeaderLines val="0"/>
-          </c:dLbls>
-          <c:cat>
-            <c:multiLvlStrRef>
-              <c:f>Sheet1!$A$2:$A$10</c:f>
-              <c:multiLvlStrCache>
-                <c:ptCount val="9"/>
-                <c:lvl>
-                  <c:pt idx="0">
-                    <c:v>CERRO VERDE/PS2</c:v>
-                  </c:pt>
-                  <c:pt idx="1">
-                    <c:v>EBMP</c:v>
-                  </c:pt>
-                  <c:pt idx="2">
-                    <c:v>EBMS</c:v>
-                  </c:pt>
-                  <c:pt idx="3">
-                    <c:v>IMPULSIÓN ADUCCIÓN</c:v>
-                  </c:pt>
-                  <c:pt idx="4">
-                    <c:v>LÍNEAS IMPULSIÓN</c:v>
-                  </c:pt>
-                  <c:pt idx="5">
-                    <c:v>PISCINAS Y SEDIMENTADOR</c:v>
-                  </c:pt>
-                  <c:pt idx="6">
-                    <c:v>POZOS</c:v>
-                  </c:pt>
-                  <c:pt idx="7">
-                    <c:v>PQS</c:v>
-                  </c:pt>
-                  <c:pt idx="8">
-                    <c:v>SALA GAR</c:v>
-                  </c:pt>
-                </c:lvl>
-              </c:multiLvlStrCache>
-            </c:multiLvlStrRef>
-          </c:cat>
-          <c:val>
-            <c:numRef>
-              <c:f>Sheet1!$D$2:$D$10</c:f>
-              <c:numCache>
-                <c:formatCode>General</c:formatCode>
-                <c:ptCount val="9"/>
-                <c:pt idx="0">
-                  <c:v/>
-                </c:pt>
-                <c:pt idx="1">
-                  <c:v/>
-                </c:pt>
-                <c:pt idx="2">
-                  <c:v>2</c:v>
-                </c:pt>
-                <c:pt idx="3">
-                  <c:v/>
-                </c:pt>
-                <c:pt idx="4">
-                  <c:v/>
-                </c:pt>
-                <c:pt idx="5">
-                  <c:v>3</c:v>
-                </c:pt>
-                <c:pt idx="6">
-                  <c:v/>
-                </c:pt>
-                <c:pt idx="7">
-                  <c:v/>
-                </c:pt>
-                <c:pt idx="8">
-                  <c:v/>
-                </c:pt>
-              </c:numCache>
-            </c:numRef>
-          </c:val>
-        </c:ser>
-        <c:ser>
-          <c:idx val="3"/>
-          <c:order val="3"/>
-          <c:tx>
-            <c:strRef>
-              <c:f>Sheet1!$E$1</c:f>
               <c:strCache>
                 <c:ptCount val="1"/>
                 <c:pt idx="0">
@@ -1867,7 +1747,7 @@
           </c:cat>
           <c:val>
             <c:numRef>
-              <c:f>Sheet1!$E$2:$E$10</c:f>
+              <c:f>Sheet1!$D$2:$D$10</c:f>
               <c:numCache>
                 <c:formatCode>General</c:formatCode>
                 <c:ptCount val="9"/>
@@ -2325,7 +2205,7 @@
                   <c:v>3</c:v>
                 </c:pt>
                 <c:pt idx="5">
-                  <c:v>6</c:v>
+                  <c:v>7</c:v>
                 </c:pt>
                 <c:pt idx="6">
                   <c:v/>
@@ -2445,7 +2325,7 @@
                   <c:v>1</c:v>
                 </c:pt>
                 <c:pt idx="5">
-                  <c:v>1</c:v>
+                  <c:v/>
                 </c:pt>
                 <c:pt idx="6">
                   <c:v/>
@@ -2736,19 +2616,19 @@
                 <c:formatCode>General</c:formatCode>
                 <c:ptCount val="5"/>
                 <c:pt idx="0">
-                  <c:v>6</c:v>
+                  <c:v>3</c:v>
                 </c:pt>
                 <c:pt idx="1">
-                  <c:v>61</c:v>
+                  <c:v>33</c:v>
                 </c:pt>
                 <c:pt idx="2">
-                  <c:v>32</c:v>
+                  <c:v>25</c:v>
                 </c:pt>
                 <c:pt idx="3">
-                  <c:v>12</c:v>
+                  <c:v>10</c:v>
                 </c:pt>
                 <c:pt idx="4">
-                  <c:v/>
+                  <c:v>2</c:v>
                 </c:pt>
               </c:numCache>
             </c:numRef>
@@ -2832,19 +2712,19 @@
                 <c:formatCode>General</c:formatCode>
                 <c:ptCount val="5"/>
                 <c:pt idx="0">
-                  <c:v>133</c:v>
+                  <c:v>132</c:v>
                 </c:pt>
                 <c:pt idx="1">
-                  <c:v>71</c:v>
+                  <c:v>56</c:v>
                 </c:pt>
                 <c:pt idx="2">
-                  <c:v>9</c:v>
+                  <c:v>8</c:v>
                 </c:pt>
                 <c:pt idx="3">
                   <c:v>13</c:v>
                 </c:pt>
                 <c:pt idx="4">
-                  <c:v>6</c:v>
+                  <c:v>3</c:v>
                 </c:pt>
               </c:numCache>
             </c:numRef>
@@ -3126,7 +3006,7 @@
                   <c:v>35</c:v>
                 </c:pt>
                 <c:pt idx="1">
-                  <c:v>37</c:v>
+                  <c:v>39</c:v>
                 </c:pt>
                 <c:pt idx="2">
                   <c:v>19</c:v>
@@ -3216,7 +3096,7 @@
                   <c:v/>
                 </c:pt>
                 <c:pt idx="1">
-                  <c:v>40</c:v>
+                  <c:v>38</c:v>
                 </c:pt>
                 <c:pt idx="2">
                   <c:v>3</c:v>
@@ -3591,7 +3471,7 @@
                 <c:formatCode>General</c:formatCode>
                 <c:ptCount val="4"/>
                 <c:pt idx="0">
-                  <c:v>10</c:v>
+                  <c:v>16</c:v>
                 </c:pt>
                 <c:pt idx="1">
                   <c:v/>
@@ -3861,7 +3741,7 @@
                 <c:formatCode>General</c:formatCode>
                 <c:ptCount val="4"/>
                 <c:pt idx="0">
-                  <c:v>14</c:v>
+                  <c:v>8</c:v>
                 </c:pt>
                 <c:pt idx="1">
                   <c:v>69</c:v>
@@ -4139,10 +4019,10 @@
                     <c:v>Mecánica</c:v>
                   </c:pt>
                   <c:pt idx="4">
-                    <c:v>Estructura</c:v>
+                    <c:v>Obras Civiles</c:v>
                   </c:pt>
                   <c:pt idx="5">
-                    <c:v>Obras Civiles</c:v>
+                    <c:v>Estructura</c:v>
                   </c:pt>
                 </c:lvl>
               </c:multiLvlStrCache>
@@ -4155,22 +4035,22 @@
                 <c:formatCode>General</c:formatCode>
                 <c:ptCount val="6"/>
                 <c:pt idx="0">
-                  <c:v>203</c:v>
+                  <c:v>180</c:v>
                 </c:pt>
                 <c:pt idx="1">
-                  <c:v>170</c:v>
+                  <c:v>163</c:v>
                 </c:pt>
                 <c:pt idx="2">
-                  <c:v>147</c:v>
+                  <c:v>141</c:v>
                 </c:pt>
                 <c:pt idx="3">
-                  <c:v>97</c:v>
+                  <c:v>78</c:v>
                 </c:pt>
                 <c:pt idx="4">
-                  <c:v>13</c:v>
+                  <c:v/>
                 </c:pt>
                 <c:pt idx="5">
-                  <c:v/>
+                  <c:v>7</c:v>
                 </c:pt>
               </c:numCache>
             </c:numRef>
@@ -4241,10 +4121,10 @@
                     <c:v>Mecánica</c:v>
                   </c:pt>
                   <c:pt idx="4">
-                    <c:v>Estructura</c:v>
+                    <c:v>Obras Civiles</c:v>
                   </c:pt>
                   <c:pt idx="5">
-                    <c:v>Obras Civiles</c:v>
+                    <c:v>Estructura</c:v>
                   </c:pt>
                 </c:lvl>
               </c:multiLvlStrCache>
@@ -4257,22 +4137,22 @@
                 <c:formatCode>General</c:formatCode>
                 <c:ptCount val="6"/>
                 <c:pt idx="0">
-                  <c:v>24</c:v>
+                  <c:v>26</c:v>
                 </c:pt>
                 <c:pt idx="1">
-                  <c:v>34</c:v>
+                  <c:v>35</c:v>
                 </c:pt>
                 <c:pt idx="2">
-                  <c:v>23</c:v>
+                  <c:v>24</c:v>
                 </c:pt>
                 <c:pt idx="3">
                   <c:v>12</c:v>
                 </c:pt>
                 <c:pt idx="4">
-                  <c:v>12</c:v>
+                  <c:v>17</c:v>
                 </c:pt>
                 <c:pt idx="5">
-                  <c:v>20</c:v>
+                  <c:v>7</c:v>
                 </c:pt>
               </c:numCache>
             </c:numRef>
@@ -6907,7 +6787,7 @@
                 <a:ea typeface="Cambria" pitchFamily="34" charset="-122"/>
                 <a:cs typeface="Cambria" pitchFamily="34" charset="-120"/>
               </a:rPr>
-              <a:t>65%</a:t>
+              <a:t>75,9%</a:t>
             </a:r>
             <a:endParaRPr lang="en-US" sz="3400" dirty="0"/>
           </a:p>
@@ -7063,7 +6943,7 @@
                 <a:ea typeface="Cambria" pitchFamily="34" charset="-122"/>
                 <a:cs typeface="Cambria" pitchFamily="34" charset="-120"/>
               </a:rPr>
-              <a:t>49,5%</a:t>
+              <a:t>56,8%</a:t>
             </a:r>
             <a:endParaRPr lang="en-US" sz="3400" dirty="0"/>
           </a:p>
@@ -7141,7 +7021,7 @@
                 <a:ea typeface="Cambria" pitchFamily="34" charset="-122"/>
                 <a:cs typeface="Cambria" pitchFamily="34" charset="-120"/>
               </a:rPr>
-              <a:t>67,6%</a:t>
+              <a:t>69,4%</a:t>
             </a:r>
             <a:endParaRPr lang="en-US" sz="3400" dirty="0"/>
           </a:p>
@@ -7219,7 +7099,7 @@
                 <a:ea typeface="Calibri" pitchFamily="34" charset="-122"/>
                 <a:cs typeface="Calibri" pitchFamily="34" charset="-120"/>
               </a:rPr>
-              <a:t>Corte: 01-09-2026</a:t>
+              <a:t>Corte: 15-09-2026</a:t>
             </a:r>
             <a:endParaRPr lang="en-US" sz="1100" dirty="0"/>
           </a:p>
@@ -7258,7 +7138,7 @@
                 <a:ea typeface="Calibri" pitchFamily="34" charset="-122"/>
                 <a:cs typeface="Calibri" pitchFamily="34" charset="-120"/>
               </a:rPr>
-              <a:t>Fuente: REPORTE_GERENCIAL + Listado de Puntos Punch Consolidado · Corte 01-09-2026 · Atrasos al 13-09-2026</a:t>
+              <a:t>Fuente: REPORTE_GERENCIAL + Listado de Puntos Punch Consolidado · Corte 15-09-2026 · Atrasos al 21-09-2026</a:t>
             </a:r>
             <a:endParaRPr lang="en-US" sz="850" dirty="0"/>
           </a:p>
@@ -7551,7 +7431,7 @@
                 <a:ea typeface="Calibri" pitchFamily="34" charset="-122"/>
                 <a:cs typeface="Calibri" pitchFamily="34" charset="-120"/>
               </a:rPr>
-              <a:t>Recuperar los 111 DT atrasados</a:t>
+              <a:t>Recuperar los 73 DT atrasados</a:t>
             </a:r>
             <a:endParaRPr lang="en-US" sz="1350" dirty="0"/>
           </a:p>
@@ -7593,7 +7473,7 @@
                 <a:ea typeface="Calibri" pitchFamily="34" charset="-122"/>
                 <a:cs typeface="Calibri" pitchFamily="34" charset="-120"/>
               </a:rPr>
-              <a:t>83 son P2 y 25 son P1. La mediana de atraso es de 38 días y 12 superan los 90 días.</a:t>
+              <a:t>47 son P2 y 23 son P1. La mediana de atraso es de 45 días y 8 superan los 90 días.</a:t>
             </a:r>
             <a:endParaRPr lang="en-US" sz="1100" dirty="0"/>
           </a:p>
@@ -7735,7 +7615,7 @@
                 <a:ea typeface="Calibri" pitchFamily="34" charset="-122"/>
                 <a:cs typeface="Calibri" pitchFamily="34" charset="-120"/>
               </a:rPr>
-              <a:t>CERRO VERDE/PS2: 0/3 (0%). A nivel proyecto la caminata 2 va 94% con 8 ya agendadas.</a:t>
+              <a:t>CERRO VERDE/PS2: 0/3 (0%). A nivel proyecto la caminata 2 va 95% con 11 ya agendadas.</a:t>
             </a:r>
             <a:endParaRPr lang="en-US" sz="1100" dirty="0"/>
           </a:p>
@@ -8019,7 +7899,7 @@
                 <a:ea typeface="Calibri" pitchFamily="34" charset="-122"/>
                 <a:cs typeface="Calibri" pitchFamily="34" charset="-120"/>
               </a:rPr>
-              <a:t>Concentra 110 de los 343 DT abiertos (32,1%), con 4 atrasados. Además hay 4 carpetas bajo 80% de avance que conviene cerrar en paralelo.</a:t>
+              <a:t>Concentra 109 de los 285 DT abiertos (38,2%), con 3 atrasados. Además hay 3 carpetas bajo 80% de avance que conviene cerrar en paralelo.</a:t>
             </a:r>
             <a:endParaRPr lang="en-US" sz="1100" dirty="0"/>
           </a:p>
@@ -8058,7 +7938,7 @@
                 <a:ea typeface="Calibri" pitchFamily="34" charset="-122"/>
                 <a:cs typeface="Calibri" pitchFamily="34" charset="-120"/>
               </a:rPr>
-              <a:t>Fuente: STATUS_SUBSISTEMAS_TALABRE + Detalle_de_Terminaciones · 218 subsistemas · 2.111 DT · Atrasos al 13-09-2026</a:t>
+              <a:t>Fuente: STATUS_SUBSISTEMAS_TALABRE + Detalle_de_Terminaciones · 218 subsistemas · 2.115 DT · Atrasos al 21-09-2026</a:t>
             </a:r>
             <a:endParaRPr lang="en-US" sz="850" dirty="0"/>
           </a:p>
@@ -8411,7 +8291,7 @@
                 <a:ea typeface="Calibri" pitchFamily="34" charset="-122"/>
                 <a:cs typeface="Calibri" pitchFamily="34" charset="-120"/>
               </a:rPr>
-              <a:t>136 subsistemas en 4 áreas (2000 · 3000 · 4000 · 8000) · 2.967 detalles de terminación levantados.</a:t>
+              <a:t>136 subsistemas en 4 áreas (2000 · 3000 · 4000 · 8000) · 3.007 detalles de terminación levantados.</a:t>
             </a:r>
             <a:endParaRPr lang="en-US" sz="1350" dirty="0"/>
           </a:p>
@@ -8548,7 +8428,7 @@
                 <a:ea typeface="Cambria" pitchFamily="34" charset="-122"/>
                 <a:cs typeface="Cambria" pitchFamily="34" charset="-120"/>
               </a:rPr>
-              <a:t>68,4%</a:t>
+              <a:t>69,9%</a:t>
             </a:r>
             <a:endParaRPr lang="en-US" sz="3400" dirty="0"/>
           </a:p>
@@ -8626,7 +8506,7 @@
                 <a:ea typeface="Cambria" pitchFamily="34" charset="-122"/>
                 <a:cs typeface="Cambria" pitchFamily="34" charset="-120"/>
               </a:rPr>
-              <a:t>22,8%</a:t>
+              <a:t>27,2%</a:t>
             </a:r>
             <a:endParaRPr lang="en-US" sz="3400" dirty="0"/>
           </a:p>
@@ -8704,7 +8584,7 @@
                 <a:ea typeface="Cambria" pitchFamily="34" charset="-122"/>
                 <a:cs typeface="Cambria" pitchFamily="34" charset="-120"/>
               </a:rPr>
-              <a:t>61,4%</a:t>
+              <a:t>65,5%</a:t>
             </a:r>
             <a:endParaRPr lang="en-US" sz="3400" dirty="0"/>
           </a:p>
@@ -8782,7 +8662,7 @@
                 <a:ea typeface="Calibri" pitchFamily="34" charset="-122"/>
                 <a:cs typeface="Calibri" pitchFamily="34" charset="-120"/>
               </a:rPr>
-              <a:t>Corte: 10-09-2026   ·   Corte anterior: 07-09-2026</a:t>
+              <a:t>Corte: 19-09-2026   ·   Corte anterior: 10-09-2026</a:t>
             </a:r>
             <a:endParaRPr lang="en-US" sz="1100" dirty="0"/>
           </a:p>
@@ -8821,7 +8701,7 @@
                 <a:ea typeface="Calibri" pitchFamily="34" charset="-122"/>
                 <a:cs typeface="Calibri" pitchFamily="34" charset="-120"/>
               </a:rPr>
-              <a:t>Fuente: Estatus_Resumen_General_QAQC.xlsx · Corte 10-09-2026 · Áreas 2000/3000/4000/8000</a:t>
+              <a:t>Fuente: Estatus_Resumen_General_QAQC.xlsx · Corte 19-09-2026 · Áreas 2000/3000/4000/8000</a:t>
             </a:r>
             <a:endParaRPr lang="en-US" sz="850" dirty="0"/>
           </a:p>
@@ -9297,7 +9177,7 @@
                 <a:ea typeface="Cambria" pitchFamily="34" charset="-122"/>
                 <a:cs typeface="Cambria" pitchFamily="34" charset="-120"/>
               </a:rPr>
-              <a:t>68,4%</a:t>
+              <a:t>69,9%</a:t>
             </a:r>
             <a:endParaRPr lang="en-US" sz="4000" dirty="0"/>
           </a:p>
@@ -9336,7 +9216,7 @@
                 <a:ea typeface="Calibri" pitchFamily="34" charset="-122"/>
                 <a:cs typeface="Calibri" pitchFamily="34" charset="-120"/>
               </a:rPr>
-              <a:t>93/136</a:t>
+              <a:t>95/136</a:t>
             </a:r>
             <a:endParaRPr lang="en-US" sz="1400" dirty="0"/>
           </a:p>
@@ -9414,7 +9294,7 @@
                 <a:ea typeface="Calibri" pitchFamily="34" charset="-122"/>
                 <a:cs typeface="Calibri" pitchFamily="34" charset="-120"/>
               </a:rPr>
-              <a:t>43 próximas · 0 por programar</a:t>
+              <a:t>41 próximas · 0 por programar</a:t>
             </a:r>
             <a:endParaRPr lang="en-US" sz="950" dirty="0"/>
           </a:p>
@@ -9453,7 +9333,7 @@
                 <a:ea typeface="Calibri" pitchFamily="34" charset="-122"/>
                 <a:cs typeface="Calibri" pitchFamily="34" charset="-120"/>
               </a:rPr>
-              <a:t>▲ +1 vs. corte anterior</a:t>
+              <a:t>▲ +2 vs. corte anterior</a:t>
             </a:r>
             <a:endParaRPr lang="en-US" sz="900" dirty="0"/>
           </a:p>
@@ -9546,7 +9426,7 @@
                 <a:ea typeface="Cambria" pitchFamily="34" charset="-122"/>
                 <a:cs typeface="Cambria" pitchFamily="34" charset="-120"/>
               </a:rPr>
-              <a:t>22,8%</a:t>
+              <a:t>27,2%</a:t>
             </a:r>
             <a:endParaRPr lang="en-US" sz="4000" dirty="0"/>
           </a:p>
@@ -9585,7 +9465,7 @@
                 <a:ea typeface="Calibri" pitchFamily="34" charset="-122"/>
                 <a:cs typeface="Calibri" pitchFamily="34" charset="-120"/>
               </a:rPr>
-              <a:t>31/136</a:t>
+              <a:t>37/136</a:t>
             </a:r>
             <a:endParaRPr lang="en-US" sz="1400" dirty="0"/>
           </a:p>
@@ -9663,7 +9543,7 @@
                 <a:ea typeface="Calibri" pitchFamily="34" charset="-122"/>
                 <a:cs typeface="Calibri" pitchFamily="34" charset="-120"/>
               </a:rPr>
-              <a:t>0 aprobadas · 19 rechazadas · 11 en revisión · 1 observadas</a:t>
+              <a:t>0 aprobadas · 19 rechazadas · 17 en revisión · 1 observadas</a:t>
             </a:r>
             <a:endParaRPr lang="en-US" sz="950" dirty="0"/>
           </a:p>
@@ -9702,7 +9582,7 @@
                 <a:ea typeface="Calibri" pitchFamily="34" charset="-122"/>
                 <a:cs typeface="Calibri" pitchFamily="34" charset="-120"/>
               </a:rPr>
-              <a:t>▲ +3 vs. corte anterior</a:t>
+              <a:t>▲ +6 vs. corte anterior</a:t>
             </a:r>
             <a:endParaRPr lang="en-US" sz="900" dirty="0"/>
           </a:p>
@@ -9795,7 +9675,7 @@
                 <a:ea typeface="Cambria" pitchFamily="34" charset="-122"/>
                 <a:cs typeface="Cambria" pitchFamily="34" charset="-120"/>
               </a:rPr>
-              <a:t>61,4%</a:t>
+              <a:t>65,5%</a:t>
             </a:r>
             <a:endParaRPr lang="en-US" sz="4000" dirty="0"/>
           </a:p>
@@ -9834,7 +9714,7 @@
                 <a:ea typeface="Calibri" pitchFamily="34" charset="-122"/>
                 <a:cs typeface="Calibri" pitchFamily="34" charset="-120"/>
               </a:rPr>
-              <a:t>1.222/1.990</a:t>
+              <a:t>1.316/2.008</a:t>
             </a:r>
             <a:endParaRPr lang="en-US" sz="1400" dirty="0"/>
           </a:p>
@@ -9912,7 +9792,7 @@
                 <a:ea typeface="Calibri" pitchFamily="34" charset="-122"/>
                 <a:cs typeface="Calibri" pitchFamily="34" charset="-120"/>
               </a:rPr>
-              <a:t>755 abiertos · 630 vencidos · 13 en trámite</a:t>
+              <a:t>690 abiertos · 569 vencidos · 2 en trámite</a:t>
             </a:r>
             <a:endParaRPr lang="en-US" sz="950" dirty="0"/>
           </a:p>
@@ -9951,7 +9831,7 @@
                 <a:ea typeface="Calibri" pitchFamily="34" charset="-122"/>
                 <a:cs typeface="Calibri" pitchFamily="34" charset="-120"/>
               </a:rPr>
-              <a:t>▲ +33 vs. corte anterior</a:t>
+              <a:t>▲ +94 vs. corte anterior</a:t>
             </a:r>
             <a:endParaRPr lang="en-US" sz="900" dirty="0"/>
           </a:p>
@@ -10091,7 +9971,7 @@
                 <a:ea typeface="Calibri" pitchFamily="34" charset="-122"/>
                 <a:cs typeface="Calibri" pitchFamily="34" charset="-120"/>
               </a:rPr>
-              <a:t>93 de 136 realizadas (68,4%); 43 próximas y 0 por programar.</a:t>
+              <a:t>95 de 136 realizadas (69,9%); 41 próximas y 0 por programar.</a:t>
             </a:r>
             <a:endParaRPr lang="en-US" sz="1250" dirty="0"/>
           </a:p>
@@ -10153,7 +10033,7 @@
                 <a:ea typeface="Calibri" pitchFamily="34" charset="-122"/>
                 <a:cs typeface="Calibri" pitchFamily="34" charset="-120"/>
               </a:rPr>
-              <a:t>Las carpetas TOP siguen sin aprobaciones y suben los rechazos.  </a:t>
+              <a:t>Las carpetas TOP siguen sin aprobaciones.  </a:t>
             </a:r>
             <a:pPr indent="0" marL="0">
               <a:lnSpc>
@@ -10170,7 +10050,7 @@
                 <a:ea typeface="Calibri" pitchFamily="34" charset="-122"/>
                 <a:cs typeface="Calibri" pitchFamily="34" charset="-120"/>
               </a:rPr>
-              <a:t>31 entregadas de 136 (22,8%) y 0 aprobadas; las rechazadas pasaron de 17 a 19.</a:t>
+              <a:t>37 entregadas de 136 (27,2%) y 0 aprobadas; 19 rechazadas.</a:t>
             </a:r>
             <a:endParaRPr lang="en-US" sz="1250" dirty="0"/>
           </a:p>
@@ -10249,7 +10129,7 @@
                 <a:ea typeface="Calibri" pitchFamily="34" charset="-122"/>
                 <a:cs typeface="Calibri" pitchFamily="34" charset="-120"/>
               </a:rPr>
-              <a:t>+33 P1 cerrado desde el corte anterior; 755 abiertos, de los cuales 630 superaron su fecha de vencimiento. El área 3000 concentra 678 (89,8%).</a:t>
+              <a:t>+94 P1 cerrado desde el corte anterior; 690 abiertos, de los cuales 569 superaron su fecha de vencimiento. El área 3000 concentra 612 (88,7%).</a:t>
             </a:r>
             <a:endParaRPr lang="en-US" sz="1250" dirty="0"/>
           </a:p>
@@ -10288,7 +10168,7 @@
                 <a:ea typeface="Calibri" pitchFamily="34" charset="-122"/>
                 <a:cs typeface="Calibri" pitchFamily="34" charset="-120"/>
               </a:rPr>
-              <a:t>Fuente: Estatus_Resumen_General_QAQC.xlsx · Corte 10-09-2026 · Áreas 2000/3000/4000/8000</a:t>
+              <a:t>Fuente: Estatus_Resumen_General_QAQC.xlsx · Corte 19-09-2026 · Áreas 2000/3000/4000/8000</a:t>
             </a:r>
             <a:endParaRPr lang="en-US" sz="850" dirty="0"/>
           </a:p>
@@ -10991,7 +10871,7 @@
                 <a:ea typeface="Calibri" pitchFamily="34" charset="-122"/>
                 <a:cs typeface="Calibri" pitchFamily="34" charset="-120"/>
               </a:rPr>
-              <a:t>21/35 · 60%</a:t>
+              <a:t>27/35 · 77,1%</a:t>
             </a:r>
             <a:endParaRPr lang="en-US" sz="1300" dirty="0"/>
           </a:p>
@@ -11030,7 +10910,7 @@
                 <a:ea typeface="Calibri" pitchFamily="34" charset="-122"/>
                 <a:cs typeface="Calibri" pitchFamily="34" charset="-120"/>
               </a:rPr>
-              <a:t>96,5%</a:t>
+              <a:t>97,9%</a:t>
             </a:r>
             <a:endParaRPr lang="en-US" sz="1300" dirty="0"/>
           </a:p>
@@ -11069,7 +10949,7 @@
                 <a:ea typeface="Calibri" pitchFamily="34" charset="-122"/>
                 <a:cs typeface="Calibri" pitchFamily="34" charset="-120"/>
               </a:rPr>
-              <a:t>18 (14)</a:t>
+              <a:t>12 (10)</a:t>
             </a:r>
             <a:endParaRPr lang="en-US" sz="1300" dirty="0"/>
           </a:p>
@@ -11329,7 +11209,7 @@
                 <a:ea typeface="Calibri" pitchFamily="34" charset="-122"/>
                 <a:cs typeface="Calibri" pitchFamily="34" charset="-120"/>
               </a:rPr>
-              <a:t>37/77 · 48,1%</a:t>
+              <a:t>39/77 · 50,6%</a:t>
             </a:r>
             <a:endParaRPr lang="en-US" sz="1300" dirty="0"/>
           </a:p>
@@ -11407,7 +11287,7 @@
                 <a:ea typeface="Calibri" pitchFamily="34" charset="-122"/>
                 <a:cs typeface="Calibri" pitchFamily="34" charset="-120"/>
               </a:rPr>
-              <a:t>34,5%</a:t>
+              <a:t>41,6%</a:t>
             </a:r>
             <a:endParaRPr lang="en-US" sz="1300" dirty="0"/>
           </a:p>
@@ -11446,7 +11326,7 @@
                 <a:ea typeface="Calibri" pitchFamily="34" charset="-122"/>
                 <a:cs typeface="Calibri" pitchFamily="34" charset="-120"/>
               </a:rPr>
-              <a:t>678 (586)</a:t>
+              <a:t>612 (529)</a:t>
             </a:r>
             <a:endParaRPr lang="en-US" sz="1300" dirty="0"/>
           </a:p>
@@ -11764,7 +11644,7 @@
                 <a:ea typeface="Calibri" pitchFamily="34" charset="-122"/>
                 <a:cs typeface="Calibri" pitchFamily="34" charset="-120"/>
               </a:rPr>
-              <a:t>83,5%</a:t>
+              <a:t>85,4%</a:t>
             </a:r>
             <a:endParaRPr lang="en-US" sz="1300" dirty="0"/>
           </a:p>
@@ -11803,7 +11683,7 @@
                 <a:ea typeface="Calibri" pitchFamily="34" charset="-122"/>
                 <a:cs typeface="Calibri" pitchFamily="34" charset="-120"/>
               </a:rPr>
-              <a:t>57 (30)</a:t>
+              <a:t>52 (27)</a:t>
             </a:r>
             <a:endParaRPr lang="en-US" sz="1300" dirty="0"/>
           </a:p>
@@ -12342,7 +12222,7 @@
                 <a:ea typeface="Calibri" pitchFamily="34" charset="-122"/>
                 <a:cs typeface="Calibri" pitchFamily="34" charset="-120"/>
               </a:rPr>
-              <a:t>Fuente: Estatus_Resumen_General_QAQC.xlsx · Corte 10-09-2026 · Áreas 2000/3000/4000/8000</a:t>
+              <a:t>Fuente: Estatus_Resumen_General_QAQC.xlsx · Corte 19-09-2026 · Áreas 2000/3000/4000/8000</a:t>
             </a:r>
             <a:endParaRPr lang="en-US" sz="850" dirty="0"/>
           </a:p>
@@ -12593,7 +12473,7 @@
                 <a:ea typeface="Calibri" pitchFamily="34" charset="-122"/>
                 <a:cs typeface="Calibri" pitchFamily="34" charset="-120"/>
               </a:rPr>
-              <a:t>Las caminatas al 80% están cerradas en todas las áreas (136/136). El hito 100% avanza a 68,4%, y el área 3000 concentra 40 de los 43 subsistemas pendientes.</a:t>
+              <a:t>Las caminatas al 80% están cerradas en todas las áreas (136/136). El hito 100% avanza a 69,9%, y el área 3000 concentra 38 de los 41 subsistemas pendientes.</a:t>
             </a:r>
             <a:endParaRPr lang="en-US" sz="1350" dirty="0"/>
           </a:p>
@@ -12849,7 +12729,7 @@
                 <a:ea typeface="Cambria" pitchFamily="34" charset="-122"/>
                 <a:cs typeface="Cambria" pitchFamily="34" charset="-120"/>
               </a:rPr>
-              <a:t>68,4%</a:t>
+              <a:t>69,9%</a:t>
             </a:r>
             <a:endParaRPr lang="en-US" sz="4000" dirty="0"/>
           </a:p>
@@ -12888,7 +12768,7 @@
                 <a:ea typeface="Calibri" pitchFamily="34" charset="-122"/>
                 <a:cs typeface="Calibri" pitchFamily="34" charset="-120"/>
               </a:rPr>
-              <a:t>93 realizadas · 43 pendientes</a:t>
+              <a:t>95 realizadas · 41 pendientes</a:t>
             </a:r>
             <a:endParaRPr lang="en-US" sz="1200" dirty="0"/>
           </a:p>
@@ -12947,7 +12827,7 @@
                 <a:ea typeface="Calibri" pitchFamily="34" charset="-122"/>
                 <a:cs typeface="Calibri" pitchFamily="34" charset="-120"/>
               </a:rPr>
-              <a:t>43 próximas a realizar y 0 por programar.</a:t>
+              <a:t>41 próximas a realizar y 0 por programar.</a:t>
             </a:r>
             <a:endParaRPr lang="en-US" sz="1150" dirty="0"/>
           </a:p>
@@ -12986,7 +12866,7 @@
                 <a:ea typeface="Calibri" pitchFamily="34" charset="-122"/>
                 <a:cs typeface="Calibri" pitchFamily="34" charset="-120"/>
               </a:rPr>
-              <a:t>Fuente: Estatus_Resumen_General_QAQC.xlsx · Corte 10-09-2026 · Áreas 2000/3000/4000/8000</a:t>
+              <a:t>Fuente: Estatus_Resumen_General_QAQC.xlsx · Corte 19-09-2026 · Áreas 2000/3000/4000/8000</a:t>
             </a:r>
             <a:endParaRPr lang="en-US" sz="850" dirty="0"/>
           </a:p>
@@ -13237,7 +13117,7 @@
                 <a:ea typeface="Calibri" pitchFamily="34" charset="-122"/>
                 <a:cs typeface="Calibri" pitchFamily="34" charset="-120"/>
               </a:rPr>
-              <a:t>31 carpetas entregadas de 136 (22,8%). Ninguna aprobada aún: el flujo se acumula en revisión y hay 19 rechazos que requieren rearmado.</a:t>
+              <a:t>37 carpetas entregadas de 136 (27,2%). Ninguna aprobada aún: el flujo se acumula en revisión y hay 19 rechazos que requieren rearmado.</a:t>
             </a:r>
             <a:endParaRPr lang="en-US" sz="1350" dirty="0"/>
           </a:p>
@@ -13439,7 +13319,7 @@
                 <a:ea typeface="Calibri" pitchFamily="34" charset="-122"/>
                 <a:cs typeface="Calibri" pitchFamily="34" charset="-120"/>
               </a:rPr>
-              <a:t>▲ +3</a:t>
+              <a:t>▲ +6</a:t>
             </a:r>
             <a:endParaRPr lang="en-US" sz="950" dirty="0"/>
           </a:p>
@@ -13478,7 +13358,7 @@
                 <a:ea typeface="Cambria" pitchFamily="34" charset="-122"/>
                 <a:cs typeface="Cambria" pitchFamily="34" charset="-120"/>
               </a:rPr>
-              <a:t>31</a:t>
+              <a:t>37</a:t>
             </a:r>
             <a:endParaRPr lang="en-US" sz="2200" dirty="0"/>
           </a:p>
@@ -13598,7 +13478,7 @@
                 <a:ea typeface="Calibri" pitchFamily="34" charset="-122"/>
                 <a:cs typeface="Calibri" pitchFamily="34" charset="-120"/>
               </a:rPr>
-              <a:t>▲ +1</a:t>
+              <a:t>▲ +6</a:t>
             </a:r>
             <a:endParaRPr lang="en-US" sz="950" dirty="0"/>
           </a:p>
@@ -13637,7 +13517,7 @@
                 <a:ea typeface="Cambria" pitchFamily="34" charset="-122"/>
                 <a:cs typeface="Cambria" pitchFamily="34" charset="-120"/>
               </a:rPr>
-              <a:t>11</a:t>
+              <a:t>17</a:t>
             </a:r>
             <a:endParaRPr lang="en-US" sz="2200" dirty="0"/>
           </a:p>
@@ -13852,45 +13732,6 @@
         </p:nvSpPr>
         <p:spPr>
           <a:xfrm>
-            <a:off x="9509760" y="4315968"/>
-            <a:ext cx="914400" cy="566928"/>
-          </a:xfrm>
-          <a:prstGeom prst="rect">
-            <a:avLst/>
-          </a:prstGeom>
-          <a:noFill/>
-          <a:ln/>
-        </p:spPr>
-        <p:txBody>
-          <a:bodyPr wrap="square" lIns="0" tIns="0" rIns="0" bIns="0" rtlCol="0" anchor="ctr"/>
-          <a:lstStyle/>
-          <a:p>
-            <a:pPr algn="r" indent="0" marL="0">
-              <a:buNone/>
-            </a:pPr>
-            <a:r>
-              <a:rPr lang="en-US" sz="950" b="1" dirty="0">
-                <a:solidFill>
-                  <a:srgbClr val="C0392B"/>
-                </a:solidFill>
-                <a:latin typeface="Calibri" pitchFamily="34" charset="0"/>
-                <a:ea typeface="Calibri" pitchFamily="34" charset="-122"/>
-                <a:cs typeface="Calibri" pitchFamily="34" charset="-120"/>
-              </a:rPr>
-              <a:t>▲ +2</a:t>
-            </a:r>
-            <a:endParaRPr lang="en-US" sz="950" dirty="0"/>
-          </a:p>
-        </p:txBody>
-      </p:sp>
-      <p:sp>
-        <p:nvSpPr>
-          <p:cNvPr id="27" name="Text 23"/>
-          <p:cNvSpPr/>
-          <p:nvPr/>
-        </p:nvSpPr>
-        <p:spPr>
-          <a:xfrm>
             <a:off x="10469880" y="4315968"/>
             <a:ext cx="868680" cy="566928"/>
           </a:xfrm>
@@ -13924,7 +13765,7 @@
       </p:sp>
       <p:sp>
         <p:nvSpPr>
-          <p:cNvPr id="28" name="Shape 24"/>
+          <p:cNvPr id="27" name="Shape 23"/>
           <p:cNvSpPr/>
           <p:nvPr/>
         </p:nvSpPr>
@@ -13946,7 +13787,7 @@
       </p:sp>
       <p:sp>
         <p:nvSpPr>
-          <p:cNvPr id="29" name="Shape 25"/>
+          <p:cNvPr id="28" name="Shape 24"/>
           <p:cNvSpPr/>
           <p:nvPr/>
         </p:nvSpPr>
@@ -13966,7 +13807,7 @@
       </p:sp>
       <p:sp>
         <p:nvSpPr>
-          <p:cNvPr id="30" name="Text 26"/>
+          <p:cNvPr id="29" name="Text 25"/>
           <p:cNvSpPr/>
           <p:nvPr/>
         </p:nvSpPr>
@@ -14005,7 +13846,7 @@
       </p:sp>
       <p:sp>
         <p:nvSpPr>
-          <p:cNvPr id="31" name="Text 27"/>
+          <p:cNvPr id="30" name="Text 26"/>
           <p:cNvSpPr/>
           <p:nvPr/>
         </p:nvSpPr>
@@ -14044,7 +13885,7 @@
       </p:sp>
       <p:sp>
         <p:nvSpPr>
-          <p:cNvPr id="32" name="Text 28"/>
+          <p:cNvPr id="31" name="Text 27"/>
           <p:cNvSpPr/>
           <p:nvPr/>
         </p:nvSpPr>
@@ -14083,7 +13924,7 @@
       </p:sp>
       <p:sp>
         <p:nvSpPr>
-          <p:cNvPr id="33" name="Text 29"/>
+          <p:cNvPr id="32" name="Text 28"/>
           <p:cNvSpPr/>
           <p:nvPr/>
         </p:nvSpPr>
@@ -14114,7 +13955,7 @@
                 <a:ea typeface="Calibri" pitchFamily="34" charset="-122"/>
                 <a:cs typeface="Calibri" pitchFamily="34" charset="-120"/>
               </a:rPr>
-              <a:t>Fuente: Estatus_Resumen_General_QAQC.xlsx · Corte 10-09-2026 · Áreas 2000/3000/4000/8000</a:t>
+              <a:t>Fuente: Estatus_Resumen_General_QAQC.xlsx · Corte 19-09-2026 · Áreas 2000/3000/4000/8000</a:t>
             </a:r>
             <a:endParaRPr lang="en-US" sz="850" dirty="0"/>
           </a:p>
@@ -14122,7 +13963,7 @@
       </p:sp>
       <p:sp>
         <p:nvSpPr>
-          <p:cNvPr id="34" name="Text 30"/>
+          <p:cNvPr id="33" name="Text 29"/>
           <p:cNvSpPr/>
           <p:nvPr/>
         </p:nvSpPr>
@@ -14161,7 +14002,7 @@
       </p:sp>
       <p:sp>
         <p:nvSpPr>
-          <p:cNvPr id="35" name="Text 31"/>
+          <p:cNvPr id="34" name="Text 30"/>
           <p:cNvSpPr/>
           <p:nvPr/>
         </p:nvSpPr>
@@ -14365,7 +14206,7 @@
                 <a:ea typeface="Calibri" pitchFamily="34" charset="-122"/>
                 <a:cs typeface="Calibri" pitchFamily="34" charset="-120"/>
               </a:rPr>
-              <a:t>1.990 P1 levantados; 61,4% cerrados. El pendiente se concentra en Piping, Eléctrica, Instrumentación y Control, y físicamente en el área 3000.</a:t>
+              <a:t>2.008 P1 levantados; 65,5% cerrados. El pendiente se concentra en Piping, Eléctrica, Instrumentación y Control, y físicamente en el área 3000.</a:t>
             </a:r>
             <a:endParaRPr lang="en-US" sz="1350" dirty="0"/>
           </a:p>
@@ -14497,7 +14338,7 @@
                 <a:ea typeface="Cambria" pitchFamily="34" charset="-122"/>
                 <a:cs typeface="Cambria" pitchFamily="34" charset="-120"/>
               </a:rPr>
-              <a:t>61,4%</a:t>
+              <a:t>65,5%</a:t>
             </a:r>
             <a:endParaRPr lang="en-US" sz="1900" dirty="0"/>
           </a:p>
@@ -14612,7 +14453,7 @@
                 <a:ea typeface="Calibri" pitchFamily="34" charset="-122"/>
                 <a:cs typeface="Calibri" pitchFamily="34" charset="-120"/>
               </a:rPr>
-              <a:t>1.222</a:t>
+              <a:t>1.316</a:t>
             </a:r>
             <a:endParaRPr lang="en-US" sz="1100" dirty="0"/>
           </a:p>
@@ -14710,7 +14551,7 @@
                 <a:ea typeface="Calibri" pitchFamily="34" charset="-122"/>
                 <a:cs typeface="Calibri" pitchFamily="34" charset="-120"/>
               </a:rPr>
-              <a:t>755</a:t>
+              <a:t>690</a:t>
             </a:r>
             <a:endParaRPr lang="en-US" sz="1100" dirty="0"/>
           </a:p>
@@ -14808,7 +14649,7 @@
                 <a:ea typeface="Calibri" pitchFamily="34" charset="-122"/>
                 <a:cs typeface="Calibri" pitchFamily="34" charset="-120"/>
               </a:rPr>
-              <a:t>13</a:t>
+              <a:t>2</a:t>
             </a:r>
             <a:endParaRPr lang="en-US" sz="1100" dirty="0"/>
           </a:p>
@@ -14891,7 +14732,7 @@
                 <a:ea typeface="Calibri" pitchFamily="34" charset="-122"/>
                 <a:cs typeface="Calibri" pitchFamily="34" charset="-120"/>
               </a:rPr>
-              <a:t>678 de 755 P1 abiertos (89,8%) están en el área 3000. Áreas 2000 y 8000 sobre 90% de cierre.</a:t>
+              <a:t>612 de 690 P1 abiertos (88,7%) están en el área 3000. Áreas 2000 y 8000 sobre 90% de cierre.</a:t>
             </a:r>
             <a:endParaRPr lang="en-US" sz="1150" dirty="0"/>
           </a:p>
@@ -14930,7 +14771,7 @@
                 <a:ea typeface="Calibri" pitchFamily="34" charset="-122"/>
                 <a:cs typeface="Calibri" pitchFamily="34" charset="-120"/>
               </a:rPr>
-              <a:t>Fuente: Estatus_Resumen_General_QAQC.xlsx · Corte 10-09-2026 · Áreas 2000/3000/4000/8000</a:t>
+              <a:t>Fuente: Estatus_Resumen_General_QAQC.xlsx · Corte 19-09-2026 · Áreas 2000/3000/4000/8000</a:t>
             </a:r>
             <a:endParaRPr lang="en-US" sz="850" dirty="0"/>
           </a:p>
@@ -15304,7 +15145,7 @@
                 <a:ea typeface="Calibri" pitchFamily="34" charset="-122"/>
                 <a:cs typeface="Calibri" pitchFamily="34" charset="-120"/>
               </a:rPr>
-              <a:t>0 aprobadas de 136. Priorizar el cierre de las 11 en revisión y el rearmado de las 19 rechazadas para convertir entregas en aprobaciones.</a:t>
+              <a:t>0 aprobadas de 136. Priorizar el cierre de las 17 en revisión y el rearmado de las 19 rechazadas para convertir entregas en aprobaciones.</a:t>
             </a:r>
             <a:endParaRPr lang="en-US" sz="1150" dirty="0"/>
           </a:p>
@@ -15446,7 +15287,7 @@
                 <a:ea typeface="Calibri" pitchFamily="34" charset="-122"/>
                 <a:cs typeface="Calibri" pitchFamily="34" charset="-120"/>
               </a:rPr>
-              <a:t>678 P1 abiertos (89,8% del total) y 40 caminatas 100% pendientes. Es la ruta crítica: sin esta área no mejora ningún indicador global.</a:t>
+              <a:t>612 P1 abiertos (88,7% del total) y 38 caminatas 100% pendientes. Es la ruta crítica: sin esta área no mejora ningún indicador global.</a:t>
             </a:r>
             <a:endParaRPr lang="en-US" sz="1150" dirty="0"/>
           </a:p>
@@ -15546,7 +15387,7 @@
                 <a:ea typeface="Calibri" pitchFamily="34" charset="-122"/>
                 <a:cs typeface="Calibri" pitchFamily="34" charset="-120"/>
               </a:rPr>
-              <a:t>Recuperar los 630 P1 vencidos</a:t>
+              <a:t>Recuperar los 569 P1 vencidos</a:t>
             </a:r>
             <a:endParaRPr lang="en-US" sz="1500" dirty="0"/>
           </a:p>
@@ -15588,7 +15429,7 @@
                 <a:ea typeface="Calibri" pitchFamily="34" charset="-122"/>
                 <a:cs typeface="Calibri" pitchFamily="34" charset="-120"/>
               </a:rPr>
-              <a:t>83,4% de los P1 abiertos superó su fecha de vencimiento. Foco en Piping (203), Eléctrica (170), Instrumentación y Control (147).</a:t>
+              <a:t>82,5% de los P1 abiertos superó su fecha de vencimiento. Foco en Piping (180), Eléctrica (163), Instrumentación y Control (141).</a:t>
             </a:r>
             <a:endParaRPr lang="en-US" sz="1150" dirty="0"/>
           </a:p>
@@ -15730,7 +15571,7 @@
                 <a:ea typeface="Calibri" pitchFamily="34" charset="-122"/>
                 <a:cs typeface="Calibri" pitchFamily="34" charset="-120"/>
               </a:rPr>
-              <a:t>43 subsistemas pendientes: 43 próximos a realizar y 0 por programar. La programación ya está hecha; falta ejecutarla para habilitar la entrega de carpetas.</a:t>
+              <a:t>41 subsistemas pendientes: 41 próximos a realizar y 0 por programar. La programación ya está hecha; falta ejecutarla para habilitar la entrega de carpetas.</a:t>
             </a:r>
             <a:endParaRPr lang="en-US" sz="1150" dirty="0"/>
           </a:p>
@@ -15769,7 +15610,7 @@
                 <a:ea typeface="Calibri" pitchFamily="34" charset="-122"/>
                 <a:cs typeface="Calibri" pitchFamily="34" charset="-120"/>
               </a:rPr>
-              <a:t>Fuente: Estatus_Resumen_General_QAQC.xlsx · Corte 10-09-2026 · Áreas 2000/3000/4000/8000</a:t>
+              <a:t>Fuente: Estatus_Resumen_General_QAQC.xlsx · Corte 19-09-2026 · Áreas 2000/3000/4000/8000</a:t>
             </a:r>
             <a:endParaRPr lang="en-US" sz="850" dirty="0"/>
           </a:p>
@@ -16074,7 +15915,7 @@
                 <a:ea typeface="Cambria" pitchFamily="34" charset="-122"/>
                 <a:cs typeface="Cambria" pitchFamily="34" charset="-120"/>
               </a:rPr>
-              <a:t>65%</a:t>
+              <a:t>75,9%</a:t>
             </a:r>
             <a:endParaRPr lang="en-US" sz="3800" dirty="0"/>
           </a:p>
@@ -16113,7 +15954,7 @@
                 <a:ea typeface="Calibri" pitchFamily="34" charset="-122"/>
                 <a:cs typeface="Calibri" pitchFamily="34" charset="-120"/>
               </a:rPr>
-              <a:t>52/80</a:t>
+              <a:t>60/79</a:t>
             </a:r>
             <a:endParaRPr lang="en-US" sz="1400" dirty="0"/>
           </a:p>
@@ -16194,7 +16035,7 @@
                 <a:ea typeface="Calibri" pitchFamily="34" charset="-122"/>
                 <a:cs typeface="Calibri" pitchFamily="34" charset="-120"/>
               </a:rPr>
-              <a:t>28 subsistemas por caminar</a:t>
+              <a:t>19 subsistemas por caminar</a:t>
             </a:r>
             <a:endParaRPr lang="en-US" sz="950" dirty="0"/>
           </a:p>
@@ -16500,7 +16341,7 @@
                 <a:ea typeface="Cambria" pitchFamily="34" charset="-122"/>
                 <a:cs typeface="Cambria" pitchFamily="34" charset="-120"/>
               </a:rPr>
-              <a:t>49,5%</a:t>
+              <a:t>56,8%</a:t>
             </a:r>
             <a:endParaRPr lang="en-US" sz="3800" dirty="0"/>
           </a:p>
@@ -16539,7 +16380,7 @@
                 <a:ea typeface="Calibri" pitchFamily="34" charset="-122"/>
                 <a:cs typeface="Calibri" pitchFamily="34" charset="-120"/>
               </a:rPr>
-              <a:t>47/95</a:t>
+              <a:t>54/95</a:t>
             </a:r>
             <a:endParaRPr lang="en-US" sz="1400" dirty="0"/>
           </a:p>
@@ -16620,7 +16461,7 @@
                 <a:ea typeface="Calibri" pitchFamily="34" charset="-122"/>
                 <a:cs typeface="Calibri" pitchFamily="34" charset="-120"/>
               </a:rPr>
-              <a:t>36 aprobadas · 9 en revisión · 2 rechazadas</a:t>
+              <a:t>39 aprobadas · 10 en revisión · 5 rechazadas</a:t>
             </a:r>
             <a:endParaRPr lang="en-US" sz="950" dirty="0"/>
           </a:p>
@@ -16713,7 +16554,7 @@
                 <a:ea typeface="Cambria" pitchFamily="34" charset="-122"/>
                 <a:cs typeface="Cambria" pitchFamily="34" charset="-120"/>
               </a:rPr>
-              <a:t>67,6%</a:t>
+              <a:t>69,4%</a:t>
             </a:r>
             <a:endParaRPr lang="en-US" sz="3800" dirty="0"/>
           </a:p>
@@ -16752,7 +16593,7 @@
                 <a:ea typeface="Calibri" pitchFamily="34" charset="-122"/>
                 <a:cs typeface="Calibri" pitchFamily="34" charset="-120"/>
               </a:rPr>
-              <a:t>881/1.304</a:t>
+              <a:t>961/1.384</a:t>
             </a:r>
             <a:endParaRPr lang="en-US" sz="1400" dirty="0"/>
           </a:p>
@@ -16973,7 +16814,7 @@
                 <a:ea typeface="Calibri" pitchFamily="34" charset="-122"/>
                 <a:cs typeface="Calibri" pitchFamily="34" charset="-120"/>
               </a:rPr>
-              <a:t>1.408 de 2.186 ítems cerrados (64,4%); de los 778 abiertos, 293 ya pasaron su fecha requerida de cierre (37,7%).</a:t>
+              <a:t>1.533 de 2.197 ítems cerrados (69,8%); de los 664 abiertos, 292 ya pasaron su fecha requerida de cierre (44%).</a:t>
             </a:r>
             <a:endParaRPr lang="en-US" sz="1150" dirty="0"/>
           </a:p>
@@ -17052,7 +16893,7 @@
                 <a:ea typeface="Calibri" pitchFamily="34" charset="-122"/>
                 <a:cs typeface="Calibri" pitchFamily="34" charset="-120"/>
               </a:rPr>
-              <a:t>Operables 52/80 por Caminata 2 (65%); Facility 12/15 por Caminata 1 (80%).</a:t>
+              <a:t>Operables 60/79 por Caminata 2 (75,9%); Facility 12/15 por Caminata 1 (80%).</a:t>
             </a:r>
             <a:endParaRPr lang="en-US" sz="1150" dirty="0"/>
           </a:p>
@@ -17114,7 +16955,7 @@
                 <a:ea typeface="Calibri" pitchFamily="34" charset="-122"/>
                 <a:cs typeface="Calibri" pitchFamily="34" charset="-120"/>
               </a:rPr>
-              <a:t>Las carpetas están a 49,5% de entrega y el cuello está en el armado interno.  </a:t>
+              <a:t>Las carpetas están a 56,8% de entrega y el cuello está en el armado interno.  </a:t>
             </a:r>
             <a:pPr indent="0" marL="0">
               <a:lnSpc>
@@ -17131,7 +16972,7 @@
                 <a:ea typeface="Calibri" pitchFamily="34" charset="-122"/>
                 <a:cs typeface="Calibri" pitchFamily="34" charset="-120"/>
               </a:rPr>
-              <a:t>47 entregadas de 95: 36 aprobadas, 9 en revisión y 2 rechazadas. Quedan 17 en preparación y 31 sin iniciar.</a:t>
+              <a:t>54 entregadas de 95: 39 aprobadas, 10 en revisión y 5 rechazadas. Quedan 18 en preparación y 23 sin iniciar.</a:t>
             </a:r>
             <a:endParaRPr lang="en-US" sz="1150" dirty="0"/>
           </a:p>
@@ -17210,7 +17051,7 @@
                 <a:ea typeface="Calibri" pitchFamily="34" charset="-122"/>
                 <a:cs typeface="Calibri" pitchFamily="34" charset="-120"/>
               </a:rPr>
-              <a:t>190 de los 423 P1 abiertos (44,9%), con 109 atrasados.</a:t>
+              <a:t>185 de los 423 P1 abiertos (43,7%), con 105 atrasados.</a:t>
             </a:r>
             <a:endParaRPr lang="en-US" sz="1150" dirty="0"/>
           </a:p>
@@ -17249,7 +17090,7 @@
                 <a:ea typeface="Calibri" pitchFamily="34" charset="-122"/>
                 <a:cs typeface="Calibri" pitchFamily="34" charset="-120"/>
               </a:rPr>
-              <a:t>Fuente: REPORTE_GERENCIAL + Listado de Puntos Punch Consolidado · Corte 01-09-2026 · Atrasos al 13-09-2026</a:t>
+              <a:t>Fuente: REPORTE_GERENCIAL + Listado de Puntos Punch Consolidado · Corte 15-09-2026 · Atrasos al 21-09-2026</a:t>
             </a:r>
             <a:endParaRPr lang="en-US" sz="850" dirty="0"/>
           </a:p>
@@ -17702,7 +17543,7 @@
                 <a:ea typeface="Calibri" pitchFamily="34" charset="-122"/>
                 <a:cs typeface="Calibri" pitchFamily="34" charset="-120"/>
               </a:rPr>
-              <a:t>37,9%</a:t>
+              <a:t>41,1%</a:t>
             </a:r>
             <a:endParaRPr lang="en-US" sz="1100" dirty="0"/>
           </a:p>
@@ -17741,7 +17582,7 @@
                 <a:ea typeface="Cambria" pitchFamily="34" charset="-122"/>
                 <a:cs typeface="Cambria" pitchFamily="34" charset="-120"/>
               </a:rPr>
-              <a:t>36</a:t>
+              <a:t>39</a:t>
             </a:r>
             <a:endParaRPr lang="en-US" sz="2200" dirty="0"/>
           </a:p>
@@ -17861,7 +17702,7 @@
                 <a:ea typeface="Calibri" pitchFamily="34" charset="-122"/>
                 <a:cs typeface="Calibri" pitchFamily="34" charset="-120"/>
               </a:rPr>
-              <a:t>9,5%</a:t>
+              <a:t>10,5%</a:t>
             </a:r>
             <a:endParaRPr lang="en-US" sz="1100" dirty="0"/>
           </a:p>
@@ -17900,7 +17741,7 @@
                 <a:ea typeface="Cambria" pitchFamily="34" charset="-122"/>
                 <a:cs typeface="Cambria" pitchFamily="34" charset="-120"/>
               </a:rPr>
-              <a:t>9</a:t>
+              <a:t>10</a:t>
             </a:r>
             <a:endParaRPr lang="en-US" sz="2200" dirty="0"/>
           </a:p>
@@ -18020,7 +17861,7 @@
                 <a:ea typeface="Calibri" pitchFamily="34" charset="-122"/>
                 <a:cs typeface="Calibri" pitchFamily="34" charset="-120"/>
               </a:rPr>
-              <a:t>2,1%</a:t>
+              <a:t>5,3%</a:t>
             </a:r>
             <a:endParaRPr lang="en-US" sz="1100" dirty="0"/>
           </a:p>
@@ -18059,7 +17900,7 @@
                 <a:ea typeface="Cambria" pitchFamily="34" charset="-122"/>
                 <a:cs typeface="Cambria" pitchFamily="34" charset="-120"/>
               </a:rPr>
-              <a:t>2</a:t>
+              <a:t>5</a:t>
             </a:r>
             <a:endParaRPr lang="en-US" sz="2200" dirty="0"/>
           </a:p>
@@ -18179,7 +18020,7 @@
                 <a:ea typeface="Calibri" pitchFamily="34" charset="-122"/>
                 <a:cs typeface="Calibri" pitchFamily="34" charset="-120"/>
               </a:rPr>
-              <a:t>17,9%</a:t>
+              <a:t>18,9%</a:t>
             </a:r>
             <a:endParaRPr lang="en-US" sz="1100" dirty="0"/>
           </a:p>
@@ -18218,7 +18059,7 @@
                 <a:ea typeface="Cambria" pitchFamily="34" charset="-122"/>
                 <a:cs typeface="Cambria" pitchFamily="34" charset="-120"/>
               </a:rPr>
-              <a:t>17</a:t>
+              <a:t>18</a:t>
             </a:r>
             <a:endParaRPr lang="en-US" sz="2200" dirty="0"/>
           </a:p>
@@ -18338,7 +18179,7 @@
                 <a:ea typeface="Calibri" pitchFamily="34" charset="-122"/>
                 <a:cs typeface="Calibri" pitchFamily="34" charset="-120"/>
               </a:rPr>
-              <a:t>32,6%</a:t>
+              <a:t>24,2%</a:t>
             </a:r>
             <a:endParaRPr lang="en-US" sz="1100" dirty="0"/>
           </a:p>
@@ -18377,7 +18218,7 @@
                 <a:ea typeface="Cambria" pitchFamily="34" charset="-122"/>
                 <a:cs typeface="Cambria" pitchFamily="34" charset="-120"/>
               </a:rPr>
-              <a:t>31</a:t>
+              <a:t>23</a:t>
             </a:r>
             <a:endParaRPr lang="en-US" sz="2200" dirty="0"/>
           </a:p>
@@ -18419,7 +18260,7 @@
                 <a:ea typeface="Calibri" pitchFamily="34" charset="-122"/>
                 <a:cs typeface="Calibri" pitchFamily="34" charset="-120"/>
               </a:rPr>
-              <a:t>47 carpetas ya están en manos del cliente (49,5%) y 0 subsistemas tienen tarjeta verde. El grueso del pendiente todavía no sale de Besalco.</a:t>
+              <a:t>54 carpetas ya están en manos del cliente (56,8%) y 43 subsistemas tienen tarjeta verde. El grueso del pendiente todavía no sale de Besalco.</a:t>
             </a:r>
             <a:endParaRPr lang="en-US" sz="1000" dirty="0"/>
           </a:p>
@@ -18458,7 +18299,7 @@
                 <a:ea typeface="Calibri" pitchFamily="34" charset="-122"/>
                 <a:cs typeface="Calibri" pitchFamily="34" charset="-120"/>
               </a:rPr>
-              <a:t>Fuente: REPORTE_GERENCIAL + Listado de Puntos Punch Consolidado · Corte 01-09-2026 · Atrasos al 13-09-2026</a:t>
+              <a:t>Fuente: REPORTE_GERENCIAL + Listado de Puntos Punch Consolidado · Corte 15-09-2026 · Atrasos al 21-09-2026</a:t>
             </a:r>
             <a:endParaRPr lang="en-US" sz="850" dirty="0"/>
           </a:p>
@@ -18709,7 +18550,7 @@
                 <a:ea typeface="Calibri" pitchFamily="34" charset="-122"/>
                 <a:cs typeface="Calibri" pitchFamily="34" charset="-120"/>
               </a:rPr>
-              <a:t>1.304 P1 levantados; 67,6% cerrados. Atrasado = ítem abierto cuya fecha requerida de cierre ya venció al 13-09-2026.</a:t>
+              <a:t>1.384 P1 levantados; 69,4% cerrados. Atrasado = ítem abierto cuya fecha requerida de cierre ya venció al 21-09-2026.</a:t>
             </a:r>
             <a:endParaRPr lang="en-US" sz="1350" dirty="0"/>
           </a:p>
@@ -18841,7 +18682,7 @@
                 <a:ea typeface="Cambria" pitchFamily="34" charset="-122"/>
                 <a:cs typeface="Cambria" pitchFamily="34" charset="-120"/>
               </a:rPr>
-              <a:t>67,6%</a:t>
+              <a:t>69,4%</a:t>
             </a:r>
             <a:endParaRPr lang="en-US" sz="1900" dirty="0"/>
           </a:p>
@@ -18956,7 +18797,7 @@
                 <a:ea typeface="Calibri" pitchFamily="34" charset="-122"/>
                 <a:cs typeface="Calibri" pitchFamily="34" charset="-120"/>
               </a:rPr>
-              <a:t>881</a:t>
+              <a:t>961</a:t>
             </a:r>
             <a:endParaRPr lang="en-US" sz="1100" dirty="0"/>
           </a:p>
@@ -19235,7 +19076,7 @@
                 <a:ea typeface="Calibri" pitchFamily="34" charset="-122"/>
                 <a:cs typeface="Calibri" pitchFamily="34" charset="-120"/>
               </a:rPr>
-              <a:t>Mediana de 13 días vencidos; el más antiguo lleva 126. 171 entre 1-30 días, 108 entre 31-90 días, 14 entre 91-180 días.</a:t>
+              <a:t>Mediana de 21 días vencidos; el más antiguo lleva 134. 189 entre 1-30 días, 91 entre 31-90 días, 12 entre 91-180 días.</a:t>
             </a:r>
             <a:endParaRPr lang="en-US" sz="1150" dirty="0"/>
           </a:p>
@@ -19274,7 +19115,7 @@
                 <a:ea typeface="Calibri" pitchFamily="34" charset="-122"/>
                 <a:cs typeface="Calibri" pitchFamily="34" charset="-120"/>
               </a:rPr>
-              <a:t>Fuente: REPORTE_GERENCIAL + Listado de Puntos Punch Consolidado · Corte 01-09-2026 · Atrasos al 13-09-2026</a:t>
+              <a:t>Fuente: REPORTE_GERENCIAL + Listado de Puntos Punch Consolidado · Corte 15-09-2026 · Atrasos al 21-09-2026</a:t>
             </a:r>
             <a:endParaRPr lang="en-US" sz="850" dirty="0"/>
           </a:p>
@@ -19606,7 +19447,7 @@
                 <a:ea typeface="Calibri" pitchFamily="34" charset="-122"/>
                 <a:cs typeface="Calibri" pitchFamily="34" charset="-120"/>
               </a:rPr>
-              <a:t>Recuperar los 293 ítems atrasados</a:t>
+              <a:t>Recuperar los 292 ítems atrasados</a:t>
             </a:r>
             <a:endParaRPr lang="en-US" sz="1400" dirty="0"/>
           </a:p>
@@ -19648,7 +19489,7 @@
                 <a:ea typeface="Calibri" pitchFamily="34" charset="-122"/>
                 <a:cs typeface="Calibri" pitchFamily="34" charset="-120"/>
               </a:rPr>
-              <a:t>37,7% de los 778 abiertos ya venció su fecha requerida. Foco en Eléctrica (109), Piping (31), Mecánica (10).</a:t>
+              <a:t>44% de los 664 abiertos ya venció su fecha requerida. Foco en Eléctrica (105), Piping (35), Mecánica (11).</a:t>
             </a:r>
             <a:endParaRPr lang="en-US" sz="1100" dirty="0"/>
           </a:p>
@@ -19748,7 +19589,7 @@
                 <a:ea typeface="Calibri" pitchFamily="34" charset="-122"/>
                 <a:cs typeface="Calibri" pitchFamily="34" charset="-120"/>
               </a:rPr>
-              <a:t>Ejecutar las 28 caminatas de Operables pendientes</a:t>
+              <a:t>Ejecutar las 19 caminatas de Operables pendientes</a:t>
             </a:r>
             <a:endParaRPr lang="en-US" sz="1400" dirty="0"/>
           </a:p>
@@ -19790,7 +19631,7 @@
                 <a:ea typeface="Calibri" pitchFamily="34" charset="-122"/>
                 <a:cs typeface="Calibri" pitchFamily="34" charset="-120"/>
               </a:rPr>
-              <a:t>La Caminata 2 va en 65% (52/80). Sin caminata no se levanta el punch final ni se habilita la entrega de la carpeta.</a:t>
+              <a:t>La Caminata 2 va en 75,9% (60/79). Sin caminata no se levanta el punch final ni se habilita la entrega de la carpeta.</a:t>
             </a:r>
             <a:endParaRPr lang="en-US" sz="1100" dirty="0"/>
           </a:p>
@@ -19890,7 +19731,7 @@
                 <a:ea typeface="Calibri" pitchFamily="34" charset="-122"/>
                 <a:cs typeface="Calibri" pitchFamily="34" charset="-120"/>
               </a:rPr>
-              <a:t>Sacar del armado interno las 48 carpetas retenidas</a:t>
+              <a:t>Sacar del armado interno las 41 carpetas retenidas</a:t>
             </a:r>
             <a:endParaRPr lang="en-US" sz="1400" dirty="0"/>
           </a:p>
@@ -19932,7 +19773,7 @@
                 <a:ea typeface="Calibri" pitchFamily="34" charset="-122"/>
                 <a:cs typeface="Calibri" pitchFamily="34" charset="-120"/>
               </a:rPr>
-              <a:t>17 están en preparación y 31 sin iniciar. Solo 47 de 95 (49,5%) llegaron al cliente; 2 volvieron rechazadas y hay que rearmarlas.</a:t>
+              <a:t>18 están en preparación y 23 sin iniciar. Solo 54 de 95 (56,8%) llegaron al cliente; 5 volvieron rechazadas y hay que rearmarlas.</a:t>
             </a:r>
             <a:endParaRPr lang="en-US" sz="1100" dirty="0"/>
           </a:p>
@@ -20074,7 +19915,7 @@
                 <a:ea typeface="Calibri" pitchFamily="34" charset="-122"/>
                 <a:cs typeface="Calibri" pitchFamily="34" charset="-120"/>
               </a:rPr>
-              <a:t>Concentra 369 P1 abiertos y 125 atrasados sobre 74 subsistemas. Es la ruta crítica del proyecto.</a:t>
+              <a:t>Concentra 370 P1 abiertos y 125 atrasados sobre 74 subsistemas. Es la ruta crítica del proyecto.</a:t>
             </a:r>
             <a:endParaRPr lang="en-US" sz="1100" dirty="0"/>
           </a:p>
@@ -20113,7 +19954,7 @@
                 <a:ea typeface="Calibri" pitchFamily="34" charset="-122"/>
                 <a:cs typeface="Calibri" pitchFamily="34" charset="-120"/>
               </a:rPr>
-              <a:t>Fuente: REPORTE_GERENCIAL + Listado de Puntos Punch Consolidado · Corte 01-09-2026 · Atrasos al 13-09-2026</a:t>
+              <a:t>Fuente: REPORTE_GERENCIAL + Listado de Puntos Punch Consolidado · Corte 15-09-2026 · Atrasos al 21-09-2026</a:t>
             </a:r>
             <a:endParaRPr lang="en-US" sz="850" dirty="0"/>
           </a:p>
@@ -20466,7 +20307,7 @@
                 <a:ea typeface="Calibri" pitchFamily="34" charset="-122"/>
                 <a:cs typeface="Calibri" pitchFamily="34" charset="-120"/>
               </a:rPr>
-              <a:t>Contrato 4600029355 · 218 subsistemas en 9 áreas · 2.111 detalles de terminación levantados.</a:t>
+              <a:t>Contrato 4600029355 · 218 subsistemas en 9 áreas · 2.115 detalles de terminación levantados.</a:t>
             </a:r>
             <a:endParaRPr lang="en-US" sz="1350" dirty="0"/>
           </a:p>
@@ -20505,7 +20346,7 @@
                 <a:ea typeface="Cambria" pitchFamily="34" charset="-122"/>
                 <a:cs typeface="Cambria" pitchFamily="34" charset="-120"/>
               </a:rPr>
-              <a:t>99,5%</a:t>
+              <a:t>100%</a:t>
             </a:r>
             <a:endParaRPr lang="en-US" sz="3400" dirty="0"/>
           </a:p>
@@ -20583,7 +20424,7 @@
                 <a:ea typeface="Cambria" pitchFamily="34" charset="-122"/>
                 <a:cs typeface="Cambria" pitchFamily="34" charset="-120"/>
               </a:rPr>
-              <a:t>97,6%</a:t>
+              <a:t>100%</a:t>
             </a:r>
             <a:endParaRPr lang="en-US" sz="3400" dirty="0"/>
           </a:p>
@@ -20739,7 +20580,7 @@
                 <a:ea typeface="Cambria" pitchFamily="34" charset="-122"/>
                 <a:cs typeface="Cambria" pitchFamily="34" charset="-120"/>
               </a:rPr>
-              <a:t>92,9%</a:t>
+              <a:t>96,1%</a:t>
             </a:r>
             <a:endParaRPr lang="en-US" sz="3400" dirty="0"/>
           </a:p>
@@ -20817,7 +20658,7 @@
                 <a:ea typeface="Calibri" pitchFamily="34" charset="-122"/>
                 <a:cs typeface="Calibri" pitchFamily="34" charset="-120"/>
               </a:rPr>
-              <a:t>Atrasos calculados al 13-09-2026</a:t>
+              <a:t>Atrasos calculados al 21-09-2026</a:t>
             </a:r>
             <a:endParaRPr lang="en-US" sz="1100" dirty="0"/>
           </a:p>
@@ -20856,7 +20697,7 @@
                 <a:ea typeface="Calibri" pitchFamily="34" charset="-122"/>
                 <a:cs typeface="Calibri" pitchFamily="34" charset="-120"/>
               </a:rPr>
-              <a:t>Fuente: STATUS_SUBSISTEMAS_TALABRE + Detalle_de_Terminaciones · 218 subsistemas · 2.111 DT · Atrasos al 13-09-2026</a:t>
+              <a:t>Fuente: STATUS_SUBSISTEMAS_TALABRE + Detalle_de_Terminaciones · 218 subsistemas · 2.115 DT · Atrasos al 21-09-2026</a:t>
             </a:r>
             <a:endParaRPr lang="en-US" sz="850" dirty="0"/>
           </a:p>
@@ -21122,7 +20963,7 @@
                 <a:ea typeface="Cambria" pitchFamily="34" charset="-122"/>
                 <a:cs typeface="Cambria" pitchFamily="34" charset="-120"/>
               </a:rPr>
-              <a:t>99,5%</a:t>
+              <a:t>100%</a:t>
             </a:r>
             <a:endParaRPr lang="en-US" sz="3800" dirty="0"/>
           </a:p>
@@ -21161,7 +21002,7 @@
                 <a:ea typeface="Calibri" pitchFamily="34" charset="-122"/>
                 <a:cs typeface="Calibri" pitchFamily="34" charset="-120"/>
               </a:rPr>
-              <a:t>215/216 exigibles</a:t>
+              <a:t>216/216 exigibles</a:t>
             </a:r>
             <a:endParaRPr lang="en-US" sz="1300" dirty="0"/>
           </a:p>
@@ -21242,7 +21083,7 @@
                 <a:ea typeface="Calibri" pitchFamily="34" charset="-122"/>
                 <a:cs typeface="Calibri" pitchFamily="34" charset="-120"/>
               </a:rPr>
-              <a:t>98,6% del universo · 2 programadas en plazo · 1 con agenda vencida · 0 sin programar</a:t>
+              <a:t>99,1% del universo · 2 programadas en plazo · 0 sin programar</a:t>
             </a:r>
             <a:endParaRPr lang="en-US" sz="950" dirty="0"/>
           </a:p>
@@ -21335,7 +21176,7 @@
                 <a:ea typeface="Cambria" pitchFamily="34" charset="-122"/>
                 <a:cs typeface="Cambria" pitchFamily="34" charset="-120"/>
               </a:rPr>
-              <a:t>97,6%</a:t>
+              <a:t>100%</a:t>
             </a:r>
             <a:endParaRPr lang="en-US" sz="3800" dirty="0"/>
           </a:p>
@@ -21374,7 +21215,7 @@
                 <a:ea typeface="Calibri" pitchFamily="34" charset="-122"/>
                 <a:cs typeface="Calibri" pitchFamily="34" charset="-120"/>
               </a:rPr>
-              <a:t>205/210 exigibles</a:t>
+              <a:t>207/207 exigibles</a:t>
             </a:r>
             <a:endParaRPr lang="en-US" sz="1300" dirty="0"/>
           </a:p>
@@ -21455,7 +21296,7 @@
                 <a:ea typeface="Calibri" pitchFamily="34" charset="-122"/>
                 <a:cs typeface="Calibri" pitchFamily="34" charset="-120"/>
               </a:rPr>
-              <a:t>94% del universo · 8 programadas en plazo · 5 con agenda vencida · 0 sin programar</a:t>
+              <a:t>95% del universo · 11 programadas en plazo · 0 sin programar</a:t>
             </a:r>
             <a:endParaRPr lang="en-US" sz="950" dirty="0"/>
           </a:p>
@@ -21668,7 +21509,7 @@
                 <a:ea typeface="Calibri" pitchFamily="34" charset="-122"/>
                 <a:cs typeface="Calibri" pitchFamily="34" charset="-120"/>
               </a:rPr>
-              <a:t>4 subsistemas bajo 80% de avance</a:t>
+              <a:t>3 subsistemas bajo 80% de avance</a:t>
             </a:r>
             <a:endParaRPr lang="en-US" sz="950" dirty="0"/>
           </a:p>
@@ -21761,7 +21602,7 @@
                 <a:ea typeface="Cambria" pitchFamily="34" charset="-122"/>
                 <a:cs typeface="Cambria" pitchFamily="34" charset="-120"/>
               </a:rPr>
-              <a:t>89,7%</a:t>
+              <a:t>94,1%</a:t>
             </a:r>
             <a:endParaRPr lang="en-US" sz="3800" dirty="0"/>
           </a:p>
@@ -21800,7 +21641,7 @@
                 <a:ea typeface="Calibri" pitchFamily="34" charset="-122"/>
                 <a:cs typeface="Calibri" pitchFamily="34" charset="-120"/>
               </a:rPr>
-              <a:t>365/407</a:t>
+              <a:t>385/409</a:t>
             </a:r>
             <a:endParaRPr lang="en-US" sz="1300" dirty="0"/>
           </a:p>
@@ -21881,7 +21722,7 @@
                 <a:ea typeface="Calibri" pitchFamily="34" charset="-122"/>
                 <a:cs typeface="Calibri" pitchFamily="34" charset="-120"/>
               </a:rPr>
-              <a:t>42 abiertos · 25 atrasados</a:t>
+              <a:t>24 abiertos · 23 atrasados</a:t>
             </a:r>
             <a:endParaRPr lang="en-US" sz="950" dirty="0"/>
           </a:p>
@@ -22021,7 +21862,7 @@
                 <a:ea typeface="Calibri" pitchFamily="34" charset="-122"/>
                 <a:cs typeface="Calibri" pitchFamily="34" charset="-120"/>
               </a:rPr>
-              <a:t>89,7% de cierre en P1 (42 abiertos), pero 301 DT abiertos entre P2, P3 y P4 sobre un total de 343.</a:t>
+              <a:t>94,1% de cierre en P1 (24 abiertos), pero 261 DT abiertos entre P2, P3 y P4 sobre un total de 285.</a:t>
             </a:r>
             <a:endParaRPr lang="en-US" sz="1150" dirty="0"/>
           </a:p>
@@ -22100,7 +21941,7 @@
                 <a:ea typeface="Calibri" pitchFamily="34" charset="-122"/>
                 <a:cs typeface="Calibri" pitchFamily="34" charset="-120"/>
               </a:rPr>
-              <a:t>111 DT con la fecha de compromiso vencida; mediana de 38 días y el más antiguo lleva 178. Los 211 abiertos sin fecha de compromiso no se cuentan como atrasados.</a:t>
+              <a:t>73 DT con la fecha de compromiso vencida; mediana de 45 días y el más antiguo lleva 186. Los 211 abiertos sin fecha de compromiso no se cuentan como atrasados.</a:t>
             </a:r>
             <a:endParaRPr lang="en-US" sz="1150" dirty="0"/>
           </a:p>
@@ -22162,7 +22003,7 @@
                 <a:ea typeface="Calibri" pitchFamily="34" charset="-122"/>
                 <a:cs typeface="Calibri" pitchFamily="34" charset="-120"/>
               </a:rPr>
-              <a:t>Caminatas: 99,5% y 97,6% de lo exigible (C1 y C2).  </a:t>
+              <a:t>Caminatas: 100% y 100% de lo exigible (C1 y C2).  </a:t>
             </a:r>
             <a:pPr indent="0" marL="0">
               <a:lnSpc>
@@ -22179,7 +22020,7 @@
                 <a:ea typeface="Calibri" pitchFamily="34" charset="-122"/>
                 <a:cs typeface="Calibri" pitchFamily="34" charset="-120"/>
               </a:rPr>
-              <a:t>Caminata 1: 215/216 exigibles, 1 con agenda vencida. Caminata 2: 205/210, con 8 agendadas en plazo y 0 sin programar.</a:t>
+              <a:t>Caminata 1: 216/216 exigibles. Caminata 2: 207/207, con 11 agendadas en plazo y 0 sin programar.</a:t>
             </a:r>
             <a:endParaRPr lang="en-US" sz="1150" dirty="0"/>
           </a:p>
@@ -22258,7 +22099,7 @@
                 <a:ea typeface="Calibri" pitchFamily="34" charset="-122"/>
                 <a:cs typeface="Calibri" pitchFamily="34" charset="-120"/>
               </a:rPr>
-              <a:t>Avance promedio 95%: 193 subsistemas sobre 95% y solo 4 bajo 80%.</a:t>
+              <a:t>Avance promedio 95%: 193 subsistemas sobre 95% y solo 3 bajo 80%.</a:t>
             </a:r>
             <a:endParaRPr lang="en-US" sz="1150" dirty="0"/>
           </a:p>
@@ -22297,7 +22138,7 @@
                 <a:ea typeface="Calibri" pitchFamily="34" charset="-122"/>
                 <a:cs typeface="Calibri" pitchFamily="34" charset="-120"/>
               </a:rPr>
-              <a:t>Fuente: STATUS_SUBSISTEMAS_TALABRE + Detalle_de_Terminaciones · 218 subsistemas · 2.111 DT · Atrasos al 13-09-2026</a:t>
+              <a:t>Fuente: STATUS_SUBSISTEMAS_TALABRE + Detalle_de_Terminaciones · 218 subsistemas · 2.115 DT · Atrasos al 21-09-2026</a:t>
             </a:r>
             <a:endParaRPr lang="en-US" sz="850" dirty="0"/>
           </a:p>
@@ -22548,7 +22389,7 @@
                 <a:ea typeface="Calibri" pitchFamily="34" charset="-122"/>
                 <a:cs typeface="Calibri" pitchFamily="34" charset="-120"/>
               </a:rPr>
-              <a:t>Caminata 2: 97,6% de lo exigible (205/210) — se descuentan 8 agendadas a fecha futura, que no son incumplimiento al corte. Talabre mide la carpeta como % de avance (PEC), no como estado de aprobación.</a:t>
+              <a:t>Caminata 2: 100% de lo exigible (207/207) — se descuentan 11 agendadas a fecha futura, que no son incumplimiento al corte. Talabre mide la carpeta como % de avance (PEC), no como estado de aprobación.</a:t>
             </a:r>
             <a:endParaRPr lang="en-US" sz="1350" dirty="0"/>
           </a:p>
@@ -22619,7 +22460,7 @@
                 <a:ea typeface="Calibri" pitchFamily="34" charset="-122"/>
                 <a:cs typeface="Calibri" pitchFamily="34" charset="-120"/>
               </a:rPr>
-              <a:t>Fuente: STATUS_SUBSISTEMAS_TALABRE + Detalle_de_Terminaciones · 218 subsistemas · 2.111 DT · Atrasos al 13-09-2026</a:t>
+              <a:t>Fuente: STATUS_SUBSISTEMAS_TALABRE + Detalle_de_Terminaciones · 218 subsistemas · 2.115 DT · Atrasos al 21-09-2026</a:t>
             </a:r>
             <a:endParaRPr lang="en-US" sz="850" dirty="0"/>
           </a:p>
@@ -22870,7 +22711,7 @@
                 <a:ea typeface="Calibri" pitchFamily="34" charset="-122"/>
                 <a:cs typeface="Calibri" pitchFamily="34" charset="-120"/>
               </a:rPr>
-              <a:t>2.111 DT levantados; 83,8% cerrados. Atrasado = DT abierto cuya fecha de compromiso de cierre ya venció al 13-09-2026.</a:t>
+              <a:t>2.115 DT levantados; 86,5% cerrados. Atrasado = DT abierto cuya fecha de compromiso de cierre ya venció al 21-09-2026.</a:t>
             </a:r>
             <a:endParaRPr lang="en-US" sz="1350" dirty="0"/>
           </a:p>
@@ -23025,7 +22866,7 @@
                 <a:ea typeface="Calibri" pitchFamily="34" charset="-122"/>
                 <a:cs typeface="Calibri" pitchFamily="34" charset="-120"/>
               </a:rPr>
-              <a:t>365/407</a:t>
+              <a:t>385/409</a:t>
             </a:r>
             <a:endParaRPr lang="en-US" sz="1050" dirty="0"/>
           </a:p>
@@ -23064,7 +22905,7 @@
                 <a:ea typeface="Calibri" pitchFamily="34" charset="-122"/>
                 <a:cs typeface="Calibri" pitchFamily="34" charset="-120"/>
               </a:rPr>
-              <a:t>89,7%</a:t>
+              <a:t>94,1%</a:t>
             </a:r>
             <a:endParaRPr lang="en-US" sz="1100" dirty="0"/>
           </a:p>
@@ -23099,13 +22940,13 @@
         <p:spPr>
           <a:xfrm>
             <a:off x="7936992" y="2688336"/>
-            <a:ext cx="3198846" cy="118872"/>
+            <a:ext cx="3355757" cy="118872"/>
           </a:xfrm>
           <a:prstGeom prst="rect">
             <a:avLst/>
           </a:prstGeom>
           <a:solidFill>
-            <a:srgbClr val="E3A55B"/>
+            <a:srgbClr val="2E9E5B"/>
           </a:solidFill>
           <a:ln/>
         </p:spPr>
@@ -23182,7 +23023,7 @@
                 <a:ea typeface="Calibri" pitchFamily="34" charset="-122"/>
                 <a:cs typeface="Calibri" pitchFamily="34" charset="-120"/>
               </a:rPr>
-              <a:t>1.319/1.406</a:t>
+              <a:t>1.361/1.408</a:t>
             </a:r>
             <a:endParaRPr lang="en-US" sz="1050" dirty="0"/>
           </a:p>
@@ -23221,7 +23062,7 @@
                 <a:ea typeface="Calibri" pitchFamily="34" charset="-122"/>
                 <a:cs typeface="Calibri" pitchFamily="34" charset="-120"/>
               </a:rPr>
-              <a:t>93,8%</a:t>
+              <a:t>96,7%</a:t>
             </a:r>
             <a:endParaRPr lang="en-US" sz="1100" dirty="0"/>
           </a:p>
@@ -23256,7 +23097,7 @@
         <p:spPr>
           <a:xfrm>
             <a:off x="7936992" y="3200400"/>
-            <a:ext cx="3345058" cy="118872"/>
+            <a:ext cx="3448477" cy="118872"/>
           </a:xfrm>
           <a:prstGeom prst="rect">
             <a:avLst/>
@@ -23795,7 +23636,7 @@
                 <a:ea typeface="Calibri" pitchFamily="34" charset="-122"/>
                 <a:cs typeface="Calibri" pitchFamily="34" charset="-120"/>
               </a:rPr>
-              <a:t>Mediana de 38 días vencidos; el más antiguo lleva 178. 28 entre 1-30 días, 71 entre 31-90 días, 12 entre 91-180 días.</a:t>
+              <a:t>Mediana de 45 días vencidos; el más antiguo lleva 186. 25 entre 1-30 días, 40 entre 31-90 días, 7 entre 91-180 días, 1 entre &gt;180 días.</a:t>
             </a:r>
             <a:endParaRPr lang="en-US" sz="1150" dirty="0"/>
           </a:p>
@@ -23834,7 +23675,7 @@
                 <a:ea typeface="Calibri" pitchFamily="34" charset="-122"/>
                 <a:cs typeface="Calibri" pitchFamily="34" charset="-120"/>
               </a:rPr>
-              <a:t>Fuente: STATUS_SUBSISTEMAS_TALABRE + Detalle_de_Terminaciones · 218 subsistemas · 2.111 DT · Atrasos al 13-09-2026</a:t>
+              <a:t>Fuente: STATUS_SUBSISTEMAS_TALABRE + Detalle_de_Terminaciones · 218 subsistemas · 2.115 DT · Atrasos al 21-09-2026</a:t>
             </a:r>
             <a:endParaRPr lang="en-US" sz="850" dirty="0"/>
           </a:p>

--- a/panel_control_TOP_P1/Panel_Control_TOP_P1.pptx
+++ b/panel_control_TOP_P1/Panel_Control_TOP_P1.pptx
@@ -687,13 +687,13 @@
               <c:numCache>
                 <c:ptCount val="3"/>
                 <c:pt idx="0">
-                  <c:v>1316</c:v>
+                  <c:v>1362</c:v>
                 </c:pt>
                 <c:pt idx="1">
-                  <c:v>690</c:v>
+                  <c:v>633</c:v>
                 </c:pt>
                 <c:pt idx="2">
-                  <c:v>2</c:v>
+                  <c:v>30</c:v>
                 </c:pt>
               </c:numCache>
             </c:numRef>
@@ -3006,13 +3006,13 @@
                   <c:v>35</c:v>
                 </c:pt>
                 <c:pt idx="1">
-                  <c:v>39</c:v>
+                  <c:v>45</c:v>
                 </c:pt>
                 <c:pt idx="2">
                   <c:v>19</c:v>
                 </c:pt>
                 <c:pt idx="3">
-                  <c:v>2</c:v>
+                  <c:v>1</c:v>
                 </c:pt>
               </c:numCache>
             </c:numRef>
@@ -3096,13 +3096,13 @@
                   <c:v/>
                 </c:pt>
                 <c:pt idx="1">
-                  <c:v>38</c:v>
+                  <c:v>29</c:v>
                 </c:pt>
                 <c:pt idx="2">
                   <c:v>3</c:v>
                 </c:pt>
                 <c:pt idx="3">
-                  <c:v/>
+                  <c:v>1</c:v>
                 </c:pt>
               </c:numCache>
             </c:numRef>
@@ -3186,7 +3186,7 @@
                   <c:v/>
                 </c:pt>
                 <c:pt idx="1">
-                  <c:v/>
+                  <c:v>3</c:v>
                 </c:pt>
                 <c:pt idx="2">
                   <c:v/>
@@ -4007,10 +4007,10 @@
                 <c:ptCount val="6"/>
                 <c:lvl>
                   <c:pt idx="0">
-                    <c:v>Piping</c:v>
+                    <c:v>Eléctrica</c:v>
                   </c:pt>
                   <c:pt idx="1">
-                    <c:v>Eléctrica</c:v>
+                    <c:v>Piping</c:v>
                   </c:pt>
                   <c:pt idx="2">
                     <c:v>Instrum. y Control</c:v>
@@ -4035,13 +4035,13 @@
                 <c:formatCode>General</c:formatCode>
                 <c:ptCount val="6"/>
                 <c:pt idx="0">
-                  <c:v>180</c:v>
+                  <c:v>153</c:v>
                 </c:pt>
                 <c:pt idx="1">
-                  <c:v>163</c:v>
+                  <c:v>135</c:v>
                 </c:pt>
                 <c:pt idx="2">
-                  <c:v>141</c:v>
+                  <c:v>138</c:v>
                 </c:pt>
                 <c:pt idx="3">
                   <c:v>78</c:v>
@@ -4050,7 +4050,7 @@
                   <c:v/>
                 </c:pt>
                 <c:pt idx="5">
-                  <c:v>7</c:v>
+                  <c:v>4</c:v>
                 </c:pt>
               </c:numCache>
             </c:numRef>
@@ -4109,10 +4109,10 @@
                 <c:ptCount val="6"/>
                 <c:lvl>
                   <c:pt idx="0">
-                    <c:v>Piping</c:v>
+                    <c:v>Eléctrica</c:v>
                   </c:pt>
                   <c:pt idx="1">
-                    <c:v>Eléctrica</c:v>
+                    <c:v>Piping</c:v>
                   </c:pt>
                   <c:pt idx="2">
                     <c:v>Instrum. y Control</c:v>
@@ -4137,22 +4137,22 @@
                 <c:formatCode>General</c:formatCode>
                 <c:ptCount val="6"/>
                 <c:pt idx="0">
-                  <c:v>26</c:v>
+                  <c:v>34</c:v>
                 </c:pt>
                 <c:pt idx="1">
-                  <c:v>35</c:v>
+                  <c:v>30</c:v>
                 </c:pt>
                 <c:pt idx="2">
                   <c:v>24</c:v>
                 </c:pt>
                 <c:pt idx="3">
-                  <c:v>12</c:v>
+                  <c:v>15</c:v>
                 </c:pt>
                 <c:pt idx="4">
                   <c:v>17</c:v>
                 </c:pt>
                 <c:pt idx="5">
-                  <c:v>7</c:v>
+                  <c:v>5</c:v>
                 </c:pt>
               </c:numCache>
             </c:numRef>
@@ -8291,7 +8291,7 @@
                 <a:ea typeface="Calibri" pitchFamily="34" charset="-122"/>
                 <a:cs typeface="Calibri" pitchFamily="34" charset="-120"/>
               </a:rPr>
-              <a:t>136 subsistemas en 4 áreas (2000 · 3000 · 4000 · 8000) · 3.007 detalles de terminación levantados.</a:t>
+              <a:t>136 subsistemas en 4 áreas (2000 · 3000 · 4000 · 8000) · 3.050 detalles de terminación levantados.</a:t>
             </a:r>
             <a:endParaRPr lang="en-US" sz="1350" dirty="0"/>
           </a:p>
@@ -8428,7 +8428,7 @@
                 <a:ea typeface="Cambria" pitchFamily="34" charset="-122"/>
                 <a:cs typeface="Cambria" pitchFamily="34" charset="-120"/>
               </a:rPr>
-              <a:t>69,9%</a:t>
+              <a:t>73,5%</a:t>
             </a:r>
             <a:endParaRPr lang="en-US" sz="3400" dirty="0"/>
           </a:p>
@@ -8584,7 +8584,7 @@
                 <a:ea typeface="Cambria" pitchFamily="34" charset="-122"/>
                 <a:cs typeface="Cambria" pitchFamily="34" charset="-120"/>
               </a:rPr>
-              <a:t>65,5%</a:t>
+              <a:t>67,3%</a:t>
             </a:r>
             <a:endParaRPr lang="en-US" sz="3400" dirty="0"/>
           </a:p>
@@ -8662,7 +8662,7 @@
                 <a:ea typeface="Calibri" pitchFamily="34" charset="-122"/>
                 <a:cs typeface="Calibri" pitchFamily="34" charset="-120"/>
               </a:rPr>
-              <a:t>Corte: 19-09-2026   ·   Corte anterior: 10-09-2026</a:t>
+              <a:t>Corte: 21-09-2026   ·   Corte anterior: 19-09-2026</a:t>
             </a:r>
             <a:endParaRPr lang="en-US" sz="1100" dirty="0"/>
           </a:p>
@@ -8701,7 +8701,7 @@
                 <a:ea typeface="Calibri" pitchFamily="34" charset="-122"/>
                 <a:cs typeface="Calibri" pitchFamily="34" charset="-120"/>
               </a:rPr>
-              <a:t>Fuente: Estatus_Resumen_General_QAQC.xlsx · Corte 19-09-2026 · Áreas 2000/3000/4000/8000</a:t>
+              <a:t>Fuente: Estatus_Resumen_General_QAQC.xlsx · Corte 21-09-2026 · Áreas 2000/3000/4000/8000</a:t>
             </a:r>
             <a:endParaRPr lang="en-US" sz="850" dirty="0"/>
           </a:p>
@@ -9177,7 +9177,7 @@
                 <a:ea typeface="Cambria" pitchFamily="34" charset="-122"/>
                 <a:cs typeface="Cambria" pitchFamily="34" charset="-120"/>
               </a:rPr>
-              <a:t>69,9%</a:t>
+              <a:t>73,5%</a:t>
             </a:r>
             <a:endParaRPr lang="en-US" sz="4000" dirty="0"/>
           </a:p>
@@ -9216,7 +9216,7 @@
                 <a:ea typeface="Calibri" pitchFamily="34" charset="-122"/>
                 <a:cs typeface="Calibri" pitchFamily="34" charset="-120"/>
               </a:rPr>
-              <a:t>95/136</a:t>
+              <a:t>100/136</a:t>
             </a:r>
             <a:endParaRPr lang="en-US" sz="1400" dirty="0"/>
           </a:p>
@@ -9294,7 +9294,7 @@
                 <a:ea typeface="Calibri" pitchFamily="34" charset="-122"/>
                 <a:cs typeface="Calibri" pitchFamily="34" charset="-120"/>
               </a:rPr>
-              <a:t>41 próximas · 0 por programar</a:t>
+              <a:t>33 próximas · 3 por programar</a:t>
             </a:r>
             <a:endParaRPr lang="en-US" sz="950" dirty="0"/>
           </a:p>
@@ -9333,7 +9333,7 @@
                 <a:ea typeface="Calibri" pitchFamily="34" charset="-122"/>
                 <a:cs typeface="Calibri" pitchFamily="34" charset="-120"/>
               </a:rPr>
-              <a:t>▲ +2 vs. corte anterior</a:t>
+              <a:t>▲ +5 vs. corte anterior</a:t>
             </a:r>
             <a:endParaRPr lang="en-US" sz="900" dirty="0"/>
           </a:p>
@@ -9576,13 +9576,13 @@
             <a:r>
               <a:rPr lang="en-US" sz="900" b="1" dirty="0">
                 <a:solidFill>
-                  <a:srgbClr val="1F7A44"/>
-                </a:solidFill>
-                <a:latin typeface="Calibri" pitchFamily="34" charset="0"/>
-                <a:ea typeface="Calibri" pitchFamily="34" charset="-122"/>
-                <a:cs typeface="Calibri" pitchFamily="34" charset="-120"/>
-              </a:rPr>
-              <a:t>▲ +6 vs. corte anterior</a:t>
+                  <a:srgbClr val="56606E"/>
+                </a:solidFill>
+                <a:latin typeface="Calibri" pitchFamily="34" charset="0"/>
+                <a:ea typeface="Calibri" pitchFamily="34" charset="-122"/>
+                <a:cs typeface="Calibri" pitchFamily="34" charset="-120"/>
+              </a:rPr>
+              <a:t>= sin cambio vs. corte anterior</a:t>
             </a:r>
             <a:endParaRPr lang="en-US" sz="900" dirty="0"/>
           </a:p>
@@ -9675,7 +9675,7 @@
                 <a:ea typeface="Cambria" pitchFamily="34" charset="-122"/>
                 <a:cs typeface="Cambria" pitchFamily="34" charset="-120"/>
               </a:rPr>
-              <a:t>65,5%</a:t>
+              <a:t>67,3%</a:t>
             </a:r>
             <a:endParaRPr lang="en-US" sz="4000" dirty="0"/>
           </a:p>
@@ -9714,7 +9714,7 @@
                 <a:ea typeface="Calibri" pitchFamily="34" charset="-122"/>
                 <a:cs typeface="Calibri" pitchFamily="34" charset="-120"/>
               </a:rPr>
-              <a:t>1.316/2.008</a:t>
+              <a:t>1.362/2.025</a:t>
             </a:r>
             <a:endParaRPr lang="en-US" sz="1400" dirty="0"/>
           </a:p>
@@ -9792,7 +9792,7 @@
                 <a:ea typeface="Calibri" pitchFamily="34" charset="-122"/>
                 <a:cs typeface="Calibri" pitchFamily="34" charset="-120"/>
               </a:rPr>
-              <a:t>690 abiertos · 569 vencidos · 2 en trámite</a:t>
+              <a:t>633 abiertos · 508 vencidos · 30 en trámite</a:t>
             </a:r>
             <a:endParaRPr lang="en-US" sz="950" dirty="0"/>
           </a:p>
@@ -9831,7 +9831,7 @@
                 <a:ea typeface="Calibri" pitchFamily="34" charset="-122"/>
                 <a:cs typeface="Calibri" pitchFamily="34" charset="-120"/>
               </a:rPr>
-              <a:t>▲ +94 vs. corte anterior</a:t>
+              <a:t>▲ +46 vs. corte anterior</a:t>
             </a:r>
             <a:endParaRPr lang="en-US" sz="900" dirty="0"/>
           </a:p>
@@ -9971,7 +9971,7 @@
                 <a:ea typeface="Calibri" pitchFamily="34" charset="-122"/>
                 <a:cs typeface="Calibri" pitchFamily="34" charset="-120"/>
               </a:rPr>
-              <a:t>95 de 136 realizadas (69,9%); 41 próximas y 0 por programar.</a:t>
+              <a:t>100 de 136 realizadas (73,5%); 33 próximas y 3 por programar.</a:t>
             </a:r>
             <a:endParaRPr lang="en-US" sz="1250" dirty="0"/>
           </a:p>
@@ -10129,7 +10129,7 @@
                 <a:ea typeface="Calibri" pitchFamily="34" charset="-122"/>
                 <a:cs typeface="Calibri" pitchFamily="34" charset="-120"/>
               </a:rPr>
-              <a:t>+94 P1 cerrado desde el corte anterior; 690 abiertos, de los cuales 569 superaron su fecha de vencimiento. El área 3000 concentra 612 (88,7%).</a:t>
+              <a:t>+46 P1 cerrado desde el corte anterior; 633 abiertos, de los cuales 508 superaron su fecha de vencimiento. El área 3000 concentra 562 (88,8%).</a:t>
             </a:r>
             <a:endParaRPr lang="en-US" sz="1250" dirty="0"/>
           </a:p>
@@ -10168,7 +10168,7 @@
                 <a:ea typeface="Calibri" pitchFamily="34" charset="-122"/>
                 <a:cs typeface="Calibri" pitchFamily="34" charset="-120"/>
               </a:rPr>
-              <a:t>Fuente: Estatus_Resumen_General_QAQC.xlsx · Corte 19-09-2026 · Áreas 2000/3000/4000/8000</a:t>
+              <a:t>Fuente: Estatus_Resumen_General_QAQC.xlsx · Corte 21-09-2026 · Áreas 2000/3000/4000/8000</a:t>
             </a:r>
             <a:endParaRPr lang="en-US" sz="850" dirty="0"/>
           </a:p>
@@ -10910,7 +10910,7 @@
                 <a:ea typeface="Calibri" pitchFamily="34" charset="-122"/>
                 <a:cs typeface="Calibri" pitchFamily="34" charset="-120"/>
               </a:rPr>
-              <a:t>97,9%</a:t>
+              <a:t>99,1%</a:t>
             </a:r>
             <a:endParaRPr lang="en-US" sz="1300" dirty="0"/>
           </a:p>
@@ -10949,7 +10949,7 @@
                 <a:ea typeface="Calibri" pitchFamily="34" charset="-122"/>
                 <a:cs typeface="Calibri" pitchFamily="34" charset="-120"/>
               </a:rPr>
-              <a:t>12 (10)</a:t>
+              <a:t>3 (1)</a:t>
             </a:r>
             <a:endParaRPr lang="en-US" sz="1300" dirty="0"/>
           </a:p>
@@ -11209,7 +11209,7 @@
                 <a:ea typeface="Calibri" pitchFamily="34" charset="-122"/>
                 <a:cs typeface="Calibri" pitchFamily="34" charset="-120"/>
               </a:rPr>
-              <a:t>39/77 · 50,6%</a:t>
+              <a:t>45/77 · 58,4%</a:t>
             </a:r>
             <a:endParaRPr lang="en-US" sz="1300" dirty="0"/>
           </a:p>
@@ -11287,7 +11287,7 @@
                 <a:ea typeface="Calibri" pitchFamily="34" charset="-122"/>
                 <a:cs typeface="Calibri" pitchFamily="34" charset="-120"/>
               </a:rPr>
-              <a:t>41,6%</a:t>
+              <a:t>44,1%</a:t>
             </a:r>
             <a:endParaRPr lang="en-US" sz="1300" dirty="0"/>
           </a:p>
@@ -11326,7 +11326,7 @@
                 <a:ea typeface="Calibri" pitchFamily="34" charset="-122"/>
                 <a:cs typeface="Calibri" pitchFamily="34" charset="-120"/>
               </a:rPr>
-              <a:t>612 (529)</a:t>
+              <a:t>562 (481)</a:t>
             </a:r>
             <a:endParaRPr lang="en-US" sz="1300" dirty="0"/>
           </a:p>
@@ -11644,7 +11644,7 @@
                 <a:ea typeface="Calibri" pitchFamily="34" charset="-122"/>
                 <a:cs typeface="Calibri" pitchFamily="34" charset="-120"/>
               </a:rPr>
-              <a:t>85,4%</a:t>
+              <a:t>86,3%</a:t>
             </a:r>
             <a:endParaRPr lang="en-US" sz="1300" dirty="0"/>
           </a:p>
@@ -11683,7 +11683,7 @@
                 <a:ea typeface="Calibri" pitchFamily="34" charset="-122"/>
                 <a:cs typeface="Calibri" pitchFamily="34" charset="-120"/>
               </a:rPr>
-              <a:t>52 (27)</a:t>
+              <a:t>49 (26)</a:t>
             </a:r>
             <a:endParaRPr lang="en-US" sz="1300" dirty="0"/>
           </a:p>
@@ -11943,7 +11943,7 @@
                 <a:ea typeface="Calibri" pitchFamily="34" charset="-122"/>
                 <a:cs typeface="Calibri" pitchFamily="34" charset="-120"/>
               </a:rPr>
-              <a:t>2/2 · 100%</a:t>
+              <a:t>1/2 · 50%</a:t>
             </a:r>
             <a:endParaRPr lang="en-US" sz="1300" dirty="0"/>
           </a:p>
@@ -12083,7 +12083,7 @@
             </a:avLst>
           </a:prstGeom>
           <a:solidFill>
-            <a:srgbClr val="2E9E5B"/>
+            <a:srgbClr val="C0392B"/>
           </a:solidFill>
           <a:ln/>
         </p:spPr>
@@ -12121,7 +12121,7 @@
                 <a:ea typeface="Calibri" pitchFamily="34" charset="-122"/>
                 <a:cs typeface="Calibri" pitchFamily="34" charset="-120"/>
               </a:rPr>
-              <a:t>Al día</a:t>
+              <a:t>Crítico</a:t>
             </a:r>
             <a:endParaRPr lang="en-US" sz="1050" dirty="0"/>
           </a:p>
@@ -12222,7 +12222,7 @@
                 <a:ea typeface="Calibri" pitchFamily="34" charset="-122"/>
                 <a:cs typeface="Calibri" pitchFamily="34" charset="-120"/>
               </a:rPr>
-              <a:t>Fuente: Estatus_Resumen_General_QAQC.xlsx · Corte 19-09-2026 · Áreas 2000/3000/4000/8000</a:t>
+              <a:t>Fuente: Estatus_Resumen_General_QAQC.xlsx · Corte 21-09-2026 · Áreas 2000/3000/4000/8000</a:t>
             </a:r>
             <a:endParaRPr lang="en-US" sz="850" dirty="0"/>
           </a:p>
@@ -12473,7 +12473,7 @@
                 <a:ea typeface="Calibri" pitchFamily="34" charset="-122"/>
                 <a:cs typeface="Calibri" pitchFamily="34" charset="-120"/>
               </a:rPr>
-              <a:t>Las caminatas al 80% están cerradas en todas las áreas (136/136). El hito 100% avanza a 69,9%, y el área 3000 concentra 38 de los 41 subsistemas pendientes.</a:t>
+              <a:t>Las caminatas al 80% están cerradas en todas las áreas (136/136). El hito 100% avanza a 73,5%, y el área 3000 concentra 32 de los 36 subsistemas pendientes.</a:t>
             </a:r>
             <a:endParaRPr lang="en-US" sz="1350" dirty="0"/>
           </a:p>
@@ -12729,7 +12729,7 @@
                 <a:ea typeface="Cambria" pitchFamily="34" charset="-122"/>
                 <a:cs typeface="Cambria" pitchFamily="34" charset="-120"/>
               </a:rPr>
-              <a:t>69,9%</a:t>
+              <a:t>73,5%</a:t>
             </a:r>
             <a:endParaRPr lang="en-US" sz="4000" dirty="0"/>
           </a:p>
@@ -12768,7 +12768,7 @@
                 <a:ea typeface="Calibri" pitchFamily="34" charset="-122"/>
                 <a:cs typeface="Calibri" pitchFamily="34" charset="-120"/>
               </a:rPr>
-              <a:t>95 realizadas · 41 pendientes</a:t>
+              <a:t>100 realizadas · 36 pendientes</a:t>
             </a:r>
             <a:endParaRPr lang="en-US" sz="1200" dirty="0"/>
           </a:p>
@@ -12827,7 +12827,7 @@
                 <a:ea typeface="Calibri" pitchFamily="34" charset="-122"/>
                 <a:cs typeface="Calibri" pitchFamily="34" charset="-120"/>
               </a:rPr>
-              <a:t>41 próximas a realizar y 0 por programar.</a:t>
+              <a:t>33 próximas a realizar y 3 por programar.</a:t>
             </a:r>
             <a:endParaRPr lang="en-US" sz="1150" dirty="0"/>
           </a:p>
@@ -12866,7 +12866,7 @@
                 <a:ea typeface="Calibri" pitchFamily="34" charset="-122"/>
                 <a:cs typeface="Calibri" pitchFamily="34" charset="-120"/>
               </a:rPr>
-              <a:t>Fuente: Estatus_Resumen_General_QAQC.xlsx · Corte 19-09-2026 · Áreas 2000/3000/4000/8000</a:t>
+              <a:t>Fuente: Estatus_Resumen_General_QAQC.xlsx · Corte 21-09-2026 · Áreas 2000/3000/4000/8000</a:t>
             </a:r>
             <a:endParaRPr lang="en-US" sz="850" dirty="0"/>
           </a:p>
@@ -13294,45 +13294,6 @@
         </p:nvSpPr>
         <p:spPr>
           <a:xfrm>
-            <a:off x="9509760" y="2450592"/>
-            <a:ext cx="914400" cy="566928"/>
-          </a:xfrm>
-          <a:prstGeom prst="rect">
-            <a:avLst/>
-          </a:prstGeom>
-          <a:noFill/>
-          <a:ln/>
-        </p:spPr>
-        <p:txBody>
-          <a:bodyPr wrap="square" lIns="0" tIns="0" rIns="0" bIns="0" rtlCol="0" anchor="ctr"/>
-          <a:lstStyle/>
-          <a:p>
-            <a:pPr algn="r" indent="0" marL="0">
-              <a:buNone/>
-            </a:pPr>
-            <a:r>
-              <a:rPr lang="en-US" sz="950" b="1" dirty="0">
-                <a:solidFill>
-                  <a:srgbClr val="1F7A44"/>
-                </a:solidFill>
-                <a:latin typeface="Calibri" pitchFamily="34" charset="0"/>
-                <a:ea typeface="Calibri" pitchFamily="34" charset="-122"/>
-                <a:cs typeface="Calibri" pitchFamily="34" charset="-120"/>
-              </a:rPr>
-              <a:t>▲ +6</a:t>
-            </a:r>
-            <a:endParaRPr lang="en-US" sz="950" dirty="0"/>
-          </a:p>
-        </p:txBody>
-      </p:sp>
-      <p:sp>
-        <p:nvSpPr>
-          <p:cNvPr id="13" name="Text 9"/>
-          <p:cNvSpPr/>
-          <p:nvPr/>
-        </p:nvSpPr>
-        <p:spPr>
-          <a:xfrm>
             <a:off x="10469880" y="2450592"/>
             <a:ext cx="868680" cy="566928"/>
           </a:xfrm>
@@ -13366,7 +13327,7 @@
       </p:sp>
       <p:sp>
         <p:nvSpPr>
-          <p:cNvPr id="14" name="Shape 10"/>
+          <p:cNvPr id="13" name="Shape 9"/>
           <p:cNvSpPr/>
           <p:nvPr/>
         </p:nvSpPr>
@@ -13388,7 +13349,7 @@
       </p:sp>
       <p:sp>
         <p:nvSpPr>
-          <p:cNvPr id="15" name="Shape 11"/>
+          <p:cNvPr id="14" name="Shape 10"/>
           <p:cNvSpPr/>
           <p:nvPr/>
         </p:nvSpPr>
@@ -13408,7 +13369,7 @@
       </p:sp>
       <p:sp>
         <p:nvSpPr>
-          <p:cNvPr id="16" name="Text 12"/>
+          <p:cNvPr id="15" name="Text 11"/>
           <p:cNvSpPr/>
           <p:nvPr/>
         </p:nvSpPr>
@@ -13447,46 +13408,7 @@
       </p:sp>
       <p:sp>
         <p:nvSpPr>
-          <p:cNvPr id="17" name="Text 13"/>
-          <p:cNvSpPr/>
-          <p:nvPr/>
-        </p:nvSpPr>
-        <p:spPr>
-          <a:xfrm>
-            <a:off x="9509760" y="3072384"/>
-            <a:ext cx="914400" cy="566928"/>
-          </a:xfrm>
-          <a:prstGeom prst="rect">
-            <a:avLst/>
-          </a:prstGeom>
-          <a:noFill/>
-          <a:ln/>
-        </p:spPr>
-        <p:txBody>
-          <a:bodyPr wrap="square" lIns="0" tIns="0" rIns="0" bIns="0" rtlCol="0" anchor="ctr"/>
-          <a:lstStyle/>
-          <a:p>
-            <a:pPr algn="r" indent="0" marL="0">
-              <a:buNone/>
-            </a:pPr>
-            <a:r>
-              <a:rPr lang="en-US" sz="950" b="1" dirty="0">
-                <a:solidFill>
-                  <a:srgbClr val="1F7A44"/>
-                </a:solidFill>
-                <a:latin typeface="Calibri" pitchFamily="34" charset="0"/>
-                <a:ea typeface="Calibri" pitchFamily="34" charset="-122"/>
-                <a:cs typeface="Calibri" pitchFamily="34" charset="-120"/>
-              </a:rPr>
-              <a:t>▲ +6</a:t>
-            </a:r>
-            <a:endParaRPr lang="en-US" sz="950" dirty="0"/>
-          </a:p>
-        </p:txBody>
-      </p:sp>
-      <p:sp>
-        <p:nvSpPr>
-          <p:cNvPr id="18" name="Text 14"/>
+          <p:cNvPr id="16" name="Text 12"/>
           <p:cNvSpPr/>
           <p:nvPr/>
         </p:nvSpPr>
@@ -13525,7 +13447,7 @@
       </p:sp>
       <p:sp>
         <p:nvSpPr>
-          <p:cNvPr id="19" name="Shape 15"/>
+          <p:cNvPr id="17" name="Shape 13"/>
           <p:cNvSpPr/>
           <p:nvPr/>
         </p:nvSpPr>
@@ -13547,7 +13469,7 @@
       </p:sp>
       <p:sp>
         <p:nvSpPr>
-          <p:cNvPr id="20" name="Shape 16"/>
+          <p:cNvPr id="18" name="Shape 14"/>
           <p:cNvSpPr/>
           <p:nvPr/>
         </p:nvSpPr>
@@ -13567,7 +13489,7 @@
       </p:sp>
       <p:sp>
         <p:nvSpPr>
-          <p:cNvPr id="21" name="Text 17"/>
+          <p:cNvPr id="19" name="Text 15"/>
           <p:cNvSpPr/>
           <p:nvPr/>
         </p:nvSpPr>
@@ -13606,7 +13528,7 @@
       </p:sp>
       <p:sp>
         <p:nvSpPr>
-          <p:cNvPr id="22" name="Text 18"/>
+          <p:cNvPr id="20" name="Text 16"/>
           <p:cNvSpPr/>
           <p:nvPr/>
         </p:nvSpPr>
@@ -13645,7 +13567,7 @@
       </p:sp>
       <p:sp>
         <p:nvSpPr>
-          <p:cNvPr id="23" name="Shape 19"/>
+          <p:cNvPr id="21" name="Shape 17"/>
           <p:cNvSpPr/>
           <p:nvPr/>
         </p:nvSpPr>
@@ -13667,7 +13589,7 @@
       </p:sp>
       <p:sp>
         <p:nvSpPr>
-          <p:cNvPr id="24" name="Shape 20"/>
+          <p:cNvPr id="22" name="Shape 18"/>
           <p:cNvSpPr/>
           <p:nvPr/>
         </p:nvSpPr>
@@ -13687,7 +13609,7 @@
       </p:sp>
       <p:sp>
         <p:nvSpPr>
-          <p:cNvPr id="25" name="Text 21"/>
+          <p:cNvPr id="23" name="Text 19"/>
           <p:cNvSpPr/>
           <p:nvPr/>
         </p:nvSpPr>
@@ -13726,7 +13648,7 @@
       </p:sp>
       <p:sp>
         <p:nvSpPr>
-          <p:cNvPr id="26" name="Text 22"/>
+          <p:cNvPr id="24" name="Text 20"/>
           <p:cNvSpPr/>
           <p:nvPr/>
         </p:nvSpPr>
@@ -13765,7 +13687,7 @@
       </p:sp>
       <p:sp>
         <p:nvSpPr>
-          <p:cNvPr id="27" name="Shape 23"/>
+          <p:cNvPr id="25" name="Shape 21"/>
           <p:cNvSpPr/>
           <p:nvPr/>
         </p:nvSpPr>
@@ -13787,7 +13709,7 @@
       </p:sp>
       <p:sp>
         <p:nvSpPr>
-          <p:cNvPr id="28" name="Shape 24"/>
+          <p:cNvPr id="26" name="Shape 22"/>
           <p:cNvSpPr/>
           <p:nvPr/>
         </p:nvSpPr>
@@ -13807,7 +13729,7 @@
       </p:sp>
       <p:sp>
         <p:nvSpPr>
-          <p:cNvPr id="29" name="Text 25"/>
+          <p:cNvPr id="27" name="Text 23"/>
           <p:cNvSpPr/>
           <p:nvPr/>
         </p:nvSpPr>
@@ -13846,7 +13768,7 @@
       </p:sp>
       <p:sp>
         <p:nvSpPr>
-          <p:cNvPr id="30" name="Text 26"/>
+          <p:cNvPr id="28" name="Text 24"/>
           <p:cNvSpPr/>
           <p:nvPr/>
         </p:nvSpPr>
@@ -13885,7 +13807,7 @@
       </p:sp>
       <p:sp>
         <p:nvSpPr>
-          <p:cNvPr id="31" name="Text 27"/>
+          <p:cNvPr id="29" name="Text 25"/>
           <p:cNvSpPr/>
           <p:nvPr/>
         </p:nvSpPr>
@@ -13924,7 +13846,7 @@
       </p:sp>
       <p:sp>
         <p:nvSpPr>
-          <p:cNvPr id="32" name="Text 28"/>
+          <p:cNvPr id="30" name="Text 26"/>
           <p:cNvSpPr/>
           <p:nvPr/>
         </p:nvSpPr>
@@ -13955,7 +13877,7 @@
                 <a:ea typeface="Calibri" pitchFamily="34" charset="-122"/>
                 <a:cs typeface="Calibri" pitchFamily="34" charset="-120"/>
               </a:rPr>
-              <a:t>Fuente: Estatus_Resumen_General_QAQC.xlsx · Corte 19-09-2026 · Áreas 2000/3000/4000/8000</a:t>
+              <a:t>Fuente: Estatus_Resumen_General_QAQC.xlsx · Corte 21-09-2026 · Áreas 2000/3000/4000/8000</a:t>
             </a:r>
             <a:endParaRPr lang="en-US" sz="850" dirty="0"/>
           </a:p>
@@ -13963,7 +13885,7 @@
       </p:sp>
       <p:sp>
         <p:nvSpPr>
-          <p:cNvPr id="33" name="Text 29"/>
+          <p:cNvPr id="31" name="Text 27"/>
           <p:cNvSpPr/>
           <p:nvPr/>
         </p:nvSpPr>
@@ -14002,7 +13924,7 @@
       </p:sp>
       <p:sp>
         <p:nvSpPr>
-          <p:cNvPr id="34" name="Text 30"/>
+          <p:cNvPr id="32" name="Text 28"/>
           <p:cNvSpPr/>
           <p:nvPr/>
         </p:nvSpPr>
@@ -14206,7 +14128,7 @@
                 <a:ea typeface="Calibri" pitchFamily="34" charset="-122"/>
                 <a:cs typeface="Calibri" pitchFamily="34" charset="-120"/>
               </a:rPr>
-              <a:t>2.008 P1 levantados; 65,5% cerrados. El pendiente se concentra en Piping, Eléctrica, Instrumentación y Control, y físicamente en el área 3000.</a:t>
+              <a:t>2.025 P1 levantados; 67,3% cerrados. El pendiente se concentra en Eléctrica, Piping, Instrumentación y Control, y físicamente en el área 3000.</a:t>
             </a:r>
             <a:endParaRPr lang="en-US" sz="1350" dirty="0"/>
           </a:p>
@@ -14338,7 +14260,7 @@
                 <a:ea typeface="Cambria" pitchFamily="34" charset="-122"/>
                 <a:cs typeface="Cambria" pitchFamily="34" charset="-120"/>
               </a:rPr>
-              <a:t>65,5%</a:t>
+              <a:t>67,3%</a:t>
             </a:r>
             <a:endParaRPr lang="en-US" sz="1900" dirty="0"/>
           </a:p>
@@ -14453,7 +14375,7 @@
                 <a:ea typeface="Calibri" pitchFamily="34" charset="-122"/>
                 <a:cs typeface="Calibri" pitchFamily="34" charset="-120"/>
               </a:rPr>
-              <a:t>1.316</a:t>
+              <a:t>1.362</a:t>
             </a:r>
             <a:endParaRPr lang="en-US" sz="1100" dirty="0"/>
           </a:p>
@@ -14551,7 +14473,7 @@
                 <a:ea typeface="Calibri" pitchFamily="34" charset="-122"/>
                 <a:cs typeface="Calibri" pitchFamily="34" charset="-120"/>
               </a:rPr>
-              <a:t>690</a:t>
+              <a:t>633</a:t>
             </a:r>
             <a:endParaRPr lang="en-US" sz="1100" dirty="0"/>
           </a:p>
@@ -14649,7 +14571,7 @@
                 <a:ea typeface="Calibri" pitchFamily="34" charset="-122"/>
                 <a:cs typeface="Calibri" pitchFamily="34" charset="-120"/>
               </a:rPr>
-              <a:t>2</a:t>
+              <a:t>30</a:t>
             </a:r>
             <a:endParaRPr lang="en-US" sz="1100" dirty="0"/>
           </a:p>
@@ -14732,7 +14654,7 @@
                 <a:ea typeface="Calibri" pitchFamily="34" charset="-122"/>
                 <a:cs typeface="Calibri" pitchFamily="34" charset="-120"/>
               </a:rPr>
-              <a:t>612 de 690 P1 abiertos (88,7%) están en el área 3000. Áreas 2000 y 8000 sobre 90% de cierre.</a:t>
+              <a:t>562 de 633 P1 abiertos (88,8%) están en el área 3000. Áreas 2000 y 8000 sobre 90% de cierre.</a:t>
             </a:r>
             <a:endParaRPr lang="en-US" sz="1150" dirty="0"/>
           </a:p>
@@ -14771,7 +14693,7 @@
                 <a:ea typeface="Calibri" pitchFamily="34" charset="-122"/>
                 <a:cs typeface="Calibri" pitchFamily="34" charset="-120"/>
               </a:rPr>
-              <a:t>Fuente: Estatus_Resumen_General_QAQC.xlsx · Corte 19-09-2026 · Áreas 2000/3000/4000/8000</a:t>
+              <a:t>Fuente: Estatus_Resumen_General_QAQC.xlsx · Corte 21-09-2026 · Áreas 2000/3000/4000/8000</a:t>
             </a:r>
             <a:endParaRPr lang="en-US" sz="850" dirty="0"/>
           </a:p>
@@ -15287,7 +15209,7 @@
                 <a:ea typeface="Calibri" pitchFamily="34" charset="-122"/>
                 <a:cs typeface="Calibri" pitchFamily="34" charset="-120"/>
               </a:rPr>
-              <a:t>612 P1 abiertos (88,7% del total) y 38 caminatas 100% pendientes. Es la ruta crítica: sin esta área no mejora ningún indicador global.</a:t>
+              <a:t>562 P1 abiertos (88,8% del total) y 32 caminatas 100% pendientes. Es la ruta crítica: sin esta área no mejora ningún indicador global.</a:t>
             </a:r>
             <a:endParaRPr lang="en-US" sz="1150" dirty="0"/>
           </a:p>
@@ -15387,7 +15309,7 @@
                 <a:ea typeface="Calibri" pitchFamily="34" charset="-122"/>
                 <a:cs typeface="Calibri" pitchFamily="34" charset="-120"/>
               </a:rPr>
-              <a:t>Recuperar los 569 P1 vencidos</a:t>
+              <a:t>Recuperar los 508 P1 vencidos</a:t>
             </a:r>
             <a:endParaRPr lang="en-US" sz="1500" dirty="0"/>
           </a:p>
@@ -15429,7 +15351,7 @@
                 <a:ea typeface="Calibri" pitchFamily="34" charset="-122"/>
                 <a:cs typeface="Calibri" pitchFamily="34" charset="-120"/>
               </a:rPr>
-              <a:t>82,5% de los P1 abiertos superó su fecha de vencimiento. Foco en Piping (180), Eléctrica (163), Instrumentación y Control (141).</a:t>
+              <a:t>80,3% de los P1 abiertos superó su fecha de vencimiento. Foco en Eléctrica (153), Instrumentación y Control (138), Piping (135).</a:t>
             </a:r>
             <a:endParaRPr lang="en-US" sz="1150" dirty="0"/>
           </a:p>
@@ -15571,7 +15493,7 @@
                 <a:ea typeface="Calibri" pitchFamily="34" charset="-122"/>
                 <a:cs typeface="Calibri" pitchFamily="34" charset="-120"/>
               </a:rPr>
-              <a:t>41 subsistemas pendientes: 41 próximos a realizar y 0 por programar. La programación ya está hecha; falta ejecutarla para habilitar la entrega de carpetas.</a:t>
+              <a:t>36 subsistemas pendientes: 33 próximos a realizar y 3 por programar. La programación ya está hecha; falta ejecutarla para habilitar la entrega de carpetas.</a:t>
             </a:r>
             <a:endParaRPr lang="en-US" sz="1150" dirty="0"/>
           </a:p>
@@ -15610,7 +15532,7 @@
                 <a:ea typeface="Calibri" pitchFamily="34" charset="-122"/>
                 <a:cs typeface="Calibri" pitchFamily="34" charset="-120"/>
               </a:rPr>
-              <a:t>Fuente: Estatus_Resumen_General_QAQC.xlsx · Corte 19-09-2026 · Áreas 2000/3000/4000/8000</a:t>
+              <a:t>Fuente: Estatus_Resumen_General_QAQC.xlsx · Corte 21-09-2026 · Áreas 2000/3000/4000/8000</a:t>
             </a:r>
             <a:endParaRPr lang="en-US" sz="850" dirty="0"/>
           </a:p>

--- a/panel_control_TOP_P1/Panel_Control_TOP_P1.pptx
+++ b/panel_control_TOP_P1/Panel_Control_TOP_P1.pptx
@@ -690,10 +690,10 @@
                   <c:v>1362</c:v>
                 </c:pt>
                 <c:pt idx="1">
-                  <c:v>633</c:v>
+                  <c:v>663</c:v>
                 </c:pt>
                 <c:pt idx="2">
-                  <c:v>30</c:v>
+                  <c:v>0</c:v>
                 </c:pt>
               </c:numCache>
             </c:numRef>
@@ -4007,10 +4007,10 @@
                 <c:ptCount val="6"/>
                 <c:lvl>
                   <c:pt idx="0">
-                    <c:v>Eléctrica</c:v>
+                    <c:v>Piping</c:v>
                   </c:pt>
                   <c:pt idx="1">
-                    <c:v>Piping</c:v>
+                    <c:v>Eléctrica</c:v>
                   </c:pt>
                   <c:pt idx="2">
                     <c:v>Instrum. y Control</c:v>
@@ -4035,13 +4035,13 @@
                 <c:formatCode>General</c:formatCode>
                 <c:ptCount val="6"/>
                 <c:pt idx="0">
-                  <c:v>153</c:v>
+                  <c:v>156</c:v>
                 </c:pt>
                 <c:pt idx="1">
-                  <c:v>135</c:v>
+                  <c:v>155</c:v>
                 </c:pt>
                 <c:pt idx="2">
-                  <c:v>138</c:v>
+                  <c:v>139</c:v>
                 </c:pt>
                 <c:pt idx="3">
                   <c:v>78</c:v>
@@ -4050,7 +4050,7 @@
                   <c:v/>
                 </c:pt>
                 <c:pt idx="5">
-                  <c:v>4</c:v>
+                  <c:v>5</c:v>
                 </c:pt>
               </c:numCache>
             </c:numRef>
@@ -4109,10 +4109,10 @@
                 <c:ptCount val="6"/>
                 <c:lvl>
                   <c:pt idx="0">
-                    <c:v>Eléctrica</c:v>
+                    <c:v>Piping</c:v>
                   </c:pt>
                   <c:pt idx="1">
-                    <c:v>Piping</c:v>
+                    <c:v>Eléctrica</c:v>
                   </c:pt>
                   <c:pt idx="2">
                     <c:v>Instrum. y Control</c:v>
@@ -4137,10 +4137,10 @@
                 <c:formatCode>General</c:formatCode>
                 <c:ptCount val="6"/>
                 <c:pt idx="0">
-                  <c:v>34</c:v>
+                  <c:v>33</c:v>
                 </c:pt>
                 <c:pt idx="1">
-                  <c:v>30</c:v>
+                  <c:v>34</c:v>
                 </c:pt>
                 <c:pt idx="2">
                   <c:v>24</c:v>
@@ -4152,7 +4152,7 @@
                   <c:v>17</c:v>
                 </c:pt>
                 <c:pt idx="5">
-                  <c:v>5</c:v>
+                  <c:v>7</c:v>
                 </c:pt>
               </c:numCache>
             </c:numRef>
@@ -9792,7 +9792,7 @@
                 <a:ea typeface="Calibri" pitchFamily="34" charset="-122"/>
                 <a:cs typeface="Calibri" pitchFamily="34" charset="-120"/>
               </a:rPr>
-              <a:t>633 abiertos · 508 vencidos · 30 en trámite</a:t>
+              <a:t>663 abiertos · 533 vencidos</a:t>
             </a:r>
             <a:endParaRPr lang="en-US" sz="950" dirty="0"/>
           </a:p>
@@ -10129,7 +10129,7 @@
                 <a:ea typeface="Calibri" pitchFamily="34" charset="-122"/>
                 <a:cs typeface="Calibri" pitchFamily="34" charset="-120"/>
               </a:rPr>
-              <a:t>+46 P1 cerrado desde el corte anterior; 633 abiertos, de los cuales 508 superaron su fecha de vencimiento. El área 3000 concentra 562 (88,8%).</a:t>
+              <a:t>+46 P1 cerrado desde el corte anterior; 663 abiertos, de los cuales 533 superaron su fecha de vencimiento. El área 3000 concentra 586 (88,4%).</a:t>
             </a:r>
             <a:endParaRPr lang="en-US" sz="1250" dirty="0"/>
           </a:p>
@@ -10949,7 +10949,7 @@
                 <a:ea typeface="Calibri" pitchFamily="34" charset="-122"/>
                 <a:cs typeface="Calibri" pitchFamily="34" charset="-120"/>
               </a:rPr>
-              <a:t>3 (1)</a:t>
+              <a:t>5 (3)</a:t>
             </a:r>
             <a:endParaRPr lang="en-US" sz="1300" dirty="0"/>
           </a:p>
@@ -11326,7 +11326,7 @@
                 <a:ea typeface="Calibri" pitchFamily="34" charset="-122"/>
                 <a:cs typeface="Calibri" pitchFamily="34" charset="-120"/>
               </a:rPr>
-              <a:t>562 (481)</a:t>
+              <a:t>586 (503)</a:t>
             </a:r>
             <a:endParaRPr lang="en-US" sz="1300" dirty="0"/>
           </a:p>
@@ -14128,7 +14128,7 @@
                 <a:ea typeface="Calibri" pitchFamily="34" charset="-122"/>
                 <a:cs typeface="Calibri" pitchFamily="34" charset="-120"/>
               </a:rPr>
-              <a:t>2.025 P1 levantados; 67,3% cerrados. El pendiente se concentra en Eléctrica, Piping, Instrumentación y Control, y físicamente en el área 3000.</a:t>
+              <a:t>2.025 P1 levantados; 67,3% cerrados. El pendiente se concentra en Piping, Eléctrica, Instrumentación y Control, y físicamente en el área 3000.</a:t>
             </a:r>
             <a:endParaRPr lang="en-US" sz="1350" dirty="0"/>
           </a:p>
@@ -14473,7 +14473,7 @@
                 <a:ea typeface="Calibri" pitchFamily="34" charset="-122"/>
                 <a:cs typeface="Calibri" pitchFamily="34" charset="-120"/>
               </a:rPr>
-              <a:t>633</a:t>
+              <a:t>663</a:t>
             </a:r>
             <a:endParaRPr lang="en-US" sz="1100" dirty="0"/>
           </a:p>
@@ -14571,7 +14571,7 @@
                 <a:ea typeface="Calibri" pitchFamily="34" charset="-122"/>
                 <a:cs typeface="Calibri" pitchFamily="34" charset="-120"/>
               </a:rPr>
-              <a:t>30</a:t>
+              <a:t>0</a:t>
             </a:r>
             <a:endParaRPr lang="en-US" sz="1100" dirty="0"/>
           </a:p>
@@ -14654,7 +14654,7 @@
                 <a:ea typeface="Calibri" pitchFamily="34" charset="-122"/>
                 <a:cs typeface="Calibri" pitchFamily="34" charset="-120"/>
               </a:rPr>
-              <a:t>562 de 633 P1 abiertos (88,8%) están en el área 3000. Áreas 2000 y 8000 sobre 90% de cierre.</a:t>
+              <a:t>586 de 663 P1 abiertos (88,4%) están en el área 3000. Áreas 2000 y 8000 sobre 90% de cierre.</a:t>
             </a:r>
             <a:endParaRPr lang="en-US" sz="1150" dirty="0"/>
           </a:p>
@@ -15209,7 +15209,7 @@
                 <a:ea typeface="Calibri" pitchFamily="34" charset="-122"/>
                 <a:cs typeface="Calibri" pitchFamily="34" charset="-120"/>
               </a:rPr>
-              <a:t>562 P1 abiertos (88,8% del total) y 32 caminatas 100% pendientes. Es la ruta crítica: sin esta área no mejora ningún indicador global.</a:t>
+              <a:t>586 P1 abiertos (88,4% del total) y 32 caminatas 100% pendientes. Es la ruta crítica: sin esta área no mejora ningún indicador global.</a:t>
             </a:r>
             <a:endParaRPr lang="en-US" sz="1150" dirty="0"/>
           </a:p>
@@ -15309,7 +15309,7 @@
                 <a:ea typeface="Calibri" pitchFamily="34" charset="-122"/>
                 <a:cs typeface="Calibri" pitchFamily="34" charset="-120"/>
               </a:rPr>
-              <a:t>Recuperar los 508 P1 vencidos</a:t>
+              <a:t>Recuperar los 533 P1 vencidos</a:t>
             </a:r>
             <a:endParaRPr lang="en-US" sz="1500" dirty="0"/>
           </a:p>
@@ -15351,7 +15351,7 @@
                 <a:ea typeface="Calibri" pitchFamily="34" charset="-122"/>
                 <a:cs typeface="Calibri" pitchFamily="34" charset="-120"/>
               </a:rPr>
-              <a:t>80,3% de los P1 abiertos superó su fecha de vencimiento. Foco en Eléctrica (153), Instrumentación y Control (138), Piping (135).</a:t>
+              <a:t>80,4% de los P1 abiertos superó su fecha de vencimiento. Foco en Piping (156), Eléctrica (155), Instrumentación y Control (139).</a:t>
             </a:r>
             <a:endParaRPr lang="en-US" sz="1150" dirty="0"/>
           </a:p>

--- a/panel_control_TOP_P1/Panel_Control_TOP_P1.pptx
+++ b/panel_control_TOP_P1/Panel_Control_TOP_P1.pptx
@@ -233,7 +233,7 @@
                 <c:formatCode>General</c:formatCode>
                 <c:ptCount val="2"/>
                 <c:pt idx="0">
-                  <c:v>60</c:v>
+                  <c:v>63</c:v>
                 </c:pt>
                 <c:pt idx="1">
                   <c:v>12</c:v>
@@ -311,7 +311,7 @@
                 <c:formatCode>General</c:formatCode>
                 <c:ptCount val="2"/>
                 <c:pt idx="0">
-                  <c:v>19</c:v>
+                  <c:v>16</c:v>
                 </c:pt>
                 <c:pt idx="1">
                   <c:v>3</c:v>
@@ -687,10 +687,10 @@
               <c:numCache>
                 <c:ptCount val="3"/>
                 <c:pt idx="0">
-                  <c:v>1362</c:v>
+                  <c:v>1437</c:v>
                 </c:pt>
                 <c:pt idx="1">
-                  <c:v>663</c:v>
+                  <c:v>619</c:v>
                 </c:pt>
                 <c:pt idx="2">
                   <c:v>0</c:v>
@@ -822,10 +822,10 @@
                 <c:ptCount val="6"/>
                 <c:lvl>
                   <c:pt idx="0">
-                    <c:v>Eléctrica</c:v>
+                    <c:v>Piping</c:v>
                   </c:pt>
                   <c:pt idx="1">
-                    <c:v>Piping</c:v>
+                    <c:v>Eléctrica</c:v>
                   </c:pt>
                   <c:pt idx="2">
                     <c:v>Mecánica</c:v>
@@ -850,10 +850,10 @@
                 <c:formatCode>General</c:formatCode>
                 <c:ptCount val="6"/>
                 <c:pt idx="0">
-                  <c:v>105</c:v>
+                  <c:v>24</c:v>
                 </c:pt>
                 <c:pt idx="1">
-                  <c:v>35</c:v>
+                  <c:v>88</c:v>
                 </c:pt>
                 <c:pt idx="2">
                   <c:v>11</c:v>
@@ -865,7 +865,7 @@
                   <c:v/>
                 </c:pt>
                 <c:pt idx="5">
-                  <c:v>8</c:v>
+                  <c:v>7</c:v>
                 </c:pt>
               </c:numCache>
             </c:numRef>
@@ -924,10 +924,10 @@
                 <c:ptCount val="6"/>
                 <c:lvl>
                   <c:pt idx="0">
-                    <c:v>Eléctrica</c:v>
+                    <c:v>Piping</c:v>
                   </c:pt>
                   <c:pt idx="1">
-                    <c:v>Piping</c:v>
+                    <c:v>Eléctrica</c:v>
                   </c:pt>
                   <c:pt idx="2">
                     <c:v>Mecánica</c:v>
@@ -952,22 +952,22 @@
                 <c:formatCode>General</c:formatCode>
                 <c:ptCount val="6"/>
                 <c:pt idx="0">
-                  <c:v>80</c:v>
+                  <c:v>195</c:v>
                 </c:pt>
                 <c:pt idx="1">
-                  <c:v>126</c:v>
+                  <c:v>45</c:v>
                 </c:pt>
                 <c:pt idx="2">
-                  <c:v>19</c:v>
+                  <c:v>50</c:v>
                 </c:pt>
                 <c:pt idx="3">
                   <c:v>9</c:v>
                 </c:pt>
                 <c:pt idx="4">
-                  <c:v>17</c:v>
+                  <c:v>15</c:v>
                 </c:pt>
                 <c:pt idx="5">
-                  <c:v>4</c:v>
+                  <c:v>3</c:v>
                 </c:pt>
               </c:numCache>
             </c:numRef>
@@ -1340,13 +1340,13 @@
               <c:numCache>
                 <c:ptCount val="3"/>
                 <c:pt idx="0">
-                  <c:v>961</c:v>
+                  <c:v>1080</c:v>
                 </c:pt>
                 <c:pt idx="1">
-                  <c:v>168</c:v>
+                  <c:v>139</c:v>
                 </c:pt>
                 <c:pt idx="2">
-                  <c:v>255</c:v>
+                  <c:v>317</c:v>
                 </c:pt>
               </c:numCache>
             </c:numRef>
@@ -3003,16 +3003,16 @@
                 <c:formatCode>General</c:formatCode>
                 <c:ptCount val="4"/>
                 <c:pt idx="0">
-                  <c:v>35</c:v>
+                  <c:v>33</c:v>
                 </c:pt>
                 <c:pt idx="1">
-                  <c:v>45</c:v>
+                  <c:v>51</c:v>
                 </c:pt>
                 <c:pt idx="2">
                   <c:v>19</c:v>
                 </c:pt>
                 <c:pt idx="3">
-                  <c:v>1</c:v>
+                  <c:v>2</c:v>
                 </c:pt>
               </c:numCache>
             </c:numRef>
@@ -3093,16 +3093,16 @@
                 <c:formatCode>General</c:formatCode>
                 <c:ptCount val="4"/>
                 <c:pt idx="0">
-                  <c:v/>
+                  <c:v>2</c:v>
                 </c:pt>
                 <c:pt idx="1">
-                  <c:v>29</c:v>
+                  <c:v>24</c:v>
                 </c:pt>
                 <c:pt idx="2">
                   <c:v>3</c:v>
                 </c:pt>
                 <c:pt idx="3">
-                  <c:v>1</c:v>
+                  <c:v/>
                 </c:pt>
               </c:numCache>
             </c:numRef>
@@ -3186,7 +3186,7 @@
                   <c:v/>
                 </c:pt>
                 <c:pt idx="1">
-                  <c:v>3</c:v>
+                  <c:v>2</c:v>
                 </c:pt>
                 <c:pt idx="2">
                   <c:v/>
@@ -3651,7 +3651,7 @@
                 <c:formatCode>General</c:formatCode>
                 <c:ptCount val="4"/>
                 <c:pt idx="0">
-                  <c:v>11</c:v>
+                  <c:v>13</c:v>
                 </c:pt>
                 <c:pt idx="1">
                   <c:v>7</c:v>
@@ -3741,7 +3741,7 @@
                 <c:formatCode>General</c:formatCode>
                 <c:ptCount val="4"/>
                 <c:pt idx="0">
-                  <c:v>8</c:v>
+                  <c:v>6</c:v>
                 </c:pt>
                 <c:pt idx="1">
                   <c:v>69</c:v>
@@ -4007,10 +4007,10 @@
                 <c:ptCount val="6"/>
                 <c:lvl>
                   <c:pt idx="0">
-                    <c:v>Piping</c:v>
+                    <c:v>Eléctrica</c:v>
                   </c:pt>
                   <c:pt idx="1">
-                    <c:v>Eléctrica</c:v>
+                    <c:v>Piping</c:v>
                   </c:pt>
                   <c:pt idx="2">
                     <c:v>Instrum. y Control</c:v>
@@ -4019,10 +4019,10 @@
                     <c:v>Mecánica</c:v>
                   </c:pt>
                   <c:pt idx="4">
-                    <c:v>Obras Civiles</c:v>
+                    <c:v>Estructura</c:v>
                   </c:pt>
                   <c:pt idx="5">
-                    <c:v>Estructura</c:v>
+                    <c:v>Obras Civiles</c:v>
                   </c:pt>
                 </c:lvl>
               </c:multiLvlStrCache>
@@ -4035,22 +4035,22 @@
                 <c:formatCode>General</c:formatCode>
                 <c:ptCount val="6"/>
                 <c:pt idx="0">
-                  <c:v>156</c:v>
+                  <c:v>141</c:v>
                 </c:pt>
                 <c:pt idx="1">
-                  <c:v>155</c:v>
+                  <c:v>126</c:v>
                 </c:pt>
                 <c:pt idx="2">
-                  <c:v>139</c:v>
+                  <c:v>133</c:v>
                 </c:pt>
                 <c:pt idx="3">
-                  <c:v>78</c:v>
+                  <c:v>70</c:v>
                 </c:pt>
                 <c:pt idx="4">
-                  <c:v/>
+                  <c:v>7</c:v>
                 </c:pt>
                 <c:pt idx="5">
-                  <c:v>5</c:v>
+                  <c:v/>
                 </c:pt>
               </c:numCache>
             </c:numRef>
@@ -4109,10 +4109,10 @@
                 <c:ptCount val="6"/>
                 <c:lvl>
                   <c:pt idx="0">
-                    <c:v>Piping</c:v>
+                    <c:v>Eléctrica</c:v>
                   </c:pt>
                   <c:pt idx="1">
-                    <c:v>Eléctrica</c:v>
+                    <c:v>Piping</c:v>
                   </c:pt>
                   <c:pt idx="2">
                     <c:v>Instrum. y Control</c:v>
@@ -4121,10 +4121,10 @@
                     <c:v>Mecánica</c:v>
                   </c:pt>
                   <c:pt idx="4">
-                    <c:v>Obras Civiles</c:v>
+                    <c:v>Estructura</c:v>
                   </c:pt>
                   <c:pt idx="5">
-                    <c:v>Estructura</c:v>
+                    <c:v>Obras Civiles</c:v>
                   </c:pt>
                 </c:lvl>
               </c:multiLvlStrCache>
@@ -4137,22 +4137,22 @@
                 <c:formatCode>General</c:formatCode>
                 <c:ptCount val="6"/>
                 <c:pt idx="0">
-                  <c:v>33</c:v>
+                  <c:v>43</c:v>
                 </c:pt>
                 <c:pt idx="1">
-                  <c:v>34</c:v>
+                  <c:v>28</c:v>
                 </c:pt>
                 <c:pt idx="2">
-                  <c:v>24</c:v>
+                  <c:v>21</c:v>
                 </c:pt>
                 <c:pt idx="3">
-                  <c:v>15</c:v>
+                  <c:v>20</c:v>
                 </c:pt>
                 <c:pt idx="4">
-                  <c:v>17</c:v>
+                  <c:v>13</c:v>
                 </c:pt>
                 <c:pt idx="5">
-                  <c:v>7</c:v>
+                  <c:v>17</c:v>
                 </c:pt>
               </c:numCache>
             </c:numRef>
@@ -6787,7 +6787,7 @@
                 <a:ea typeface="Cambria" pitchFamily="34" charset="-122"/>
                 <a:cs typeface="Cambria" pitchFamily="34" charset="-120"/>
               </a:rPr>
-              <a:t>75,9%</a:t>
+              <a:t>79,7%</a:t>
             </a:r>
             <a:endParaRPr lang="en-US" sz="3400" dirty="0"/>
           </a:p>
@@ -6943,7 +6943,7 @@
                 <a:ea typeface="Cambria" pitchFamily="34" charset="-122"/>
                 <a:cs typeface="Cambria" pitchFamily="34" charset="-120"/>
               </a:rPr>
-              <a:t>56,8%</a:t>
+              <a:t>61,1%</a:t>
             </a:r>
             <a:endParaRPr lang="en-US" sz="3400" dirty="0"/>
           </a:p>
@@ -7021,7 +7021,7 @@
                 <a:ea typeface="Cambria" pitchFamily="34" charset="-122"/>
                 <a:cs typeface="Cambria" pitchFamily="34" charset="-120"/>
               </a:rPr>
-              <a:t>69,4%</a:t>
+              <a:t>70,3%</a:t>
             </a:r>
             <a:endParaRPr lang="en-US" sz="3400" dirty="0"/>
           </a:p>
@@ -7099,7 +7099,7 @@
                 <a:ea typeface="Calibri" pitchFamily="34" charset="-122"/>
                 <a:cs typeface="Calibri" pitchFamily="34" charset="-120"/>
               </a:rPr>
-              <a:t>Corte: 15-09-2026</a:t>
+              <a:t>Corte: 22-09-2026</a:t>
             </a:r>
             <a:endParaRPr lang="en-US" sz="1100" dirty="0"/>
           </a:p>
@@ -7138,7 +7138,7 @@
                 <a:ea typeface="Calibri" pitchFamily="34" charset="-122"/>
                 <a:cs typeface="Calibri" pitchFamily="34" charset="-120"/>
               </a:rPr>
-              <a:t>Fuente: REPORTE_GERENCIAL + Listado de Puntos Punch Consolidado · Corte 15-09-2026 · Atrasos al 21-09-2026</a:t>
+              <a:t>Fuente: REPORTE_GERENCIAL + Listado de Puntos Punch Consolidado · Corte 22-09-2026 · Atrasos al 28-09-2026</a:t>
             </a:r>
             <a:endParaRPr lang="en-US" sz="850" dirty="0"/>
           </a:p>
@@ -8291,7 +8291,7 @@
                 <a:ea typeface="Calibri" pitchFamily="34" charset="-122"/>
                 <a:cs typeface="Calibri" pitchFamily="34" charset="-120"/>
               </a:rPr>
-              <a:t>136 subsistemas en 4 áreas (2000 · 3000 · 4000 · 8000) · 3.050 detalles de terminación levantados.</a:t>
+              <a:t>136 subsistemas en 4 áreas (2000 · 3000 · 4000 · 8000) · 3.106 detalles de terminación levantados.</a:t>
             </a:r>
             <a:endParaRPr lang="en-US" sz="1350" dirty="0"/>
           </a:p>
@@ -8428,7 +8428,7 @@
                 <a:ea typeface="Cambria" pitchFamily="34" charset="-122"/>
                 <a:cs typeface="Cambria" pitchFamily="34" charset="-120"/>
               </a:rPr>
-              <a:t>73,5%</a:t>
+              <a:t>77,2%</a:t>
             </a:r>
             <a:endParaRPr lang="en-US" sz="3400" dirty="0"/>
           </a:p>
@@ -8506,7 +8506,7 @@
                 <a:ea typeface="Cambria" pitchFamily="34" charset="-122"/>
                 <a:cs typeface="Cambria" pitchFamily="34" charset="-120"/>
               </a:rPr>
-              <a:t>27,2%</a:t>
+              <a:t>28,7%</a:t>
             </a:r>
             <a:endParaRPr lang="en-US" sz="3400" dirty="0"/>
           </a:p>
@@ -8584,7 +8584,7 @@
                 <a:ea typeface="Cambria" pitchFamily="34" charset="-122"/>
                 <a:cs typeface="Cambria" pitchFamily="34" charset="-120"/>
               </a:rPr>
-              <a:t>67,3%</a:t>
+              <a:t>69,9%</a:t>
             </a:r>
             <a:endParaRPr lang="en-US" sz="3400" dirty="0"/>
           </a:p>
@@ -8662,7 +8662,7 @@
                 <a:ea typeface="Calibri" pitchFamily="34" charset="-122"/>
                 <a:cs typeface="Calibri" pitchFamily="34" charset="-120"/>
               </a:rPr>
-              <a:t>Corte: 21-09-2026   ·   Corte anterior: 19-09-2026</a:t>
+              <a:t>Corte: 28-09-2026   ·   Corte anterior: 21-09-2026</a:t>
             </a:r>
             <a:endParaRPr lang="en-US" sz="1100" dirty="0"/>
           </a:p>
@@ -8701,7 +8701,7 @@
                 <a:ea typeface="Calibri" pitchFamily="34" charset="-122"/>
                 <a:cs typeface="Calibri" pitchFamily="34" charset="-120"/>
               </a:rPr>
-              <a:t>Fuente: Estatus_Resumen_General_QAQC.xlsx · Corte 21-09-2026 · Áreas 2000/3000/4000/8000</a:t>
+              <a:t>Fuente: Estatus_Resumen_General_QAQC.xlsx · Corte 28-09-2026 · Áreas 2000/3000/4000/8000</a:t>
             </a:r>
             <a:endParaRPr lang="en-US" sz="850" dirty="0"/>
           </a:p>
@@ -9177,7 +9177,7 @@
                 <a:ea typeface="Cambria" pitchFamily="34" charset="-122"/>
                 <a:cs typeface="Cambria" pitchFamily="34" charset="-120"/>
               </a:rPr>
-              <a:t>73,5%</a:t>
+              <a:t>77,2%</a:t>
             </a:r>
             <a:endParaRPr lang="en-US" sz="4000" dirty="0"/>
           </a:p>
@@ -9216,7 +9216,7 @@
                 <a:ea typeface="Calibri" pitchFamily="34" charset="-122"/>
                 <a:cs typeface="Calibri" pitchFamily="34" charset="-120"/>
               </a:rPr>
-              <a:t>100/136</a:t>
+              <a:t>105/136</a:t>
             </a:r>
             <a:endParaRPr lang="en-US" sz="1400" dirty="0"/>
           </a:p>
@@ -9294,7 +9294,7 @@
                 <a:ea typeface="Calibri" pitchFamily="34" charset="-122"/>
                 <a:cs typeface="Calibri" pitchFamily="34" charset="-120"/>
               </a:rPr>
-              <a:t>33 próximas · 3 por programar</a:t>
+              <a:t>29 próximas · 2 por programar</a:t>
             </a:r>
             <a:endParaRPr lang="en-US" sz="950" dirty="0"/>
           </a:p>
@@ -9426,7 +9426,7 @@
                 <a:ea typeface="Cambria" pitchFamily="34" charset="-122"/>
                 <a:cs typeface="Cambria" pitchFamily="34" charset="-120"/>
               </a:rPr>
-              <a:t>27,2%</a:t>
+              <a:t>28,7%</a:t>
             </a:r>
             <a:endParaRPr lang="en-US" sz="4000" dirty="0"/>
           </a:p>
@@ -9465,7 +9465,7 @@
                 <a:ea typeface="Calibri" pitchFamily="34" charset="-122"/>
                 <a:cs typeface="Calibri" pitchFamily="34" charset="-120"/>
               </a:rPr>
-              <a:t>37/136</a:t>
+              <a:t>39/136</a:t>
             </a:r>
             <a:endParaRPr lang="en-US" sz="1400" dirty="0"/>
           </a:p>
@@ -9543,7 +9543,7 @@
                 <a:ea typeface="Calibri" pitchFamily="34" charset="-122"/>
                 <a:cs typeface="Calibri" pitchFamily="34" charset="-120"/>
               </a:rPr>
-              <a:t>0 aprobadas · 19 rechazadas · 17 en revisión · 1 observadas</a:t>
+              <a:t>0 aprobadas · 21 rechazadas · 17 en revisión · 1 observadas</a:t>
             </a:r>
             <a:endParaRPr lang="en-US" sz="950" dirty="0"/>
           </a:p>
@@ -9576,13 +9576,13 @@
             <a:r>
               <a:rPr lang="en-US" sz="900" b="1" dirty="0">
                 <a:solidFill>
-                  <a:srgbClr val="56606E"/>
-                </a:solidFill>
-                <a:latin typeface="Calibri" pitchFamily="34" charset="0"/>
-                <a:ea typeface="Calibri" pitchFamily="34" charset="-122"/>
-                <a:cs typeface="Calibri" pitchFamily="34" charset="-120"/>
-              </a:rPr>
-              <a:t>= sin cambio vs. corte anterior</a:t>
+                  <a:srgbClr val="1F7A44"/>
+                </a:solidFill>
+                <a:latin typeface="Calibri" pitchFamily="34" charset="0"/>
+                <a:ea typeface="Calibri" pitchFamily="34" charset="-122"/>
+                <a:cs typeface="Calibri" pitchFamily="34" charset="-120"/>
+              </a:rPr>
+              <a:t>▲ +2 vs. corte anterior</a:t>
             </a:r>
             <a:endParaRPr lang="en-US" sz="900" dirty="0"/>
           </a:p>
@@ -9675,7 +9675,7 @@
                 <a:ea typeface="Cambria" pitchFamily="34" charset="-122"/>
                 <a:cs typeface="Cambria" pitchFamily="34" charset="-120"/>
               </a:rPr>
-              <a:t>67,3%</a:t>
+              <a:t>69,9%</a:t>
             </a:r>
             <a:endParaRPr lang="en-US" sz="4000" dirty="0"/>
           </a:p>
@@ -9714,7 +9714,7 @@
                 <a:ea typeface="Calibri" pitchFamily="34" charset="-122"/>
                 <a:cs typeface="Calibri" pitchFamily="34" charset="-120"/>
               </a:rPr>
-              <a:t>1.362/2.025</a:t>
+              <a:t>1.437/2.056</a:t>
             </a:r>
             <a:endParaRPr lang="en-US" sz="1400" dirty="0"/>
           </a:p>
@@ -9792,7 +9792,7 @@
                 <a:ea typeface="Calibri" pitchFamily="34" charset="-122"/>
                 <a:cs typeface="Calibri" pitchFamily="34" charset="-120"/>
               </a:rPr>
-              <a:t>663 abiertos · 533 vencidos</a:t>
+              <a:t>619 abiertos · 477 vencidos</a:t>
             </a:r>
             <a:endParaRPr lang="en-US" sz="950" dirty="0"/>
           </a:p>
@@ -9831,7 +9831,7 @@
                 <a:ea typeface="Calibri" pitchFamily="34" charset="-122"/>
                 <a:cs typeface="Calibri" pitchFamily="34" charset="-120"/>
               </a:rPr>
-              <a:t>▲ +46 vs. corte anterior</a:t>
+              <a:t>▲ +75 vs. corte anterior</a:t>
             </a:r>
             <a:endParaRPr lang="en-US" sz="900" dirty="0"/>
           </a:p>
@@ -9954,7 +9954,7 @@
                 <a:ea typeface="Calibri" pitchFamily="34" charset="-122"/>
                 <a:cs typeface="Calibri" pitchFamily="34" charset="-120"/>
               </a:rPr>
-              <a:t>Avance de caminatas al 100%.  </a:t>
+              <a:t>Se destrabó la programación de caminatas, pero no la ejecución.  </a:t>
             </a:r>
             <a:pPr indent="0" marL="0">
               <a:lnSpc>
@@ -9971,7 +9971,7 @@
                 <a:ea typeface="Calibri" pitchFamily="34" charset="-122"/>
                 <a:cs typeface="Calibri" pitchFamily="34" charset="-120"/>
               </a:rPr>
-              <a:t>100 de 136 realizadas (73,5%); 33 próximas y 3 por programar.</a:t>
+              <a:t>Los subsistemas «por programar» bajaron de 3 a 2, mientras las realizadas al 100% se mantienen en 105 (77,2%).</a:t>
             </a:r>
             <a:endParaRPr lang="en-US" sz="1250" dirty="0"/>
           </a:p>
@@ -10033,7 +10033,7 @@
                 <a:ea typeface="Calibri" pitchFamily="34" charset="-122"/>
                 <a:cs typeface="Calibri" pitchFamily="34" charset="-120"/>
               </a:rPr>
-              <a:t>Las carpetas TOP siguen sin aprobaciones.  </a:t>
+              <a:t>Las carpetas TOP siguen sin aprobaciones y suben los rechazos.  </a:t>
             </a:r>
             <a:pPr indent="0" marL="0">
               <a:lnSpc>
@@ -10050,7 +10050,7 @@
                 <a:ea typeface="Calibri" pitchFamily="34" charset="-122"/>
                 <a:cs typeface="Calibri" pitchFamily="34" charset="-120"/>
               </a:rPr>
-              <a:t>37 entregadas de 136 (27,2%) y 0 aprobadas; 19 rechazadas.</a:t>
+              <a:t>39 entregadas de 136 (28,7%) y 0 aprobadas; las rechazadas pasaron de 19 a 21.</a:t>
             </a:r>
             <a:endParaRPr lang="en-US" sz="1250" dirty="0"/>
           </a:p>
@@ -10129,7 +10129,7 @@
                 <a:ea typeface="Calibri" pitchFamily="34" charset="-122"/>
                 <a:cs typeface="Calibri" pitchFamily="34" charset="-120"/>
               </a:rPr>
-              <a:t>+46 P1 cerrado desde el corte anterior; 663 abiertos, de los cuales 533 superaron su fecha de vencimiento. El área 3000 concentra 586 (88,4%).</a:t>
+              <a:t>+75 P1 cerrado desde el corte anterior; 619 abiertos, de los cuales 477 superaron su fecha de vencimiento. El área 3000 concentra 543 (87,7%).</a:t>
             </a:r>
             <a:endParaRPr lang="en-US" sz="1250" dirty="0"/>
           </a:p>
@@ -10168,7 +10168,7 @@
                 <a:ea typeface="Calibri" pitchFamily="34" charset="-122"/>
                 <a:cs typeface="Calibri" pitchFamily="34" charset="-120"/>
               </a:rPr>
-              <a:t>Fuente: Estatus_Resumen_General_QAQC.xlsx · Corte 21-09-2026 · Áreas 2000/3000/4000/8000</a:t>
+              <a:t>Fuente: Estatus_Resumen_General_QAQC.xlsx · Corte 28-09-2026 · Áreas 2000/3000/4000/8000</a:t>
             </a:r>
             <a:endParaRPr lang="en-US" sz="850" dirty="0"/>
           </a:p>
@@ -10832,7 +10832,7 @@
                 <a:ea typeface="Calibri" pitchFamily="34" charset="-122"/>
                 <a:cs typeface="Calibri" pitchFamily="34" charset="-120"/>
               </a:rPr>
-              <a:t>35/35 · 100%</a:t>
+              <a:t>33/35 · 94,3%</a:t>
             </a:r>
             <a:endParaRPr lang="en-US" sz="1300" dirty="0"/>
           </a:p>
@@ -10871,7 +10871,7 @@
                 <a:ea typeface="Calibri" pitchFamily="34" charset="-122"/>
                 <a:cs typeface="Calibri" pitchFamily="34" charset="-120"/>
               </a:rPr>
-              <a:t>27/35 · 77,1%</a:t>
+              <a:t>29/35 · 82,9%</a:t>
             </a:r>
             <a:endParaRPr lang="en-US" sz="1300" dirty="0"/>
           </a:p>
@@ -10910,7 +10910,7 @@
                 <a:ea typeface="Calibri" pitchFamily="34" charset="-122"/>
                 <a:cs typeface="Calibri" pitchFamily="34" charset="-120"/>
               </a:rPr>
-              <a:t>99,1%</a:t>
+              <a:t>100%</a:t>
             </a:r>
             <a:endParaRPr lang="en-US" sz="1300" dirty="0"/>
           </a:p>
@@ -10949,7 +10949,7 @@
                 <a:ea typeface="Calibri" pitchFamily="34" charset="-122"/>
                 <a:cs typeface="Calibri" pitchFamily="34" charset="-120"/>
               </a:rPr>
-              <a:t>5 (3)</a:t>
+              <a:t>0 (0)</a:t>
             </a:r>
             <a:endParaRPr lang="en-US" sz="1300" dirty="0"/>
           </a:p>
@@ -11209,7 +11209,7 @@
                 <a:ea typeface="Calibri" pitchFamily="34" charset="-122"/>
                 <a:cs typeface="Calibri" pitchFamily="34" charset="-120"/>
               </a:rPr>
-              <a:t>45/77 · 58,4%</a:t>
+              <a:t>51/77 · 66,2%</a:t>
             </a:r>
             <a:endParaRPr lang="en-US" sz="1300" dirty="0"/>
           </a:p>
@@ -11287,7 +11287,7 @@
                 <a:ea typeface="Calibri" pitchFamily="34" charset="-122"/>
                 <a:cs typeface="Calibri" pitchFamily="34" charset="-120"/>
               </a:rPr>
-              <a:t>44,1%</a:t>
+              <a:t>49,3%</a:t>
             </a:r>
             <a:endParaRPr lang="en-US" sz="1300" dirty="0"/>
           </a:p>
@@ -11326,7 +11326,7 @@
                 <a:ea typeface="Calibri" pitchFamily="34" charset="-122"/>
                 <a:cs typeface="Calibri" pitchFamily="34" charset="-120"/>
               </a:rPr>
-              <a:t>586 (503)</a:t>
+              <a:t>543 (450)</a:t>
             </a:r>
             <a:endParaRPr lang="en-US" sz="1300" dirty="0"/>
           </a:p>
@@ -11644,7 +11644,7 @@
                 <a:ea typeface="Calibri" pitchFamily="34" charset="-122"/>
                 <a:cs typeface="Calibri" pitchFamily="34" charset="-120"/>
               </a:rPr>
-              <a:t>86,3%</a:t>
+              <a:t>87,7%</a:t>
             </a:r>
             <a:endParaRPr lang="en-US" sz="1300" dirty="0"/>
           </a:p>
@@ -11683,7 +11683,7 @@
                 <a:ea typeface="Calibri" pitchFamily="34" charset="-122"/>
                 <a:cs typeface="Calibri" pitchFamily="34" charset="-120"/>
               </a:rPr>
-              <a:t>49 (26)</a:t>
+              <a:t>45 (25)</a:t>
             </a:r>
             <a:endParaRPr lang="en-US" sz="1300" dirty="0"/>
           </a:p>
@@ -11943,7 +11943,7 @@
                 <a:ea typeface="Calibri" pitchFamily="34" charset="-122"/>
                 <a:cs typeface="Calibri" pitchFamily="34" charset="-120"/>
               </a:rPr>
-              <a:t>1/2 · 50%</a:t>
+              <a:t>2/2 · 100%</a:t>
             </a:r>
             <a:endParaRPr lang="en-US" sz="1300" dirty="0"/>
           </a:p>
@@ -12021,7 +12021,7 @@
                 <a:ea typeface="Calibri" pitchFamily="34" charset="-122"/>
                 <a:cs typeface="Calibri" pitchFamily="34" charset="-120"/>
               </a:rPr>
-              <a:t>100%</a:t>
+              <a:t>85,7%</a:t>
             </a:r>
             <a:endParaRPr lang="en-US" sz="1300" dirty="0"/>
           </a:p>
@@ -12060,7 +12060,7 @@
                 <a:ea typeface="Calibri" pitchFamily="34" charset="-122"/>
                 <a:cs typeface="Calibri" pitchFamily="34" charset="-120"/>
               </a:rPr>
-              <a:t>0 (0)</a:t>
+              <a:t>2 (2)</a:t>
             </a:r>
             <a:endParaRPr lang="en-US" sz="1300" dirty="0"/>
           </a:p>
@@ -12083,7 +12083,7 @@
             </a:avLst>
           </a:prstGeom>
           <a:solidFill>
-            <a:srgbClr val="C0392B"/>
+            <a:srgbClr val="E0A32E"/>
           </a:solidFill>
           <a:ln/>
         </p:spPr>
@@ -12121,7 +12121,7 @@
                 <a:ea typeface="Calibri" pitchFamily="34" charset="-122"/>
                 <a:cs typeface="Calibri" pitchFamily="34" charset="-120"/>
               </a:rPr>
-              <a:t>Crítico</a:t>
+              <a:t>Atención</a:t>
             </a:r>
             <a:endParaRPr lang="en-US" sz="1050" dirty="0"/>
           </a:p>
@@ -12222,7 +12222,7 @@
                 <a:ea typeface="Calibri" pitchFamily="34" charset="-122"/>
                 <a:cs typeface="Calibri" pitchFamily="34" charset="-120"/>
               </a:rPr>
-              <a:t>Fuente: Estatus_Resumen_General_QAQC.xlsx · Corte 21-09-2026 · Áreas 2000/3000/4000/8000</a:t>
+              <a:t>Fuente: Estatus_Resumen_General_QAQC.xlsx · Corte 28-09-2026 · Áreas 2000/3000/4000/8000</a:t>
             </a:r>
             <a:endParaRPr lang="en-US" sz="850" dirty="0"/>
           </a:p>
@@ -12473,7 +12473,7 @@
                 <a:ea typeface="Calibri" pitchFamily="34" charset="-122"/>
                 <a:cs typeface="Calibri" pitchFamily="34" charset="-120"/>
               </a:rPr>
-              <a:t>Las caminatas al 80% están cerradas en todas las áreas (136/136). El hito 100% avanza a 73,5%, y el área 3000 concentra 32 de los 36 subsistemas pendientes.</a:t>
+              <a:t>Las caminatas al 80% están cerradas en todas las áreas (136/136). El hito 100% avanza a 77,2%, y el área 3000 concentra 26 de los 31 subsistemas pendientes.</a:t>
             </a:r>
             <a:endParaRPr lang="en-US" sz="1350" dirty="0"/>
           </a:p>
@@ -12729,7 +12729,7 @@
                 <a:ea typeface="Cambria" pitchFamily="34" charset="-122"/>
                 <a:cs typeface="Cambria" pitchFamily="34" charset="-120"/>
               </a:rPr>
-              <a:t>73,5%</a:t>
+              <a:t>77,2%</a:t>
             </a:r>
             <a:endParaRPr lang="en-US" sz="4000" dirty="0"/>
           </a:p>
@@ -12768,7 +12768,7 @@
                 <a:ea typeface="Calibri" pitchFamily="34" charset="-122"/>
                 <a:cs typeface="Calibri" pitchFamily="34" charset="-120"/>
               </a:rPr>
-              <a:t>100 realizadas · 36 pendientes</a:t>
+              <a:t>105 realizadas · 31 pendientes</a:t>
             </a:r>
             <a:endParaRPr lang="en-US" sz="1200" dirty="0"/>
           </a:p>
@@ -12827,7 +12827,7 @@
                 <a:ea typeface="Calibri" pitchFamily="34" charset="-122"/>
                 <a:cs typeface="Calibri" pitchFamily="34" charset="-120"/>
               </a:rPr>
-              <a:t>33 próximas a realizar y 3 por programar.</a:t>
+              <a:t>29 próximas a realizar y 2 por programar. Las «por programar» bajaron 1 en el período.</a:t>
             </a:r>
             <a:endParaRPr lang="en-US" sz="1150" dirty="0"/>
           </a:p>
@@ -12866,7 +12866,7 @@
                 <a:ea typeface="Calibri" pitchFamily="34" charset="-122"/>
                 <a:cs typeface="Calibri" pitchFamily="34" charset="-120"/>
               </a:rPr>
-              <a:t>Fuente: Estatus_Resumen_General_QAQC.xlsx · Corte 21-09-2026 · Áreas 2000/3000/4000/8000</a:t>
+              <a:t>Fuente: Estatus_Resumen_General_QAQC.xlsx · Corte 28-09-2026 · Áreas 2000/3000/4000/8000</a:t>
             </a:r>
             <a:endParaRPr lang="en-US" sz="850" dirty="0"/>
           </a:p>
@@ -13117,7 +13117,7 @@
                 <a:ea typeface="Calibri" pitchFamily="34" charset="-122"/>
                 <a:cs typeface="Calibri" pitchFamily="34" charset="-120"/>
               </a:rPr>
-              <a:t>37 carpetas entregadas de 136 (27,2%). Ninguna aprobada aún: el flujo se acumula en revisión y hay 19 rechazos que requieren rearmado.</a:t>
+              <a:t>39 carpetas entregadas de 136 (28,7%). Ninguna aprobada aún: el flujo se acumula en revisión y hay 21 rechazos que requieren rearmado.</a:t>
             </a:r>
             <a:endParaRPr lang="en-US" sz="1350" dirty="0"/>
           </a:p>
@@ -13294,6 +13294,45 @@
         </p:nvSpPr>
         <p:spPr>
           <a:xfrm>
+            <a:off x="9509760" y="2450592"/>
+            <a:ext cx="914400" cy="566928"/>
+          </a:xfrm>
+          <a:prstGeom prst="rect">
+            <a:avLst/>
+          </a:prstGeom>
+          <a:noFill/>
+          <a:ln/>
+        </p:spPr>
+        <p:txBody>
+          <a:bodyPr wrap="square" lIns="0" tIns="0" rIns="0" bIns="0" rtlCol="0" anchor="ctr"/>
+          <a:lstStyle/>
+          <a:p>
+            <a:pPr algn="r" indent="0" marL="0">
+              <a:buNone/>
+            </a:pPr>
+            <a:r>
+              <a:rPr lang="en-US" sz="950" b="1" dirty="0">
+                <a:solidFill>
+                  <a:srgbClr val="1F7A44"/>
+                </a:solidFill>
+                <a:latin typeface="Calibri" pitchFamily="34" charset="0"/>
+                <a:ea typeface="Calibri" pitchFamily="34" charset="-122"/>
+                <a:cs typeface="Calibri" pitchFamily="34" charset="-120"/>
+              </a:rPr>
+              <a:t>▲ +2</a:t>
+            </a:r>
+            <a:endParaRPr lang="en-US" sz="950" dirty="0"/>
+          </a:p>
+        </p:txBody>
+      </p:sp>
+      <p:sp>
+        <p:nvSpPr>
+          <p:cNvPr id="13" name="Text 9"/>
+          <p:cNvSpPr/>
+          <p:nvPr/>
+        </p:nvSpPr>
+        <p:spPr>
+          <a:xfrm>
             <a:off x="10469880" y="2450592"/>
             <a:ext cx="868680" cy="566928"/>
           </a:xfrm>
@@ -13319,7 +13358,7 @@
                 <a:ea typeface="Cambria" pitchFamily="34" charset="-122"/>
                 <a:cs typeface="Cambria" pitchFamily="34" charset="-120"/>
               </a:rPr>
-              <a:t>37</a:t>
+              <a:t>39</a:t>
             </a:r>
             <a:endParaRPr lang="en-US" sz="2200" dirty="0"/>
           </a:p>
@@ -13327,7 +13366,7 @@
       </p:sp>
       <p:sp>
         <p:nvSpPr>
-          <p:cNvPr id="13" name="Shape 9"/>
+          <p:cNvPr id="14" name="Shape 10"/>
           <p:cNvSpPr/>
           <p:nvPr/>
         </p:nvSpPr>
@@ -13349,7 +13388,7 @@
       </p:sp>
       <p:sp>
         <p:nvSpPr>
-          <p:cNvPr id="14" name="Shape 10"/>
+          <p:cNvPr id="15" name="Shape 11"/>
           <p:cNvSpPr/>
           <p:nvPr/>
         </p:nvSpPr>
@@ -13369,7 +13408,7 @@
       </p:sp>
       <p:sp>
         <p:nvSpPr>
-          <p:cNvPr id="15" name="Text 11"/>
+          <p:cNvPr id="16" name="Text 12"/>
           <p:cNvSpPr/>
           <p:nvPr/>
         </p:nvSpPr>
@@ -13408,7 +13447,7 @@
       </p:sp>
       <p:sp>
         <p:nvSpPr>
-          <p:cNvPr id="16" name="Text 12"/>
+          <p:cNvPr id="17" name="Text 13"/>
           <p:cNvSpPr/>
           <p:nvPr/>
         </p:nvSpPr>
@@ -13447,7 +13486,7 @@
       </p:sp>
       <p:sp>
         <p:nvSpPr>
-          <p:cNvPr id="17" name="Shape 13"/>
+          <p:cNvPr id="18" name="Shape 14"/>
           <p:cNvSpPr/>
           <p:nvPr/>
         </p:nvSpPr>
@@ -13469,7 +13508,7 @@
       </p:sp>
       <p:sp>
         <p:nvSpPr>
-          <p:cNvPr id="18" name="Shape 14"/>
+          <p:cNvPr id="19" name="Shape 15"/>
           <p:cNvSpPr/>
           <p:nvPr/>
         </p:nvSpPr>
@@ -13489,7 +13528,7 @@
       </p:sp>
       <p:sp>
         <p:nvSpPr>
-          <p:cNvPr id="19" name="Text 15"/>
+          <p:cNvPr id="20" name="Text 16"/>
           <p:cNvSpPr/>
           <p:nvPr/>
         </p:nvSpPr>
@@ -13528,7 +13567,7 @@
       </p:sp>
       <p:sp>
         <p:nvSpPr>
-          <p:cNvPr id="20" name="Text 16"/>
+          <p:cNvPr id="21" name="Text 17"/>
           <p:cNvSpPr/>
           <p:nvPr/>
         </p:nvSpPr>
@@ -13567,7 +13606,7 @@
       </p:sp>
       <p:sp>
         <p:nvSpPr>
-          <p:cNvPr id="21" name="Shape 17"/>
+          <p:cNvPr id="22" name="Shape 18"/>
           <p:cNvSpPr/>
           <p:nvPr/>
         </p:nvSpPr>
@@ -13589,7 +13628,7 @@
       </p:sp>
       <p:sp>
         <p:nvSpPr>
-          <p:cNvPr id="22" name="Shape 18"/>
+          <p:cNvPr id="23" name="Shape 19"/>
           <p:cNvSpPr/>
           <p:nvPr/>
         </p:nvSpPr>
@@ -13609,7 +13648,7 @@
       </p:sp>
       <p:sp>
         <p:nvSpPr>
-          <p:cNvPr id="23" name="Text 19"/>
+          <p:cNvPr id="24" name="Text 20"/>
           <p:cNvSpPr/>
           <p:nvPr/>
         </p:nvSpPr>
@@ -13648,7 +13687,46 @@
       </p:sp>
       <p:sp>
         <p:nvSpPr>
-          <p:cNvPr id="24" name="Text 20"/>
+          <p:cNvPr id="25" name="Text 21"/>
+          <p:cNvSpPr/>
+          <p:nvPr/>
+        </p:nvSpPr>
+        <p:spPr>
+          <a:xfrm>
+            <a:off x="9509760" y="4315968"/>
+            <a:ext cx="914400" cy="566928"/>
+          </a:xfrm>
+          <a:prstGeom prst="rect">
+            <a:avLst/>
+          </a:prstGeom>
+          <a:noFill/>
+          <a:ln/>
+        </p:spPr>
+        <p:txBody>
+          <a:bodyPr wrap="square" lIns="0" tIns="0" rIns="0" bIns="0" rtlCol="0" anchor="ctr"/>
+          <a:lstStyle/>
+          <a:p>
+            <a:pPr algn="r" indent="0" marL="0">
+              <a:buNone/>
+            </a:pPr>
+            <a:r>
+              <a:rPr lang="en-US" sz="950" b="1" dirty="0">
+                <a:solidFill>
+                  <a:srgbClr val="C0392B"/>
+                </a:solidFill>
+                <a:latin typeface="Calibri" pitchFamily="34" charset="0"/>
+                <a:ea typeface="Calibri" pitchFamily="34" charset="-122"/>
+                <a:cs typeface="Calibri" pitchFamily="34" charset="-120"/>
+              </a:rPr>
+              <a:t>▲ +2</a:t>
+            </a:r>
+            <a:endParaRPr lang="en-US" sz="950" dirty="0"/>
+          </a:p>
+        </p:txBody>
+      </p:sp>
+      <p:sp>
+        <p:nvSpPr>
+          <p:cNvPr id="26" name="Text 22"/>
           <p:cNvSpPr/>
           <p:nvPr/>
         </p:nvSpPr>
@@ -13679,7 +13757,7 @@
                 <a:ea typeface="Cambria" pitchFamily="34" charset="-122"/>
                 <a:cs typeface="Cambria" pitchFamily="34" charset="-120"/>
               </a:rPr>
-              <a:t>19</a:t>
+              <a:t>21</a:t>
             </a:r>
             <a:endParaRPr lang="en-US" sz="2200" dirty="0"/>
           </a:p>
@@ -13687,7 +13765,7 @@
       </p:sp>
       <p:sp>
         <p:nvSpPr>
-          <p:cNvPr id="25" name="Shape 21"/>
+          <p:cNvPr id="27" name="Shape 23"/>
           <p:cNvSpPr/>
           <p:nvPr/>
         </p:nvSpPr>
@@ -13709,7 +13787,7 @@
       </p:sp>
       <p:sp>
         <p:nvSpPr>
-          <p:cNvPr id="26" name="Shape 22"/>
+          <p:cNvPr id="28" name="Shape 24"/>
           <p:cNvSpPr/>
           <p:nvPr/>
         </p:nvSpPr>
@@ -13729,7 +13807,7 @@
       </p:sp>
       <p:sp>
         <p:nvSpPr>
-          <p:cNvPr id="27" name="Text 23"/>
+          <p:cNvPr id="29" name="Text 25"/>
           <p:cNvSpPr/>
           <p:nvPr/>
         </p:nvSpPr>
@@ -13768,7 +13846,7 @@
       </p:sp>
       <p:sp>
         <p:nvSpPr>
-          <p:cNvPr id="28" name="Text 24"/>
+          <p:cNvPr id="30" name="Text 26"/>
           <p:cNvSpPr/>
           <p:nvPr/>
         </p:nvSpPr>
@@ -13807,7 +13885,7 @@
       </p:sp>
       <p:sp>
         <p:nvSpPr>
-          <p:cNvPr id="29" name="Text 25"/>
+          <p:cNvPr id="31" name="Text 27"/>
           <p:cNvSpPr/>
           <p:nvPr/>
         </p:nvSpPr>
@@ -13846,7 +13924,7 @@
       </p:sp>
       <p:sp>
         <p:nvSpPr>
-          <p:cNvPr id="30" name="Text 26"/>
+          <p:cNvPr id="32" name="Text 28"/>
           <p:cNvSpPr/>
           <p:nvPr/>
         </p:nvSpPr>
@@ -13877,7 +13955,7 @@
                 <a:ea typeface="Calibri" pitchFamily="34" charset="-122"/>
                 <a:cs typeface="Calibri" pitchFamily="34" charset="-120"/>
               </a:rPr>
-              <a:t>Fuente: Estatus_Resumen_General_QAQC.xlsx · Corte 21-09-2026 · Áreas 2000/3000/4000/8000</a:t>
+              <a:t>Fuente: Estatus_Resumen_General_QAQC.xlsx · Corte 28-09-2026 · Áreas 2000/3000/4000/8000</a:t>
             </a:r>
             <a:endParaRPr lang="en-US" sz="850" dirty="0"/>
           </a:p>
@@ -13885,7 +13963,7 @@
       </p:sp>
       <p:sp>
         <p:nvSpPr>
-          <p:cNvPr id="31" name="Text 27"/>
+          <p:cNvPr id="33" name="Text 29"/>
           <p:cNvSpPr/>
           <p:nvPr/>
         </p:nvSpPr>
@@ -13924,7 +14002,7 @@
       </p:sp>
       <p:sp>
         <p:nvSpPr>
-          <p:cNvPr id="32" name="Text 28"/>
+          <p:cNvPr id="34" name="Text 30"/>
           <p:cNvSpPr/>
           <p:nvPr/>
         </p:nvSpPr>
@@ -14128,7 +14206,7 @@
                 <a:ea typeface="Calibri" pitchFamily="34" charset="-122"/>
                 <a:cs typeface="Calibri" pitchFamily="34" charset="-120"/>
               </a:rPr>
-              <a:t>2.025 P1 levantados; 67,3% cerrados. El pendiente se concentra en Piping, Eléctrica, Instrumentación y Control, y físicamente en el área 3000.</a:t>
+              <a:t>2.056 P1 levantados; 69,9% cerrados. El pendiente se concentra en Eléctrica, Piping, Instrumentación y Control, y físicamente en el área 3000.</a:t>
             </a:r>
             <a:endParaRPr lang="en-US" sz="1350" dirty="0"/>
           </a:p>
@@ -14260,7 +14338,7 @@
                 <a:ea typeface="Cambria" pitchFamily="34" charset="-122"/>
                 <a:cs typeface="Cambria" pitchFamily="34" charset="-120"/>
               </a:rPr>
-              <a:t>67,3%</a:t>
+              <a:t>69,9%</a:t>
             </a:r>
             <a:endParaRPr lang="en-US" sz="1900" dirty="0"/>
           </a:p>
@@ -14375,7 +14453,7 @@
                 <a:ea typeface="Calibri" pitchFamily="34" charset="-122"/>
                 <a:cs typeface="Calibri" pitchFamily="34" charset="-120"/>
               </a:rPr>
-              <a:t>1.362</a:t>
+              <a:t>1.437</a:t>
             </a:r>
             <a:endParaRPr lang="en-US" sz="1100" dirty="0"/>
           </a:p>
@@ -14473,7 +14551,7 @@
                 <a:ea typeface="Calibri" pitchFamily="34" charset="-122"/>
                 <a:cs typeface="Calibri" pitchFamily="34" charset="-120"/>
               </a:rPr>
-              <a:t>663</a:t>
+              <a:t>619</a:t>
             </a:r>
             <a:endParaRPr lang="en-US" sz="1100" dirty="0"/>
           </a:p>
@@ -14654,7 +14732,7 @@
                 <a:ea typeface="Calibri" pitchFamily="34" charset="-122"/>
                 <a:cs typeface="Calibri" pitchFamily="34" charset="-120"/>
               </a:rPr>
-              <a:t>586 de 663 P1 abiertos (88,4%) están en el área 3000. Áreas 2000 y 8000 sobre 90% de cierre.</a:t>
+              <a:t>543 de 619 P1 abiertos (87,7%) están en el área 3000. Áreas 2000 sobre 90% de cierre.</a:t>
             </a:r>
             <a:endParaRPr lang="en-US" sz="1150" dirty="0"/>
           </a:p>
@@ -14693,7 +14771,7 @@
                 <a:ea typeface="Calibri" pitchFamily="34" charset="-122"/>
                 <a:cs typeface="Calibri" pitchFamily="34" charset="-120"/>
               </a:rPr>
-              <a:t>Fuente: Estatus_Resumen_General_QAQC.xlsx · Corte 21-09-2026 · Áreas 2000/3000/4000/8000</a:t>
+              <a:t>Fuente: Estatus_Resumen_General_QAQC.xlsx · Corte 28-09-2026 · Áreas 2000/3000/4000/8000</a:t>
             </a:r>
             <a:endParaRPr lang="en-US" sz="850" dirty="0"/>
           </a:p>
@@ -15067,7 +15145,7 @@
                 <a:ea typeface="Calibri" pitchFamily="34" charset="-122"/>
                 <a:cs typeface="Calibri" pitchFamily="34" charset="-120"/>
               </a:rPr>
-              <a:t>0 aprobadas de 136. Priorizar el cierre de las 17 en revisión y el rearmado de las 19 rechazadas para convertir entregas en aprobaciones.</a:t>
+              <a:t>0 aprobadas de 136. Priorizar el cierre de las 17 en revisión y el rearmado de las 21 rechazadas para convertir entregas en aprobaciones.</a:t>
             </a:r>
             <a:endParaRPr lang="en-US" sz="1150" dirty="0"/>
           </a:p>
@@ -15209,7 +15287,7 @@
                 <a:ea typeface="Calibri" pitchFamily="34" charset="-122"/>
                 <a:cs typeface="Calibri" pitchFamily="34" charset="-120"/>
               </a:rPr>
-              <a:t>586 P1 abiertos (88,4% del total) y 32 caminatas 100% pendientes. Es la ruta crítica: sin esta área no mejora ningún indicador global.</a:t>
+              <a:t>543 P1 abiertos (87,7% del total) y 26 caminatas 100% pendientes. Es la ruta crítica: sin esta área no mejora ningún indicador global.</a:t>
             </a:r>
             <a:endParaRPr lang="en-US" sz="1150" dirty="0"/>
           </a:p>
@@ -15309,7 +15387,7 @@
                 <a:ea typeface="Calibri" pitchFamily="34" charset="-122"/>
                 <a:cs typeface="Calibri" pitchFamily="34" charset="-120"/>
               </a:rPr>
-              <a:t>Recuperar los 533 P1 vencidos</a:t>
+              <a:t>Recuperar los 477 P1 vencidos</a:t>
             </a:r>
             <a:endParaRPr lang="en-US" sz="1500" dirty="0"/>
           </a:p>
@@ -15351,7 +15429,7 @@
                 <a:ea typeface="Calibri" pitchFamily="34" charset="-122"/>
                 <a:cs typeface="Calibri" pitchFamily="34" charset="-120"/>
               </a:rPr>
-              <a:t>80,4% de los P1 abiertos superó su fecha de vencimiento. Foco en Piping (156), Eléctrica (155), Instrumentación y Control (139).</a:t>
+              <a:t>77,1% de los P1 abiertos superó su fecha de vencimiento. Foco en Eléctrica (141), Instrumentación y Control (133), Piping (126).</a:t>
             </a:r>
             <a:endParaRPr lang="en-US" sz="1150" dirty="0"/>
           </a:p>
@@ -15493,7 +15571,7 @@
                 <a:ea typeface="Calibri" pitchFamily="34" charset="-122"/>
                 <a:cs typeface="Calibri" pitchFamily="34" charset="-120"/>
               </a:rPr>
-              <a:t>36 subsistemas pendientes: 33 próximos a realizar y 3 por programar. La programación ya está hecha; falta ejecutarla para habilitar la entrega de carpetas.</a:t>
+              <a:t>31 subsistemas pendientes: 29 próximos a realizar y 2 por programar. La programación ya está hecha; falta ejecutarla para habilitar la entrega de carpetas.</a:t>
             </a:r>
             <a:endParaRPr lang="en-US" sz="1150" dirty="0"/>
           </a:p>
@@ -15532,7 +15610,7 @@
                 <a:ea typeface="Calibri" pitchFamily="34" charset="-122"/>
                 <a:cs typeface="Calibri" pitchFamily="34" charset="-120"/>
               </a:rPr>
-              <a:t>Fuente: Estatus_Resumen_General_QAQC.xlsx · Corte 21-09-2026 · Áreas 2000/3000/4000/8000</a:t>
+              <a:t>Fuente: Estatus_Resumen_General_QAQC.xlsx · Corte 28-09-2026 · Áreas 2000/3000/4000/8000</a:t>
             </a:r>
             <a:endParaRPr lang="en-US" sz="850" dirty="0"/>
           </a:p>
@@ -15837,7 +15915,7 @@
                 <a:ea typeface="Cambria" pitchFamily="34" charset="-122"/>
                 <a:cs typeface="Cambria" pitchFamily="34" charset="-120"/>
               </a:rPr>
-              <a:t>75,9%</a:t>
+              <a:t>79,7%</a:t>
             </a:r>
             <a:endParaRPr lang="en-US" sz="3800" dirty="0"/>
           </a:p>
@@ -15876,7 +15954,7 @@
                 <a:ea typeface="Calibri" pitchFamily="34" charset="-122"/>
                 <a:cs typeface="Calibri" pitchFamily="34" charset="-120"/>
               </a:rPr>
-              <a:t>60/79</a:t>
+              <a:t>63/79</a:t>
             </a:r>
             <a:endParaRPr lang="en-US" sz="1400" dirty="0"/>
           </a:p>
@@ -15957,7 +16035,7 @@
                 <a:ea typeface="Calibri" pitchFamily="34" charset="-122"/>
                 <a:cs typeface="Calibri" pitchFamily="34" charset="-120"/>
               </a:rPr>
-              <a:t>19 subsistemas por caminar</a:t>
+              <a:t>16 subsistemas por caminar</a:t>
             </a:r>
             <a:endParaRPr lang="en-US" sz="950" dirty="0"/>
           </a:p>
@@ -16263,7 +16341,7 @@
                 <a:ea typeface="Cambria" pitchFamily="34" charset="-122"/>
                 <a:cs typeface="Cambria" pitchFamily="34" charset="-120"/>
               </a:rPr>
-              <a:t>56,8%</a:t>
+              <a:t>61,1%</a:t>
             </a:r>
             <a:endParaRPr lang="en-US" sz="3800" dirty="0"/>
           </a:p>
@@ -16302,7 +16380,7 @@
                 <a:ea typeface="Calibri" pitchFamily="34" charset="-122"/>
                 <a:cs typeface="Calibri" pitchFamily="34" charset="-120"/>
               </a:rPr>
-              <a:t>54/95</a:t>
+              <a:t>58/95</a:t>
             </a:r>
             <a:endParaRPr lang="en-US" sz="1400" dirty="0"/>
           </a:p>
@@ -16383,7 +16461,7 @@
                 <a:ea typeface="Calibri" pitchFamily="34" charset="-122"/>
                 <a:cs typeface="Calibri" pitchFamily="34" charset="-120"/>
               </a:rPr>
-              <a:t>39 aprobadas · 10 en revisión · 5 rechazadas</a:t>
+              <a:t>44 aprobadas · 8 en revisión · 6 rechazadas</a:t>
             </a:r>
             <a:endParaRPr lang="en-US" sz="950" dirty="0"/>
           </a:p>
@@ -16476,7 +16554,7 @@
                 <a:ea typeface="Cambria" pitchFamily="34" charset="-122"/>
                 <a:cs typeface="Cambria" pitchFamily="34" charset="-120"/>
               </a:rPr>
-              <a:t>69,4%</a:t>
+              <a:t>70,3%</a:t>
             </a:r>
             <a:endParaRPr lang="en-US" sz="3800" dirty="0"/>
           </a:p>
@@ -16515,7 +16593,7 @@
                 <a:ea typeface="Calibri" pitchFamily="34" charset="-122"/>
                 <a:cs typeface="Calibri" pitchFamily="34" charset="-120"/>
               </a:rPr>
-              <a:t>961/1.384</a:t>
+              <a:t>1.080/1.536</a:t>
             </a:r>
             <a:endParaRPr lang="en-US" sz="1400" dirty="0"/>
           </a:p>
@@ -16596,7 +16674,7 @@
                 <a:ea typeface="Calibri" pitchFamily="34" charset="-122"/>
                 <a:cs typeface="Calibri" pitchFamily="34" charset="-120"/>
               </a:rPr>
-              <a:t>423 abiertos · 168 atrasados</a:t>
+              <a:t>456 abiertos · 139 atrasados</a:t>
             </a:r>
             <a:endParaRPr lang="en-US" sz="950" dirty="0"/>
           </a:p>
@@ -16736,7 +16814,7 @@
                 <a:ea typeface="Calibri" pitchFamily="34" charset="-122"/>
                 <a:cs typeface="Calibri" pitchFamily="34" charset="-120"/>
               </a:rPr>
-              <a:t>1.533 de 2.197 ítems cerrados (69,8%); de los 664 abiertos, 292 ya pasaron su fecha requerida de cierre (44%).</a:t>
+              <a:t>1.721 de 2.419 ítems cerrados (71,1%); de los 698 abiertos, 240 ya pasaron su fecha requerida de cierre (34,4%).</a:t>
             </a:r>
             <a:endParaRPr lang="en-US" sz="1150" dirty="0"/>
           </a:p>
@@ -16815,7 +16893,7 @@
                 <a:ea typeface="Calibri" pitchFamily="34" charset="-122"/>
                 <a:cs typeface="Calibri" pitchFamily="34" charset="-120"/>
               </a:rPr>
-              <a:t>Operables 60/79 por Caminata 2 (75,9%); Facility 12/15 por Caminata 1 (80%).</a:t>
+              <a:t>Operables 63/79 por Caminata 2 (79,7%); Facility 12/15 por Caminata 1 (80%).</a:t>
             </a:r>
             <a:endParaRPr lang="en-US" sz="1150" dirty="0"/>
           </a:p>
@@ -16877,7 +16955,7 @@
                 <a:ea typeface="Calibri" pitchFamily="34" charset="-122"/>
                 <a:cs typeface="Calibri" pitchFamily="34" charset="-120"/>
               </a:rPr>
-              <a:t>Las carpetas están a 56,8% de entrega y el cuello está en el armado interno.  </a:t>
+              <a:t>Las carpetas están a 61,1% de entrega y el cuello está en el armado interno.  </a:t>
             </a:r>
             <a:pPr indent="0" marL="0">
               <a:lnSpc>
@@ -16894,7 +16972,7 @@
                 <a:ea typeface="Calibri" pitchFamily="34" charset="-122"/>
                 <a:cs typeface="Calibri" pitchFamily="34" charset="-120"/>
               </a:rPr>
-              <a:t>54 entregadas de 95: 39 aprobadas, 10 en revisión y 5 rechazadas. Quedan 18 en preparación y 23 sin iniciar.</a:t>
+              <a:t>58 entregadas de 95: 44 aprobadas, 8 en revisión y 6 rechazadas. Quedan 17 en preparación y 20 sin iniciar.</a:t>
             </a:r>
             <a:endParaRPr lang="en-US" sz="1150" dirty="0"/>
           </a:p>
@@ -16956,7 +17034,7 @@
                 <a:ea typeface="Calibri" pitchFamily="34" charset="-122"/>
                 <a:cs typeface="Calibri" pitchFamily="34" charset="-120"/>
               </a:rPr>
-              <a:t>Eléctrica concentra el pendiente de P1.  </a:t>
+              <a:t>Piping concentra el pendiente de P1.  </a:t>
             </a:r>
             <a:pPr indent="0" marL="0">
               <a:lnSpc>
@@ -16973,7 +17051,7 @@
                 <a:ea typeface="Calibri" pitchFamily="34" charset="-122"/>
                 <a:cs typeface="Calibri" pitchFamily="34" charset="-120"/>
               </a:rPr>
-              <a:t>185 de los 423 P1 abiertos (43,7%), con 105 atrasados.</a:t>
+              <a:t>219 de los 456 P1 abiertos (48%), con 24 atrasados.</a:t>
             </a:r>
             <a:endParaRPr lang="en-US" sz="1150" dirty="0"/>
           </a:p>
@@ -17012,7 +17090,7 @@
                 <a:ea typeface="Calibri" pitchFamily="34" charset="-122"/>
                 <a:cs typeface="Calibri" pitchFamily="34" charset="-120"/>
               </a:rPr>
-              <a:t>Fuente: REPORTE_GERENCIAL + Listado de Puntos Punch Consolidado · Corte 15-09-2026 · Atrasos al 21-09-2026</a:t>
+              <a:t>Fuente: REPORTE_GERENCIAL + Listado de Puntos Punch Consolidado · Corte 22-09-2026 · Atrasos al 28-09-2026</a:t>
             </a:r>
             <a:endParaRPr lang="en-US" sz="850" dirty="0"/>
           </a:p>
@@ -17465,7 +17543,7 @@
                 <a:ea typeface="Calibri" pitchFamily="34" charset="-122"/>
                 <a:cs typeface="Calibri" pitchFamily="34" charset="-120"/>
               </a:rPr>
-              <a:t>41,1%</a:t>
+              <a:t>46,3%</a:t>
             </a:r>
             <a:endParaRPr lang="en-US" sz="1100" dirty="0"/>
           </a:p>
@@ -17504,7 +17582,7 @@
                 <a:ea typeface="Cambria" pitchFamily="34" charset="-122"/>
                 <a:cs typeface="Cambria" pitchFamily="34" charset="-120"/>
               </a:rPr>
-              <a:t>39</a:t>
+              <a:t>44</a:t>
             </a:r>
             <a:endParaRPr lang="en-US" sz="2200" dirty="0"/>
           </a:p>
@@ -17624,7 +17702,7 @@
                 <a:ea typeface="Calibri" pitchFamily="34" charset="-122"/>
                 <a:cs typeface="Calibri" pitchFamily="34" charset="-120"/>
               </a:rPr>
-              <a:t>10,5%</a:t>
+              <a:t>8,4%</a:t>
             </a:r>
             <a:endParaRPr lang="en-US" sz="1100" dirty="0"/>
           </a:p>
@@ -17663,7 +17741,7 @@
                 <a:ea typeface="Cambria" pitchFamily="34" charset="-122"/>
                 <a:cs typeface="Cambria" pitchFamily="34" charset="-120"/>
               </a:rPr>
-              <a:t>10</a:t>
+              <a:t>8</a:t>
             </a:r>
             <a:endParaRPr lang="en-US" sz="2200" dirty="0"/>
           </a:p>
@@ -17783,7 +17861,7 @@
                 <a:ea typeface="Calibri" pitchFamily="34" charset="-122"/>
                 <a:cs typeface="Calibri" pitchFamily="34" charset="-120"/>
               </a:rPr>
-              <a:t>5,3%</a:t>
+              <a:t>6,3%</a:t>
             </a:r>
             <a:endParaRPr lang="en-US" sz="1100" dirty="0"/>
           </a:p>
@@ -17822,7 +17900,7 @@
                 <a:ea typeface="Cambria" pitchFamily="34" charset="-122"/>
                 <a:cs typeface="Cambria" pitchFamily="34" charset="-120"/>
               </a:rPr>
-              <a:t>5</a:t>
+              <a:t>6</a:t>
             </a:r>
             <a:endParaRPr lang="en-US" sz="2200" dirty="0"/>
           </a:p>
@@ -17942,7 +18020,7 @@
                 <a:ea typeface="Calibri" pitchFamily="34" charset="-122"/>
                 <a:cs typeface="Calibri" pitchFamily="34" charset="-120"/>
               </a:rPr>
-              <a:t>18,9%</a:t>
+              <a:t>17,9%</a:t>
             </a:r>
             <a:endParaRPr lang="en-US" sz="1100" dirty="0"/>
           </a:p>
@@ -17981,7 +18059,7 @@
                 <a:ea typeface="Cambria" pitchFamily="34" charset="-122"/>
                 <a:cs typeface="Cambria" pitchFamily="34" charset="-120"/>
               </a:rPr>
-              <a:t>18</a:t>
+              <a:t>17</a:t>
             </a:r>
             <a:endParaRPr lang="en-US" sz="2200" dirty="0"/>
           </a:p>
@@ -18101,7 +18179,7 @@
                 <a:ea typeface="Calibri" pitchFamily="34" charset="-122"/>
                 <a:cs typeface="Calibri" pitchFamily="34" charset="-120"/>
               </a:rPr>
-              <a:t>24,2%</a:t>
+              <a:t>21,1%</a:t>
             </a:r>
             <a:endParaRPr lang="en-US" sz="1100" dirty="0"/>
           </a:p>
@@ -18140,7 +18218,7 @@
                 <a:ea typeface="Cambria" pitchFamily="34" charset="-122"/>
                 <a:cs typeface="Cambria" pitchFamily="34" charset="-120"/>
               </a:rPr>
-              <a:t>23</a:t>
+              <a:t>20</a:t>
             </a:r>
             <a:endParaRPr lang="en-US" sz="2200" dirty="0"/>
           </a:p>
@@ -18182,7 +18260,7 @@
                 <a:ea typeface="Calibri" pitchFamily="34" charset="-122"/>
                 <a:cs typeface="Calibri" pitchFamily="34" charset="-120"/>
               </a:rPr>
-              <a:t>54 carpetas ya están en manos del cliente (56,8%) y 43 subsistemas tienen tarjeta verde. El grueso del pendiente todavía no sale de Besalco.</a:t>
+              <a:t>58 carpetas ya están en manos del cliente (61,1%) y 45 subsistemas tienen tarjeta verde. El grueso del pendiente todavía no sale de Besalco.</a:t>
             </a:r>
             <a:endParaRPr lang="en-US" sz="1000" dirty="0"/>
           </a:p>
@@ -18221,7 +18299,7 @@
                 <a:ea typeface="Calibri" pitchFamily="34" charset="-122"/>
                 <a:cs typeface="Calibri" pitchFamily="34" charset="-120"/>
               </a:rPr>
-              <a:t>Fuente: REPORTE_GERENCIAL + Listado de Puntos Punch Consolidado · Corte 15-09-2026 · Atrasos al 21-09-2026</a:t>
+              <a:t>Fuente: REPORTE_GERENCIAL + Listado de Puntos Punch Consolidado · Corte 22-09-2026 · Atrasos al 28-09-2026</a:t>
             </a:r>
             <a:endParaRPr lang="en-US" sz="850" dirty="0"/>
           </a:p>
@@ -18472,7 +18550,7 @@
                 <a:ea typeface="Calibri" pitchFamily="34" charset="-122"/>
                 <a:cs typeface="Calibri" pitchFamily="34" charset="-120"/>
               </a:rPr>
-              <a:t>1.384 P1 levantados; 69,4% cerrados. Atrasado = ítem abierto cuya fecha requerida de cierre ya venció al 21-09-2026.</a:t>
+              <a:t>1.536 P1 levantados; 70,3% cerrados. Atrasado = ítem abierto cuya fecha requerida de cierre ya venció al 28-09-2026.</a:t>
             </a:r>
             <a:endParaRPr lang="en-US" sz="1350" dirty="0"/>
           </a:p>
@@ -18604,7 +18682,7 @@
                 <a:ea typeface="Cambria" pitchFamily="34" charset="-122"/>
                 <a:cs typeface="Cambria" pitchFamily="34" charset="-120"/>
               </a:rPr>
-              <a:t>69,4%</a:t>
+              <a:t>70,3%</a:t>
             </a:r>
             <a:endParaRPr lang="en-US" sz="1900" dirty="0"/>
           </a:p>
@@ -18719,7 +18797,7 @@
                 <a:ea typeface="Calibri" pitchFamily="34" charset="-122"/>
                 <a:cs typeface="Calibri" pitchFamily="34" charset="-120"/>
               </a:rPr>
-              <a:t>961</a:t>
+              <a:t>1.080</a:t>
             </a:r>
             <a:endParaRPr lang="en-US" sz="1100" dirty="0"/>
           </a:p>
@@ -18817,7 +18895,7 @@
                 <a:ea typeface="Calibri" pitchFamily="34" charset="-122"/>
                 <a:cs typeface="Calibri" pitchFamily="34" charset="-120"/>
               </a:rPr>
-              <a:t>168</a:t>
+              <a:t>139</a:t>
             </a:r>
             <a:endParaRPr lang="en-US" sz="1100" dirty="0"/>
           </a:p>
@@ -18915,7 +18993,7 @@
                 <a:ea typeface="Calibri" pitchFamily="34" charset="-122"/>
                 <a:cs typeface="Calibri" pitchFamily="34" charset="-120"/>
               </a:rPr>
-              <a:t>255</a:t>
+              <a:t>317</a:t>
             </a:r>
             <a:endParaRPr lang="en-US" sz="1100" dirty="0"/>
           </a:p>
@@ -18998,7 +19076,7 @@
                 <a:ea typeface="Calibri" pitchFamily="34" charset="-122"/>
                 <a:cs typeface="Calibri" pitchFamily="34" charset="-120"/>
               </a:rPr>
-              <a:t>Mediana de 21 días vencidos; el más antiguo lleva 134. 189 entre 1-30 días, 91 entre 31-90 días, 12 entre 91-180 días.</a:t>
+              <a:t>Mediana de 28 días vencidos; el más antiguo lleva 141. 151 entre 1-30 días, 77 entre 31-90 días, 12 entre 91-180 días.</a:t>
             </a:r>
             <a:endParaRPr lang="en-US" sz="1150" dirty="0"/>
           </a:p>
@@ -19037,7 +19115,7 @@
                 <a:ea typeface="Calibri" pitchFamily="34" charset="-122"/>
                 <a:cs typeface="Calibri" pitchFamily="34" charset="-120"/>
               </a:rPr>
-              <a:t>Fuente: REPORTE_GERENCIAL + Listado de Puntos Punch Consolidado · Corte 15-09-2026 · Atrasos al 21-09-2026</a:t>
+              <a:t>Fuente: REPORTE_GERENCIAL + Listado de Puntos Punch Consolidado · Corte 22-09-2026 · Atrasos al 28-09-2026</a:t>
             </a:r>
             <a:endParaRPr lang="en-US" sz="850" dirty="0"/>
           </a:p>
@@ -19369,7 +19447,7 @@
                 <a:ea typeface="Calibri" pitchFamily="34" charset="-122"/>
                 <a:cs typeface="Calibri" pitchFamily="34" charset="-120"/>
               </a:rPr>
-              <a:t>Recuperar los 292 ítems atrasados</a:t>
+              <a:t>Recuperar los 240 ítems atrasados</a:t>
             </a:r>
             <a:endParaRPr lang="en-US" sz="1400" dirty="0"/>
           </a:p>
@@ -19411,7 +19489,7 @@
                 <a:ea typeface="Calibri" pitchFamily="34" charset="-122"/>
                 <a:cs typeface="Calibri" pitchFamily="34" charset="-120"/>
               </a:rPr>
-              <a:t>44% de los 664 abiertos ya venció su fecha requerida. Foco en Eléctrica (105), Piping (35), Mecánica (11).</a:t>
+              <a:t>34,4% de los 698 abiertos ya venció su fecha requerida. Foco en Piping (24), Eléctrica (88), Mecánica (11).</a:t>
             </a:r>
             <a:endParaRPr lang="en-US" sz="1100" dirty="0"/>
           </a:p>
@@ -19511,7 +19589,7 @@
                 <a:ea typeface="Calibri" pitchFamily="34" charset="-122"/>
                 <a:cs typeface="Calibri" pitchFamily="34" charset="-120"/>
               </a:rPr>
-              <a:t>Ejecutar las 19 caminatas de Operables pendientes</a:t>
+              <a:t>Ejecutar las 16 caminatas de Operables pendientes</a:t>
             </a:r>
             <a:endParaRPr lang="en-US" sz="1400" dirty="0"/>
           </a:p>
@@ -19553,7 +19631,7 @@
                 <a:ea typeface="Calibri" pitchFamily="34" charset="-122"/>
                 <a:cs typeface="Calibri" pitchFamily="34" charset="-120"/>
               </a:rPr>
-              <a:t>La Caminata 2 va en 75,9% (60/79). Sin caminata no se levanta el punch final ni se habilita la entrega de la carpeta.</a:t>
+              <a:t>La Caminata 2 va en 79,7% (63/79). Sin caminata no se levanta el punch final ni se habilita la entrega de la carpeta.</a:t>
             </a:r>
             <a:endParaRPr lang="en-US" sz="1100" dirty="0"/>
           </a:p>
@@ -19653,7 +19731,7 @@
                 <a:ea typeface="Calibri" pitchFamily="34" charset="-122"/>
                 <a:cs typeface="Calibri" pitchFamily="34" charset="-120"/>
               </a:rPr>
-              <a:t>Sacar del armado interno las 41 carpetas retenidas</a:t>
+              <a:t>Sacar del armado interno las 37 carpetas retenidas</a:t>
             </a:r>
             <a:endParaRPr lang="en-US" sz="1400" dirty="0"/>
           </a:p>
@@ -19695,7 +19773,7 @@
                 <a:ea typeface="Calibri" pitchFamily="34" charset="-122"/>
                 <a:cs typeface="Calibri" pitchFamily="34" charset="-120"/>
               </a:rPr>
-              <a:t>18 están en preparación y 23 sin iniciar. Solo 54 de 95 (56,8%) llegaron al cliente; 5 volvieron rechazadas y hay que rearmarlas.</a:t>
+              <a:t>17 están en preparación y 20 sin iniciar. Solo 58 de 95 (61,1%) llegaron al cliente; 6 volvieron rechazadas y hay que rearmarlas.</a:t>
             </a:r>
             <a:endParaRPr lang="en-US" sz="1100" dirty="0"/>
           </a:p>
@@ -19837,7 +19915,7 @@
                 <a:ea typeface="Calibri" pitchFamily="34" charset="-122"/>
                 <a:cs typeface="Calibri" pitchFamily="34" charset="-120"/>
               </a:rPr>
-              <a:t>Concentra 370 P1 abiertos y 125 atrasados sobre 74 subsistemas. Es la ruta crítica del proyecto.</a:t>
+              <a:t>Concentra 403 P1 abiertos y 96 atrasados sobre 74 subsistemas. Es la ruta crítica del proyecto.</a:t>
             </a:r>
             <a:endParaRPr lang="en-US" sz="1100" dirty="0"/>
           </a:p>
@@ -19876,7 +19954,7 @@
                 <a:ea typeface="Calibri" pitchFamily="34" charset="-122"/>
                 <a:cs typeface="Calibri" pitchFamily="34" charset="-120"/>
               </a:rPr>
-              <a:t>Fuente: REPORTE_GERENCIAL + Listado de Puntos Punch Consolidado · Corte 15-09-2026 · Atrasos al 21-09-2026</a:t>
+              <a:t>Fuente: REPORTE_GERENCIAL + Listado de Puntos Punch Consolidado · Corte 22-09-2026 · Atrasos al 28-09-2026</a:t>
             </a:r>
             <a:endParaRPr lang="en-US" sz="850" dirty="0"/>
           </a:p>

--- a/panel_control_TOP_P1/Panel_Control_TOP_P1.pptx
+++ b/panel_control_TOP_P1/Panel_Control_TOP_P1.pptx
@@ -1512,7 +1512,7 @@
                 <c:formatCode>General</c:formatCode>
                 <c:ptCount val="9"/>
                 <c:pt idx="0">
-                  <c:v/>
+                  <c:v>1</c:v>
                 </c:pt>
                 <c:pt idx="1">
                   <c:v>20</c:v>
@@ -1527,7 +1527,7 @@
                   <c:v>14</c:v>
                 </c:pt>
                 <c:pt idx="5">
-                  <c:v>15</c:v>
+                  <c:v>21</c:v>
                 </c:pt>
                 <c:pt idx="6">
                   <c:v>110</c:v>
@@ -1632,7 +1632,7 @@
                 <c:formatCode>General</c:formatCode>
                 <c:ptCount val="9"/>
                 <c:pt idx="0">
-                  <c:v>3</c:v>
+                  <c:v>2</c:v>
                 </c:pt>
                 <c:pt idx="1">
                   <c:v/>
@@ -1647,7 +1647,7 @@
                   <c:v/>
                 </c:pt>
                 <c:pt idx="5">
-                  <c:v>7</c:v>
+                  <c:v>1</c:v>
                 </c:pt>
                 <c:pt idx="6">
                   <c:v/>
@@ -2619,16 +2619,16 @@
                   <c:v>3</c:v>
                 </c:pt>
                 <c:pt idx="1">
-                  <c:v>33</c:v>
+                  <c:v>24</c:v>
                 </c:pt>
                 <c:pt idx="2">
-                  <c:v>25</c:v>
+                  <c:v>21</c:v>
                 </c:pt>
                 <c:pt idx="3">
-                  <c:v>10</c:v>
+                  <c:v>8</c:v>
                 </c:pt>
                 <c:pt idx="4">
-                  <c:v>2</c:v>
+                  <c:v>1</c:v>
                 </c:pt>
               </c:numCache>
             </c:numRef>
@@ -2712,13 +2712,13 @@
                 <c:formatCode>General</c:formatCode>
                 <c:ptCount val="5"/>
                 <c:pt idx="0">
-                  <c:v>132</c:v>
+                  <c:v>138</c:v>
                 </c:pt>
                 <c:pt idx="1">
-                  <c:v>56</c:v>
+                  <c:v>68</c:v>
                 </c:pt>
                 <c:pt idx="2">
-                  <c:v>8</c:v>
+                  <c:v>15</c:v>
                 </c:pt>
                 <c:pt idx="3">
                   <c:v>13</c:v>
@@ -7431,7 +7431,7 @@
                 <a:ea typeface="Calibri" pitchFamily="34" charset="-122"/>
                 <a:cs typeface="Calibri" pitchFamily="34" charset="-120"/>
               </a:rPr>
-              <a:t>Recuperar los 73 DT atrasados</a:t>
+              <a:t>Recuperar los 57 DT atrasados</a:t>
             </a:r>
             <a:endParaRPr lang="en-US" sz="1350" dirty="0"/>
           </a:p>
@@ -7473,7 +7473,7 @@
                 <a:ea typeface="Calibri" pitchFamily="34" charset="-122"/>
                 <a:cs typeface="Calibri" pitchFamily="34" charset="-120"/>
               </a:rPr>
-              <a:t>47 son P2 y 23 son P1. La mediana de atraso es de 45 días y 8 superan los 90 días.</a:t>
+              <a:t>38 son P2 y 16 son P1. La mediana de atraso es de 53 días y 8 superan los 90 días.</a:t>
             </a:r>
             <a:endParaRPr lang="en-US" sz="1100" dirty="0"/>
           </a:p>
@@ -7615,7 +7615,7 @@
                 <a:ea typeface="Calibri" pitchFamily="34" charset="-122"/>
                 <a:cs typeface="Calibri" pitchFamily="34" charset="-120"/>
               </a:rPr>
-              <a:t>CERRO VERDE/PS2: 0/3 (0%). A nivel proyecto la caminata 2 va 95% con 11 ya agendadas.</a:t>
+              <a:t>CERRO VERDE/PS2: 1/3 (33,3%). A nivel proyecto la caminata 2 va 98,2% con 4 ya agendadas.</a:t>
             </a:r>
             <a:endParaRPr lang="en-US" sz="1100" dirty="0"/>
           </a:p>
@@ -7899,7 +7899,7 @@
                 <a:ea typeface="Calibri" pitchFamily="34" charset="-122"/>
                 <a:cs typeface="Calibri" pitchFamily="34" charset="-120"/>
               </a:rPr>
-              <a:t>Concentra 109 de los 285 DT abiertos (38,2%), con 3 atrasados. Además hay 3 carpetas bajo 80% de avance que conviene cerrar en paralelo.</a:t>
+              <a:t>Concentra 108 de los 294 DT abiertos (36,7%), con 2 atrasados. Además hay 3 carpetas bajo 80% de avance que conviene cerrar en paralelo.</a:t>
             </a:r>
             <a:endParaRPr lang="en-US" sz="1100" dirty="0"/>
           </a:p>
@@ -7938,7 +7938,7 @@
                 <a:ea typeface="Calibri" pitchFamily="34" charset="-122"/>
                 <a:cs typeface="Calibri" pitchFamily="34" charset="-120"/>
               </a:rPr>
-              <a:t>Fuente: STATUS_SUBSISTEMAS_TALABRE + Detalle_de_Terminaciones · 218 subsistemas · 2.115 DT · Atrasos al 21-09-2026</a:t>
+              <a:t>Fuente: STATUS_SUBSISTEMAS_TALABRE + Detalle_de_Terminaciones · 218 subsistemas · 2.141 DT · Atrasos al 28-09-2026</a:t>
             </a:r>
             <a:endParaRPr lang="en-US" sz="850" dirty="0"/>
           </a:p>
@@ -20307,7 +20307,7 @@
                 <a:ea typeface="Calibri" pitchFamily="34" charset="-122"/>
                 <a:cs typeface="Calibri" pitchFamily="34" charset="-120"/>
               </a:rPr>
-              <a:t>Contrato 4600029355 · 218 subsistemas en 9 áreas · 2.115 detalles de terminación levantados.</a:t>
+              <a:t>Contrato 4600029355 · 218 subsistemas en 9 áreas · 2.141 detalles de terminación levantados.</a:t>
             </a:r>
             <a:endParaRPr lang="en-US" sz="1350" dirty="0"/>
           </a:p>
@@ -20580,7 +20580,7 @@
                 <a:ea typeface="Cambria" pitchFamily="34" charset="-122"/>
                 <a:cs typeface="Cambria" pitchFamily="34" charset="-120"/>
               </a:rPr>
-              <a:t>96,1%</a:t>
+              <a:t>95,7%</a:t>
             </a:r>
             <a:endParaRPr lang="en-US" sz="3400" dirty="0"/>
           </a:p>
@@ -20658,7 +20658,7 @@
                 <a:ea typeface="Calibri" pitchFamily="34" charset="-122"/>
                 <a:cs typeface="Calibri" pitchFamily="34" charset="-120"/>
               </a:rPr>
-              <a:t>Atrasos calculados al 21-09-2026</a:t>
+              <a:t>Atrasos calculados al 28-09-2026</a:t>
             </a:r>
             <a:endParaRPr lang="en-US" sz="1100" dirty="0"/>
           </a:p>
@@ -20697,7 +20697,7 @@
                 <a:ea typeface="Calibri" pitchFamily="34" charset="-122"/>
                 <a:cs typeface="Calibri" pitchFamily="34" charset="-120"/>
               </a:rPr>
-              <a:t>Fuente: STATUS_SUBSISTEMAS_TALABRE + Detalle_de_Terminaciones · 218 subsistemas · 2.115 DT · Atrasos al 21-09-2026</a:t>
+              <a:t>Fuente: STATUS_SUBSISTEMAS_TALABRE + Detalle_de_Terminaciones · 218 subsistemas · 2.141 DT · Atrasos al 28-09-2026</a:t>
             </a:r>
             <a:endParaRPr lang="en-US" sz="850" dirty="0"/>
           </a:p>
@@ -21002,7 +21002,7 @@
                 <a:ea typeface="Calibri" pitchFamily="34" charset="-122"/>
                 <a:cs typeface="Calibri" pitchFamily="34" charset="-120"/>
               </a:rPr>
-              <a:t>216/216 exigibles</a:t>
+              <a:t>218/218 exigibles</a:t>
             </a:r>
             <a:endParaRPr lang="en-US" sz="1300" dirty="0"/>
           </a:p>
@@ -21083,7 +21083,7 @@
                 <a:ea typeface="Calibri" pitchFamily="34" charset="-122"/>
                 <a:cs typeface="Calibri" pitchFamily="34" charset="-120"/>
               </a:rPr>
-              <a:t>99,1% del universo · 2 programadas en plazo · 0 sin programar</a:t>
+              <a:t>100% del universo · 0 programadas en plazo · 0 sin programar</a:t>
             </a:r>
             <a:endParaRPr lang="en-US" sz="950" dirty="0"/>
           </a:p>
@@ -21215,7 +21215,7 @@
                 <a:ea typeface="Calibri" pitchFamily="34" charset="-122"/>
                 <a:cs typeface="Calibri" pitchFamily="34" charset="-120"/>
               </a:rPr>
-              <a:t>207/207 exigibles</a:t>
+              <a:t>214/214 exigibles</a:t>
             </a:r>
             <a:endParaRPr lang="en-US" sz="1300" dirty="0"/>
           </a:p>
@@ -21296,7 +21296,7 @@
                 <a:ea typeface="Calibri" pitchFamily="34" charset="-122"/>
                 <a:cs typeface="Calibri" pitchFamily="34" charset="-120"/>
               </a:rPr>
-              <a:t>95% del universo · 11 programadas en plazo · 0 sin programar</a:t>
+              <a:t>98,2% del universo · 4 programadas en plazo · 0 sin programar</a:t>
             </a:r>
             <a:endParaRPr lang="en-US" sz="950" dirty="0"/>
           </a:p>
@@ -21602,7 +21602,7 @@
                 <a:ea typeface="Cambria" pitchFamily="34" charset="-122"/>
                 <a:cs typeface="Cambria" pitchFamily="34" charset="-120"/>
               </a:rPr>
-              <a:t>94,1%</a:t>
+              <a:t>92,9%</a:t>
             </a:r>
             <a:endParaRPr lang="en-US" sz="3800" dirty="0"/>
           </a:p>
@@ -21641,7 +21641,7 @@
                 <a:ea typeface="Calibri" pitchFamily="34" charset="-122"/>
                 <a:cs typeface="Calibri" pitchFamily="34" charset="-120"/>
               </a:rPr>
-              <a:t>385/409</a:t>
+              <a:t>393/423</a:t>
             </a:r>
             <a:endParaRPr lang="en-US" sz="1300" dirty="0"/>
           </a:p>
@@ -21722,7 +21722,7 @@
                 <a:ea typeface="Calibri" pitchFamily="34" charset="-122"/>
                 <a:cs typeface="Calibri" pitchFamily="34" charset="-120"/>
               </a:rPr>
-              <a:t>24 abiertos · 23 atrasados</a:t>
+              <a:t>30 abiertos · 16 atrasados</a:t>
             </a:r>
             <a:endParaRPr lang="en-US" sz="950" dirty="0"/>
           </a:p>
@@ -21862,7 +21862,7 @@
                 <a:ea typeface="Calibri" pitchFamily="34" charset="-122"/>
                 <a:cs typeface="Calibri" pitchFamily="34" charset="-120"/>
               </a:rPr>
-              <a:t>94,1% de cierre en P1 (24 abiertos), pero 261 DT abiertos entre P2, P3 y P4 sobre un total de 285.</a:t>
+              <a:t>92,9% de cierre en P1 (30 abiertos), pero 264 DT abiertos entre P2, P3 y P4 sobre un total de 294.</a:t>
             </a:r>
             <a:endParaRPr lang="en-US" sz="1150" dirty="0"/>
           </a:p>
@@ -21941,7 +21941,7 @@
                 <a:ea typeface="Calibri" pitchFamily="34" charset="-122"/>
                 <a:cs typeface="Calibri" pitchFamily="34" charset="-120"/>
               </a:rPr>
-              <a:t>73 DT con la fecha de compromiso vencida; mediana de 45 días y el más antiguo lleva 186. Los 211 abiertos sin fecha de compromiso no se cuentan como atrasados.</a:t>
+              <a:t>57 DT con la fecha de compromiso vencida; mediana de 53 días y el más antiguo lleva 193. Los 211 abiertos sin fecha de compromiso no se cuentan como atrasados.</a:t>
             </a:r>
             <a:endParaRPr lang="en-US" sz="1150" dirty="0"/>
           </a:p>
@@ -22020,7 +22020,7 @@
                 <a:ea typeface="Calibri" pitchFamily="34" charset="-122"/>
                 <a:cs typeface="Calibri" pitchFamily="34" charset="-120"/>
               </a:rPr>
-              <a:t>Caminata 1: 216/216 exigibles. Caminata 2: 207/207, con 11 agendadas en plazo y 0 sin programar.</a:t>
+              <a:t>Caminata 1: 218/218 exigibles. Caminata 2: 214/214, con 4 agendadas en plazo y 0 sin programar.</a:t>
             </a:r>
             <a:endParaRPr lang="en-US" sz="1150" dirty="0"/>
           </a:p>
@@ -22138,7 +22138,7 @@
                 <a:ea typeface="Calibri" pitchFamily="34" charset="-122"/>
                 <a:cs typeface="Calibri" pitchFamily="34" charset="-120"/>
               </a:rPr>
-              <a:t>Fuente: STATUS_SUBSISTEMAS_TALABRE + Detalle_de_Terminaciones · 218 subsistemas · 2.115 DT · Atrasos al 21-09-2026</a:t>
+              <a:t>Fuente: STATUS_SUBSISTEMAS_TALABRE + Detalle_de_Terminaciones · 218 subsistemas · 2.141 DT · Atrasos al 28-09-2026</a:t>
             </a:r>
             <a:endParaRPr lang="en-US" sz="850" dirty="0"/>
           </a:p>
@@ -22389,7 +22389,7 @@
                 <a:ea typeface="Calibri" pitchFamily="34" charset="-122"/>
                 <a:cs typeface="Calibri" pitchFamily="34" charset="-120"/>
               </a:rPr>
-              <a:t>Caminata 2: 100% de lo exigible (207/207) — se descuentan 11 agendadas a fecha futura, que no son incumplimiento al corte. Talabre mide la carpeta como % de avance (PEC), no como estado de aprobación.</a:t>
+              <a:t>Caminata 2: 100% de lo exigible (214/214) — se descuentan 4 agendadas a fecha futura, que no son incumplimiento al corte. Talabre mide la carpeta como % de avance (PEC), no como estado de aprobación.</a:t>
             </a:r>
             <a:endParaRPr lang="en-US" sz="1350" dirty="0"/>
           </a:p>
@@ -22460,7 +22460,7 @@
                 <a:ea typeface="Calibri" pitchFamily="34" charset="-122"/>
                 <a:cs typeface="Calibri" pitchFamily="34" charset="-120"/>
               </a:rPr>
-              <a:t>Fuente: STATUS_SUBSISTEMAS_TALABRE + Detalle_de_Terminaciones · 218 subsistemas · 2.115 DT · Atrasos al 21-09-2026</a:t>
+              <a:t>Fuente: STATUS_SUBSISTEMAS_TALABRE + Detalle_de_Terminaciones · 218 subsistemas · 2.141 DT · Atrasos al 28-09-2026</a:t>
             </a:r>
             <a:endParaRPr lang="en-US" sz="850" dirty="0"/>
           </a:p>
@@ -22711,7 +22711,7 @@
                 <a:ea typeface="Calibri" pitchFamily="34" charset="-122"/>
                 <a:cs typeface="Calibri" pitchFamily="34" charset="-120"/>
               </a:rPr>
-              <a:t>2.115 DT levantados; 86,5% cerrados. Atrasado = DT abierto cuya fecha de compromiso de cierre ya venció al 21-09-2026.</a:t>
+              <a:t>2.141 DT levantados; 86,3% cerrados. Atrasado = DT abierto cuya fecha de compromiso de cierre ya venció al 28-09-2026.</a:t>
             </a:r>
             <a:endParaRPr lang="en-US" sz="1350" dirty="0"/>
           </a:p>
@@ -22866,7 +22866,7 @@
                 <a:ea typeface="Calibri" pitchFamily="34" charset="-122"/>
                 <a:cs typeface="Calibri" pitchFamily="34" charset="-120"/>
               </a:rPr>
-              <a:t>385/409</a:t>
+              <a:t>393/423</a:t>
             </a:r>
             <a:endParaRPr lang="en-US" sz="1050" dirty="0"/>
           </a:p>
@@ -22905,7 +22905,7 @@
                 <a:ea typeface="Calibri" pitchFamily="34" charset="-122"/>
                 <a:cs typeface="Calibri" pitchFamily="34" charset="-120"/>
               </a:rPr>
-              <a:t>94,1%</a:t>
+              <a:t>92,9%</a:t>
             </a:r>
             <a:endParaRPr lang="en-US" sz="1100" dirty="0"/>
           </a:p>
@@ -22940,7 +22940,7 @@
         <p:spPr>
           <a:xfrm>
             <a:off x="7936992" y="2688336"/>
-            <a:ext cx="3355757" cy="118872"/>
+            <a:ext cx="3312963" cy="118872"/>
           </a:xfrm>
           <a:prstGeom prst="rect">
             <a:avLst/>
@@ -23023,7 +23023,7 @@
                 <a:ea typeface="Calibri" pitchFamily="34" charset="-122"/>
                 <a:cs typeface="Calibri" pitchFamily="34" charset="-120"/>
               </a:rPr>
-              <a:t>1.361/1.408</a:t>
+              <a:t>1.370/1.420</a:t>
             </a:r>
             <a:endParaRPr lang="en-US" sz="1050" dirty="0"/>
           </a:p>
@@ -23062,7 +23062,7 @@
                 <a:ea typeface="Calibri" pitchFamily="34" charset="-122"/>
                 <a:cs typeface="Calibri" pitchFamily="34" charset="-120"/>
               </a:rPr>
-              <a:t>96,7%</a:t>
+              <a:t>96,5%</a:t>
             </a:r>
             <a:endParaRPr lang="en-US" sz="1100" dirty="0"/>
           </a:p>
@@ -23097,7 +23097,7 @@
         <p:spPr>
           <a:xfrm>
             <a:off x="7936992" y="3200400"/>
-            <a:ext cx="3448477" cy="118872"/>
+            <a:ext cx="3441344" cy="118872"/>
           </a:xfrm>
           <a:prstGeom prst="rect">
             <a:avLst/>
@@ -23636,7 +23636,7 @@
                 <a:ea typeface="Calibri" pitchFamily="34" charset="-122"/>
                 <a:cs typeface="Calibri" pitchFamily="34" charset="-120"/>
               </a:rPr>
-              <a:t>Mediana de 45 días vencidos; el más antiguo lleva 186. 25 entre 1-30 días, 40 entre 31-90 días, 7 entre 91-180 días, 1 entre &gt;180 días.</a:t>
+              <a:t>Mediana de 53 días vencidos; el más antiguo lleva 193. 18 entre 1-30 días, 31 entre 31-90 días, 7 entre 91-180 días, 1 entre &gt;180 días.</a:t>
             </a:r>
             <a:endParaRPr lang="en-US" sz="1150" dirty="0"/>
           </a:p>
@@ -23675,7 +23675,7 @@
                 <a:ea typeface="Calibri" pitchFamily="34" charset="-122"/>
                 <a:cs typeface="Calibri" pitchFamily="34" charset="-120"/>
               </a:rPr>
-              <a:t>Fuente: STATUS_SUBSISTEMAS_TALABRE + Detalle_de_Terminaciones · 218 subsistemas · 2.115 DT · Atrasos al 21-09-2026</a:t>
+              <a:t>Fuente: STATUS_SUBSISTEMAS_TALABRE + Detalle_de_Terminaciones · 218 subsistemas · 2.141 DT · Atrasos al 28-09-2026</a:t>
             </a:r>
             <a:endParaRPr lang="en-US" sz="850" dirty="0"/>
           </a:p>

--- a/panel_control_TOP_P1/Panel_Control_TOP_P1.pptx
+++ b/panel_control_TOP_P1/Panel_Control_TOP_P1.pptx
@@ -3003,7 +3003,7 @@
                 <c:formatCode>General</c:formatCode>
                 <c:ptCount val="4"/>
                 <c:pt idx="0">
-                  <c:v>33</c:v>
+                  <c:v>35</c:v>
                 </c:pt>
                 <c:pt idx="1">
                   <c:v>51</c:v>
@@ -3093,7 +3093,7 @@
                 <c:formatCode>General</c:formatCode>
                 <c:ptCount val="4"/>
                 <c:pt idx="0">
-                  <c:v>2</c:v>
+                  <c:v/>
                 </c:pt>
                 <c:pt idx="1">
                   <c:v>24</c:v>
@@ -8428,7 +8428,7 @@
                 <a:ea typeface="Cambria" pitchFamily="34" charset="-122"/>
                 <a:cs typeface="Cambria" pitchFamily="34" charset="-120"/>
               </a:rPr>
-              <a:t>77,2%</a:t>
+              <a:t>78,7%</a:t>
             </a:r>
             <a:endParaRPr lang="en-US" sz="3400" dirty="0"/>
           </a:p>
@@ -9177,7 +9177,7 @@
                 <a:ea typeface="Cambria" pitchFamily="34" charset="-122"/>
                 <a:cs typeface="Cambria" pitchFamily="34" charset="-120"/>
               </a:rPr>
-              <a:t>77,2%</a:t>
+              <a:t>78,7%</a:t>
             </a:r>
             <a:endParaRPr lang="en-US" sz="4000" dirty="0"/>
           </a:p>
@@ -9216,7 +9216,7 @@
                 <a:ea typeface="Calibri" pitchFamily="34" charset="-122"/>
                 <a:cs typeface="Calibri" pitchFamily="34" charset="-120"/>
               </a:rPr>
-              <a:t>105/136</a:t>
+              <a:t>107/136</a:t>
             </a:r>
             <a:endParaRPr lang="en-US" sz="1400" dirty="0"/>
           </a:p>
@@ -9294,7 +9294,7 @@
                 <a:ea typeface="Calibri" pitchFamily="34" charset="-122"/>
                 <a:cs typeface="Calibri" pitchFamily="34" charset="-120"/>
               </a:rPr>
-              <a:t>29 próximas · 2 por programar</a:t>
+              <a:t>27 próximas · 2 por programar</a:t>
             </a:r>
             <a:endParaRPr lang="en-US" sz="950" dirty="0"/>
           </a:p>
@@ -9333,7 +9333,7 @@
                 <a:ea typeface="Calibri" pitchFamily="34" charset="-122"/>
                 <a:cs typeface="Calibri" pitchFamily="34" charset="-120"/>
               </a:rPr>
-              <a:t>▲ +5 vs. corte anterior</a:t>
+              <a:t>▲ +7 vs. corte anterior</a:t>
             </a:r>
             <a:endParaRPr lang="en-US" sz="900" dirty="0"/>
           </a:p>
@@ -9971,7 +9971,7 @@
                 <a:ea typeface="Calibri" pitchFamily="34" charset="-122"/>
                 <a:cs typeface="Calibri" pitchFamily="34" charset="-120"/>
               </a:rPr>
-              <a:t>Los subsistemas «por programar» bajaron de 3 a 2, mientras las realizadas al 100% se mantienen en 105 (77,2%).</a:t>
+              <a:t>Los subsistemas «por programar» bajaron de 3 a 2, mientras las realizadas al 100% se mantienen en 107 (78,7%).</a:t>
             </a:r>
             <a:endParaRPr lang="en-US" sz="1250" dirty="0"/>
           </a:p>
@@ -10832,7 +10832,7 @@
                 <a:ea typeface="Calibri" pitchFamily="34" charset="-122"/>
                 <a:cs typeface="Calibri" pitchFamily="34" charset="-120"/>
               </a:rPr>
-              <a:t>33/35 · 94,3%</a:t>
+              <a:t>35/35 · 100%</a:t>
             </a:r>
             <a:endParaRPr lang="en-US" sz="1300" dirty="0"/>
           </a:p>
@@ -12473,7 +12473,7 @@
                 <a:ea typeface="Calibri" pitchFamily="34" charset="-122"/>
                 <a:cs typeface="Calibri" pitchFamily="34" charset="-120"/>
               </a:rPr>
-              <a:t>Las caminatas al 80% están cerradas en todas las áreas (136/136). El hito 100% avanza a 77,2%, y el área 3000 concentra 26 de los 31 subsistemas pendientes.</a:t>
+              <a:t>Las caminatas al 80% están cerradas en todas las áreas (136/136). El hito 100% avanza a 78,7%, y el área 3000 concentra 26 de los 29 subsistemas pendientes.</a:t>
             </a:r>
             <a:endParaRPr lang="en-US" sz="1350" dirty="0"/>
           </a:p>
@@ -12729,7 +12729,7 @@
                 <a:ea typeface="Cambria" pitchFamily="34" charset="-122"/>
                 <a:cs typeface="Cambria" pitchFamily="34" charset="-120"/>
               </a:rPr>
-              <a:t>77,2%</a:t>
+              <a:t>78,7%</a:t>
             </a:r>
             <a:endParaRPr lang="en-US" sz="4000" dirty="0"/>
           </a:p>
@@ -12768,7 +12768,7 @@
                 <a:ea typeface="Calibri" pitchFamily="34" charset="-122"/>
                 <a:cs typeface="Calibri" pitchFamily="34" charset="-120"/>
               </a:rPr>
-              <a:t>105 realizadas · 31 pendientes</a:t>
+              <a:t>107 realizadas · 29 pendientes</a:t>
             </a:r>
             <a:endParaRPr lang="en-US" sz="1200" dirty="0"/>
           </a:p>
@@ -12827,7 +12827,7 @@
                 <a:ea typeface="Calibri" pitchFamily="34" charset="-122"/>
                 <a:cs typeface="Calibri" pitchFamily="34" charset="-120"/>
               </a:rPr>
-              <a:t>29 próximas a realizar y 2 por programar. Las «por programar» bajaron 1 en el período.</a:t>
+              <a:t>27 próximas a realizar y 2 por programar. Las «por programar» bajaron 1 en el período.</a:t>
             </a:r>
             <a:endParaRPr lang="en-US" sz="1150" dirty="0"/>
           </a:p>
@@ -15571,7 +15571,7 @@
                 <a:ea typeface="Calibri" pitchFamily="34" charset="-122"/>
                 <a:cs typeface="Calibri" pitchFamily="34" charset="-120"/>
               </a:rPr>
-              <a:t>31 subsistemas pendientes: 29 próximos a realizar y 2 por programar. La programación ya está hecha; falta ejecutarla para habilitar la entrega de carpetas.</a:t>
+              <a:t>29 subsistemas pendientes: 27 próximos a realizar y 2 por programar. La programación ya está hecha; falta ejecutarla para habilitar la entrega de carpetas.</a:t>
             </a:r>
             <a:endParaRPr lang="en-US" sz="1150" dirty="0"/>
           </a:p>

--- a/panel_control_TOP_P1/Panel_Control_TOP_P1.pptx
+++ b/panel_control_TOP_P1/Panel_Control_TOP_P1.pptx
@@ -687,10 +687,10 @@
               <c:numCache>
                 <c:ptCount val="3"/>
                 <c:pt idx="0">
-                  <c:v>1437</c:v>
+                  <c:v>1474</c:v>
                 </c:pt>
                 <c:pt idx="1">
-                  <c:v>619</c:v>
+                  <c:v>582</c:v>
                 </c:pt>
                 <c:pt idx="2">
                   <c:v>0</c:v>
@@ -3006,10 +3006,10 @@
                   <c:v>35</c:v>
                 </c:pt>
                 <c:pt idx="1">
-                  <c:v>51</c:v>
+                  <c:v>50</c:v>
                 </c:pt>
                 <c:pt idx="2">
-                  <c:v>19</c:v>
+                  <c:v>20</c:v>
                 </c:pt>
                 <c:pt idx="3">
                   <c:v>2</c:v>
@@ -3096,10 +3096,10 @@
                   <c:v/>
                 </c:pt>
                 <c:pt idx="1">
-                  <c:v>24</c:v>
+                  <c:v>27</c:v>
                 </c:pt>
                 <c:pt idx="2">
-                  <c:v>3</c:v>
+                  <c:v>2</c:v>
                 </c:pt>
                 <c:pt idx="3">
                   <c:v/>
@@ -3186,7 +3186,7 @@
                   <c:v/>
                 </c:pt>
                 <c:pt idx="1">
-                  <c:v>2</c:v>
+                  <c:v/>
                 </c:pt>
                 <c:pt idx="2">
                   <c:v/>
@@ -3471,13 +3471,13 @@
                 <c:formatCode>General</c:formatCode>
                 <c:ptCount val="4"/>
                 <c:pt idx="0">
-                  <c:v>16</c:v>
+                  <c:v>15</c:v>
                 </c:pt>
                 <c:pt idx="1">
                   <c:v/>
                 </c:pt>
                 <c:pt idx="2">
-                  <c:v>1</c:v>
+                  <c:v/>
                 </c:pt>
                 <c:pt idx="3">
                   <c:v/>
@@ -3651,13 +3651,13 @@
                 <c:formatCode>General</c:formatCode>
                 <c:ptCount val="4"/>
                 <c:pt idx="0">
-                  <c:v>13</c:v>
+                  <c:v>15</c:v>
                 </c:pt>
                 <c:pt idx="1">
                   <c:v>7</c:v>
                 </c:pt>
                 <c:pt idx="2">
-                  <c:v>1</c:v>
+                  <c:v>2</c:v>
                 </c:pt>
                 <c:pt idx="3">
                   <c:v/>
@@ -3741,7 +3741,7 @@
                 <c:formatCode>General</c:formatCode>
                 <c:ptCount val="4"/>
                 <c:pt idx="0">
-                  <c:v>6</c:v>
+                  <c:v>5</c:v>
                 </c:pt>
                 <c:pt idx="1">
                   <c:v>69</c:v>
@@ -4019,10 +4019,10 @@
                     <c:v>Mecánica</c:v>
                   </c:pt>
                   <c:pt idx="4">
-                    <c:v>Estructura</c:v>
+                    <c:v>Obras Civiles</c:v>
                   </c:pt>
                   <c:pt idx="5">
-                    <c:v>Obras Civiles</c:v>
+                    <c:v>Estructura</c:v>
                   </c:pt>
                 </c:lvl>
               </c:multiLvlStrCache>
@@ -4035,22 +4035,22 @@
                 <c:formatCode>General</c:formatCode>
                 <c:ptCount val="6"/>
                 <c:pt idx="0">
-                  <c:v>141</c:v>
+                  <c:v>132</c:v>
                 </c:pt>
                 <c:pt idx="1">
-                  <c:v>126</c:v>
+                  <c:v>124</c:v>
                 </c:pt>
                 <c:pt idx="2">
-                  <c:v>133</c:v>
+                  <c:v>129</c:v>
                 </c:pt>
                 <c:pt idx="3">
-                  <c:v>70</c:v>
+                  <c:v>62</c:v>
                 </c:pt>
                 <c:pt idx="4">
-                  <c:v>7</c:v>
+                  <c:v/>
                 </c:pt>
                 <c:pt idx="5">
-                  <c:v/>
+                  <c:v>1</c:v>
                 </c:pt>
               </c:numCache>
             </c:numRef>
@@ -4121,10 +4121,10 @@
                     <c:v>Mecánica</c:v>
                   </c:pt>
                   <c:pt idx="4">
-                    <c:v>Estructura</c:v>
+                    <c:v>Obras Civiles</c:v>
                   </c:pt>
                   <c:pt idx="5">
-                    <c:v>Obras Civiles</c:v>
+                    <c:v>Estructura</c:v>
                   </c:pt>
                 </c:lvl>
               </c:multiLvlStrCache>
@@ -4140,19 +4140,19 @@
                   <c:v>43</c:v>
                 </c:pt>
                 <c:pt idx="1">
-                  <c:v>28</c:v>
+                  <c:v>26</c:v>
                 </c:pt>
                 <c:pt idx="2">
-                  <c:v>21</c:v>
+                  <c:v>20</c:v>
                 </c:pt>
                 <c:pt idx="3">
-                  <c:v>20</c:v>
+                  <c:v>16</c:v>
                 </c:pt>
                 <c:pt idx="4">
-                  <c:v>13</c:v>
+                  <c:v>16</c:v>
                 </c:pt>
                 <c:pt idx="5">
-                  <c:v>17</c:v>
+                  <c:v>13</c:v>
                 </c:pt>
               </c:numCache>
             </c:numRef>
@@ -8291,7 +8291,7 @@
                 <a:ea typeface="Calibri" pitchFamily="34" charset="-122"/>
                 <a:cs typeface="Calibri" pitchFamily="34" charset="-120"/>
               </a:rPr>
-              <a:t>136 subsistemas en 4 áreas (2000 · 3000 · 4000 · 8000) · 3.106 detalles de terminación levantados.</a:t>
+              <a:t>136 subsistemas en 4 áreas (2000 · 3000 · 4000 · 8000) · 3.114 detalles de terminación levantados.</a:t>
             </a:r>
             <a:endParaRPr lang="en-US" sz="1350" dirty="0"/>
           </a:p>
@@ -8506,7 +8506,7 @@
                 <a:ea typeface="Cambria" pitchFamily="34" charset="-122"/>
                 <a:cs typeface="Cambria" pitchFamily="34" charset="-120"/>
               </a:rPr>
-              <a:t>28,7%</a:t>
+              <a:t>29,4%</a:t>
             </a:r>
             <a:endParaRPr lang="en-US" sz="3400" dirty="0"/>
           </a:p>
@@ -8584,7 +8584,7 @@
                 <a:ea typeface="Cambria" pitchFamily="34" charset="-122"/>
                 <a:cs typeface="Cambria" pitchFamily="34" charset="-120"/>
               </a:rPr>
-              <a:t>69,9%</a:t>
+              <a:t>71,7%</a:t>
             </a:r>
             <a:endParaRPr lang="en-US" sz="3400" dirty="0"/>
           </a:p>
@@ -8662,7 +8662,7 @@
                 <a:ea typeface="Calibri" pitchFamily="34" charset="-122"/>
                 <a:cs typeface="Calibri" pitchFamily="34" charset="-120"/>
               </a:rPr>
-              <a:t>Corte: 28-09-2026   ·   Corte anterior: 21-09-2026</a:t>
+              <a:t>Corte: 01-10-2026   ·   Corte anterior: 28-09-2026</a:t>
             </a:r>
             <a:endParaRPr lang="en-US" sz="1100" dirty="0"/>
           </a:p>
@@ -8701,7 +8701,7 @@
                 <a:ea typeface="Calibri" pitchFamily="34" charset="-122"/>
                 <a:cs typeface="Calibri" pitchFamily="34" charset="-120"/>
               </a:rPr>
-              <a:t>Fuente: Estatus_Resumen_General_QAQC.xlsx · Corte 28-09-2026 · Áreas 2000/3000/4000/8000</a:t>
+              <a:t>Fuente: Estatus_Resumen_General_QAQC.xlsx · Corte 01-10-2026 · Áreas 2000/3000/4000/8000</a:t>
             </a:r>
             <a:endParaRPr lang="en-US" sz="850" dirty="0"/>
           </a:p>
@@ -9294,7 +9294,7 @@
                 <a:ea typeface="Calibri" pitchFamily="34" charset="-122"/>
                 <a:cs typeface="Calibri" pitchFamily="34" charset="-120"/>
               </a:rPr>
-              <a:t>27 próximas · 2 por programar</a:t>
+              <a:t>29 próximas · 0 por programar</a:t>
             </a:r>
             <a:endParaRPr lang="en-US" sz="950" dirty="0"/>
           </a:p>
@@ -9327,13 +9327,13 @@
             <a:r>
               <a:rPr lang="en-US" sz="900" b="1" dirty="0">
                 <a:solidFill>
-                  <a:srgbClr val="1F7A44"/>
-                </a:solidFill>
-                <a:latin typeface="Calibri" pitchFamily="34" charset="0"/>
-                <a:ea typeface="Calibri" pitchFamily="34" charset="-122"/>
-                <a:cs typeface="Calibri" pitchFamily="34" charset="-120"/>
-              </a:rPr>
-              <a:t>▲ +7 vs. corte anterior</a:t>
+                  <a:srgbClr val="56606E"/>
+                </a:solidFill>
+                <a:latin typeface="Calibri" pitchFamily="34" charset="0"/>
+                <a:ea typeface="Calibri" pitchFamily="34" charset="-122"/>
+                <a:cs typeface="Calibri" pitchFamily="34" charset="-120"/>
+              </a:rPr>
+              <a:t>= sin cambio vs. corte anterior</a:t>
             </a:r>
             <a:endParaRPr lang="en-US" sz="900" dirty="0"/>
           </a:p>
@@ -9426,7 +9426,7 @@
                 <a:ea typeface="Cambria" pitchFamily="34" charset="-122"/>
                 <a:cs typeface="Cambria" pitchFamily="34" charset="-120"/>
               </a:rPr>
-              <a:t>28,7%</a:t>
+              <a:t>29,4%</a:t>
             </a:r>
             <a:endParaRPr lang="en-US" sz="4000" dirty="0"/>
           </a:p>
@@ -9465,7 +9465,7 @@
                 <a:ea typeface="Calibri" pitchFamily="34" charset="-122"/>
                 <a:cs typeface="Calibri" pitchFamily="34" charset="-120"/>
               </a:rPr>
-              <a:t>39/136</a:t>
+              <a:t>40/136</a:t>
             </a:r>
             <a:endParaRPr lang="en-US" sz="1400" dirty="0"/>
           </a:p>
@@ -9543,7 +9543,7 @@
                 <a:ea typeface="Calibri" pitchFamily="34" charset="-122"/>
                 <a:cs typeface="Calibri" pitchFamily="34" charset="-120"/>
               </a:rPr>
-              <a:t>0 aprobadas · 21 rechazadas · 17 en revisión · 1 observadas</a:t>
+              <a:t>0 aprobadas · 24 rechazadas · 15 en revisión · 1 observadas</a:t>
             </a:r>
             <a:endParaRPr lang="en-US" sz="950" dirty="0"/>
           </a:p>
@@ -9582,7 +9582,7 @@
                 <a:ea typeface="Calibri" pitchFamily="34" charset="-122"/>
                 <a:cs typeface="Calibri" pitchFamily="34" charset="-120"/>
               </a:rPr>
-              <a:t>▲ +2 vs. corte anterior</a:t>
+              <a:t>▲ +1 vs. corte anterior</a:t>
             </a:r>
             <a:endParaRPr lang="en-US" sz="900" dirty="0"/>
           </a:p>
@@ -9675,7 +9675,7 @@
                 <a:ea typeface="Cambria" pitchFamily="34" charset="-122"/>
                 <a:cs typeface="Cambria" pitchFamily="34" charset="-120"/>
               </a:rPr>
-              <a:t>69,9%</a:t>
+              <a:t>71,7%</a:t>
             </a:r>
             <a:endParaRPr lang="en-US" sz="4000" dirty="0"/>
           </a:p>
@@ -9714,7 +9714,7 @@
                 <a:ea typeface="Calibri" pitchFamily="34" charset="-122"/>
                 <a:cs typeface="Calibri" pitchFamily="34" charset="-120"/>
               </a:rPr>
-              <a:t>1.437/2.056</a:t>
+              <a:t>1.474/2.056</a:t>
             </a:r>
             <a:endParaRPr lang="en-US" sz="1400" dirty="0"/>
           </a:p>
@@ -9792,7 +9792,7 @@
                 <a:ea typeface="Calibri" pitchFamily="34" charset="-122"/>
                 <a:cs typeface="Calibri" pitchFamily="34" charset="-120"/>
               </a:rPr>
-              <a:t>619 abiertos · 477 vencidos</a:t>
+              <a:t>582 abiertos · 448 vencidos</a:t>
             </a:r>
             <a:endParaRPr lang="en-US" sz="950" dirty="0"/>
           </a:p>
@@ -9831,7 +9831,7 @@
                 <a:ea typeface="Calibri" pitchFamily="34" charset="-122"/>
                 <a:cs typeface="Calibri" pitchFamily="34" charset="-120"/>
               </a:rPr>
-              <a:t>▲ +75 vs. corte anterior</a:t>
+              <a:t>▲ +37 vs. corte anterior</a:t>
             </a:r>
             <a:endParaRPr lang="en-US" sz="900" dirty="0"/>
           </a:p>
@@ -9971,7 +9971,7 @@
                 <a:ea typeface="Calibri" pitchFamily="34" charset="-122"/>
                 <a:cs typeface="Calibri" pitchFamily="34" charset="-120"/>
               </a:rPr>
-              <a:t>Los subsistemas «por programar» bajaron de 3 a 2, mientras las realizadas al 100% se mantienen en 107 (78,7%).</a:t>
+              <a:t>Los subsistemas «por programar» bajaron de 2 a 0, mientras las realizadas al 100% se mantienen en 107 (78,7%).</a:t>
             </a:r>
             <a:endParaRPr lang="en-US" sz="1250" dirty="0"/>
           </a:p>
@@ -10050,7 +10050,7 @@
                 <a:ea typeface="Calibri" pitchFamily="34" charset="-122"/>
                 <a:cs typeface="Calibri" pitchFamily="34" charset="-120"/>
               </a:rPr>
-              <a:t>39 entregadas de 136 (28,7%) y 0 aprobadas; las rechazadas pasaron de 19 a 21.</a:t>
+              <a:t>40 entregadas de 136 (29,4%) y 0 aprobadas; las rechazadas pasaron de 21 a 24.</a:t>
             </a:r>
             <a:endParaRPr lang="en-US" sz="1250" dirty="0"/>
           </a:p>
@@ -10129,7 +10129,7 @@
                 <a:ea typeface="Calibri" pitchFamily="34" charset="-122"/>
                 <a:cs typeface="Calibri" pitchFamily="34" charset="-120"/>
               </a:rPr>
-              <a:t>+75 P1 cerrado desde el corte anterior; 619 abiertos, de los cuales 477 superaron su fecha de vencimiento. El área 3000 concentra 543 (87,7%).</a:t>
+              <a:t>+37 P1 cerrado desde el corte anterior; 582 abiertos, de los cuales 448 superaron su fecha de vencimiento. El área 3000 concentra 536 (92,1%).</a:t>
             </a:r>
             <a:endParaRPr lang="en-US" sz="1250" dirty="0"/>
           </a:p>
@@ -10168,7 +10168,7 @@
                 <a:ea typeface="Calibri" pitchFamily="34" charset="-122"/>
                 <a:cs typeface="Calibri" pitchFamily="34" charset="-120"/>
               </a:rPr>
-              <a:t>Fuente: Estatus_Resumen_General_QAQC.xlsx · Corte 28-09-2026 · Áreas 2000/3000/4000/8000</a:t>
+              <a:t>Fuente: Estatus_Resumen_General_QAQC.xlsx · Corte 01-10-2026 · Áreas 2000/3000/4000/8000</a:t>
             </a:r>
             <a:endParaRPr lang="en-US" sz="850" dirty="0"/>
           </a:p>
@@ -10871,7 +10871,7 @@
                 <a:ea typeface="Calibri" pitchFamily="34" charset="-122"/>
                 <a:cs typeface="Calibri" pitchFamily="34" charset="-120"/>
               </a:rPr>
-              <a:t>29/35 · 82,9%</a:t>
+              <a:t>30/35 · 85,7%</a:t>
             </a:r>
             <a:endParaRPr lang="en-US" sz="1300" dirty="0"/>
           </a:p>
@@ -11209,7 +11209,7 @@
                 <a:ea typeface="Calibri" pitchFamily="34" charset="-122"/>
                 <a:cs typeface="Calibri" pitchFamily="34" charset="-120"/>
               </a:rPr>
-              <a:t>51/77 · 66,2%</a:t>
+              <a:t>50/77 · 64,9%</a:t>
             </a:r>
             <a:endParaRPr lang="en-US" sz="1300" dirty="0"/>
           </a:p>
@@ -11287,7 +11287,7 @@
                 <a:ea typeface="Calibri" pitchFamily="34" charset="-122"/>
                 <a:cs typeface="Calibri" pitchFamily="34" charset="-120"/>
               </a:rPr>
-              <a:t>49,3%</a:t>
+              <a:t>51,3%</a:t>
             </a:r>
             <a:endParaRPr lang="en-US" sz="1300" dirty="0"/>
           </a:p>
@@ -11326,7 +11326,7 @@
                 <a:ea typeface="Calibri" pitchFamily="34" charset="-122"/>
                 <a:cs typeface="Calibri" pitchFamily="34" charset="-120"/>
               </a:rPr>
-              <a:t>543 (450)</a:t>
+              <a:t>536 (421)</a:t>
             </a:r>
             <a:endParaRPr lang="en-US" sz="1300" dirty="0"/>
           </a:p>
@@ -11349,7 +11349,7 @@
             </a:avLst>
           </a:prstGeom>
           <a:solidFill>
-            <a:srgbClr val="C0392B"/>
+            <a:srgbClr val="E0A32E"/>
           </a:solidFill>
           <a:ln/>
         </p:spPr>
@@ -11387,7 +11387,7 @@
                 <a:ea typeface="Calibri" pitchFamily="34" charset="-122"/>
                 <a:cs typeface="Calibri" pitchFamily="34" charset="-120"/>
               </a:rPr>
-              <a:t>Crítico</a:t>
+              <a:t>Atención</a:t>
             </a:r>
             <a:endParaRPr lang="en-US" sz="1050" dirty="0"/>
           </a:p>
@@ -11566,7 +11566,7 @@
                 <a:ea typeface="Calibri" pitchFamily="34" charset="-122"/>
                 <a:cs typeface="Calibri" pitchFamily="34" charset="-120"/>
               </a:rPr>
-              <a:t>19/22 · 86,4%</a:t>
+              <a:t>20/22 · 90,9%</a:t>
             </a:r>
             <a:endParaRPr lang="en-US" sz="1300" dirty="0"/>
           </a:p>
@@ -11644,7 +11644,7 @@
                 <a:ea typeface="Calibri" pitchFamily="34" charset="-122"/>
                 <a:cs typeface="Calibri" pitchFamily="34" charset="-120"/>
               </a:rPr>
-              <a:t>87,7%</a:t>
+              <a:t>88%</a:t>
             </a:r>
             <a:endParaRPr lang="en-US" sz="1300" dirty="0"/>
           </a:p>
@@ -11683,7 +11683,7 @@
                 <a:ea typeface="Calibri" pitchFamily="34" charset="-122"/>
                 <a:cs typeface="Calibri" pitchFamily="34" charset="-120"/>
               </a:rPr>
-              <a:t>45 (25)</a:t>
+              <a:t>44 (25)</a:t>
             </a:r>
             <a:endParaRPr lang="en-US" sz="1300" dirty="0"/>
           </a:p>
@@ -12222,7 +12222,7 @@
                 <a:ea typeface="Calibri" pitchFamily="34" charset="-122"/>
                 <a:cs typeface="Calibri" pitchFamily="34" charset="-120"/>
               </a:rPr>
-              <a:t>Fuente: Estatus_Resumen_General_QAQC.xlsx · Corte 28-09-2026 · Áreas 2000/3000/4000/8000</a:t>
+              <a:t>Fuente: Estatus_Resumen_General_QAQC.xlsx · Corte 01-10-2026 · Áreas 2000/3000/4000/8000</a:t>
             </a:r>
             <a:endParaRPr lang="en-US" sz="850" dirty="0"/>
           </a:p>
@@ -12473,7 +12473,7 @@
                 <a:ea typeface="Calibri" pitchFamily="34" charset="-122"/>
                 <a:cs typeface="Calibri" pitchFamily="34" charset="-120"/>
               </a:rPr>
-              <a:t>Las caminatas al 80% están cerradas en todas las áreas (136/136). El hito 100% avanza a 78,7%, y el área 3000 concentra 26 de los 29 subsistemas pendientes.</a:t>
+              <a:t>Las caminatas al 80% están cerradas en todas las áreas (136/136). El hito 100% avanza a 78,7%, y el área 3000 concentra 27 de los 29 subsistemas pendientes.</a:t>
             </a:r>
             <a:endParaRPr lang="en-US" sz="1350" dirty="0"/>
           </a:p>
@@ -12827,7 +12827,7 @@
                 <a:ea typeface="Calibri" pitchFamily="34" charset="-122"/>
                 <a:cs typeface="Calibri" pitchFamily="34" charset="-120"/>
               </a:rPr>
-              <a:t>27 próximas a realizar y 2 por programar. Las «por programar» bajaron 1 en el período.</a:t>
+              <a:t>29 próximas a realizar y 0 por programar. Las «por programar» bajaron 2 en el período.</a:t>
             </a:r>
             <a:endParaRPr lang="en-US" sz="1150" dirty="0"/>
           </a:p>
@@ -12866,7 +12866,7 @@
                 <a:ea typeface="Calibri" pitchFamily="34" charset="-122"/>
                 <a:cs typeface="Calibri" pitchFamily="34" charset="-120"/>
               </a:rPr>
-              <a:t>Fuente: Estatus_Resumen_General_QAQC.xlsx · Corte 28-09-2026 · Áreas 2000/3000/4000/8000</a:t>
+              <a:t>Fuente: Estatus_Resumen_General_QAQC.xlsx · Corte 01-10-2026 · Áreas 2000/3000/4000/8000</a:t>
             </a:r>
             <a:endParaRPr lang="en-US" sz="850" dirty="0"/>
           </a:p>
@@ -13117,7 +13117,7 @@
                 <a:ea typeface="Calibri" pitchFamily="34" charset="-122"/>
                 <a:cs typeface="Calibri" pitchFamily="34" charset="-120"/>
               </a:rPr>
-              <a:t>39 carpetas entregadas de 136 (28,7%). Ninguna aprobada aún: el flujo se acumula en revisión y hay 21 rechazos que requieren rearmado.</a:t>
+              <a:t>40 carpetas entregadas de 136 (29,4%). Ninguna aprobada aún: el flujo se acumula en revisión y hay 24 rechazos que requieren rearmado.</a:t>
             </a:r>
             <a:endParaRPr lang="en-US" sz="1350" dirty="0"/>
           </a:p>
@@ -13319,7 +13319,7 @@
                 <a:ea typeface="Calibri" pitchFamily="34" charset="-122"/>
                 <a:cs typeface="Calibri" pitchFamily="34" charset="-120"/>
               </a:rPr>
-              <a:t>▲ +2</a:t>
+              <a:t>▲ +1</a:t>
             </a:r>
             <a:endParaRPr lang="en-US" sz="950" dirty="0"/>
           </a:p>
@@ -13358,7 +13358,7 @@
                 <a:ea typeface="Cambria" pitchFamily="34" charset="-122"/>
                 <a:cs typeface="Cambria" pitchFamily="34" charset="-120"/>
               </a:rPr>
-              <a:t>39</a:t>
+              <a:t>40</a:t>
             </a:r>
             <a:endParaRPr lang="en-US" sz="2200" dirty="0"/>
           </a:p>
@@ -13453,6 +13453,45 @@
         </p:nvSpPr>
         <p:spPr>
           <a:xfrm>
+            <a:off x="9509760" y="3072384"/>
+            <a:ext cx="914400" cy="566928"/>
+          </a:xfrm>
+          <a:prstGeom prst="rect">
+            <a:avLst/>
+          </a:prstGeom>
+          <a:noFill/>
+          <a:ln/>
+        </p:spPr>
+        <p:txBody>
+          <a:bodyPr wrap="square" lIns="0" tIns="0" rIns="0" bIns="0" rtlCol="0" anchor="ctr"/>
+          <a:lstStyle/>
+          <a:p>
+            <a:pPr algn="r" indent="0" marL="0">
+              <a:buNone/>
+            </a:pPr>
+            <a:r>
+              <a:rPr lang="en-US" sz="950" b="1" dirty="0">
+                <a:solidFill>
+                  <a:srgbClr val="C0392B"/>
+                </a:solidFill>
+                <a:latin typeface="Calibri" pitchFamily="34" charset="0"/>
+                <a:ea typeface="Calibri" pitchFamily="34" charset="-122"/>
+                <a:cs typeface="Calibri" pitchFamily="34" charset="-120"/>
+              </a:rPr>
+              <a:t>▼ -2</a:t>
+            </a:r>
+            <a:endParaRPr lang="en-US" sz="950" dirty="0"/>
+          </a:p>
+        </p:txBody>
+      </p:sp>
+      <p:sp>
+        <p:nvSpPr>
+          <p:cNvPr id="18" name="Text 14"/>
+          <p:cNvSpPr/>
+          <p:nvPr/>
+        </p:nvSpPr>
+        <p:spPr>
+          <a:xfrm>
             <a:off x="10469880" y="3072384"/>
             <a:ext cx="868680" cy="566928"/>
           </a:xfrm>
@@ -13478,7 +13517,7 @@
                 <a:ea typeface="Cambria" pitchFamily="34" charset="-122"/>
                 <a:cs typeface="Cambria" pitchFamily="34" charset="-120"/>
               </a:rPr>
-              <a:t>17</a:t>
+              <a:t>15</a:t>
             </a:r>
             <a:endParaRPr lang="en-US" sz="2200" dirty="0"/>
           </a:p>
@@ -13486,7 +13525,7 @@
       </p:sp>
       <p:sp>
         <p:nvSpPr>
-          <p:cNvPr id="18" name="Shape 14"/>
+          <p:cNvPr id="19" name="Shape 15"/>
           <p:cNvSpPr/>
           <p:nvPr/>
         </p:nvSpPr>
@@ -13508,7 +13547,7 @@
       </p:sp>
       <p:sp>
         <p:nvSpPr>
-          <p:cNvPr id="19" name="Shape 15"/>
+          <p:cNvPr id="20" name="Shape 16"/>
           <p:cNvSpPr/>
           <p:nvPr/>
         </p:nvSpPr>
@@ -13528,7 +13567,7 @@
       </p:sp>
       <p:sp>
         <p:nvSpPr>
-          <p:cNvPr id="20" name="Text 16"/>
+          <p:cNvPr id="21" name="Text 17"/>
           <p:cNvSpPr/>
           <p:nvPr/>
         </p:nvSpPr>
@@ -13567,7 +13606,7 @@
       </p:sp>
       <p:sp>
         <p:nvSpPr>
-          <p:cNvPr id="21" name="Text 17"/>
+          <p:cNvPr id="22" name="Text 18"/>
           <p:cNvSpPr/>
           <p:nvPr/>
         </p:nvSpPr>
@@ -13606,7 +13645,7 @@
       </p:sp>
       <p:sp>
         <p:nvSpPr>
-          <p:cNvPr id="22" name="Shape 18"/>
+          <p:cNvPr id="23" name="Shape 19"/>
           <p:cNvSpPr/>
           <p:nvPr/>
         </p:nvSpPr>
@@ -13628,7 +13667,7 @@
       </p:sp>
       <p:sp>
         <p:nvSpPr>
-          <p:cNvPr id="23" name="Shape 19"/>
+          <p:cNvPr id="24" name="Shape 20"/>
           <p:cNvSpPr/>
           <p:nvPr/>
         </p:nvSpPr>
@@ -13648,7 +13687,7 @@
       </p:sp>
       <p:sp>
         <p:nvSpPr>
-          <p:cNvPr id="24" name="Text 20"/>
+          <p:cNvPr id="25" name="Text 21"/>
           <p:cNvSpPr/>
           <p:nvPr/>
         </p:nvSpPr>
@@ -13687,7 +13726,7 @@
       </p:sp>
       <p:sp>
         <p:nvSpPr>
-          <p:cNvPr id="25" name="Text 21"/>
+          <p:cNvPr id="26" name="Text 22"/>
           <p:cNvSpPr/>
           <p:nvPr/>
         </p:nvSpPr>
@@ -13718,7 +13757,7 @@
                 <a:ea typeface="Calibri" pitchFamily="34" charset="-122"/>
                 <a:cs typeface="Calibri" pitchFamily="34" charset="-120"/>
               </a:rPr>
-              <a:t>▲ +2</a:t>
+              <a:t>▲ +3</a:t>
             </a:r>
             <a:endParaRPr lang="en-US" sz="950" dirty="0"/>
           </a:p>
@@ -13726,7 +13765,7 @@
       </p:sp>
       <p:sp>
         <p:nvSpPr>
-          <p:cNvPr id="26" name="Text 22"/>
+          <p:cNvPr id="27" name="Text 23"/>
           <p:cNvSpPr/>
           <p:nvPr/>
         </p:nvSpPr>
@@ -13757,7 +13796,7 @@
                 <a:ea typeface="Cambria" pitchFamily="34" charset="-122"/>
                 <a:cs typeface="Cambria" pitchFamily="34" charset="-120"/>
               </a:rPr>
-              <a:t>21</a:t>
+              <a:t>24</a:t>
             </a:r>
             <a:endParaRPr lang="en-US" sz="2200" dirty="0"/>
           </a:p>
@@ -13765,7 +13804,7 @@
       </p:sp>
       <p:sp>
         <p:nvSpPr>
-          <p:cNvPr id="27" name="Shape 23"/>
+          <p:cNvPr id="28" name="Shape 24"/>
           <p:cNvSpPr/>
           <p:nvPr/>
         </p:nvSpPr>
@@ -13787,7 +13826,7 @@
       </p:sp>
       <p:sp>
         <p:nvSpPr>
-          <p:cNvPr id="28" name="Shape 24"/>
+          <p:cNvPr id="29" name="Shape 25"/>
           <p:cNvSpPr/>
           <p:nvPr/>
         </p:nvSpPr>
@@ -13807,7 +13846,7 @@
       </p:sp>
       <p:sp>
         <p:nvSpPr>
-          <p:cNvPr id="29" name="Text 25"/>
+          <p:cNvPr id="30" name="Text 26"/>
           <p:cNvSpPr/>
           <p:nvPr/>
         </p:nvSpPr>
@@ -13846,7 +13885,7 @@
       </p:sp>
       <p:sp>
         <p:nvSpPr>
-          <p:cNvPr id="30" name="Text 26"/>
+          <p:cNvPr id="31" name="Text 27"/>
           <p:cNvSpPr/>
           <p:nvPr/>
         </p:nvSpPr>
@@ -13885,7 +13924,7 @@
       </p:sp>
       <p:sp>
         <p:nvSpPr>
-          <p:cNvPr id="31" name="Text 27"/>
+          <p:cNvPr id="32" name="Text 28"/>
           <p:cNvSpPr/>
           <p:nvPr/>
         </p:nvSpPr>
@@ -13924,7 +13963,7 @@
       </p:sp>
       <p:sp>
         <p:nvSpPr>
-          <p:cNvPr id="32" name="Text 28"/>
+          <p:cNvPr id="33" name="Text 29"/>
           <p:cNvSpPr/>
           <p:nvPr/>
         </p:nvSpPr>
@@ -13955,7 +13994,7 @@
                 <a:ea typeface="Calibri" pitchFamily="34" charset="-122"/>
                 <a:cs typeface="Calibri" pitchFamily="34" charset="-120"/>
               </a:rPr>
-              <a:t>Fuente: Estatus_Resumen_General_QAQC.xlsx · Corte 28-09-2026 · Áreas 2000/3000/4000/8000</a:t>
+              <a:t>Fuente: Estatus_Resumen_General_QAQC.xlsx · Corte 01-10-2026 · Áreas 2000/3000/4000/8000</a:t>
             </a:r>
             <a:endParaRPr lang="en-US" sz="850" dirty="0"/>
           </a:p>
@@ -13963,7 +14002,7 @@
       </p:sp>
       <p:sp>
         <p:nvSpPr>
-          <p:cNvPr id="33" name="Text 29"/>
+          <p:cNvPr id="34" name="Text 30"/>
           <p:cNvSpPr/>
           <p:nvPr/>
         </p:nvSpPr>
@@ -14002,7 +14041,7 @@
       </p:sp>
       <p:sp>
         <p:nvSpPr>
-          <p:cNvPr id="34" name="Text 30"/>
+          <p:cNvPr id="35" name="Text 31"/>
           <p:cNvSpPr/>
           <p:nvPr/>
         </p:nvSpPr>
@@ -14206,7 +14245,7 @@
                 <a:ea typeface="Calibri" pitchFamily="34" charset="-122"/>
                 <a:cs typeface="Calibri" pitchFamily="34" charset="-120"/>
               </a:rPr>
-              <a:t>2.056 P1 levantados; 69,9% cerrados. El pendiente se concentra en Eléctrica, Piping, Instrumentación y Control, y físicamente en el área 3000.</a:t>
+              <a:t>2.056 P1 levantados; 71,7% cerrados. El pendiente se concentra en Eléctrica, Piping, Instrumentación y Control, y físicamente en el área 3000.</a:t>
             </a:r>
             <a:endParaRPr lang="en-US" sz="1350" dirty="0"/>
           </a:p>
@@ -14338,7 +14377,7 @@
                 <a:ea typeface="Cambria" pitchFamily="34" charset="-122"/>
                 <a:cs typeface="Cambria" pitchFamily="34" charset="-120"/>
               </a:rPr>
-              <a:t>69,9%</a:t>
+              <a:t>71,7%</a:t>
             </a:r>
             <a:endParaRPr lang="en-US" sz="1900" dirty="0"/>
           </a:p>
@@ -14453,7 +14492,7 @@
                 <a:ea typeface="Calibri" pitchFamily="34" charset="-122"/>
                 <a:cs typeface="Calibri" pitchFamily="34" charset="-120"/>
               </a:rPr>
-              <a:t>1.437</a:t>
+              <a:t>1.474</a:t>
             </a:r>
             <a:endParaRPr lang="en-US" sz="1100" dirty="0"/>
           </a:p>
@@ -14551,7 +14590,7 @@
                 <a:ea typeface="Calibri" pitchFamily="34" charset="-122"/>
                 <a:cs typeface="Calibri" pitchFamily="34" charset="-120"/>
               </a:rPr>
-              <a:t>619</a:t>
+              <a:t>582</a:t>
             </a:r>
             <a:endParaRPr lang="en-US" sz="1100" dirty="0"/>
           </a:p>
@@ -14732,7 +14771,7 @@
                 <a:ea typeface="Calibri" pitchFamily="34" charset="-122"/>
                 <a:cs typeface="Calibri" pitchFamily="34" charset="-120"/>
               </a:rPr>
-              <a:t>543 de 619 P1 abiertos (87,7%) están en el área 3000. Áreas 2000 sobre 90% de cierre.</a:t>
+              <a:t>536 de 582 P1 abiertos (92,1%) están en el área 3000. Áreas 2000 sobre 90% de cierre.</a:t>
             </a:r>
             <a:endParaRPr lang="en-US" sz="1150" dirty="0"/>
           </a:p>
@@ -14771,7 +14810,7 @@
                 <a:ea typeface="Calibri" pitchFamily="34" charset="-122"/>
                 <a:cs typeface="Calibri" pitchFamily="34" charset="-120"/>
               </a:rPr>
-              <a:t>Fuente: Estatus_Resumen_General_QAQC.xlsx · Corte 28-09-2026 · Áreas 2000/3000/4000/8000</a:t>
+              <a:t>Fuente: Estatus_Resumen_General_QAQC.xlsx · Corte 01-10-2026 · Áreas 2000/3000/4000/8000</a:t>
             </a:r>
             <a:endParaRPr lang="en-US" sz="850" dirty="0"/>
           </a:p>
@@ -15145,7 +15184,7 @@
                 <a:ea typeface="Calibri" pitchFamily="34" charset="-122"/>
                 <a:cs typeface="Calibri" pitchFamily="34" charset="-120"/>
               </a:rPr>
-              <a:t>0 aprobadas de 136. Priorizar el cierre de las 17 en revisión y el rearmado de las 21 rechazadas para convertir entregas en aprobaciones.</a:t>
+              <a:t>0 aprobadas de 136. Priorizar el cierre de las 15 en revisión y el rearmado de las 24 rechazadas para convertir entregas en aprobaciones.</a:t>
             </a:r>
             <a:endParaRPr lang="en-US" sz="1150" dirty="0"/>
           </a:p>
@@ -15287,7 +15326,7 @@
                 <a:ea typeface="Calibri" pitchFamily="34" charset="-122"/>
                 <a:cs typeface="Calibri" pitchFamily="34" charset="-120"/>
               </a:rPr>
-              <a:t>543 P1 abiertos (87,7% del total) y 26 caminatas 100% pendientes. Es la ruta crítica: sin esta área no mejora ningún indicador global.</a:t>
+              <a:t>536 P1 abiertos (92,1% del total) y 27 caminatas 100% pendientes. Es la ruta crítica: sin esta área no mejora ningún indicador global.</a:t>
             </a:r>
             <a:endParaRPr lang="en-US" sz="1150" dirty="0"/>
           </a:p>
@@ -15387,7 +15426,7 @@
                 <a:ea typeface="Calibri" pitchFamily="34" charset="-122"/>
                 <a:cs typeface="Calibri" pitchFamily="34" charset="-120"/>
               </a:rPr>
-              <a:t>Recuperar los 477 P1 vencidos</a:t>
+              <a:t>Recuperar los 448 P1 vencidos</a:t>
             </a:r>
             <a:endParaRPr lang="en-US" sz="1500" dirty="0"/>
           </a:p>
@@ -15429,7 +15468,7 @@
                 <a:ea typeface="Calibri" pitchFamily="34" charset="-122"/>
                 <a:cs typeface="Calibri" pitchFamily="34" charset="-120"/>
               </a:rPr>
-              <a:t>77,1% de los P1 abiertos superó su fecha de vencimiento. Foco en Eléctrica (141), Instrumentación y Control (133), Piping (126).</a:t>
+              <a:t>77% de los P1 abiertos superó su fecha de vencimiento. Foco en Eléctrica (132), Instrumentación y Control (129), Piping (124).</a:t>
             </a:r>
             <a:endParaRPr lang="en-US" sz="1150" dirty="0"/>
           </a:p>
@@ -15571,7 +15610,7 @@
                 <a:ea typeface="Calibri" pitchFamily="34" charset="-122"/>
                 <a:cs typeface="Calibri" pitchFamily="34" charset="-120"/>
               </a:rPr>
-              <a:t>29 subsistemas pendientes: 27 próximos a realizar y 2 por programar. La programación ya está hecha; falta ejecutarla para habilitar la entrega de carpetas.</a:t>
+              <a:t>29 subsistemas pendientes: 29 próximos a realizar y 0 por programar. La programación ya está hecha; falta ejecutarla para habilitar la entrega de carpetas.</a:t>
             </a:r>
             <a:endParaRPr lang="en-US" sz="1150" dirty="0"/>
           </a:p>
@@ -15610,7 +15649,7 @@
                 <a:ea typeface="Calibri" pitchFamily="34" charset="-122"/>
                 <a:cs typeface="Calibri" pitchFamily="34" charset="-120"/>
               </a:rPr>
-              <a:t>Fuente: Estatus_Resumen_General_QAQC.xlsx · Corte 28-09-2026 · Áreas 2000/3000/4000/8000</a:t>
+              <a:t>Fuente: Estatus_Resumen_General_QAQC.xlsx · Corte 01-10-2026 · Áreas 2000/3000/4000/8000</a:t>
             </a:r>
             <a:endParaRPr lang="en-US" sz="850" dirty="0"/>
           </a:p>

--- a/panel_control_TOP_P1/Panel_Control_TOP_P1.pptx
+++ b/panel_control_TOP_P1/Panel_Control_TOP_P1.pptx
@@ -1632,6 +1632,126 @@
                 <c:formatCode>General</c:formatCode>
                 <c:ptCount val="9"/>
                 <c:pt idx="0">
+                  <c:v/>
+                </c:pt>
+                <c:pt idx="1">
+                  <c:v/>
+                </c:pt>
+                <c:pt idx="2">
+                  <c:v/>
+                </c:pt>
+                <c:pt idx="3">
+                  <c:v/>
+                </c:pt>
+                <c:pt idx="4">
+                  <c:v/>
+                </c:pt>
+                <c:pt idx="5">
+                  <c:v/>
+                </c:pt>
+                <c:pt idx="6">
+                  <c:v/>
+                </c:pt>
+                <c:pt idx="7">
+                  <c:v/>
+                </c:pt>
+                <c:pt idx="8">
+                  <c:v/>
+                </c:pt>
+              </c:numCache>
+            </c:numRef>
+          </c:val>
+        </c:ser>
+        <c:ser>
+          <c:idx val="2"/>
+          <c:order val="2"/>
+          <c:tx>
+            <c:strRef>
+              <c:f>Sheet1!$D$1</c:f>
+              <c:strCache>
+                <c:ptCount val="1"/>
+                <c:pt idx="0">
+                  <c:v>Agenda vencida</c:v>
+                </c:pt>
+              </c:strCache>
+            </c:strRef>
+          </c:tx>
+          <c:spPr>
+            <a:solidFill>
+              <a:srgbClr val="9A6B0F"/>
+            </a:solidFill>
+            <a:effectLst/>
+          </c:spPr>
+          <c:invertIfNegative val="0"/>
+          <c:dLbls>
+            <c:numFmt formatCode="#,##0" sourceLinked="0"/>
+            <c:txPr>
+              <a:bodyPr/>
+              <a:lstStyle/>
+              <a:p>
+                <a:pPr>
+                  <a:defRPr b="1" i="0" strike="noStrike" sz="1100" u="none">
+                    <a:solidFill>
+                      <a:srgbClr val="FFFFFF"/>
+                    </a:solidFill>
+                    <a:latin typeface="Calibri"/>
+                  </a:defRPr>
+                </a:pPr>
+              </a:p>
+            </c:txPr>
+            <c:dLblPos val="ctr"/>
+            <c:showLegendKey val="0"/>
+            <c:showVal val="1"/>
+            <c:showCatName val="0"/>
+            <c:showSerName val="0"/>
+            <c:showPercent val="0"/>
+            <c:showBubbleSize val="0"/>
+            <c:showLeaderLines val="0"/>
+          </c:dLbls>
+          <c:cat>
+            <c:multiLvlStrRef>
+              <c:f>Sheet1!$A$2:$A$10</c:f>
+              <c:multiLvlStrCache>
+                <c:ptCount val="9"/>
+                <c:lvl>
+                  <c:pt idx="0">
+                    <c:v>CERRO VERDE/PS2</c:v>
+                  </c:pt>
+                  <c:pt idx="1">
+                    <c:v>EBMP</c:v>
+                  </c:pt>
+                  <c:pt idx="2">
+                    <c:v>EBMS</c:v>
+                  </c:pt>
+                  <c:pt idx="3">
+                    <c:v>IMPULSIÓN ADUCCIÓN</c:v>
+                  </c:pt>
+                  <c:pt idx="4">
+                    <c:v>LÍNEAS IMPULSIÓN</c:v>
+                  </c:pt>
+                  <c:pt idx="5">
+                    <c:v>PISCINAS Y SEDIMENTADOR</c:v>
+                  </c:pt>
+                  <c:pt idx="6">
+                    <c:v>POZOS</c:v>
+                  </c:pt>
+                  <c:pt idx="7">
+                    <c:v>PQS</c:v>
+                  </c:pt>
+                  <c:pt idx="8">
+                    <c:v>SALA GAR</c:v>
+                  </c:pt>
+                </c:lvl>
+              </c:multiLvlStrCache>
+            </c:multiLvlStrRef>
+          </c:cat>
+          <c:val>
+            <c:numRef>
+              <c:f>Sheet1!$D$2:$D$10</c:f>
+              <c:numCache>
+                <c:formatCode>General</c:formatCode>
+                <c:ptCount val="9"/>
+                <c:pt idx="0">
                   <c:v>2</c:v>
                 </c:pt>
                 <c:pt idx="1">
@@ -1663,11 +1783,11 @@
           </c:val>
         </c:ser>
         <c:ser>
-          <c:idx val="2"/>
-          <c:order val="2"/>
+          <c:idx val="3"/>
+          <c:order val="3"/>
           <c:tx>
             <c:strRef>
-              <c:f>Sheet1!$D$1</c:f>
+              <c:f>Sheet1!$E$1</c:f>
               <c:strCache>
                 <c:ptCount val="1"/>
                 <c:pt idx="0">
@@ -1747,7 +1867,7 @@
           </c:cat>
           <c:val>
             <c:numRef>
-              <c:f>Sheet1!$D$2:$D$10</c:f>
+              <c:f>Sheet1!$E$2:$E$10</c:f>
               <c:numCache>
                 <c:formatCode>General</c:formatCode>
                 <c:ptCount val="9"/>
@@ -2616,19 +2736,19 @@
                 <c:formatCode>General</c:formatCode>
                 <c:ptCount val="5"/>
                 <c:pt idx="0">
-                  <c:v>3</c:v>
+                  <c:v>9</c:v>
                 </c:pt>
                 <c:pt idx="1">
-                  <c:v>24</c:v>
+                  <c:v>43</c:v>
                 </c:pt>
                 <c:pt idx="2">
-                  <c:v>21</c:v>
+                  <c:v>8</c:v>
                 </c:pt>
                 <c:pt idx="3">
                   <c:v>8</c:v>
                 </c:pt>
                 <c:pt idx="4">
-                  <c:v>1</c:v>
+                  <c:v/>
                 </c:pt>
               </c:numCache>
             </c:numRef>
@@ -2712,19 +2832,19 @@
                 <c:formatCode>General</c:formatCode>
                 <c:ptCount val="5"/>
                 <c:pt idx="0">
-                  <c:v>138</c:v>
+                  <c:v>132</c:v>
                 </c:pt>
                 <c:pt idx="1">
-                  <c:v>68</c:v>
+                  <c:v>60</c:v>
                 </c:pt>
                 <c:pt idx="2">
-                  <c:v>15</c:v>
+                  <c:v>23</c:v>
                 </c:pt>
                 <c:pt idx="3">
                   <c:v>13</c:v>
                 </c:pt>
                 <c:pt idx="4">
-                  <c:v>3</c:v>
+                  <c:v>17</c:v>
                 </c:pt>
               </c:numCache>
             </c:numRef>
@@ -7431,7 +7551,7 @@
                 <a:ea typeface="Calibri" pitchFamily="34" charset="-122"/>
                 <a:cs typeface="Calibri" pitchFamily="34" charset="-120"/>
               </a:rPr>
-              <a:t>Recuperar los 57 DT atrasados</a:t>
+              <a:t>Recuperar los 68 DT atrasados</a:t>
             </a:r>
             <a:endParaRPr lang="en-US" sz="1350" dirty="0"/>
           </a:p>
@@ -7473,7 +7593,7 @@
                 <a:ea typeface="Calibri" pitchFamily="34" charset="-122"/>
                 <a:cs typeface="Calibri" pitchFamily="34" charset="-120"/>
               </a:rPr>
-              <a:t>38 son P2 y 16 son P1. La mediana de atraso es de 53 días y 8 superan los 90 días.</a:t>
+              <a:t>46 son P2 y 19 son P1. La mediana de atraso es de 59 días y 11 superan los 90 días.</a:t>
             </a:r>
             <a:endParaRPr lang="en-US" sz="1100" dirty="0"/>
           </a:p>
@@ -7615,7 +7735,7 @@
                 <a:ea typeface="Calibri" pitchFamily="34" charset="-122"/>
                 <a:cs typeface="Calibri" pitchFamily="34" charset="-120"/>
               </a:rPr>
-              <a:t>CERRO VERDE/PS2: 1/3 (33,3%). A nivel proyecto la caminata 2 va 98,2% con 4 ya agendadas.</a:t>
+              <a:t>CERRO VERDE/PS2: 1/3 (33,3%). A nivel proyecto la caminata 2 va 98,2% con 0 ya agendadas.</a:t>
             </a:r>
             <a:endParaRPr lang="en-US" sz="1100" dirty="0"/>
           </a:p>
@@ -7899,7 +8019,7 @@
                 <a:ea typeface="Calibri" pitchFamily="34" charset="-122"/>
                 <a:cs typeface="Calibri" pitchFamily="34" charset="-120"/>
               </a:rPr>
-              <a:t>Concentra 108 de los 294 DT abiertos (36,7%), con 2 atrasados. Además hay 3 carpetas bajo 80% de avance que conviene cerrar en paralelo.</a:t>
+              <a:t>Concentra 108 de los 313 DT abiertos (34,5%), con 2 atrasados. Además hay 3 carpetas bajo 80% de avance que conviene cerrar en paralelo.</a:t>
             </a:r>
             <a:endParaRPr lang="en-US" sz="1100" dirty="0"/>
           </a:p>
@@ -7938,7 +8058,7 @@
                 <a:ea typeface="Calibri" pitchFamily="34" charset="-122"/>
                 <a:cs typeface="Calibri" pitchFamily="34" charset="-120"/>
               </a:rPr>
-              <a:t>Fuente: STATUS_SUBSISTEMAS_TALABRE + Detalle_de_Terminaciones · 218 subsistemas · 2.141 DT · Atrasos al 28-09-2026</a:t>
+              <a:t>Fuente: STATUS_SUBSISTEMAS_TALABRE + Detalle_de_Terminaciones · 218 subsistemas · 2.175 DT · Atrasos al 05-10-2026</a:t>
             </a:r>
             <a:endParaRPr lang="en-US" sz="850" dirty="0"/>
           </a:p>
@@ -20346,7 +20466,7 @@
                 <a:ea typeface="Calibri" pitchFamily="34" charset="-122"/>
                 <a:cs typeface="Calibri" pitchFamily="34" charset="-120"/>
               </a:rPr>
-              <a:t>Contrato 4600029355 · 218 subsistemas en 9 áreas · 2.141 detalles de terminación levantados.</a:t>
+              <a:t>Contrato 4600029355 · 218 subsistemas en 9 áreas · 2.175 detalles de terminación levantados.</a:t>
             </a:r>
             <a:endParaRPr lang="en-US" sz="1350" dirty="0"/>
           </a:p>
@@ -20463,7 +20583,7 @@
                 <a:ea typeface="Cambria" pitchFamily="34" charset="-122"/>
                 <a:cs typeface="Cambria" pitchFamily="34" charset="-120"/>
               </a:rPr>
-              <a:t>100%</a:t>
+              <a:t>98,2%</a:t>
             </a:r>
             <a:endParaRPr lang="en-US" sz="3400" dirty="0"/>
           </a:p>
@@ -20619,7 +20739,7 @@
                 <a:ea typeface="Cambria" pitchFamily="34" charset="-122"/>
                 <a:cs typeface="Cambria" pitchFamily="34" charset="-120"/>
               </a:rPr>
-              <a:t>95,7%</a:t>
+              <a:t>94,7%</a:t>
             </a:r>
             <a:endParaRPr lang="en-US" sz="3400" dirty="0"/>
           </a:p>
@@ -20697,7 +20817,7 @@
                 <a:ea typeface="Calibri" pitchFamily="34" charset="-122"/>
                 <a:cs typeface="Calibri" pitchFamily="34" charset="-120"/>
               </a:rPr>
-              <a:t>Atrasos calculados al 28-09-2026</a:t>
+              <a:t>Atrasos calculados al 05-10-2026</a:t>
             </a:r>
             <a:endParaRPr lang="en-US" sz="1100" dirty="0"/>
           </a:p>
@@ -20736,7 +20856,7 @@
                 <a:ea typeface="Calibri" pitchFamily="34" charset="-122"/>
                 <a:cs typeface="Calibri" pitchFamily="34" charset="-120"/>
               </a:rPr>
-              <a:t>Fuente: STATUS_SUBSISTEMAS_TALABRE + Detalle_de_Terminaciones · 218 subsistemas · 2.141 DT · Atrasos al 28-09-2026</a:t>
+              <a:t>Fuente: STATUS_SUBSISTEMAS_TALABRE + Detalle_de_Terminaciones · 218 subsistemas · 2.175 DT · Atrasos al 05-10-2026</a:t>
             </a:r>
             <a:endParaRPr lang="en-US" sz="850" dirty="0"/>
           </a:p>
@@ -21215,7 +21335,7 @@
                 <a:ea typeface="Cambria" pitchFamily="34" charset="-122"/>
                 <a:cs typeface="Cambria" pitchFamily="34" charset="-120"/>
               </a:rPr>
-              <a:t>100%</a:t>
+              <a:t>98,2%</a:t>
             </a:r>
             <a:endParaRPr lang="en-US" sz="3800" dirty="0"/>
           </a:p>
@@ -21254,7 +21374,7 @@
                 <a:ea typeface="Calibri" pitchFamily="34" charset="-122"/>
                 <a:cs typeface="Calibri" pitchFamily="34" charset="-120"/>
               </a:rPr>
-              <a:t>214/214 exigibles</a:t>
+              <a:t>214/218 exigibles</a:t>
             </a:r>
             <a:endParaRPr lang="en-US" sz="1300" dirty="0"/>
           </a:p>
@@ -21335,7 +21455,7 @@
                 <a:ea typeface="Calibri" pitchFamily="34" charset="-122"/>
                 <a:cs typeface="Calibri" pitchFamily="34" charset="-120"/>
               </a:rPr>
-              <a:t>98,2% del universo · 4 programadas en plazo · 0 sin programar</a:t>
+              <a:t>98,2% del universo · 0 programadas en plazo · 4 con agenda vencida · 0 sin programar</a:t>
             </a:r>
             <a:endParaRPr lang="en-US" sz="950" dirty="0"/>
           </a:p>
@@ -21641,7 +21761,7 @@
                 <a:ea typeface="Cambria" pitchFamily="34" charset="-122"/>
                 <a:cs typeface="Cambria" pitchFamily="34" charset="-120"/>
               </a:rPr>
-              <a:t>92,9%</a:t>
+              <a:t>91,8%</a:t>
             </a:r>
             <a:endParaRPr lang="en-US" sz="3800" dirty="0"/>
           </a:p>
@@ -21680,7 +21800,7 @@
                 <a:ea typeface="Calibri" pitchFamily="34" charset="-122"/>
                 <a:cs typeface="Calibri" pitchFamily="34" charset="-120"/>
               </a:rPr>
-              <a:t>393/423</a:t>
+              <a:t>404/440</a:t>
             </a:r>
             <a:endParaRPr lang="en-US" sz="1300" dirty="0"/>
           </a:p>
@@ -21761,7 +21881,7 @@
                 <a:ea typeface="Calibri" pitchFamily="34" charset="-122"/>
                 <a:cs typeface="Calibri" pitchFamily="34" charset="-120"/>
               </a:rPr>
-              <a:t>30 abiertos · 16 atrasados</a:t>
+              <a:t>36 abiertos · 19 atrasados</a:t>
             </a:r>
             <a:endParaRPr lang="en-US" sz="950" dirty="0"/>
           </a:p>
@@ -21901,7 +22021,7 @@
                 <a:ea typeface="Calibri" pitchFamily="34" charset="-122"/>
                 <a:cs typeface="Calibri" pitchFamily="34" charset="-120"/>
               </a:rPr>
-              <a:t>92,9% de cierre en P1 (30 abiertos), pero 264 DT abiertos entre P2, P3 y P4 sobre un total de 294.</a:t>
+              <a:t>91,8% de cierre en P1 (36 abiertos), pero 277 DT abiertos entre P2, P3 y P4 sobre un total de 313.</a:t>
             </a:r>
             <a:endParaRPr lang="en-US" sz="1150" dirty="0"/>
           </a:p>
@@ -21980,7 +22100,7 @@
                 <a:ea typeface="Calibri" pitchFamily="34" charset="-122"/>
                 <a:cs typeface="Calibri" pitchFamily="34" charset="-120"/>
               </a:rPr>
-              <a:t>57 DT con la fecha de compromiso vencida; mediana de 53 días y el más antiguo lleva 193. Los 211 abiertos sin fecha de compromiso no se cuentan como atrasados.</a:t>
+              <a:t>68 DT con la fecha de compromiso vencida; mediana de 59 días y el más antiguo lleva 200. Los 211 abiertos sin fecha de compromiso no se cuentan como atrasados.</a:t>
             </a:r>
             <a:endParaRPr lang="en-US" sz="1150" dirty="0"/>
           </a:p>
@@ -22042,7 +22162,7 @@
                 <a:ea typeface="Calibri" pitchFamily="34" charset="-122"/>
                 <a:cs typeface="Calibri" pitchFamily="34" charset="-120"/>
               </a:rPr>
-              <a:t>Caminatas: 100% y 100% de lo exigible (C1 y C2).  </a:t>
+              <a:t>Caminatas: 100% y 98,2% de lo exigible (C1 y C2).  </a:t>
             </a:r>
             <a:pPr indent="0" marL="0">
               <a:lnSpc>
@@ -22059,7 +22179,7 @@
                 <a:ea typeface="Calibri" pitchFamily="34" charset="-122"/>
                 <a:cs typeface="Calibri" pitchFamily="34" charset="-120"/>
               </a:rPr>
-              <a:t>Caminata 1: 218/218 exigibles. Caminata 2: 214/214, con 4 agendadas en plazo y 0 sin programar.</a:t>
+              <a:t>Caminata 1: 218/218 exigibles. Caminata 2: 214/218, con 0 agendadas en plazo y 0 sin programar.</a:t>
             </a:r>
             <a:endParaRPr lang="en-US" sz="1150" dirty="0"/>
           </a:p>
@@ -22177,7 +22297,7 @@
                 <a:ea typeface="Calibri" pitchFamily="34" charset="-122"/>
                 <a:cs typeface="Calibri" pitchFamily="34" charset="-120"/>
               </a:rPr>
-              <a:t>Fuente: STATUS_SUBSISTEMAS_TALABRE + Detalle_de_Terminaciones · 218 subsistemas · 2.141 DT · Atrasos al 28-09-2026</a:t>
+              <a:t>Fuente: STATUS_SUBSISTEMAS_TALABRE + Detalle_de_Terminaciones · 218 subsistemas · 2.175 DT · Atrasos al 05-10-2026</a:t>
             </a:r>
             <a:endParaRPr lang="en-US" sz="850" dirty="0"/>
           </a:p>
@@ -22428,7 +22548,7 @@
                 <a:ea typeface="Calibri" pitchFamily="34" charset="-122"/>
                 <a:cs typeface="Calibri" pitchFamily="34" charset="-120"/>
               </a:rPr>
-              <a:t>Caminata 2: 100% de lo exigible (214/214) — se descuentan 4 agendadas a fecha futura, que no son incumplimiento al corte. Talabre mide la carpeta como % de avance (PEC), no como estado de aprobación.</a:t>
+              <a:t>Caminata 2: 98,2% de lo exigible (214/218) — se descuentan 0 agendadas a fecha futura, que no son incumplimiento al corte. Talabre mide la carpeta como % de avance (PEC), no como estado de aprobación.</a:t>
             </a:r>
             <a:endParaRPr lang="en-US" sz="1350" dirty="0"/>
           </a:p>
@@ -22499,7 +22619,7 @@
                 <a:ea typeface="Calibri" pitchFamily="34" charset="-122"/>
                 <a:cs typeface="Calibri" pitchFamily="34" charset="-120"/>
               </a:rPr>
-              <a:t>Fuente: STATUS_SUBSISTEMAS_TALABRE + Detalle_de_Terminaciones · 218 subsistemas · 2.141 DT · Atrasos al 28-09-2026</a:t>
+              <a:t>Fuente: STATUS_SUBSISTEMAS_TALABRE + Detalle_de_Terminaciones · 218 subsistemas · 2.175 DT · Atrasos al 05-10-2026</a:t>
             </a:r>
             <a:endParaRPr lang="en-US" sz="850" dirty="0"/>
           </a:p>
@@ -22750,7 +22870,7 @@
                 <a:ea typeface="Calibri" pitchFamily="34" charset="-122"/>
                 <a:cs typeface="Calibri" pitchFamily="34" charset="-120"/>
               </a:rPr>
-              <a:t>2.141 DT levantados; 86,3% cerrados. Atrasado = DT abierto cuya fecha de compromiso de cierre ya venció al 28-09-2026.</a:t>
+              <a:t>2.175 DT levantados; 85,6% cerrados. Atrasado = DT abierto cuya fecha de compromiso de cierre ya venció al 05-10-2026.</a:t>
             </a:r>
             <a:endParaRPr lang="en-US" sz="1350" dirty="0"/>
           </a:p>
@@ -22905,7 +23025,7 @@
                 <a:ea typeface="Calibri" pitchFamily="34" charset="-122"/>
                 <a:cs typeface="Calibri" pitchFamily="34" charset="-120"/>
               </a:rPr>
-              <a:t>393/423</a:t>
+              <a:t>404/440</a:t>
             </a:r>
             <a:endParaRPr lang="en-US" sz="1050" dirty="0"/>
           </a:p>
@@ -22944,7 +23064,7 @@
                 <a:ea typeface="Calibri" pitchFamily="34" charset="-122"/>
                 <a:cs typeface="Calibri" pitchFamily="34" charset="-120"/>
               </a:rPr>
-              <a:t>92,9%</a:t>
+              <a:t>91,8%</a:t>
             </a:r>
             <a:endParaRPr lang="en-US" sz="1100" dirty="0"/>
           </a:p>
@@ -22979,7 +23099,7 @@
         <p:spPr>
           <a:xfrm>
             <a:off x="7936992" y="2688336"/>
-            <a:ext cx="3312963" cy="118872"/>
+            <a:ext cx="3273735" cy="118872"/>
           </a:xfrm>
           <a:prstGeom prst="rect">
             <a:avLst/>
@@ -23062,7 +23182,7 @@
                 <a:ea typeface="Calibri" pitchFamily="34" charset="-122"/>
                 <a:cs typeface="Calibri" pitchFamily="34" charset="-120"/>
               </a:rPr>
-              <a:t>1.370/1.420</a:t>
+              <a:t>1.374/1.437</a:t>
             </a:r>
             <a:endParaRPr lang="en-US" sz="1050" dirty="0"/>
           </a:p>
@@ -23101,7 +23221,7 @@
                 <a:ea typeface="Calibri" pitchFamily="34" charset="-122"/>
                 <a:cs typeface="Calibri" pitchFamily="34" charset="-120"/>
               </a:rPr>
-              <a:t>96,5%</a:t>
+              <a:t>95,6%</a:t>
             </a:r>
             <a:endParaRPr lang="en-US" sz="1100" dirty="0"/>
           </a:p>
@@ -23136,7 +23256,7 @@
         <p:spPr>
           <a:xfrm>
             <a:off x="7936992" y="3200400"/>
-            <a:ext cx="3441344" cy="118872"/>
+            <a:ext cx="3409249" cy="118872"/>
           </a:xfrm>
           <a:prstGeom prst="rect">
             <a:avLst/>
@@ -23675,7 +23795,7 @@
                 <a:ea typeface="Calibri" pitchFamily="34" charset="-122"/>
                 <a:cs typeface="Calibri" pitchFamily="34" charset="-120"/>
               </a:rPr>
-              <a:t>Mediana de 53 días vencidos; el más antiguo lleva 193. 18 entre 1-30 días, 31 entre 31-90 días, 7 entre 91-180 días, 1 entre &gt;180 días.</a:t>
+              <a:t>Mediana de 59 días vencidos; el más antiguo lleva 200. 30 entre 1-30 días, 27 entre 31-90 días, 9 entre 91-180 días, 2 entre &gt;180 días.</a:t>
             </a:r>
             <a:endParaRPr lang="en-US" sz="1150" dirty="0"/>
           </a:p>
@@ -23714,7 +23834,7 @@
                 <a:ea typeface="Calibri" pitchFamily="34" charset="-122"/>
                 <a:cs typeface="Calibri" pitchFamily="34" charset="-120"/>
               </a:rPr>
-              <a:t>Fuente: STATUS_SUBSISTEMAS_TALABRE + Detalle_de_Terminaciones · 218 subsistemas · 2.141 DT · Atrasos al 28-09-2026</a:t>
+              <a:t>Fuente: STATUS_SUBSISTEMAS_TALABRE + Detalle_de_Terminaciones · 218 subsistemas · 2.175 DT · Atrasos al 05-10-2026</a:t>
             </a:r>
             <a:endParaRPr lang="en-US" sz="850" dirty="0"/>
           </a:p>

--- a/panel_control_TOP_P1/Panel_Control_TOP_P1.pptx
+++ b/panel_control_TOP_P1/Panel_Control_TOP_P1.pptx
@@ -233,7 +233,7 @@
                 <c:formatCode>General</c:formatCode>
                 <c:ptCount val="2"/>
                 <c:pt idx="0">
-                  <c:v>63</c:v>
+                  <c:v>66</c:v>
                 </c:pt>
                 <c:pt idx="1">
                   <c:v>12</c:v>
@@ -311,7 +311,7 @@
                 <c:formatCode>General</c:formatCode>
                 <c:ptCount val="2"/>
                 <c:pt idx="0">
-                  <c:v>16</c:v>
+                  <c:v>13</c:v>
                 </c:pt>
                 <c:pt idx="1">
                   <c:v>3</c:v>
@@ -850,22 +850,22 @@
                 <c:formatCode>General</c:formatCode>
                 <c:ptCount val="6"/>
                 <c:pt idx="0">
-                  <c:v>24</c:v>
+                  <c:v>84</c:v>
                 </c:pt>
                 <c:pt idx="1">
-                  <c:v>88</c:v>
+                  <c:v>83</c:v>
                 </c:pt>
                 <c:pt idx="2">
                   <c:v>11</c:v>
                 </c:pt>
                 <c:pt idx="3">
-                  <c:v>9</c:v>
+                  <c:v>14</c:v>
                 </c:pt>
                 <c:pt idx="4">
-                  <c:v/>
+                  <c:v>5</c:v>
                 </c:pt>
                 <c:pt idx="5">
-                  <c:v>7</c:v>
+                  <c:v>9</c:v>
                 </c:pt>
               </c:numCache>
             </c:numRef>
@@ -952,22 +952,22 @@
                 <c:formatCode>General</c:formatCode>
                 <c:ptCount val="6"/>
                 <c:pt idx="0">
-                  <c:v>195</c:v>
+                  <c:v>148</c:v>
                 </c:pt>
                 <c:pt idx="1">
-                  <c:v>45</c:v>
+                  <c:v>31</c:v>
                 </c:pt>
                 <c:pt idx="2">
-                  <c:v>50</c:v>
+                  <c:v>48</c:v>
                 </c:pt>
                 <c:pt idx="3">
-                  <c:v>9</c:v>
+                  <c:v>1</c:v>
                 </c:pt>
                 <c:pt idx="4">
-                  <c:v>15</c:v>
+                  <c:v>8</c:v>
                 </c:pt>
                 <c:pt idx="5">
-                  <c:v>3</c:v>
+                  <c:v>1</c:v>
                 </c:pt>
               </c:numCache>
             </c:numRef>
@@ -1340,13 +1340,13 @@
               <c:numCache>
                 <c:ptCount val="3"/>
                 <c:pt idx="0">
-                  <c:v>1080</c:v>
+                  <c:v>1129</c:v>
                 </c:pt>
                 <c:pt idx="1">
-                  <c:v>139</c:v>
+                  <c:v>206</c:v>
                 </c:pt>
                 <c:pt idx="2">
-                  <c:v>317</c:v>
+                  <c:v>237</c:v>
                 </c:pt>
               </c:numCache>
             </c:numRef>
@@ -6907,7 +6907,7 @@
                 <a:ea typeface="Cambria" pitchFamily="34" charset="-122"/>
                 <a:cs typeface="Cambria" pitchFamily="34" charset="-120"/>
               </a:rPr>
-              <a:t>79,7%</a:t>
+              <a:t>83,5%</a:t>
             </a:r>
             <a:endParaRPr lang="en-US" sz="3400" dirty="0"/>
           </a:p>
@@ -7063,7 +7063,7 @@
                 <a:ea typeface="Cambria" pitchFamily="34" charset="-122"/>
                 <a:cs typeface="Cambria" pitchFamily="34" charset="-120"/>
               </a:rPr>
-              <a:t>61,1%</a:t>
+              <a:t>66,3%</a:t>
             </a:r>
             <a:endParaRPr lang="en-US" sz="3400" dirty="0"/>
           </a:p>
@@ -7141,7 +7141,7 @@
                 <a:ea typeface="Cambria" pitchFamily="34" charset="-122"/>
                 <a:cs typeface="Cambria" pitchFamily="34" charset="-120"/>
               </a:rPr>
-              <a:t>70,3%</a:t>
+              <a:t>71,8%</a:t>
             </a:r>
             <a:endParaRPr lang="en-US" sz="3400" dirty="0"/>
           </a:p>
@@ -7219,7 +7219,7 @@
                 <a:ea typeface="Calibri" pitchFamily="34" charset="-122"/>
                 <a:cs typeface="Calibri" pitchFamily="34" charset="-120"/>
               </a:rPr>
-              <a:t>Corte: 22-09-2026</a:t>
+              <a:t>Corte: 29-09-2026</a:t>
             </a:r>
             <a:endParaRPr lang="en-US" sz="1100" dirty="0"/>
           </a:p>
@@ -7258,7 +7258,7 @@
                 <a:ea typeface="Calibri" pitchFamily="34" charset="-122"/>
                 <a:cs typeface="Calibri" pitchFamily="34" charset="-120"/>
               </a:rPr>
-              <a:t>Fuente: REPORTE_GERENCIAL + Listado de Puntos Punch Consolidado · Corte 22-09-2026 · Atrasos al 28-09-2026</a:t>
+              <a:t>Fuente: REPORTE_GERENCIAL + Listado de Puntos Punch Consolidado · Corte 29-09-2026 · Atrasos al 05-10-2026</a:t>
             </a:r>
             <a:endParaRPr lang="en-US" sz="850" dirty="0"/>
           </a:p>
@@ -16074,7 +16074,7 @@
                 <a:ea typeface="Cambria" pitchFamily="34" charset="-122"/>
                 <a:cs typeface="Cambria" pitchFamily="34" charset="-120"/>
               </a:rPr>
-              <a:t>79,7%</a:t>
+              <a:t>83,5%</a:t>
             </a:r>
             <a:endParaRPr lang="en-US" sz="3800" dirty="0"/>
           </a:p>
@@ -16113,7 +16113,7 @@
                 <a:ea typeface="Calibri" pitchFamily="34" charset="-122"/>
                 <a:cs typeface="Calibri" pitchFamily="34" charset="-120"/>
               </a:rPr>
-              <a:t>63/79</a:t>
+              <a:t>66/79</a:t>
             </a:r>
             <a:endParaRPr lang="en-US" sz="1400" dirty="0"/>
           </a:p>
@@ -16194,7 +16194,7 @@
                 <a:ea typeface="Calibri" pitchFamily="34" charset="-122"/>
                 <a:cs typeface="Calibri" pitchFamily="34" charset="-120"/>
               </a:rPr>
-              <a:t>16 subsistemas por caminar</a:t>
+              <a:t>13 subsistemas por caminar</a:t>
             </a:r>
             <a:endParaRPr lang="en-US" sz="950" dirty="0"/>
           </a:p>
@@ -16500,7 +16500,7 @@
                 <a:ea typeface="Cambria" pitchFamily="34" charset="-122"/>
                 <a:cs typeface="Cambria" pitchFamily="34" charset="-120"/>
               </a:rPr>
-              <a:t>61,1%</a:t>
+              <a:t>66,3%</a:t>
             </a:r>
             <a:endParaRPr lang="en-US" sz="3800" dirty="0"/>
           </a:p>
@@ -16539,7 +16539,7 @@
                 <a:ea typeface="Calibri" pitchFamily="34" charset="-122"/>
                 <a:cs typeface="Calibri" pitchFamily="34" charset="-120"/>
               </a:rPr>
-              <a:t>58/95</a:t>
+              <a:t>63/95</a:t>
             </a:r>
             <a:endParaRPr lang="en-US" sz="1400" dirty="0"/>
           </a:p>
@@ -16620,7 +16620,7 @@
                 <a:ea typeface="Calibri" pitchFamily="34" charset="-122"/>
                 <a:cs typeface="Calibri" pitchFamily="34" charset="-120"/>
               </a:rPr>
-              <a:t>44 aprobadas · 8 en revisión · 6 rechazadas</a:t>
+              <a:t>46 aprobadas · 11 en revisión · 6 rechazadas</a:t>
             </a:r>
             <a:endParaRPr lang="en-US" sz="950" dirty="0"/>
           </a:p>
@@ -16713,7 +16713,7 @@
                 <a:ea typeface="Cambria" pitchFamily="34" charset="-122"/>
                 <a:cs typeface="Cambria" pitchFamily="34" charset="-120"/>
               </a:rPr>
-              <a:t>70,3%</a:t>
+              <a:t>71,8%</a:t>
             </a:r>
             <a:endParaRPr lang="en-US" sz="3800" dirty="0"/>
           </a:p>
@@ -16752,7 +16752,7 @@
                 <a:ea typeface="Calibri" pitchFamily="34" charset="-122"/>
                 <a:cs typeface="Calibri" pitchFamily="34" charset="-120"/>
               </a:rPr>
-              <a:t>1.080/1.536</a:t>
+              <a:t>1.129/1.572</a:t>
             </a:r>
             <a:endParaRPr lang="en-US" sz="1400" dirty="0"/>
           </a:p>
@@ -16833,7 +16833,7 @@
                 <a:ea typeface="Calibri" pitchFamily="34" charset="-122"/>
                 <a:cs typeface="Calibri" pitchFamily="34" charset="-120"/>
               </a:rPr>
-              <a:t>456 abiertos · 139 atrasados</a:t>
+              <a:t>443 abiertos · 206 atrasados</a:t>
             </a:r>
             <a:endParaRPr lang="en-US" sz="950" dirty="0"/>
           </a:p>
@@ -16973,7 +16973,7 @@
                 <a:ea typeface="Calibri" pitchFamily="34" charset="-122"/>
                 <a:cs typeface="Calibri" pitchFamily="34" charset="-120"/>
               </a:rPr>
-              <a:t>1.721 de 2.419 ítems cerrados (71,1%); de los 698 abiertos, 240 ya pasaron su fecha requerida de cierre (34,4%).</a:t>
+              <a:t>1.792 de 2.481 ítems cerrados (72,2%); de los 689 abiertos, 366 ya pasaron su fecha requerida de cierre (53,1%).</a:t>
             </a:r>
             <a:endParaRPr lang="en-US" sz="1150" dirty="0"/>
           </a:p>
@@ -17052,7 +17052,7 @@
                 <a:ea typeface="Calibri" pitchFamily="34" charset="-122"/>
                 <a:cs typeface="Calibri" pitchFamily="34" charset="-120"/>
               </a:rPr>
-              <a:t>Operables 63/79 por Caminata 2 (79,7%); Facility 12/15 por Caminata 1 (80%).</a:t>
+              <a:t>Operables 66/79 por Caminata 2 (83,5%); Facility 12/15 por Caminata 1 (80%).</a:t>
             </a:r>
             <a:endParaRPr lang="en-US" sz="1150" dirty="0"/>
           </a:p>
@@ -17114,7 +17114,7 @@
                 <a:ea typeface="Calibri" pitchFamily="34" charset="-122"/>
                 <a:cs typeface="Calibri" pitchFamily="34" charset="-120"/>
               </a:rPr>
-              <a:t>Las carpetas están a 61,1% de entrega y el cuello está en el armado interno.  </a:t>
+              <a:t>Las carpetas están a 66,3% de entrega y el cuello está en el armado interno.  </a:t>
             </a:r>
             <a:pPr indent="0" marL="0">
               <a:lnSpc>
@@ -17131,7 +17131,7 @@
                 <a:ea typeface="Calibri" pitchFamily="34" charset="-122"/>
                 <a:cs typeface="Calibri" pitchFamily="34" charset="-120"/>
               </a:rPr>
-              <a:t>58 entregadas de 95: 44 aprobadas, 8 en revisión y 6 rechazadas. Quedan 17 en preparación y 20 sin iniciar.</a:t>
+              <a:t>63 entregadas de 95: 46 aprobadas, 11 en revisión y 6 rechazadas. Quedan 15 en preparación y 17 sin iniciar.</a:t>
             </a:r>
             <a:endParaRPr lang="en-US" sz="1150" dirty="0"/>
           </a:p>
@@ -17210,7 +17210,7 @@
                 <a:ea typeface="Calibri" pitchFamily="34" charset="-122"/>
                 <a:cs typeface="Calibri" pitchFamily="34" charset="-120"/>
               </a:rPr>
-              <a:t>219 de los 456 P1 abiertos (48%), con 24 atrasados.</a:t>
+              <a:t>232 de los 443 P1 abiertos (52,4%), con 84 atrasados.</a:t>
             </a:r>
             <a:endParaRPr lang="en-US" sz="1150" dirty="0"/>
           </a:p>
@@ -17249,7 +17249,7 @@
                 <a:ea typeface="Calibri" pitchFamily="34" charset="-122"/>
                 <a:cs typeface="Calibri" pitchFamily="34" charset="-120"/>
               </a:rPr>
-              <a:t>Fuente: REPORTE_GERENCIAL + Listado de Puntos Punch Consolidado · Corte 22-09-2026 · Atrasos al 28-09-2026</a:t>
+              <a:t>Fuente: REPORTE_GERENCIAL + Listado de Puntos Punch Consolidado · Corte 29-09-2026 · Atrasos al 05-10-2026</a:t>
             </a:r>
             <a:endParaRPr lang="en-US" sz="850" dirty="0"/>
           </a:p>
@@ -17702,7 +17702,7 @@
                 <a:ea typeface="Calibri" pitchFamily="34" charset="-122"/>
                 <a:cs typeface="Calibri" pitchFamily="34" charset="-120"/>
               </a:rPr>
-              <a:t>46,3%</a:t>
+              <a:t>48,4%</a:t>
             </a:r>
             <a:endParaRPr lang="en-US" sz="1100" dirty="0"/>
           </a:p>
@@ -17741,7 +17741,7 @@
                 <a:ea typeface="Cambria" pitchFamily="34" charset="-122"/>
                 <a:cs typeface="Cambria" pitchFamily="34" charset="-120"/>
               </a:rPr>
-              <a:t>44</a:t>
+              <a:t>46</a:t>
             </a:r>
             <a:endParaRPr lang="en-US" sz="2200" dirty="0"/>
           </a:p>
@@ -17861,7 +17861,7 @@
                 <a:ea typeface="Calibri" pitchFamily="34" charset="-122"/>
                 <a:cs typeface="Calibri" pitchFamily="34" charset="-120"/>
               </a:rPr>
-              <a:t>8,4%</a:t>
+              <a:t>11,6%</a:t>
             </a:r>
             <a:endParaRPr lang="en-US" sz="1100" dirty="0"/>
           </a:p>
@@ -17900,7 +17900,7 @@
                 <a:ea typeface="Cambria" pitchFamily="34" charset="-122"/>
                 <a:cs typeface="Cambria" pitchFamily="34" charset="-120"/>
               </a:rPr>
-              <a:t>8</a:t>
+              <a:t>11</a:t>
             </a:r>
             <a:endParaRPr lang="en-US" sz="2200" dirty="0"/>
           </a:p>
@@ -18179,7 +18179,7 @@
                 <a:ea typeface="Calibri" pitchFamily="34" charset="-122"/>
                 <a:cs typeface="Calibri" pitchFamily="34" charset="-120"/>
               </a:rPr>
-              <a:t>17,9%</a:t>
+              <a:t>15,8%</a:t>
             </a:r>
             <a:endParaRPr lang="en-US" sz="1100" dirty="0"/>
           </a:p>
@@ -18218,7 +18218,7 @@
                 <a:ea typeface="Cambria" pitchFamily="34" charset="-122"/>
                 <a:cs typeface="Cambria" pitchFamily="34" charset="-120"/>
               </a:rPr>
-              <a:t>17</a:t>
+              <a:t>15</a:t>
             </a:r>
             <a:endParaRPr lang="en-US" sz="2200" dirty="0"/>
           </a:p>
@@ -18338,7 +18338,7 @@
                 <a:ea typeface="Calibri" pitchFamily="34" charset="-122"/>
                 <a:cs typeface="Calibri" pitchFamily="34" charset="-120"/>
               </a:rPr>
-              <a:t>21,1%</a:t>
+              <a:t>17,9%</a:t>
             </a:r>
             <a:endParaRPr lang="en-US" sz="1100" dirty="0"/>
           </a:p>
@@ -18377,7 +18377,7 @@
                 <a:ea typeface="Cambria" pitchFamily="34" charset="-122"/>
                 <a:cs typeface="Cambria" pitchFamily="34" charset="-120"/>
               </a:rPr>
-              <a:t>20</a:t>
+              <a:t>17</a:t>
             </a:r>
             <a:endParaRPr lang="en-US" sz="2200" dirty="0"/>
           </a:p>
@@ -18419,7 +18419,7 @@
                 <a:ea typeface="Calibri" pitchFamily="34" charset="-122"/>
                 <a:cs typeface="Calibri" pitchFamily="34" charset="-120"/>
               </a:rPr>
-              <a:t>58 carpetas ya están en manos del cliente (61,1%) y 45 subsistemas tienen tarjeta verde. El grueso del pendiente todavía no sale de Besalco.</a:t>
+              <a:t>63 carpetas ya están en manos del cliente (66,3%) y 46 subsistemas tienen tarjeta verde. El grueso del pendiente todavía no sale de Besalco.</a:t>
             </a:r>
             <a:endParaRPr lang="en-US" sz="1000" dirty="0"/>
           </a:p>
@@ -18458,7 +18458,7 @@
                 <a:ea typeface="Calibri" pitchFamily="34" charset="-122"/>
                 <a:cs typeface="Calibri" pitchFamily="34" charset="-120"/>
               </a:rPr>
-              <a:t>Fuente: REPORTE_GERENCIAL + Listado de Puntos Punch Consolidado · Corte 22-09-2026 · Atrasos al 28-09-2026</a:t>
+              <a:t>Fuente: REPORTE_GERENCIAL + Listado de Puntos Punch Consolidado · Corte 29-09-2026 · Atrasos al 05-10-2026</a:t>
             </a:r>
             <a:endParaRPr lang="en-US" sz="850" dirty="0"/>
           </a:p>
@@ -18709,7 +18709,7 @@
                 <a:ea typeface="Calibri" pitchFamily="34" charset="-122"/>
                 <a:cs typeface="Calibri" pitchFamily="34" charset="-120"/>
               </a:rPr>
-              <a:t>1.536 P1 levantados; 70,3% cerrados. Atrasado = ítem abierto cuya fecha requerida de cierre ya venció al 28-09-2026.</a:t>
+              <a:t>1.572 P1 levantados; 71,8% cerrados. Atrasado = ítem abierto cuya fecha requerida de cierre ya venció al 05-10-2026.</a:t>
             </a:r>
             <a:endParaRPr lang="en-US" sz="1350" dirty="0"/>
           </a:p>
@@ -18841,7 +18841,7 @@
                 <a:ea typeface="Cambria" pitchFamily="34" charset="-122"/>
                 <a:cs typeface="Cambria" pitchFamily="34" charset="-120"/>
               </a:rPr>
-              <a:t>70,3%</a:t>
+              <a:t>71,8%</a:t>
             </a:r>
             <a:endParaRPr lang="en-US" sz="1900" dirty="0"/>
           </a:p>
@@ -18956,7 +18956,7 @@
                 <a:ea typeface="Calibri" pitchFamily="34" charset="-122"/>
                 <a:cs typeface="Calibri" pitchFamily="34" charset="-120"/>
               </a:rPr>
-              <a:t>1.080</a:t>
+              <a:t>1.129</a:t>
             </a:r>
             <a:endParaRPr lang="en-US" sz="1100" dirty="0"/>
           </a:p>
@@ -19054,7 +19054,7 @@
                 <a:ea typeface="Calibri" pitchFamily="34" charset="-122"/>
                 <a:cs typeface="Calibri" pitchFamily="34" charset="-120"/>
               </a:rPr>
-              <a:t>139</a:t>
+              <a:t>206</a:t>
             </a:r>
             <a:endParaRPr lang="en-US" sz="1100" dirty="0"/>
           </a:p>
@@ -19152,7 +19152,7 @@
                 <a:ea typeface="Calibri" pitchFamily="34" charset="-122"/>
                 <a:cs typeface="Calibri" pitchFamily="34" charset="-120"/>
               </a:rPr>
-              <a:t>317</a:t>
+              <a:t>237</a:t>
             </a:r>
             <a:endParaRPr lang="en-US" sz="1100" dirty="0"/>
           </a:p>
@@ -19235,7 +19235,7 @@
                 <a:ea typeface="Calibri" pitchFamily="34" charset="-122"/>
                 <a:cs typeface="Calibri" pitchFamily="34" charset="-120"/>
               </a:rPr>
-              <a:t>Mediana de 28 días vencidos; el más antiguo lleva 141. 151 entre 1-30 días, 77 entre 31-90 días, 12 entre 91-180 días.</a:t>
+              <a:t>Mediana de 20 días vencidos; el más antiguo lleva 148. 202 entre 1-30 días, 82 entre 31-90 días, 82 entre 91-180 días.</a:t>
             </a:r>
             <a:endParaRPr lang="en-US" sz="1150" dirty="0"/>
           </a:p>
@@ -19274,7 +19274,7 @@
                 <a:ea typeface="Calibri" pitchFamily="34" charset="-122"/>
                 <a:cs typeface="Calibri" pitchFamily="34" charset="-120"/>
               </a:rPr>
-              <a:t>Fuente: REPORTE_GERENCIAL + Listado de Puntos Punch Consolidado · Corte 22-09-2026 · Atrasos al 28-09-2026</a:t>
+              <a:t>Fuente: REPORTE_GERENCIAL + Listado de Puntos Punch Consolidado · Corte 29-09-2026 · Atrasos al 05-10-2026</a:t>
             </a:r>
             <a:endParaRPr lang="en-US" sz="850" dirty="0"/>
           </a:p>
@@ -19606,7 +19606,7 @@
                 <a:ea typeface="Calibri" pitchFamily="34" charset="-122"/>
                 <a:cs typeface="Calibri" pitchFamily="34" charset="-120"/>
               </a:rPr>
-              <a:t>Recuperar los 240 ítems atrasados</a:t>
+              <a:t>Recuperar los 366 ítems atrasados</a:t>
             </a:r>
             <a:endParaRPr lang="en-US" sz="1400" dirty="0"/>
           </a:p>
@@ -19648,7 +19648,7 @@
                 <a:ea typeface="Calibri" pitchFamily="34" charset="-122"/>
                 <a:cs typeface="Calibri" pitchFamily="34" charset="-120"/>
               </a:rPr>
-              <a:t>34,4% de los 698 abiertos ya venció su fecha requerida. Foco en Piping (24), Eléctrica (88), Mecánica (11).</a:t>
+              <a:t>53,1% de los 689 abiertos ya venció su fecha requerida. Foco en Piping (84), Eléctrica (83), Mecánica (11).</a:t>
             </a:r>
             <a:endParaRPr lang="en-US" sz="1100" dirty="0"/>
           </a:p>
@@ -19748,7 +19748,7 @@
                 <a:ea typeface="Calibri" pitchFamily="34" charset="-122"/>
                 <a:cs typeface="Calibri" pitchFamily="34" charset="-120"/>
               </a:rPr>
-              <a:t>Ejecutar las 16 caminatas de Operables pendientes</a:t>
+              <a:t>Ejecutar las 13 caminatas de Operables pendientes</a:t>
             </a:r>
             <a:endParaRPr lang="en-US" sz="1400" dirty="0"/>
           </a:p>
@@ -19790,7 +19790,7 @@
                 <a:ea typeface="Calibri" pitchFamily="34" charset="-122"/>
                 <a:cs typeface="Calibri" pitchFamily="34" charset="-120"/>
               </a:rPr>
-              <a:t>La Caminata 2 va en 79,7% (63/79). Sin caminata no se levanta el punch final ni se habilita la entrega de la carpeta.</a:t>
+              <a:t>La Caminata 2 va en 83,5% (66/79). Sin caminata no se levanta el punch final ni se habilita la entrega de la carpeta.</a:t>
             </a:r>
             <a:endParaRPr lang="en-US" sz="1100" dirty="0"/>
           </a:p>
@@ -19890,7 +19890,7 @@
                 <a:ea typeface="Calibri" pitchFamily="34" charset="-122"/>
                 <a:cs typeface="Calibri" pitchFamily="34" charset="-120"/>
               </a:rPr>
-              <a:t>Sacar del armado interno las 37 carpetas retenidas</a:t>
+              <a:t>Sacar del armado interno las 32 carpetas retenidas</a:t>
             </a:r>
             <a:endParaRPr lang="en-US" sz="1400" dirty="0"/>
           </a:p>
@@ -19932,7 +19932,7 @@
                 <a:ea typeface="Calibri" pitchFamily="34" charset="-122"/>
                 <a:cs typeface="Calibri" pitchFamily="34" charset="-120"/>
               </a:rPr>
-              <a:t>17 están en preparación y 20 sin iniciar. Solo 58 de 95 (61,1%) llegaron al cliente; 6 volvieron rechazadas y hay que rearmarlas.</a:t>
+              <a:t>15 están en preparación y 17 sin iniciar. Solo 63 de 95 (66,3%) llegaron al cliente; 6 volvieron rechazadas y hay que rearmarlas.</a:t>
             </a:r>
             <a:endParaRPr lang="en-US" sz="1100" dirty="0"/>
           </a:p>
@@ -20074,7 +20074,7 @@
                 <a:ea typeface="Calibri" pitchFamily="34" charset="-122"/>
                 <a:cs typeface="Calibri" pitchFamily="34" charset="-120"/>
               </a:rPr>
-              <a:t>Concentra 403 P1 abiertos y 96 atrasados sobre 74 subsistemas. Es la ruta crítica del proyecto.</a:t>
+              <a:t>Concentra 391 P1 abiertos y 154 atrasados sobre 74 subsistemas. Es la ruta crítica del proyecto.</a:t>
             </a:r>
             <a:endParaRPr lang="en-US" sz="1100" dirty="0"/>
           </a:p>
@@ -20113,7 +20113,7 @@
                 <a:ea typeface="Calibri" pitchFamily="34" charset="-122"/>
                 <a:cs typeface="Calibri" pitchFamily="34" charset="-120"/>
               </a:rPr>
-              <a:t>Fuente: REPORTE_GERENCIAL + Listado de Puntos Punch Consolidado · Corte 22-09-2026 · Atrasos al 28-09-2026</a:t>
+              <a:t>Fuente: REPORTE_GERENCIAL + Listado de Puntos Punch Consolidado · Corte 29-09-2026 · Atrasos al 05-10-2026</a:t>
             </a:r>
             <a:endParaRPr lang="en-US" sz="850" dirty="0"/>
           </a:p>

--- a/panel_control_TOP_P1/Panel_Control_TOP_P1.pptx
+++ b/panel_control_TOP_P1/Panel_Control_TOP_P1.pptx
@@ -1527,7 +1527,7 @@
                   <c:v>14</c:v>
                 </c:pt>
                 <c:pt idx="5">
-                  <c:v>21</c:v>
+                  <c:v>22</c:v>
                 </c:pt>
                 <c:pt idx="6">
                   <c:v>110</c:v>
@@ -1767,7 +1767,7 @@
                   <c:v/>
                 </c:pt>
                 <c:pt idx="5">
-                  <c:v>1</c:v>
+                  <c:v/>
                 </c:pt>
                 <c:pt idx="6">
                   <c:v/>
@@ -7735,7 +7735,7 @@
                 <a:ea typeface="Calibri" pitchFamily="34" charset="-122"/>
                 <a:cs typeface="Calibri" pitchFamily="34" charset="-120"/>
               </a:rPr>
-              <a:t>CERRO VERDE/PS2: 1/3 (33,3%). A nivel proyecto la caminata 2 va 98,2% con 0 ya agendadas.</a:t>
+              <a:t>CERRO VERDE/PS2: 1/3 (33,3%). A nivel proyecto la caminata 2 va 98,6% con 0 ya agendadas.</a:t>
             </a:r>
             <a:endParaRPr lang="en-US" sz="1100" dirty="0"/>
           </a:p>
@@ -20583,7 +20583,7 @@
                 <a:ea typeface="Cambria" pitchFamily="34" charset="-122"/>
                 <a:cs typeface="Cambria" pitchFamily="34" charset="-120"/>
               </a:rPr>
-              <a:t>98,2%</a:t>
+              <a:t>98,6%</a:t>
             </a:r>
             <a:endParaRPr lang="en-US" sz="3400" dirty="0"/>
           </a:p>
@@ -20661,7 +20661,7 @@
                 <a:ea typeface="Cambria" pitchFamily="34" charset="-122"/>
                 <a:cs typeface="Cambria" pitchFamily="34" charset="-120"/>
               </a:rPr>
-              <a:t>95%</a:t>
+              <a:t>95,3%</a:t>
             </a:r>
             <a:endParaRPr lang="en-US" sz="3400" dirty="0"/>
           </a:p>
@@ -21335,7 +21335,7 @@
                 <a:ea typeface="Cambria" pitchFamily="34" charset="-122"/>
                 <a:cs typeface="Cambria" pitchFamily="34" charset="-120"/>
               </a:rPr>
-              <a:t>98,2%</a:t>
+              <a:t>98,6%</a:t>
             </a:r>
             <a:endParaRPr lang="en-US" sz="3800" dirty="0"/>
           </a:p>
@@ -21374,7 +21374,7 @@
                 <a:ea typeface="Calibri" pitchFamily="34" charset="-122"/>
                 <a:cs typeface="Calibri" pitchFamily="34" charset="-120"/>
               </a:rPr>
-              <a:t>214/218 exigibles</a:t>
+              <a:t>215/218 exigibles</a:t>
             </a:r>
             <a:endParaRPr lang="en-US" sz="1300" dirty="0"/>
           </a:p>
@@ -21455,7 +21455,7 @@
                 <a:ea typeface="Calibri" pitchFamily="34" charset="-122"/>
                 <a:cs typeface="Calibri" pitchFamily="34" charset="-120"/>
               </a:rPr>
-              <a:t>98,2% del universo · 0 programadas en plazo · 4 con agenda vencida · 0 sin programar</a:t>
+              <a:t>98,6% del universo · 0 programadas en plazo · 3 con agenda vencida · 0 sin programar</a:t>
             </a:r>
             <a:endParaRPr lang="en-US" sz="950" dirty="0"/>
           </a:p>
@@ -21548,7 +21548,7 @@
                 <a:ea typeface="Cambria" pitchFamily="34" charset="-122"/>
                 <a:cs typeface="Cambria" pitchFamily="34" charset="-120"/>
               </a:rPr>
-              <a:t>95%</a:t>
+              <a:t>95,3%</a:t>
             </a:r>
             <a:endParaRPr lang="en-US" sz="3800" dirty="0"/>
           </a:p>
@@ -22162,7 +22162,7 @@
                 <a:ea typeface="Calibri" pitchFamily="34" charset="-122"/>
                 <a:cs typeface="Calibri" pitchFamily="34" charset="-120"/>
               </a:rPr>
-              <a:t>Caminatas: 100% y 98,2% de lo exigible (C1 y C2).  </a:t>
+              <a:t>Caminatas: 100% y 98,6% de lo exigible (C1 y C2).  </a:t>
             </a:r>
             <a:pPr indent="0" marL="0">
               <a:lnSpc>
@@ -22179,7 +22179,7 @@
                 <a:ea typeface="Calibri" pitchFamily="34" charset="-122"/>
                 <a:cs typeface="Calibri" pitchFamily="34" charset="-120"/>
               </a:rPr>
-              <a:t>Caminata 1: 218/218 exigibles. Caminata 2: 214/218, con 0 agendadas en plazo y 0 sin programar.</a:t>
+              <a:t>Caminata 1: 218/218 exigibles. Caminata 2: 215/218, con 0 agendadas en plazo y 0 sin programar.</a:t>
             </a:r>
             <a:endParaRPr lang="en-US" sz="1150" dirty="0"/>
           </a:p>
@@ -22258,7 +22258,7 @@
                 <a:ea typeface="Calibri" pitchFamily="34" charset="-122"/>
                 <a:cs typeface="Calibri" pitchFamily="34" charset="-120"/>
               </a:rPr>
-              <a:t>Avance promedio 95%: 193 subsistemas sobre 95% y solo 3 bajo 80%.</a:t>
+              <a:t>Avance promedio 95,3%: 193 subsistemas sobre 95% y solo 3 bajo 80%.</a:t>
             </a:r>
             <a:endParaRPr lang="en-US" sz="1150" dirty="0"/>
           </a:p>
@@ -22548,7 +22548,7 @@
                 <a:ea typeface="Calibri" pitchFamily="34" charset="-122"/>
                 <a:cs typeface="Calibri" pitchFamily="34" charset="-120"/>
               </a:rPr>
-              <a:t>Caminata 2: 98,2% de lo exigible (214/218) — se descuentan 0 agendadas a fecha futura, que no son incumplimiento al corte. Talabre mide la carpeta como % de avance (PEC), no como estado de aprobación.</a:t>
+              <a:t>Caminata 2: 98,6% de lo exigible (215/218) — se descuentan 0 agendadas a fecha futura, que no son incumplimiento al corte. Talabre mide la carpeta como % de avance (PEC), no como estado de aprobación.</a:t>
             </a:r>
             <a:endParaRPr lang="en-US" sz="1350" dirty="0"/>
           </a:p>

--- a/panel_control_TOP_P1/Panel_Control_TOP_P1.pptx
+++ b/panel_control_TOP_P1/Panel_Control_TOP_P1.pptx
@@ -2717,10 +2717,10 @@
                     <c:v>Obras Civiles</c:v>
                   </c:pt>
                   <c:pt idx="2">
-                    <c:v>Eléctrica</c:v>
+                    <c:v>Estructura</c:v>
                   </c:pt>
                   <c:pt idx="3">
-                    <c:v>Estructura</c:v>
+                    <c:v>Eléctrica</c:v>
                   </c:pt>
                   <c:pt idx="4">
                     <c:v>Instr. y Control</c:v>
@@ -2736,19 +2736,19 @@
                 <c:formatCode>General</c:formatCode>
                 <c:ptCount val="5"/>
                 <c:pt idx="0">
-                  <c:v>9</c:v>
+                  <c:v>6</c:v>
                 </c:pt>
                 <c:pt idx="1">
-                  <c:v>43</c:v>
+                  <c:v>15</c:v>
                 </c:pt>
                 <c:pt idx="2">
-                  <c:v>8</c:v>
+                  <c:v>4</c:v>
                 </c:pt>
                 <c:pt idx="3">
-                  <c:v>8</c:v>
+                  <c:v>3</c:v>
                 </c:pt>
                 <c:pt idx="4">
-                  <c:v/>
+                  <c:v>6</c:v>
                 </c:pt>
               </c:numCache>
             </c:numRef>
@@ -2813,10 +2813,10 @@
                     <c:v>Obras Civiles</c:v>
                   </c:pt>
                   <c:pt idx="2">
-                    <c:v>Eléctrica</c:v>
+                    <c:v>Estructura</c:v>
                   </c:pt>
                   <c:pt idx="3">
-                    <c:v>Estructura</c:v>
+                    <c:v>Eléctrica</c:v>
                   </c:pt>
                   <c:pt idx="4">
                     <c:v>Instr. y Control</c:v>
@@ -2832,19 +2832,19 @@
                 <c:formatCode>General</c:formatCode>
                 <c:ptCount val="5"/>
                 <c:pt idx="0">
-                  <c:v>132</c:v>
+                  <c:v>130</c:v>
                 </c:pt>
                 <c:pt idx="1">
-                  <c:v>60</c:v>
+                  <c:v>56</c:v>
                 </c:pt>
                 <c:pt idx="2">
-                  <c:v>23</c:v>
+                  <c:v>13</c:v>
                 </c:pt>
                 <c:pt idx="3">
-                  <c:v>13</c:v>
+                  <c:v>12</c:v>
                 </c:pt>
                 <c:pt idx="4">
-                  <c:v>17</c:v>
+                  <c:v>7</c:v>
                 </c:pt>
               </c:numCache>
             </c:numRef>
@@ -7551,7 +7551,7 @@
                 <a:ea typeface="Calibri" pitchFamily="34" charset="-122"/>
                 <a:cs typeface="Calibri" pitchFamily="34" charset="-120"/>
               </a:rPr>
-              <a:t>Recuperar los 68 DT atrasados</a:t>
+              <a:t>Recuperar los 34 DT atrasados</a:t>
             </a:r>
             <a:endParaRPr lang="en-US" sz="1350" dirty="0"/>
           </a:p>
@@ -7593,7 +7593,7 @@
                 <a:ea typeface="Calibri" pitchFamily="34" charset="-122"/>
                 <a:cs typeface="Calibri" pitchFamily="34" charset="-120"/>
               </a:rPr>
-              <a:t>46 son P2 y 19 son P1. La mediana de atraso es de 59 días y 11 superan los 90 días.</a:t>
+              <a:t>25 son P2 y 6 son P1. La mediana de atraso es de 38 días y 7 superan los 90 días.</a:t>
             </a:r>
             <a:endParaRPr lang="en-US" sz="1100" dirty="0"/>
           </a:p>
@@ -7835,7 +7835,7 @@
                 <a:ea typeface="Calibri" pitchFamily="34" charset="-122"/>
                 <a:cs typeface="Calibri" pitchFamily="34" charset="-120"/>
               </a:rPr>
-              <a:t>Destrabar P4: 50 abiertos y ninguno cerrado</a:t>
+              <a:t>Destrabar P4: 48 abiertos y ninguno cerrado</a:t>
             </a:r>
             <a:endParaRPr lang="en-US" sz="1350" dirty="0"/>
           </a:p>
@@ -7877,7 +7877,7 @@
                 <a:ea typeface="Calibri" pitchFamily="34" charset="-122"/>
                 <a:cs typeface="Calibri" pitchFamily="34" charset="-120"/>
               </a:rPr>
-              <a:t>De 50 DT levantados en P4 no se ha cerrado ninguno (0%). P3 tampoco despega: 31,4% de cierre.</a:t>
+              <a:t>De 50 DT levantados en P4 no se ha cerrado ninguno (4%). P3 tampoco despega: 31,4% de cierre.</a:t>
             </a:r>
             <a:endParaRPr lang="en-US" sz="1100" dirty="0"/>
           </a:p>
@@ -8019,7 +8019,7 @@
                 <a:ea typeface="Calibri" pitchFamily="34" charset="-122"/>
                 <a:cs typeface="Calibri" pitchFamily="34" charset="-120"/>
               </a:rPr>
-              <a:t>Concentra 108 de los 313 DT abiertos (34,5%), con 2 atrasados. Además hay 3 carpetas bajo 80% de avance que conviene cerrar en paralelo.</a:t>
+              <a:t>Concentra 106 de los 252 DT abiertos (42,1%), con 0 atrasados. Además hay 3 carpetas bajo 80% de avance que conviene cerrar en paralelo.</a:t>
             </a:r>
             <a:endParaRPr lang="en-US" sz="1100" dirty="0"/>
           </a:p>
@@ -8058,7 +8058,7 @@
                 <a:ea typeface="Calibri" pitchFamily="34" charset="-122"/>
                 <a:cs typeface="Calibri" pitchFamily="34" charset="-120"/>
               </a:rPr>
-              <a:t>Fuente: STATUS_SUBSISTEMAS_TALABRE + Detalle_de_Terminaciones · 218 subsistemas · 2.175 DT · Atrasos al 05-10-2026</a:t>
+              <a:t>Fuente: STATUS_SUBSISTEMAS_TALABRE + Detalle_de_Terminaciones · 218 subsistemas · 2.175 DT · Atrasos al 12-10-2026</a:t>
             </a:r>
             <a:endParaRPr lang="en-US" sz="850" dirty="0"/>
           </a:p>
@@ -20739,7 +20739,7 @@
                 <a:ea typeface="Cambria" pitchFamily="34" charset="-122"/>
                 <a:cs typeface="Cambria" pitchFamily="34" charset="-120"/>
               </a:rPr>
-              <a:t>94,7%</a:t>
+              <a:t>97,9%</a:t>
             </a:r>
             <a:endParaRPr lang="en-US" sz="3400" dirty="0"/>
           </a:p>
@@ -20817,7 +20817,7 @@
                 <a:ea typeface="Calibri" pitchFamily="34" charset="-122"/>
                 <a:cs typeface="Calibri" pitchFamily="34" charset="-120"/>
               </a:rPr>
-              <a:t>Atrasos calculados al 05-10-2026</a:t>
+              <a:t>Atrasos calculados al 12-10-2026</a:t>
             </a:r>
             <a:endParaRPr lang="en-US" sz="1100" dirty="0"/>
           </a:p>
@@ -20856,7 +20856,7 @@
                 <a:ea typeface="Calibri" pitchFamily="34" charset="-122"/>
                 <a:cs typeface="Calibri" pitchFamily="34" charset="-120"/>
               </a:rPr>
-              <a:t>Fuente: STATUS_SUBSISTEMAS_TALABRE + Detalle_de_Terminaciones · 218 subsistemas · 2.175 DT · Atrasos al 05-10-2026</a:t>
+              <a:t>Fuente: STATUS_SUBSISTEMAS_TALABRE + Detalle_de_Terminaciones · 218 subsistemas · 2.175 DT · Atrasos al 12-10-2026</a:t>
             </a:r>
             <a:endParaRPr lang="en-US" sz="850" dirty="0"/>
           </a:p>
@@ -21761,7 +21761,7 @@
                 <a:ea typeface="Cambria" pitchFamily="34" charset="-122"/>
                 <a:cs typeface="Cambria" pitchFamily="34" charset="-120"/>
               </a:rPr>
-              <a:t>91,8%</a:t>
+              <a:t>97,5%</a:t>
             </a:r>
             <a:endParaRPr lang="en-US" sz="3800" dirty="0"/>
           </a:p>
@@ -21800,7 +21800,7 @@
                 <a:ea typeface="Calibri" pitchFamily="34" charset="-122"/>
                 <a:cs typeface="Calibri" pitchFamily="34" charset="-120"/>
               </a:rPr>
-              <a:t>404/440</a:t>
+              <a:t>429/440</a:t>
             </a:r>
             <a:endParaRPr lang="en-US" sz="1300" dirty="0"/>
           </a:p>
@@ -21881,7 +21881,7 @@
                 <a:ea typeface="Calibri" pitchFamily="34" charset="-122"/>
                 <a:cs typeface="Calibri" pitchFamily="34" charset="-120"/>
               </a:rPr>
-              <a:t>36 abiertos · 19 atrasados</a:t>
+              <a:t>11 abiertos · 6 atrasados</a:t>
             </a:r>
             <a:endParaRPr lang="en-US" sz="950" dirty="0"/>
           </a:p>
@@ -22021,7 +22021,7 @@
                 <a:ea typeface="Calibri" pitchFamily="34" charset="-122"/>
                 <a:cs typeface="Calibri" pitchFamily="34" charset="-120"/>
               </a:rPr>
-              <a:t>91,8% de cierre en P1 (36 abiertos), pero 277 DT abiertos entre P2, P3 y P4 sobre un total de 313.</a:t>
+              <a:t>97,5% de cierre en P1 (11 abiertos), pero 241 DT abiertos entre P2, P3 y P4 sobre un total de 252.</a:t>
             </a:r>
             <a:endParaRPr lang="en-US" sz="1150" dirty="0"/>
           </a:p>
@@ -22100,7 +22100,7 @@
                 <a:ea typeface="Calibri" pitchFamily="34" charset="-122"/>
                 <a:cs typeface="Calibri" pitchFamily="34" charset="-120"/>
               </a:rPr>
-              <a:t>68 DT con la fecha de compromiso vencida; mediana de 59 días y el más antiguo lleva 200. Los 211 abiertos sin fecha de compromiso no se cuentan como atrasados.</a:t>
+              <a:t>34 DT con la fecha de compromiso vencida; mediana de 38 días y el más antiguo lleva 207. Los 209 abiertos sin fecha de compromiso no se cuentan como atrasados.</a:t>
             </a:r>
             <a:endParaRPr lang="en-US" sz="1150" dirty="0"/>
           </a:p>
@@ -22297,7 +22297,7 @@
                 <a:ea typeface="Calibri" pitchFamily="34" charset="-122"/>
                 <a:cs typeface="Calibri" pitchFamily="34" charset="-120"/>
               </a:rPr>
-              <a:t>Fuente: STATUS_SUBSISTEMAS_TALABRE + Detalle_de_Terminaciones · 218 subsistemas · 2.175 DT · Atrasos al 05-10-2026</a:t>
+              <a:t>Fuente: STATUS_SUBSISTEMAS_TALABRE + Detalle_de_Terminaciones · 218 subsistemas · 2.175 DT · Atrasos al 12-10-2026</a:t>
             </a:r>
             <a:endParaRPr lang="en-US" sz="850" dirty="0"/>
           </a:p>
@@ -22619,7 +22619,7 @@
                 <a:ea typeface="Calibri" pitchFamily="34" charset="-122"/>
                 <a:cs typeface="Calibri" pitchFamily="34" charset="-120"/>
               </a:rPr>
-              <a:t>Fuente: STATUS_SUBSISTEMAS_TALABRE + Detalle_de_Terminaciones · 218 subsistemas · 2.175 DT · Atrasos al 05-10-2026</a:t>
+              <a:t>Fuente: STATUS_SUBSISTEMAS_TALABRE + Detalle_de_Terminaciones · 218 subsistemas · 2.175 DT · Atrasos al 12-10-2026</a:t>
             </a:r>
             <a:endParaRPr lang="en-US" sz="850" dirty="0"/>
           </a:p>
@@ -22870,7 +22870,7 @@
                 <a:ea typeface="Calibri" pitchFamily="34" charset="-122"/>
                 <a:cs typeface="Calibri" pitchFamily="34" charset="-120"/>
               </a:rPr>
-              <a:t>2.175 DT levantados; 85,6% cerrados. Atrasado = DT abierto cuya fecha de compromiso de cierre ya venció al 05-10-2026.</a:t>
+              <a:t>2.175 DT levantados; 88,4% cerrados. Atrasado = DT abierto cuya fecha de compromiso de cierre ya venció al 12-10-2026.</a:t>
             </a:r>
             <a:endParaRPr lang="en-US" sz="1350" dirty="0"/>
           </a:p>
@@ -23025,7 +23025,7 @@
                 <a:ea typeface="Calibri" pitchFamily="34" charset="-122"/>
                 <a:cs typeface="Calibri" pitchFamily="34" charset="-120"/>
               </a:rPr>
-              <a:t>404/440</a:t>
+              <a:t>429/440</a:t>
             </a:r>
             <a:endParaRPr lang="en-US" sz="1050" dirty="0"/>
           </a:p>
@@ -23064,7 +23064,7 @@
                 <a:ea typeface="Calibri" pitchFamily="34" charset="-122"/>
                 <a:cs typeface="Calibri" pitchFamily="34" charset="-120"/>
               </a:rPr>
-              <a:t>91,8%</a:t>
+              <a:t>97,5%</a:t>
             </a:r>
             <a:endParaRPr lang="en-US" sz="1100" dirty="0"/>
           </a:p>
@@ -23099,7 +23099,7 @@
         <p:spPr>
           <a:xfrm>
             <a:off x="7936992" y="2688336"/>
-            <a:ext cx="3273735" cy="118872"/>
+            <a:ext cx="3477006" cy="118872"/>
           </a:xfrm>
           <a:prstGeom prst="rect">
             <a:avLst/>
@@ -23182,7 +23182,7 @@
                 <a:ea typeface="Calibri" pitchFamily="34" charset="-122"/>
                 <a:cs typeface="Calibri" pitchFamily="34" charset="-120"/>
               </a:rPr>
-              <a:t>1.374/1.437</a:t>
+              <a:t>1.408/1.437</a:t>
             </a:r>
             <a:endParaRPr lang="en-US" sz="1050" dirty="0"/>
           </a:p>
@@ -23221,7 +23221,7 @@
                 <a:ea typeface="Calibri" pitchFamily="34" charset="-122"/>
                 <a:cs typeface="Calibri" pitchFamily="34" charset="-120"/>
               </a:rPr>
-              <a:t>95,6%</a:t>
+              <a:t>98%</a:t>
             </a:r>
             <a:endParaRPr lang="en-US" sz="1100" dirty="0"/>
           </a:p>
@@ -23256,7 +23256,7 @@
         <p:spPr>
           <a:xfrm>
             <a:off x="7936992" y="3200400"/>
-            <a:ext cx="3409249" cy="118872"/>
+            <a:ext cx="3494837" cy="118872"/>
           </a:xfrm>
           <a:prstGeom prst="rect">
             <a:avLst/>
@@ -23496,7 +23496,7 @@
                 <a:ea typeface="Calibri" pitchFamily="34" charset="-122"/>
                 <a:cs typeface="Calibri" pitchFamily="34" charset="-120"/>
               </a:rPr>
-              <a:t>0/50</a:t>
+              <a:t>2/50</a:t>
             </a:r>
             <a:endParaRPr lang="en-US" sz="1050" dirty="0"/>
           </a:p>
@@ -23535,7 +23535,7 @@
                 <a:ea typeface="Calibri" pitchFamily="34" charset="-122"/>
                 <a:cs typeface="Calibri" pitchFamily="34" charset="-120"/>
               </a:rPr>
-              <a:t>0%</a:t>
+              <a:t>4%</a:t>
             </a:r>
             <a:endParaRPr lang="en-US" sz="1100" dirty="0"/>
           </a:p>
@@ -23563,7 +23563,27 @@
       </p:sp>
       <p:sp>
         <p:nvSpPr>
-          <p:cNvPr id="28" name="Text 24"/>
+          <p:cNvPr id="28" name="Shape 24"/>
+          <p:cNvSpPr/>
+          <p:nvPr/>
+        </p:nvSpPr>
+        <p:spPr>
+          <a:xfrm>
+            <a:off x="7936992" y="4224528"/>
+            <a:ext cx="142646" cy="118872"/>
+          </a:xfrm>
+          <a:prstGeom prst="rect">
+            <a:avLst/>
+          </a:prstGeom>
+          <a:solidFill>
+            <a:srgbClr val="C0392B"/>
+          </a:solidFill>
+          <a:ln/>
+        </p:spPr>
+      </p:sp>
+      <p:sp>
+        <p:nvSpPr>
+          <p:cNvPr id="29" name="Text 25"/>
           <p:cNvSpPr/>
           <p:nvPr/>
         </p:nvSpPr>
@@ -23602,7 +23622,7 @@
       </p:sp>
       <p:sp>
         <p:nvSpPr>
-          <p:cNvPr id="29" name="Text 25"/>
+          <p:cNvPr id="30" name="Text 26"/>
           <p:cNvSpPr/>
           <p:nvPr/>
         </p:nvSpPr>
@@ -23641,7 +23661,7 @@
       </p:sp>
       <p:sp>
         <p:nvSpPr>
-          <p:cNvPr id="30" name="Text 26"/>
+          <p:cNvPr id="31" name="Text 27"/>
           <p:cNvSpPr/>
           <p:nvPr/>
         </p:nvSpPr>
@@ -23680,7 +23700,7 @@
       </p:sp>
       <p:sp>
         <p:nvSpPr>
-          <p:cNvPr id="31" name="Shape 27"/>
+          <p:cNvPr id="32" name="Shape 28"/>
           <p:cNvSpPr/>
           <p:nvPr/>
         </p:nvSpPr>
@@ -23700,7 +23720,7 @@
       </p:sp>
       <p:sp>
         <p:nvSpPr>
-          <p:cNvPr id="32" name="Shape 28"/>
+          <p:cNvPr id="33" name="Shape 29"/>
           <p:cNvSpPr/>
           <p:nvPr/>
         </p:nvSpPr>
@@ -23720,7 +23740,7 @@
       </p:sp>
       <p:sp>
         <p:nvSpPr>
-          <p:cNvPr id="33" name="Shape 29"/>
+          <p:cNvPr id="34" name="Shape 30"/>
           <p:cNvSpPr/>
           <p:nvPr/>
         </p:nvSpPr>
@@ -23743,7 +23763,7 @@
       </p:sp>
       <p:sp>
         <p:nvSpPr>
-          <p:cNvPr id="34" name="Text 30"/>
+          <p:cNvPr id="35" name="Text 31"/>
           <p:cNvSpPr/>
           <p:nvPr/>
         </p:nvSpPr>
@@ -23795,7 +23815,7 @@
                 <a:ea typeface="Calibri" pitchFamily="34" charset="-122"/>
                 <a:cs typeface="Calibri" pitchFamily="34" charset="-120"/>
               </a:rPr>
-              <a:t>Mediana de 59 días vencidos; el más antiguo lleva 200. 30 entre 1-30 días, 27 entre 31-90 días, 9 entre 91-180 días, 2 entre &gt;180 días.</a:t>
+              <a:t>Mediana de 38 días vencidos; el más antiguo lleva 207. 17 entre 1-30 días, 10 entre 31-90 días, 5 entre 91-180 días, 2 entre &gt;180 días.</a:t>
             </a:r>
             <a:endParaRPr lang="en-US" sz="1150" dirty="0"/>
           </a:p>
@@ -23803,7 +23823,7 @@
       </p:sp>
       <p:sp>
         <p:nvSpPr>
-          <p:cNvPr id="35" name="Text 31"/>
+          <p:cNvPr id="36" name="Text 32"/>
           <p:cNvSpPr/>
           <p:nvPr/>
         </p:nvSpPr>
@@ -23834,7 +23854,7 @@
                 <a:ea typeface="Calibri" pitchFamily="34" charset="-122"/>
                 <a:cs typeface="Calibri" pitchFamily="34" charset="-120"/>
               </a:rPr>
-              <a:t>Fuente: STATUS_SUBSISTEMAS_TALABRE + Detalle_de_Terminaciones · 218 subsistemas · 2.175 DT · Atrasos al 05-10-2026</a:t>
+              <a:t>Fuente: STATUS_SUBSISTEMAS_TALABRE + Detalle_de_Terminaciones · 218 subsistemas · 2.175 DT · Atrasos al 12-10-2026</a:t>
             </a:r>
             <a:endParaRPr lang="en-US" sz="850" dirty="0"/>
           </a:p>
@@ -23842,7 +23862,7 @@
       </p:sp>
       <p:sp>
         <p:nvSpPr>
-          <p:cNvPr id="36" name="Text 32"/>
+          <p:cNvPr id="37" name="Text 33"/>
           <p:cNvSpPr/>
           <p:nvPr/>
         </p:nvSpPr>
@@ -23881,7 +23901,7 @@
       </p:sp>
       <p:sp>
         <p:nvSpPr>
-          <p:cNvPr id="37" name="Text 33"/>
+          <p:cNvPr id="38" name="Text 34"/>
           <p:cNvSpPr/>
           <p:nvPr/>
         </p:nvSpPr>

--- a/panel_control_TOP_P1/Panel_Control_TOP_P1.pptx
+++ b/panel_control_TOP_P1/Panel_Control_TOP_P1.pptx
@@ -850,19 +850,19 @@
                 <c:formatCode>General</c:formatCode>
                 <c:ptCount val="6"/>
                 <c:pt idx="0">
-                  <c:v>84</c:v>
+                  <c:v>110</c:v>
                 </c:pt>
                 <c:pt idx="1">
-                  <c:v>83</c:v>
+                  <c:v>89</c:v>
                 </c:pt>
                 <c:pt idx="2">
-                  <c:v>11</c:v>
+                  <c:v>27</c:v>
                 </c:pt>
                 <c:pt idx="3">
-                  <c:v>14</c:v>
+                  <c:v>15</c:v>
                 </c:pt>
                 <c:pt idx="4">
-                  <c:v>5</c:v>
+                  <c:v>10</c:v>
                 </c:pt>
                 <c:pt idx="5">
                   <c:v>9</c:v>
@@ -952,22 +952,22 @@
                 <c:formatCode>General</c:formatCode>
                 <c:ptCount val="6"/>
                 <c:pt idx="0">
-                  <c:v>148</c:v>
+                  <c:v>93</c:v>
                 </c:pt>
                 <c:pt idx="1">
-                  <c:v>31</c:v>
+                  <c:v>27</c:v>
                 </c:pt>
                 <c:pt idx="2">
-                  <c:v>48</c:v>
+                  <c:v>30</c:v>
                 </c:pt>
                 <c:pt idx="3">
-                  <c:v>1</c:v>
+                  <c:v>3</c:v>
                 </c:pt>
                 <c:pt idx="4">
-                  <c:v>8</c:v>
+                  <c:v>3</c:v>
                 </c:pt>
                 <c:pt idx="5">
-                  <c:v>1</c:v>
+                  <c:v/>
                 </c:pt>
               </c:numCache>
             </c:numRef>
@@ -1340,13 +1340,13 @@
               <c:numCache>
                 <c:ptCount val="3"/>
                 <c:pt idx="0">
-                  <c:v>1129</c:v>
+                  <c:v>1224</c:v>
                 </c:pt>
                 <c:pt idx="1">
-                  <c:v>206</c:v>
+                  <c:v>260</c:v>
                 </c:pt>
                 <c:pt idx="2">
-                  <c:v>237</c:v>
+                  <c:v>156</c:v>
                 </c:pt>
               </c:numCache>
             </c:numRef>
@@ -7141,7 +7141,7 @@
                 <a:ea typeface="Cambria" pitchFamily="34" charset="-122"/>
                 <a:cs typeface="Cambria" pitchFamily="34" charset="-120"/>
               </a:rPr>
-              <a:t>71,8%</a:t>
+              <a:t>74,6%</a:t>
             </a:r>
             <a:endParaRPr lang="en-US" sz="3400" dirty="0"/>
           </a:p>
@@ -7258,7 +7258,7 @@
                 <a:ea typeface="Calibri" pitchFamily="34" charset="-122"/>
                 <a:cs typeface="Calibri" pitchFamily="34" charset="-120"/>
               </a:rPr>
-              <a:t>Fuente: REPORTE_GERENCIAL + Listado de Puntos Punch Consolidado · Corte 29-09-2026 · Atrasos al 05-10-2026</a:t>
+              <a:t>Fuente: REPORTE_GERENCIAL + Listado de Puntos Punch Consolidado · Corte 29-09-2026 · Atrasos al 12-10-2026</a:t>
             </a:r>
             <a:endParaRPr lang="en-US" sz="850" dirty="0"/>
           </a:p>
@@ -16713,7 +16713,7 @@
                 <a:ea typeface="Cambria" pitchFamily="34" charset="-122"/>
                 <a:cs typeface="Cambria" pitchFamily="34" charset="-120"/>
               </a:rPr>
-              <a:t>71,8%</a:t>
+              <a:t>74,6%</a:t>
             </a:r>
             <a:endParaRPr lang="en-US" sz="3800" dirty="0"/>
           </a:p>
@@ -16752,7 +16752,7 @@
                 <a:ea typeface="Calibri" pitchFamily="34" charset="-122"/>
                 <a:cs typeface="Calibri" pitchFamily="34" charset="-120"/>
               </a:rPr>
-              <a:t>1.129/1.572</a:t>
+              <a:t>1.224/1.640</a:t>
             </a:r>
             <a:endParaRPr lang="en-US" sz="1400" dirty="0"/>
           </a:p>
@@ -16833,7 +16833,7 @@
                 <a:ea typeface="Calibri" pitchFamily="34" charset="-122"/>
                 <a:cs typeface="Calibri" pitchFamily="34" charset="-120"/>
               </a:rPr>
-              <a:t>443 abiertos · 206 atrasados</a:t>
+              <a:t>416 abiertos · 260 atrasados</a:t>
             </a:r>
             <a:endParaRPr lang="en-US" sz="950" dirty="0"/>
           </a:p>
@@ -16973,7 +16973,7 @@
                 <a:ea typeface="Calibri" pitchFamily="34" charset="-122"/>
                 <a:cs typeface="Calibri" pitchFamily="34" charset="-120"/>
               </a:rPr>
-              <a:t>1.792 de 2.481 ítems cerrados (72,2%); de los 689 abiertos, 366 ya pasaron su fecha requerida de cierre (53,1%).</a:t>
+              <a:t>1.925 de 2.605 ítems cerrados (73,9%); de los 680 abiertos, 440 ya pasaron su fecha requerida de cierre (64,7%).</a:t>
             </a:r>
             <a:endParaRPr lang="en-US" sz="1150" dirty="0"/>
           </a:p>
@@ -17210,7 +17210,7 @@
                 <a:ea typeface="Calibri" pitchFamily="34" charset="-122"/>
                 <a:cs typeface="Calibri" pitchFamily="34" charset="-120"/>
               </a:rPr>
-              <a:t>232 de los 443 P1 abiertos (52,4%), con 84 atrasados.</a:t>
+              <a:t>203 de los 416 P1 abiertos (48,8%), con 110 atrasados.</a:t>
             </a:r>
             <a:endParaRPr lang="en-US" sz="1150" dirty="0"/>
           </a:p>
@@ -17249,7 +17249,7 @@
                 <a:ea typeface="Calibri" pitchFamily="34" charset="-122"/>
                 <a:cs typeface="Calibri" pitchFamily="34" charset="-120"/>
               </a:rPr>
-              <a:t>Fuente: REPORTE_GERENCIAL + Listado de Puntos Punch Consolidado · Corte 29-09-2026 · Atrasos al 05-10-2026</a:t>
+              <a:t>Fuente: REPORTE_GERENCIAL + Listado de Puntos Punch Consolidado · Corte 29-09-2026 · Atrasos al 12-10-2026</a:t>
             </a:r>
             <a:endParaRPr lang="en-US" sz="850" dirty="0"/>
           </a:p>
@@ -18458,7 +18458,7 @@
                 <a:ea typeface="Calibri" pitchFamily="34" charset="-122"/>
                 <a:cs typeface="Calibri" pitchFamily="34" charset="-120"/>
               </a:rPr>
-              <a:t>Fuente: REPORTE_GERENCIAL + Listado de Puntos Punch Consolidado · Corte 29-09-2026 · Atrasos al 05-10-2026</a:t>
+              <a:t>Fuente: REPORTE_GERENCIAL + Listado de Puntos Punch Consolidado · Corte 29-09-2026 · Atrasos al 12-10-2026</a:t>
             </a:r>
             <a:endParaRPr lang="en-US" sz="850" dirty="0"/>
           </a:p>
@@ -18709,7 +18709,7 @@
                 <a:ea typeface="Calibri" pitchFamily="34" charset="-122"/>
                 <a:cs typeface="Calibri" pitchFamily="34" charset="-120"/>
               </a:rPr>
-              <a:t>1.572 P1 levantados; 71,8% cerrados. Atrasado = ítem abierto cuya fecha requerida de cierre ya venció al 05-10-2026.</a:t>
+              <a:t>1.640 P1 levantados; 74,6% cerrados. Atrasado = ítem abierto cuya fecha requerida de cierre ya venció al 12-10-2026.</a:t>
             </a:r>
             <a:endParaRPr lang="en-US" sz="1350" dirty="0"/>
           </a:p>
@@ -18841,7 +18841,7 @@
                 <a:ea typeface="Cambria" pitchFamily="34" charset="-122"/>
                 <a:cs typeface="Cambria" pitchFamily="34" charset="-120"/>
               </a:rPr>
-              <a:t>71,8%</a:t>
+              <a:t>74,6%</a:t>
             </a:r>
             <a:endParaRPr lang="en-US" sz="1900" dirty="0"/>
           </a:p>
@@ -18956,7 +18956,7 @@
                 <a:ea typeface="Calibri" pitchFamily="34" charset="-122"/>
                 <a:cs typeface="Calibri" pitchFamily="34" charset="-120"/>
               </a:rPr>
-              <a:t>1.129</a:t>
+              <a:t>1.224</a:t>
             </a:r>
             <a:endParaRPr lang="en-US" sz="1100" dirty="0"/>
           </a:p>
@@ -19054,7 +19054,7 @@
                 <a:ea typeface="Calibri" pitchFamily="34" charset="-122"/>
                 <a:cs typeface="Calibri" pitchFamily="34" charset="-120"/>
               </a:rPr>
-              <a:t>206</a:t>
+              <a:t>260</a:t>
             </a:r>
             <a:endParaRPr lang="en-US" sz="1100" dirty="0"/>
           </a:p>
@@ -19152,7 +19152,7 @@
                 <a:ea typeface="Calibri" pitchFamily="34" charset="-122"/>
                 <a:cs typeface="Calibri" pitchFamily="34" charset="-120"/>
               </a:rPr>
-              <a:t>237</a:t>
+              <a:t>156</a:t>
             </a:r>
             <a:endParaRPr lang="en-US" sz="1100" dirty="0"/>
           </a:p>
@@ -19235,7 +19235,7 @@
                 <a:ea typeface="Calibri" pitchFamily="34" charset="-122"/>
                 <a:cs typeface="Calibri" pitchFamily="34" charset="-120"/>
               </a:rPr>
-              <a:t>Mediana de 20 días vencidos; el más antiguo lleva 148. 202 entre 1-30 días, 82 entre 31-90 días, 82 entre 91-180 días.</a:t>
+              <a:t>Mediana de 12 días vencidos; el más antiguo lleva 155. 266 entre 1-30 días, 92 entre 31-90 días, 82 entre 91-180 días.</a:t>
             </a:r>
             <a:endParaRPr lang="en-US" sz="1150" dirty="0"/>
           </a:p>
@@ -19274,7 +19274,7 @@
                 <a:ea typeface="Calibri" pitchFamily="34" charset="-122"/>
                 <a:cs typeface="Calibri" pitchFamily="34" charset="-120"/>
               </a:rPr>
-              <a:t>Fuente: REPORTE_GERENCIAL + Listado de Puntos Punch Consolidado · Corte 29-09-2026 · Atrasos al 05-10-2026</a:t>
+              <a:t>Fuente: REPORTE_GERENCIAL + Listado de Puntos Punch Consolidado · Corte 29-09-2026 · Atrasos al 12-10-2026</a:t>
             </a:r>
             <a:endParaRPr lang="en-US" sz="850" dirty="0"/>
           </a:p>
@@ -19606,7 +19606,7 @@
                 <a:ea typeface="Calibri" pitchFamily="34" charset="-122"/>
                 <a:cs typeface="Calibri" pitchFamily="34" charset="-120"/>
               </a:rPr>
-              <a:t>Recuperar los 366 ítems atrasados</a:t>
+              <a:t>Recuperar los 440 ítems atrasados</a:t>
             </a:r>
             <a:endParaRPr lang="en-US" sz="1400" dirty="0"/>
           </a:p>
@@ -19648,7 +19648,7 @@
                 <a:ea typeface="Calibri" pitchFamily="34" charset="-122"/>
                 <a:cs typeface="Calibri" pitchFamily="34" charset="-120"/>
               </a:rPr>
-              <a:t>53,1% de los 689 abiertos ya venció su fecha requerida. Foco en Piping (84), Eléctrica (83), Mecánica (11).</a:t>
+              <a:t>64,7% de los 680 abiertos ya venció su fecha requerida. Foco en Piping (110), Eléctrica (89), Mecánica (27).</a:t>
             </a:r>
             <a:endParaRPr lang="en-US" sz="1100" dirty="0"/>
           </a:p>
@@ -20074,7 +20074,7 @@
                 <a:ea typeface="Calibri" pitchFamily="34" charset="-122"/>
                 <a:cs typeface="Calibri" pitchFamily="34" charset="-120"/>
               </a:rPr>
-              <a:t>Concentra 391 P1 abiertos y 154 atrasados sobre 74 subsistemas. Es la ruta crítica del proyecto.</a:t>
+              <a:t>Concentra 367 P1 abiertos y 211 atrasados sobre 74 subsistemas. Es la ruta crítica del proyecto.</a:t>
             </a:r>
             <a:endParaRPr lang="en-US" sz="1100" dirty="0"/>
           </a:p>
@@ -20113,7 +20113,7 @@
                 <a:ea typeface="Calibri" pitchFamily="34" charset="-122"/>
                 <a:cs typeface="Calibri" pitchFamily="34" charset="-120"/>
               </a:rPr>
-              <a:t>Fuente: REPORTE_GERENCIAL + Listado de Puntos Punch Consolidado · Corte 29-09-2026 · Atrasos al 05-10-2026</a:t>
+              <a:t>Fuente: REPORTE_GERENCIAL + Listado de Puntos Punch Consolidado · Corte 29-09-2026 · Atrasos al 12-10-2026</a:t>
             </a:r>
             <a:endParaRPr lang="en-US" sz="850" dirty="0"/>
           </a:p>

--- a/panel_control_TOP_P1/Panel_Control_TOP_P1.pptx
+++ b/panel_control_TOP_P1/Panel_Control_TOP_P1.pptx
@@ -687,10 +687,10 @@
               <c:numCache>
                 <c:ptCount val="3"/>
                 <c:pt idx="0">
-                  <c:v>1474</c:v>
+                  <c:v>1611</c:v>
                 </c:pt>
                 <c:pt idx="1">
-                  <c:v>582</c:v>
+                  <c:v>483</c:v>
                 </c:pt>
                 <c:pt idx="2">
                   <c:v>0</c:v>
@@ -3126,10 +3126,10 @@
                   <c:v>35</c:v>
                 </c:pt>
                 <c:pt idx="1">
-                  <c:v>50</c:v>
+                  <c:v>77</c:v>
                 </c:pt>
                 <c:pt idx="2">
-                  <c:v>20</c:v>
+                  <c:v>22</c:v>
                 </c:pt>
                 <c:pt idx="3">
                   <c:v>2</c:v>
@@ -3216,10 +3216,10 @@
                   <c:v/>
                 </c:pt>
                 <c:pt idx="1">
-                  <c:v>27</c:v>
+                  <c:v/>
                 </c:pt>
                 <c:pt idx="2">
-                  <c:v>2</c:v>
+                  <c:v/>
                 </c:pt>
                 <c:pt idx="3">
                   <c:v/>
@@ -3591,13 +3591,13 @@
                 <c:formatCode>General</c:formatCode>
                 <c:ptCount val="4"/>
                 <c:pt idx="0">
-                  <c:v>15</c:v>
+                  <c:v>16</c:v>
                 </c:pt>
                 <c:pt idx="1">
                   <c:v/>
                 </c:pt>
                 <c:pt idx="2">
-                  <c:v/>
+                  <c:v>5</c:v>
                 </c:pt>
                 <c:pt idx="3">
                   <c:v/>
@@ -3861,13 +3861,13 @@
                 <c:formatCode>General</c:formatCode>
                 <c:ptCount val="4"/>
                 <c:pt idx="0">
-                  <c:v>5</c:v>
+                  <c:v>4</c:v>
                 </c:pt>
                 <c:pt idx="1">
                   <c:v>69</c:v>
                 </c:pt>
                 <c:pt idx="2">
-                  <c:v>20</c:v>
+                  <c:v>15</c:v>
                 </c:pt>
                 <c:pt idx="3">
                   <c:v>2</c:v>
@@ -4155,16 +4155,16 @@
                 <c:formatCode>General</c:formatCode>
                 <c:ptCount val="6"/>
                 <c:pt idx="0">
-                  <c:v>132</c:v>
+                  <c:v>106</c:v>
                 </c:pt>
                 <c:pt idx="1">
-                  <c:v>124</c:v>
+                  <c:v>81</c:v>
                 </c:pt>
                 <c:pt idx="2">
-                  <c:v>129</c:v>
+                  <c:v>97</c:v>
                 </c:pt>
                 <c:pt idx="3">
-                  <c:v>62</c:v>
+                  <c:v>40</c:v>
                 </c:pt>
                 <c:pt idx="4">
                   <c:v/>
@@ -4257,16 +4257,16 @@
                 <c:formatCode>General</c:formatCode>
                 <c:ptCount val="6"/>
                 <c:pt idx="0">
-                  <c:v>43</c:v>
+                  <c:v>47</c:v>
                 </c:pt>
                 <c:pt idx="1">
-                  <c:v>26</c:v>
+                  <c:v>45</c:v>
                 </c:pt>
                 <c:pt idx="2">
-                  <c:v>20</c:v>
+                  <c:v>22</c:v>
                 </c:pt>
                 <c:pt idx="3">
-                  <c:v>16</c:v>
+                  <c:v>15</c:v>
                 </c:pt>
                 <c:pt idx="4">
                   <c:v>16</c:v>
@@ -8411,7 +8411,7 @@
                 <a:ea typeface="Calibri" pitchFamily="34" charset="-122"/>
                 <a:cs typeface="Calibri" pitchFamily="34" charset="-120"/>
               </a:rPr>
-              <a:t>136 subsistemas en 4 áreas (2000 · 3000 · 4000 · 8000) · 3.114 detalles de terminación levantados.</a:t>
+              <a:t>136 subsistemas en 4 áreas (2000 · 3000 · 4000 · 8000) · 3.175 detalles de terminación levantados.</a:t>
             </a:r>
             <a:endParaRPr lang="en-US" sz="1350" dirty="0"/>
           </a:p>
@@ -8548,7 +8548,7 @@
                 <a:ea typeface="Cambria" pitchFamily="34" charset="-122"/>
                 <a:cs typeface="Cambria" pitchFamily="34" charset="-120"/>
               </a:rPr>
-              <a:t>78,7%</a:t>
+              <a:t>100%</a:t>
             </a:r>
             <a:endParaRPr lang="en-US" sz="3400" dirty="0"/>
           </a:p>
@@ -8626,7 +8626,7 @@
                 <a:ea typeface="Cambria" pitchFamily="34" charset="-122"/>
                 <a:cs typeface="Cambria" pitchFamily="34" charset="-120"/>
               </a:rPr>
-              <a:t>29,4%</a:t>
+              <a:t>33,8%</a:t>
             </a:r>
             <a:endParaRPr lang="en-US" sz="3400" dirty="0"/>
           </a:p>
@@ -8704,7 +8704,7 @@
                 <a:ea typeface="Cambria" pitchFamily="34" charset="-122"/>
                 <a:cs typeface="Cambria" pitchFamily="34" charset="-120"/>
               </a:rPr>
-              <a:t>71,7%</a:t>
+              <a:t>76,9%</a:t>
             </a:r>
             <a:endParaRPr lang="en-US" sz="3400" dirty="0"/>
           </a:p>
@@ -8782,7 +8782,7 @@
                 <a:ea typeface="Calibri" pitchFamily="34" charset="-122"/>
                 <a:cs typeface="Calibri" pitchFamily="34" charset="-120"/>
               </a:rPr>
-              <a:t>Corte: 01-10-2026   ·   Corte anterior: 28-09-2026</a:t>
+              <a:t>Corte: 13-10-2026   ·   Corte anterior: 01-10-2026</a:t>
             </a:r>
             <a:endParaRPr lang="en-US" sz="1100" dirty="0"/>
           </a:p>
@@ -8821,7 +8821,7 @@
                 <a:ea typeface="Calibri" pitchFamily="34" charset="-122"/>
                 <a:cs typeface="Calibri" pitchFamily="34" charset="-120"/>
               </a:rPr>
-              <a:t>Fuente: Estatus_Resumen_General_QAQC.xlsx · Corte 01-10-2026 · Áreas 2000/3000/4000/8000</a:t>
+              <a:t>Fuente: Estatus_Resumen_General_QAQC.xlsx · Corte 13-10-2026 · Áreas 2000/3000/4000/8000</a:t>
             </a:r>
             <a:endParaRPr lang="en-US" sz="850" dirty="0"/>
           </a:p>
@@ -9297,7 +9297,7 @@
                 <a:ea typeface="Cambria" pitchFamily="34" charset="-122"/>
                 <a:cs typeface="Cambria" pitchFamily="34" charset="-120"/>
               </a:rPr>
-              <a:t>78,7%</a:t>
+              <a:t>100%</a:t>
             </a:r>
             <a:endParaRPr lang="en-US" sz="4000" dirty="0"/>
           </a:p>
@@ -9336,7 +9336,7 @@
                 <a:ea typeface="Calibri" pitchFamily="34" charset="-122"/>
                 <a:cs typeface="Calibri" pitchFamily="34" charset="-120"/>
               </a:rPr>
-              <a:t>107/136</a:t>
+              <a:t>136/136</a:t>
             </a:r>
             <a:endParaRPr lang="en-US" sz="1400" dirty="0"/>
           </a:p>
@@ -9414,7 +9414,7 @@
                 <a:ea typeface="Calibri" pitchFamily="34" charset="-122"/>
                 <a:cs typeface="Calibri" pitchFamily="34" charset="-120"/>
               </a:rPr>
-              <a:t>29 próximas · 0 por programar</a:t>
+              <a:t>0 próximas · 0 por programar</a:t>
             </a:r>
             <a:endParaRPr lang="en-US" sz="950" dirty="0"/>
           </a:p>
@@ -9447,13 +9447,13 @@
             <a:r>
               <a:rPr lang="en-US" sz="900" b="1" dirty="0">
                 <a:solidFill>
-                  <a:srgbClr val="56606E"/>
-                </a:solidFill>
-                <a:latin typeface="Calibri" pitchFamily="34" charset="0"/>
-                <a:ea typeface="Calibri" pitchFamily="34" charset="-122"/>
-                <a:cs typeface="Calibri" pitchFamily="34" charset="-120"/>
-              </a:rPr>
-              <a:t>= sin cambio vs. corte anterior</a:t>
+                  <a:srgbClr val="1F7A44"/>
+                </a:solidFill>
+                <a:latin typeface="Calibri" pitchFamily="34" charset="0"/>
+                <a:ea typeface="Calibri" pitchFamily="34" charset="-122"/>
+                <a:cs typeface="Calibri" pitchFamily="34" charset="-120"/>
+              </a:rPr>
+              <a:t>▲ +29 vs. corte anterior</a:t>
             </a:r>
             <a:endParaRPr lang="en-US" sz="900" dirty="0"/>
           </a:p>
@@ -9546,7 +9546,7 @@
                 <a:ea typeface="Cambria" pitchFamily="34" charset="-122"/>
                 <a:cs typeface="Cambria" pitchFamily="34" charset="-120"/>
               </a:rPr>
-              <a:t>29,4%</a:t>
+              <a:t>33,8%</a:t>
             </a:r>
             <a:endParaRPr lang="en-US" sz="4000" dirty="0"/>
           </a:p>
@@ -9585,7 +9585,7 @@
                 <a:ea typeface="Calibri" pitchFamily="34" charset="-122"/>
                 <a:cs typeface="Calibri" pitchFamily="34" charset="-120"/>
               </a:rPr>
-              <a:t>40/136</a:t>
+              <a:t>46/136</a:t>
             </a:r>
             <a:endParaRPr lang="en-US" sz="1400" dirty="0"/>
           </a:p>
@@ -9663,7 +9663,7 @@
                 <a:ea typeface="Calibri" pitchFamily="34" charset="-122"/>
                 <a:cs typeface="Calibri" pitchFamily="34" charset="-120"/>
               </a:rPr>
-              <a:t>0 aprobadas · 24 rechazadas · 15 en revisión · 1 observadas</a:t>
+              <a:t>0 aprobadas · 24 rechazadas · 21 en revisión · 1 observadas</a:t>
             </a:r>
             <a:endParaRPr lang="en-US" sz="950" dirty="0"/>
           </a:p>
@@ -9702,7 +9702,7 @@
                 <a:ea typeface="Calibri" pitchFamily="34" charset="-122"/>
                 <a:cs typeface="Calibri" pitchFamily="34" charset="-120"/>
               </a:rPr>
-              <a:t>▲ +1 vs. corte anterior</a:t>
+              <a:t>▲ +6 vs. corte anterior</a:t>
             </a:r>
             <a:endParaRPr lang="en-US" sz="900" dirty="0"/>
           </a:p>
@@ -9795,7 +9795,7 @@
                 <a:ea typeface="Cambria" pitchFamily="34" charset="-122"/>
                 <a:cs typeface="Cambria" pitchFamily="34" charset="-120"/>
               </a:rPr>
-              <a:t>71,7%</a:t>
+              <a:t>76,9%</a:t>
             </a:r>
             <a:endParaRPr lang="en-US" sz="4000" dirty="0"/>
           </a:p>
@@ -9834,7 +9834,7 @@
                 <a:ea typeface="Calibri" pitchFamily="34" charset="-122"/>
                 <a:cs typeface="Calibri" pitchFamily="34" charset="-120"/>
               </a:rPr>
-              <a:t>1.474/2.056</a:t>
+              <a:t>1.611/2.094</a:t>
             </a:r>
             <a:endParaRPr lang="en-US" sz="1400" dirty="0"/>
           </a:p>
@@ -9912,7 +9912,7 @@
                 <a:ea typeface="Calibri" pitchFamily="34" charset="-122"/>
                 <a:cs typeface="Calibri" pitchFamily="34" charset="-120"/>
               </a:rPr>
-              <a:t>582 abiertos · 448 vencidos</a:t>
+              <a:t>483 abiertos · 325 vencidos</a:t>
             </a:r>
             <a:endParaRPr lang="en-US" sz="950" dirty="0"/>
           </a:p>
@@ -9951,7 +9951,7 @@
                 <a:ea typeface="Calibri" pitchFamily="34" charset="-122"/>
                 <a:cs typeface="Calibri" pitchFamily="34" charset="-120"/>
               </a:rPr>
-              <a:t>▲ +37 vs. corte anterior</a:t>
+              <a:t>▲ +137 vs. corte anterior</a:t>
             </a:r>
             <a:endParaRPr lang="en-US" sz="900" dirty="0"/>
           </a:p>
@@ -10074,7 +10074,7 @@
                 <a:ea typeface="Calibri" pitchFamily="34" charset="-122"/>
                 <a:cs typeface="Calibri" pitchFamily="34" charset="-120"/>
               </a:rPr>
-              <a:t>Se destrabó la programación de caminatas, pero no la ejecución.  </a:t>
+              <a:t>Avance de caminatas al 100%.  </a:t>
             </a:r>
             <a:pPr indent="0" marL="0">
               <a:lnSpc>
@@ -10091,7 +10091,7 @@
                 <a:ea typeface="Calibri" pitchFamily="34" charset="-122"/>
                 <a:cs typeface="Calibri" pitchFamily="34" charset="-120"/>
               </a:rPr>
-              <a:t>Los subsistemas «por programar» bajaron de 2 a 0, mientras las realizadas al 100% se mantienen en 107 (78,7%).</a:t>
+              <a:t>136 de 136 realizadas (100%); 0 próximas y 0 por programar.</a:t>
             </a:r>
             <a:endParaRPr lang="en-US" sz="1250" dirty="0"/>
           </a:p>
@@ -10153,7 +10153,7 @@
                 <a:ea typeface="Calibri" pitchFamily="34" charset="-122"/>
                 <a:cs typeface="Calibri" pitchFamily="34" charset="-120"/>
               </a:rPr>
-              <a:t>Las carpetas TOP siguen sin aprobaciones y suben los rechazos.  </a:t>
+              <a:t>Las carpetas TOP siguen sin aprobaciones.  </a:t>
             </a:r>
             <a:pPr indent="0" marL="0">
               <a:lnSpc>
@@ -10170,7 +10170,7 @@
                 <a:ea typeface="Calibri" pitchFamily="34" charset="-122"/>
                 <a:cs typeface="Calibri" pitchFamily="34" charset="-120"/>
               </a:rPr>
-              <a:t>40 entregadas de 136 (29,4%) y 0 aprobadas; las rechazadas pasaron de 21 a 24.</a:t>
+              <a:t>46 entregadas de 136 (33,8%) y 0 aprobadas; 24 rechazadas.</a:t>
             </a:r>
             <a:endParaRPr lang="en-US" sz="1250" dirty="0"/>
           </a:p>
@@ -10249,7 +10249,7 @@
                 <a:ea typeface="Calibri" pitchFamily="34" charset="-122"/>
                 <a:cs typeface="Calibri" pitchFamily="34" charset="-120"/>
               </a:rPr>
-              <a:t>+37 P1 cerrado desde el corte anterior; 582 abiertos, de los cuales 448 superaron su fecha de vencimiento. El área 3000 concentra 536 (92,1%).</a:t>
+              <a:t>+137 P1 cerrado desde el corte anterior; 483 abiertos, de los cuales 325 superaron su fecha de vencimiento. El área 3000 concentra 440 (91,1%).</a:t>
             </a:r>
             <a:endParaRPr lang="en-US" sz="1250" dirty="0"/>
           </a:p>
@@ -10288,7 +10288,7 @@
                 <a:ea typeface="Calibri" pitchFamily="34" charset="-122"/>
                 <a:cs typeface="Calibri" pitchFamily="34" charset="-120"/>
               </a:rPr>
-              <a:t>Fuente: Estatus_Resumen_General_QAQC.xlsx · Corte 01-10-2026 · Áreas 2000/3000/4000/8000</a:t>
+              <a:t>Fuente: Estatus_Resumen_General_QAQC.xlsx · Corte 13-10-2026 · Áreas 2000/3000/4000/8000</a:t>
             </a:r>
             <a:endParaRPr lang="en-US" sz="850" dirty="0"/>
           </a:p>
@@ -10991,7 +10991,7 @@
                 <a:ea typeface="Calibri" pitchFamily="34" charset="-122"/>
                 <a:cs typeface="Calibri" pitchFamily="34" charset="-120"/>
               </a:rPr>
-              <a:t>30/35 · 85,7%</a:t>
+              <a:t>31/35 · 88,6%</a:t>
             </a:r>
             <a:endParaRPr lang="en-US" sz="1300" dirty="0"/>
           </a:p>
@@ -11329,7 +11329,7 @@
                 <a:ea typeface="Calibri" pitchFamily="34" charset="-122"/>
                 <a:cs typeface="Calibri" pitchFamily="34" charset="-120"/>
               </a:rPr>
-              <a:t>50/77 · 64,9%</a:t>
+              <a:t>77/77 · 100%</a:t>
             </a:r>
             <a:endParaRPr lang="en-US" sz="1300" dirty="0"/>
           </a:p>
@@ -11407,7 +11407,7 @@
                 <a:ea typeface="Calibri" pitchFamily="34" charset="-122"/>
                 <a:cs typeface="Calibri" pitchFamily="34" charset="-120"/>
               </a:rPr>
-              <a:t>51,3%</a:t>
+              <a:t>61,4%</a:t>
             </a:r>
             <a:endParaRPr lang="en-US" sz="1300" dirty="0"/>
           </a:p>
@@ -11446,7 +11446,7 @@
                 <a:ea typeface="Calibri" pitchFamily="34" charset="-122"/>
                 <a:cs typeface="Calibri" pitchFamily="34" charset="-120"/>
               </a:rPr>
-              <a:t>536 (421)</a:t>
+              <a:t>440 (301)</a:t>
             </a:r>
             <a:endParaRPr lang="en-US" sz="1300" dirty="0"/>
           </a:p>
@@ -11686,7 +11686,7 @@
                 <a:ea typeface="Calibri" pitchFamily="34" charset="-122"/>
                 <a:cs typeface="Calibri" pitchFamily="34" charset="-120"/>
               </a:rPr>
-              <a:t>20/22 · 90,9%</a:t>
+              <a:t>22/22 · 100%</a:t>
             </a:r>
             <a:endParaRPr lang="en-US" sz="1300" dirty="0"/>
           </a:p>
@@ -11725,7 +11725,7 @@
                 <a:ea typeface="Calibri" pitchFamily="34" charset="-122"/>
                 <a:cs typeface="Calibri" pitchFamily="34" charset="-120"/>
               </a:rPr>
-              <a:t>2/22 · 9,1%</a:t>
+              <a:t>7/22 · 31,8%</a:t>
             </a:r>
             <a:endParaRPr lang="en-US" sz="1300" dirty="0"/>
           </a:p>
@@ -11764,7 +11764,7 @@
                 <a:ea typeface="Calibri" pitchFamily="34" charset="-122"/>
                 <a:cs typeface="Calibri" pitchFamily="34" charset="-120"/>
               </a:rPr>
-              <a:t>88%</a:t>
+              <a:t>88,8%</a:t>
             </a:r>
             <a:endParaRPr lang="en-US" sz="1300" dirty="0"/>
           </a:p>
@@ -11803,7 +11803,7 @@
                 <a:ea typeface="Calibri" pitchFamily="34" charset="-122"/>
                 <a:cs typeface="Calibri" pitchFamily="34" charset="-120"/>
               </a:rPr>
-              <a:t>44 (25)</a:t>
+              <a:t>41 (22)</a:t>
             </a:r>
             <a:endParaRPr lang="en-US" sz="1300" dirty="0"/>
           </a:p>
@@ -12342,7 +12342,7 @@
                 <a:ea typeface="Calibri" pitchFamily="34" charset="-122"/>
                 <a:cs typeface="Calibri" pitchFamily="34" charset="-120"/>
               </a:rPr>
-              <a:t>Fuente: Estatus_Resumen_General_QAQC.xlsx · Corte 01-10-2026 · Áreas 2000/3000/4000/8000</a:t>
+              <a:t>Fuente: Estatus_Resumen_General_QAQC.xlsx · Corte 13-10-2026 · Áreas 2000/3000/4000/8000</a:t>
             </a:r>
             <a:endParaRPr lang="en-US" sz="850" dirty="0"/>
           </a:p>
@@ -12593,7 +12593,7 @@
                 <a:ea typeface="Calibri" pitchFamily="34" charset="-122"/>
                 <a:cs typeface="Calibri" pitchFamily="34" charset="-120"/>
               </a:rPr>
-              <a:t>Las caminatas al 80% están cerradas en todas las áreas (136/136). El hito 100% avanza a 78,7%, y el área 3000 concentra 27 de los 29 subsistemas pendientes.</a:t>
+              <a:t>Las caminatas al 80% están cerradas en todas las áreas (136/136). El hito 100% avanza a 100%.</a:t>
             </a:r>
             <a:endParaRPr lang="en-US" sz="1350" dirty="0"/>
           </a:p>
@@ -12849,7 +12849,7 @@
                 <a:ea typeface="Cambria" pitchFamily="34" charset="-122"/>
                 <a:cs typeface="Cambria" pitchFamily="34" charset="-120"/>
               </a:rPr>
-              <a:t>78,7%</a:t>
+              <a:t>100%</a:t>
             </a:r>
             <a:endParaRPr lang="en-US" sz="4000" dirty="0"/>
           </a:p>
@@ -12888,7 +12888,7 @@
                 <a:ea typeface="Calibri" pitchFamily="34" charset="-122"/>
                 <a:cs typeface="Calibri" pitchFamily="34" charset="-120"/>
               </a:rPr>
-              <a:t>107 realizadas · 29 pendientes</a:t>
+              <a:t>136 realizadas · 0 pendientes</a:t>
             </a:r>
             <a:endParaRPr lang="en-US" sz="1200" dirty="0"/>
           </a:p>
@@ -12947,7 +12947,7 @@
                 <a:ea typeface="Calibri" pitchFamily="34" charset="-122"/>
                 <a:cs typeface="Calibri" pitchFamily="34" charset="-120"/>
               </a:rPr>
-              <a:t>29 próximas a realizar y 0 por programar. Las «por programar» bajaron 2 en el período.</a:t>
+              <a:t>0 próximas a realizar y 0 por programar.</a:t>
             </a:r>
             <a:endParaRPr lang="en-US" sz="1150" dirty="0"/>
           </a:p>
@@ -12986,7 +12986,7 @@
                 <a:ea typeface="Calibri" pitchFamily="34" charset="-122"/>
                 <a:cs typeface="Calibri" pitchFamily="34" charset="-120"/>
               </a:rPr>
-              <a:t>Fuente: Estatus_Resumen_General_QAQC.xlsx · Corte 01-10-2026 · Áreas 2000/3000/4000/8000</a:t>
+              <a:t>Fuente: Estatus_Resumen_General_QAQC.xlsx · Corte 13-10-2026 · Áreas 2000/3000/4000/8000</a:t>
             </a:r>
             <a:endParaRPr lang="en-US" sz="850" dirty="0"/>
           </a:p>
@@ -13237,7 +13237,7 @@
                 <a:ea typeface="Calibri" pitchFamily="34" charset="-122"/>
                 <a:cs typeface="Calibri" pitchFamily="34" charset="-120"/>
               </a:rPr>
-              <a:t>40 carpetas entregadas de 136 (29,4%). Ninguna aprobada aún: el flujo se acumula en revisión y hay 24 rechazos que requieren rearmado.</a:t>
+              <a:t>46 carpetas entregadas de 136 (33,8%). Ninguna aprobada aún: el flujo se acumula en revisión y hay 24 rechazos que requieren rearmado.</a:t>
             </a:r>
             <a:endParaRPr lang="en-US" sz="1350" dirty="0"/>
           </a:p>
@@ -13439,7 +13439,7 @@
                 <a:ea typeface="Calibri" pitchFamily="34" charset="-122"/>
                 <a:cs typeface="Calibri" pitchFamily="34" charset="-120"/>
               </a:rPr>
-              <a:t>▲ +1</a:t>
+              <a:t>▲ +6</a:t>
             </a:r>
             <a:endParaRPr lang="en-US" sz="950" dirty="0"/>
           </a:p>
@@ -13478,7 +13478,7 @@
                 <a:ea typeface="Cambria" pitchFamily="34" charset="-122"/>
                 <a:cs typeface="Cambria" pitchFamily="34" charset="-120"/>
               </a:rPr>
-              <a:t>40</a:t>
+              <a:t>46</a:t>
             </a:r>
             <a:endParaRPr lang="en-US" sz="2200" dirty="0"/>
           </a:p>
@@ -13592,13 +13592,13 @@
             <a:r>
               <a:rPr lang="en-US" sz="950" b="1" dirty="0">
                 <a:solidFill>
-                  <a:srgbClr val="C0392B"/>
-                </a:solidFill>
-                <a:latin typeface="Calibri" pitchFamily="34" charset="0"/>
-                <a:ea typeface="Calibri" pitchFamily="34" charset="-122"/>
-                <a:cs typeface="Calibri" pitchFamily="34" charset="-120"/>
-              </a:rPr>
-              <a:t>▼ -2</a:t>
+                  <a:srgbClr val="1F7A44"/>
+                </a:solidFill>
+                <a:latin typeface="Calibri" pitchFamily="34" charset="0"/>
+                <a:ea typeface="Calibri" pitchFamily="34" charset="-122"/>
+                <a:cs typeface="Calibri" pitchFamily="34" charset="-120"/>
+              </a:rPr>
+              <a:t>▲ +6</a:t>
             </a:r>
             <a:endParaRPr lang="en-US" sz="950" dirty="0"/>
           </a:p>
@@ -13637,7 +13637,7 @@
                 <a:ea typeface="Cambria" pitchFamily="34" charset="-122"/>
                 <a:cs typeface="Cambria" pitchFamily="34" charset="-120"/>
               </a:rPr>
-              <a:t>15</a:t>
+              <a:t>21</a:t>
             </a:r>
             <a:endParaRPr lang="en-US" sz="2200" dirty="0"/>
           </a:p>
@@ -13852,45 +13852,6 @@
         </p:nvSpPr>
         <p:spPr>
           <a:xfrm>
-            <a:off x="9509760" y="4315968"/>
-            <a:ext cx="914400" cy="566928"/>
-          </a:xfrm>
-          <a:prstGeom prst="rect">
-            <a:avLst/>
-          </a:prstGeom>
-          <a:noFill/>
-          <a:ln/>
-        </p:spPr>
-        <p:txBody>
-          <a:bodyPr wrap="square" lIns="0" tIns="0" rIns="0" bIns="0" rtlCol="0" anchor="ctr"/>
-          <a:lstStyle/>
-          <a:p>
-            <a:pPr algn="r" indent="0" marL="0">
-              <a:buNone/>
-            </a:pPr>
-            <a:r>
-              <a:rPr lang="en-US" sz="950" b="1" dirty="0">
-                <a:solidFill>
-                  <a:srgbClr val="C0392B"/>
-                </a:solidFill>
-                <a:latin typeface="Calibri" pitchFamily="34" charset="0"/>
-                <a:ea typeface="Calibri" pitchFamily="34" charset="-122"/>
-                <a:cs typeface="Calibri" pitchFamily="34" charset="-120"/>
-              </a:rPr>
-              <a:t>▲ +3</a:t>
-            </a:r>
-            <a:endParaRPr lang="en-US" sz="950" dirty="0"/>
-          </a:p>
-        </p:txBody>
-      </p:sp>
-      <p:sp>
-        <p:nvSpPr>
-          <p:cNvPr id="27" name="Text 23"/>
-          <p:cNvSpPr/>
-          <p:nvPr/>
-        </p:nvSpPr>
-        <p:spPr>
-          <a:xfrm>
             <a:off x="10469880" y="4315968"/>
             <a:ext cx="868680" cy="566928"/>
           </a:xfrm>
@@ -13924,7 +13885,7 @@
       </p:sp>
       <p:sp>
         <p:nvSpPr>
-          <p:cNvPr id="28" name="Shape 24"/>
+          <p:cNvPr id="27" name="Shape 23"/>
           <p:cNvSpPr/>
           <p:nvPr/>
         </p:nvSpPr>
@@ -13946,7 +13907,7 @@
       </p:sp>
       <p:sp>
         <p:nvSpPr>
-          <p:cNvPr id="29" name="Shape 25"/>
+          <p:cNvPr id="28" name="Shape 24"/>
           <p:cNvSpPr/>
           <p:nvPr/>
         </p:nvSpPr>
@@ -13966,7 +13927,7 @@
       </p:sp>
       <p:sp>
         <p:nvSpPr>
-          <p:cNvPr id="30" name="Text 26"/>
+          <p:cNvPr id="29" name="Text 25"/>
           <p:cNvSpPr/>
           <p:nvPr/>
         </p:nvSpPr>
@@ -14005,7 +13966,7 @@
       </p:sp>
       <p:sp>
         <p:nvSpPr>
-          <p:cNvPr id="31" name="Text 27"/>
+          <p:cNvPr id="30" name="Text 26"/>
           <p:cNvSpPr/>
           <p:nvPr/>
         </p:nvSpPr>
@@ -14044,7 +14005,7 @@
       </p:sp>
       <p:sp>
         <p:nvSpPr>
-          <p:cNvPr id="32" name="Text 28"/>
+          <p:cNvPr id="31" name="Text 27"/>
           <p:cNvSpPr/>
           <p:nvPr/>
         </p:nvSpPr>
@@ -14083,7 +14044,7 @@
       </p:sp>
       <p:sp>
         <p:nvSpPr>
-          <p:cNvPr id="33" name="Text 29"/>
+          <p:cNvPr id="32" name="Text 28"/>
           <p:cNvSpPr/>
           <p:nvPr/>
         </p:nvSpPr>
@@ -14114,7 +14075,7 @@
                 <a:ea typeface="Calibri" pitchFamily="34" charset="-122"/>
                 <a:cs typeface="Calibri" pitchFamily="34" charset="-120"/>
               </a:rPr>
-              <a:t>Fuente: Estatus_Resumen_General_QAQC.xlsx · Corte 01-10-2026 · Áreas 2000/3000/4000/8000</a:t>
+              <a:t>Fuente: Estatus_Resumen_General_QAQC.xlsx · Corte 13-10-2026 · Áreas 2000/3000/4000/8000</a:t>
             </a:r>
             <a:endParaRPr lang="en-US" sz="850" dirty="0"/>
           </a:p>
@@ -14122,7 +14083,7 @@
       </p:sp>
       <p:sp>
         <p:nvSpPr>
-          <p:cNvPr id="34" name="Text 30"/>
+          <p:cNvPr id="33" name="Text 29"/>
           <p:cNvSpPr/>
           <p:nvPr/>
         </p:nvSpPr>
@@ -14161,7 +14122,7 @@
       </p:sp>
       <p:sp>
         <p:nvSpPr>
-          <p:cNvPr id="35" name="Text 31"/>
+          <p:cNvPr id="34" name="Text 30"/>
           <p:cNvSpPr/>
           <p:nvPr/>
         </p:nvSpPr>
@@ -14365,7 +14326,7 @@
                 <a:ea typeface="Calibri" pitchFamily="34" charset="-122"/>
                 <a:cs typeface="Calibri" pitchFamily="34" charset="-120"/>
               </a:rPr>
-              <a:t>2.056 P1 levantados; 71,7% cerrados. El pendiente se concentra en Eléctrica, Piping, Instrumentación y Control, y físicamente en el área 3000.</a:t>
+              <a:t>2.094 P1 levantados; 76,9% cerrados. El pendiente se concentra en Eléctrica, Piping, Instrumentación y Control, y físicamente en el área 3000.</a:t>
             </a:r>
             <a:endParaRPr lang="en-US" sz="1350" dirty="0"/>
           </a:p>
@@ -14497,7 +14458,7 @@
                 <a:ea typeface="Cambria" pitchFamily="34" charset="-122"/>
                 <a:cs typeface="Cambria" pitchFamily="34" charset="-120"/>
               </a:rPr>
-              <a:t>71,7%</a:t>
+              <a:t>76,9%</a:t>
             </a:r>
             <a:endParaRPr lang="en-US" sz="1900" dirty="0"/>
           </a:p>
@@ -14612,7 +14573,7 @@
                 <a:ea typeface="Calibri" pitchFamily="34" charset="-122"/>
                 <a:cs typeface="Calibri" pitchFamily="34" charset="-120"/>
               </a:rPr>
-              <a:t>1.474</a:t>
+              <a:t>1.611</a:t>
             </a:r>
             <a:endParaRPr lang="en-US" sz="1100" dirty="0"/>
           </a:p>
@@ -14710,7 +14671,7 @@
                 <a:ea typeface="Calibri" pitchFamily="34" charset="-122"/>
                 <a:cs typeface="Calibri" pitchFamily="34" charset="-120"/>
               </a:rPr>
-              <a:t>582</a:t>
+              <a:t>483</a:t>
             </a:r>
             <a:endParaRPr lang="en-US" sz="1100" dirty="0"/>
           </a:p>
@@ -14891,7 +14852,7 @@
                 <a:ea typeface="Calibri" pitchFamily="34" charset="-122"/>
                 <a:cs typeface="Calibri" pitchFamily="34" charset="-120"/>
               </a:rPr>
-              <a:t>536 de 582 P1 abiertos (92,1%) están en el área 3000. Áreas 2000 sobre 90% de cierre.</a:t>
+              <a:t>440 de 483 P1 abiertos (91,1%) están en el área 3000. Áreas 2000 sobre 90% de cierre.</a:t>
             </a:r>
             <a:endParaRPr lang="en-US" sz="1150" dirty="0"/>
           </a:p>
@@ -14930,7 +14891,7 @@
                 <a:ea typeface="Calibri" pitchFamily="34" charset="-122"/>
                 <a:cs typeface="Calibri" pitchFamily="34" charset="-120"/>
               </a:rPr>
-              <a:t>Fuente: Estatus_Resumen_General_QAQC.xlsx · Corte 01-10-2026 · Áreas 2000/3000/4000/8000</a:t>
+              <a:t>Fuente: Estatus_Resumen_General_QAQC.xlsx · Corte 13-10-2026 · Áreas 2000/3000/4000/8000</a:t>
             </a:r>
             <a:endParaRPr lang="en-US" sz="850" dirty="0"/>
           </a:p>
@@ -15304,7 +15265,7 @@
                 <a:ea typeface="Calibri" pitchFamily="34" charset="-122"/>
                 <a:cs typeface="Calibri" pitchFamily="34" charset="-120"/>
               </a:rPr>
-              <a:t>0 aprobadas de 136. Priorizar el cierre de las 15 en revisión y el rearmado de las 24 rechazadas para convertir entregas en aprobaciones.</a:t>
+              <a:t>0 aprobadas de 136. Priorizar el cierre de las 21 en revisión y el rearmado de las 24 rechazadas para convertir entregas en aprobaciones.</a:t>
             </a:r>
             <a:endParaRPr lang="en-US" sz="1150" dirty="0"/>
           </a:p>
@@ -15446,7 +15407,7 @@
                 <a:ea typeface="Calibri" pitchFamily="34" charset="-122"/>
                 <a:cs typeface="Calibri" pitchFamily="34" charset="-120"/>
               </a:rPr>
-              <a:t>536 P1 abiertos (92,1% del total) y 27 caminatas 100% pendientes. Es la ruta crítica: sin esta área no mejora ningún indicador global.</a:t>
+              <a:t>440 P1 abiertos (91,1% del total) y 0 caminatas 100% pendientes. Es la ruta crítica: sin esta área no mejora ningún indicador global.</a:t>
             </a:r>
             <a:endParaRPr lang="en-US" sz="1150" dirty="0"/>
           </a:p>
@@ -15546,7 +15507,7 @@
                 <a:ea typeface="Calibri" pitchFamily="34" charset="-122"/>
                 <a:cs typeface="Calibri" pitchFamily="34" charset="-120"/>
               </a:rPr>
-              <a:t>Recuperar los 448 P1 vencidos</a:t>
+              <a:t>Recuperar los 325 P1 vencidos</a:t>
             </a:r>
             <a:endParaRPr lang="en-US" sz="1500" dirty="0"/>
           </a:p>
@@ -15588,7 +15549,7 @@
                 <a:ea typeface="Calibri" pitchFamily="34" charset="-122"/>
                 <a:cs typeface="Calibri" pitchFamily="34" charset="-120"/>
               </a:rPr>
-              <a:t>77% de los P1 abiertos superó su fecha de vencimiento. Foco en Eléctrica (132), Instrumentación y Control (129), Piping (124).</a:t>
+              <a:t>67,3% de los P1 abiertos superó su fecha de vencimiento. Foco en Eléctrica (106), Instrumentación y Control (97), Piping (81).</a:t>
             </a:r>
             <a:endParaRPr lang="en-US" sz="1150" dirty="0"/>
           </a:p>
@@ -15730,7 +15691,7 @@
                 <a:ea typeface="Calibri" pitchFamily="34" charset="-122"/>
                 <a:cs typeface="Calibri" pitchFamily="34" charset="-120"/>
               </a:rPr>
-              <a:t>29 subsistemas pendientes: 29 próximos a realizar y 0 por programar. La programación ya está hecha; falta ejecutarla para habilitar la entrega de carpetas.</a:t>
+              <a:t>0 subsistemas pendientes: 0 próximos a realizar y 0 por programar. La programación ya está hecha; falta ejecutarla para habilitar la entrega de carpetas.</a:t>
             </a:r>
             <a:endParaRPr lang="en-US" sz="1150" dirty="0"/>
           </a:p>
@@ -15769,7 +15730,7 @@
                 <a:ea typeface="Calibri" pitchFamily="34" charset="-122"/>
                 <a:cs typeface="Calibri" pitchFamily="34" charset="-120"/>
               </a:rPr>
-              <a:t>Fuente: Estatus_Resumen_General_QAQC.xlsx · Corte 01-10-2026 · Áreas 2000/3000/4000/8000</a:t>
+              <a:t>Fuente: Estatus_Resumen_General_QAQC.xlsx · Corte 13-10-2026 · Áreas 2000/3000/4000/8000</a:t>
             </a:r>
             <a:endParaRPr lang="en-US" sz="850" dirty="0"/>
           </a:p>

--- a/panel_control_TOP_P1/Panel_Control_TOP_P1.pptx
+++ b/panel_control_TOP_P1/Panel_Control_TOP_P1.pptx
@@ -233,7 +233,7 @@
                 <c:formatCode>General</c:formatCode>
                 <c:ptCount val="2"/>
                 <c:pt idx="0">
-                  <c:v>66</c:v>
+                  <c:v>72</c:v>
                 </c:pt>
                 <c:pt idx="1">
                   <c:v>12</c:v>
@@ -311,7 +311,7 @@
                 <c:formatCode>General</c:formatCode>
                 <c:ptCount val="2"/>
                 <c:pt idx="0">
-                  <c:v>13</c:v>
+                  <c:v>8</c:v>
                 </c:pt>
                 <c:pt idx="1">
                   <c:v>3</c:v>
@@ -6907,7 +6907,7 @@
                 <a:ea typeface="Cambria" pitchFamily="34" charset="-122"/>
                 <a:cs typeface="Cambria" pitchFamily="34" charset="-120"/>
               </a:rPr>
-              <a:t>83,5%</a:t>
+              <a:t>90%</a:t>
             </a:r>
             <a:endParaRPr lang="en-US" sz="3400" dirty="0"/>
           </a:p>
@@ -7063,7 +7063,7 @@
                 <a:ea typeface="Cambria" pitchFamily="34" charset="-122"/>
                 <a:cs typeface="Cambria" pitchFamily="34" charset="-120"/>
               </a:rPr>
-              <a:t>66,3%</a:t>
+              <a:t>71,6%</a:t>
             </a:r>
             <a:endParaRPr lang="en-US" sz="3400" dirty="0"/>
           </a:p>
@@ -7219,7 +7219,7 @@
                 <a:ea typeface="Calibri" pitchFamily="34" charset="-122"/>
                 <a:cs typeface="Calibri" pitchFamily="34" charset="-120"/>
               </a:rPr>
-              <a:t>Corte: 29-09-2026</a:t>
+              <a:t>Corte: 13-10-2026</a:t>
             </a:r>
             <a:endParaRPr lang="en-US" sz="1100" dirty="0"/>
           </a:p>
@@ -7258,7 +7258,7 @@
                 <a:ea typeface="Calibri" pitchFamily="34" charset="-122"/>
                 <a:cs typeface="Calibri" pitchFamily="34" charset="-120"/>
               </a:rPr>
-              <a:t>Fuente: REPORTE_GERENCIAL + Listado de Puntos Punch Consolidado · Corte 29-09-2026 · Atrasos al 12-10-2026</a:t>
+              <a:t>Fuente: REPORTE_GERENCIAL + Listado de Puntos Punch Consolidado · Corte 13-10-2026 · Atrasos al 12-10-2026</a:t>
             </a:r>
             <a:endParaRPr lang="en-US" sz="850" dirty="0"/>
           </a:p>
@@ -16035,7 +16035,7 @@
                 <a:ea typeface="Cambria" pitchFamily="34" charset="-122"/>
                 <a:cs typeface="Cambria" pitchFamily="34" charset="-120"/>
               </a:rPr>
-              <a:t>83,5%</a:t>
+              <a:t>90%</a:t>
             </a:r>
             <a:endParaRPr lang="en-US" sz="3800" dirty="0"/>
           </a:p>
@@ -16074,7 +16074,7 @@
                 <a:ea typeface="Calibri" pitchFamily="34" charset="-122"/>
                 <a:cs typeface="Calibri" pitchFamily="34" charset="-120"/>
               </a:rPr>
-              <a:t>66/79</a:t>
+              <a:t>72/80</a:t>
             </a:r>
             <a:endParaRPr lang="en-US" sz="1400" dirty="0"/>
           </a:p>
@@ -16155,7 +16155,7 @@
                 <a:ea typeface="Calibri" pitchFamily="34" charset="-122"/>
                 <a:cs typeface="Calibri" pitchFamily="34" charset="-120"/>
               </a:rPr>
-              <a:t>13 subsistemas por caminar</a:t>
+              <a:t>8 subsistemas por caminar</a:t>
             </a:r>
             <a:endParaRPr lang="en-US" sz="950" dirty="0"/>
           </a:p>
@@ -16461,7 +16461,7 @@
                 <a:ea typeface="Cambria" pitchFamily="34" charset="-122"/>
                 <a:cs typeface="Cambria" pitchFamily="34" charset="-120"/>
               </a:rPr>
-              <a:t>66,3%</a:t>
+              <a:t>71,6%</a:t>
             </a:r>
             <a:endParaRPr lang="en-US" sz="3800" dirty="0"/>
           </a:p>
@@ -16500,7 +16500,7 @@
                 <a:ea typeface="Calibri" pitchFamily="34" charset="-122"/>
                 <a:cs typeface="Calibri" pitchFamily="34" charset="-120"/>
               </a:rPr>
-              <a:t>63/95</a:t>
+              <a:t>68/95</a:t>
             </a:r>
             <a:endParaRPr lang="en-US" sz="1400" dirty="0"/>
           </a:p>
@@ -16581,7 +16581,7 @@
                 <a:ea typeface="Calibri" pitchFamily="34" charset="-122"/>
                 <a:cs typeface="Calibri" pitchFamily="34" charset="-120"/>
               </a:rPr>
-              <a:t>46 aprobadas · 11 en revisión · 6 rechazadas</a:t>
+              <a:t>51 aprobadas · 10 en revisión · 7 rechazadas</a:t>
             </a:r>
             <a:endParaRPr lang="en-US" sz="950" dirty="0"/>
           </a:p>
@@ -17013,7 +17013,7 @@
                 <a:ea typeface="Calibri" pitchFamily="34" charset="-122"/>
                 <a:cs typeface="Calibri" pitchFamily="34" charset="-120"/>
               </a:rPr>
-              <a:t>Operables 66/79 por Caminata 2 (83,5%); Facility 12/15 por Caminata 1 (80%).</a:t>
+              <a:t>Operables 72/80 por Caminata 2 (90%); Facility 12/15 por Caminata 1 (80%).</a:t>
             </a:r>
             <a:endParaRPr lang="en-US" sz="1150" dirty="0"/>
           </a:p>
@@ -17075,7 +17075,7 @@
                 <a:ea typeface="Calibri" pitchFamily="34" charset="-122"/>
                 <a:cs typeface="Calibri" pitchFamily="34" charset="-120"/>
               </a:rPr>
-              <a:t>Las carpetas están a 66,3% de entrega y el cuello está en el armado interno.  </a:t>
+              <a:t>Las carpetas están a 71,6% de entrega y el cuello está en el armado interno.  </a:t>
             </a:r>
             <a:pPr indent="0" marL="0">
               <a:lnSpc>
@@ -17092,7 +17092,7 @@
                 <a:ea typeface="Calibri" pitchFamily="34" charset="-122"/>
                 <a:cs typeface="Calibri" pitchFamily="34" charset="-120"/>
               </a:rPr>
-              <a:t>63 entregadas de 95: 46 aprobadas, 11 en revisión y 6 rechazadas. Quedan 15 en preparación y 17 sin iniciar.</a:t>
+              <a:t>68 entregadas de 95: 51 aprobadas, 10 en revisión y 7 rechazadas. Quedan 16 en preparación y 11 sin iniciar.</a:t>
             </a:r>
             <a:endParaRPr lang="en-US" sz="1150" dirty="0"/>
           </a:p>
@@ -17210,7 +17210,7 @@
                 <a:ea typeface="Calibri" pitchFamily="34" charset="-122"/>
                 <a:cs typeface="Calibri" pitchFamily="34" charset="-120"/>
               </a:rPr>
-              <a:t>Fuente: REPORTE_GERENCIAL + Listado de Puntos Punch Consolidado · Corte 29-09-2026 · Atrasos al 12-10-2026</a:t>
+              <a:t>Fuente: REPORTE_GERENCIAL + Listado de Puntos Punch Consolidado · Corte 13-10-2026 · Atrasos al 12-10-2026</a:t>
             </a:r>
             <a:endParaRPr lang="en-US" sz="850" dirty="0"/>
           </a:p>
@@ -17663,7 +17663,7 @@
                 <a:ea typeface="Calibri" pitchFamily="34" charset="-122"/>
                 <a:cs typeface="Calibri" pitchFamily="34" charset="-120"/>
               </a:rPr>
-              <a:t>48,4%</a:t>
+              <a:t>53,7%</a:t>
             </a:r>
             <a:endParaRPr lang="en-US" sz="1100" dirty="0"/>
           </a:p>
@@ -17702,7 +17702,7 @@
                 <a:ea typeface="Cambria" pitchFamily="34" charset="-122"/>
                 <a:cs typeface="Cambria" pitchFamily="34" charset="-120"/>
               </a:rPr>
-              <a:t>46</a:t>
+              <a:t>51</a:t>
             </a:r>
             <a:endParaRPr lang="en-US" sz="2200" dirty="0"/>
           </a:p>
@@ -17822,7 +17822,7 @@
                 <a:ea typeface="Calibri" pitchFamily="34" charset="-122"/>
                 <a:cs typeface="Calibri" pitchFamily="34" charset="-120"/>
               </a:rPr>
-              <a:t>11,6%</a:t>
+              <a:t>10,5%</a:t>
             </a:r>
             <a:endParaRPr lang="en-US" sz="1100" dirty="0"/>
           </a:p>
@@ -17861,7 +17861,7 @@
                 <a:ea typeface="Cambria" pitchFamily="34" charset="-122"/>
                 <a:cs typeface="Cambria" pitchFamily="34" charset="-120"/>
               </a:rPr>
-              <a:t>11</a:t>
+              <a:t>10</a:t>
             </a:r>
             <a:endParaRPr lang="en-US" sz="2200" dirty="0"/>
           </a:p>
@@ -17981,7 +17981,7 @@
                 <a:ea typeface="Calibri" pitchFamily="34" charset="-122"/>
                 <a:cs typeface="Calibri" pitchFamily="34" charset="-120"/>
               </a:rPr>
-              <a:t>6,3%</a:t>
+              <a:t>7,4%</a:t>
             </a:r>
             <a:endParaRPr lang="en-US" sz="1100" dirty="0"/>
           </a:p>
@@ -18020,7 +18020,7 @@
                 <a:ea typeface="Cambria" pitchFamily="34" charset="-122"/>
                 <a:cs typeface="Cambria" pitchFamily="34" charset="-120"/>
               </a:rPr>
-              <a:t>6</a:t>
+              <a:t>7</a:t>
             </a:r>
             <a:endParaRPr lang="en-US" sz="2200" dirty="0"/>
           </a:p>
@@ -18140,7 +18140,7 @@
                 <a:ea typeface="Calibri" pitchFamily="34" charset="-122"/>
                 <a:cs typeface="Calibri" pitchFamily="34" charset="-120"/>
               </a:rPr>
-              <a:t>15,8%</a:t>
+              <a:t>16,8%</a:t>
             </a:r>
             <a:endParaRPr lang="en-US" sz="1100" dirty="0"/>
           </a:p>
@@ -18179,7 +18179,7 @@
                 <a:ea typeface="Cambria" pitchFamily="34" charset="-122"/>
                 <a:cs typeface="Cambria" pitchFamily="34" charset="-120"/>
               </a:rPr>
-              <a:t>15</a:t>
+              <a:t>16</a:t>
             </a:r>
             <a:endParaRPr lang="en-US" sz="2200" dirty="0"/>
           </a:p>
@@ -18299,7 +18299,7 @@
                 <a:ea typeface="Calibri" pitchFamily="34" charset="-122"/>
                 <a:cs typeface="Calibri" pitchFamily="34" charset="-120"/>
               </a:rPr>
-              <a:t>17,9%</a:t>
+              <a:t>11,6%</a:t>
             </a:r>
             <a:endParaRPr lang="en-US" sz="1100" dirty="0"/>
           </a:p>
@@ -18338,7 +18338,7 @@
                 <a:ea typeface="Cambria" pitchFamily="34" charset="-122"/>
                 <a:cs typeface="Cambria" pitchFamily="34" charset="-120"/>
               </a:rPr>
-              <a:t>17</a:t>
+              <a:t>11</a:t>
             </a:r>
             <a:endParaRPr lang="en-US" sz="2200" dirty="0"/>
           </a:p>
@@ -18380,7 +18380,7 @@
                 <a:ea typeface="Calibri" pitchFamily="34" charset="-122"/>
                 <a:cs typeface="Calibri" pitchFamily="34" charset="-120"/>
               </a:rPr>
-              <a:t>63 carpetas ya están en manos del cliente (66,3%) y 46 subsistemas tienen tarjeta verde. El grueso del pendiente todavía no sale de Besalco.</a:t>
+              <a:t>68 carpetas ya están en manos del cliente (71,6%) y 52 subsistemas tienen tarjeta verde. El grueso del pendiente todavía no sale de Besalco.</a:t>
             </a:r>
             <a:endParaRPr lang="en-US" sz="1000" dirty="0"/>
           </a:p>
@@ -18419,7 +18419,7 @@
                 <a:ea typeface="Calibri" pitchFamily="34" charset="-122"/>
                 <a:cs typeface="Calibri" pitchFamily="34" charset="-120"/>
               </a:rPr>
-              <a:t>Fuente: REPORTE_GERENCIAL + Listado de Puntos Punch Consolidado · Corte 29-09-2026 · Atrasos al 12-10-2026</a:t>
+              <a:t>Fuente: REPORTE_GERENCIAL + Listado de Puntos Punch Consolidado · Corte 13-10-2026 · Atrasos al 12-10-2026</a:t>
             </a:r>
             <a:endParaRPr lang="en-US" sz="850" dirty="0"/>
           </a:p>
@@ -19235,7 +19235,7 @@
                 <a:ea typeface="Calibri" pitchFamily="34" charset="-122"/>
                 <a:cs typeface="Calibri" pitchFamily="34" charset="-120"/>
               </a:rPr>
-              <a:t>Fuente: REPORTE_GERENCIAL + Listado de Puntos Punch Consolidado · Corte 29-09-2026 · Atrasos al 12-10-2026</a:t>
+              <a:t>Fuente: REPORTE_GERENCIAL + Listado de Puntos Punch Consolidado · Corte 13-10-2026 · Atrasos al 12-10-2026</a:t>
             </a:r>
             <a:endParaRPr lang="en-US" sz="850" dirty="0"/>
           </a:p>
@@ -19709,7 +19709,7 @@
                 <a:ea typeface="Calibri" pitchFamily="34" charset="-122"/>
                 <a:cs typeface="Calibri" pitchFamily="34" charset="-120"/>
               </a:rPr>
-              <a:t>Ejecutar las 13 caminatas de Operables pendientes</a:t>
+              <a:t>Ejecutar las 8 caminatas de Operables pendientes</a:t>
             </a:r>
             <a:endParaRPr lang="en-US" sz="1400" dirty="0"/>
           </a:p>
@@ -19751,7 +19751,7 @@
                 <a:ea typeface="Calibri" pitchFamily="34" charset="-122"/>
                 <a:cs typeface="Calibri" pitchFamily="34" charset="-120"/>
               </a:rPr>
-              <a:t>La Caminata 2 va en 83,5% (66/79). Sin caminata no se levanta el punch final ni se habilita la entrega de la carpeta.</a:t>
+              <a:t>La Caminata 2 va en 90% (72/80). Sin caminata no se levanta el punch final ni se habilita la entrega de la carpeta.</a:t>
             </a:r>
             <a:endParaRPr lang="en-US" sz="1100" dirty="0"/>
           </a:p>
@@ -19851,7 +19851,7 @@
                 <a:ea typeface="Calibri" pitchFamily="34" charset="-122"/>
                 <a:cs typeface="Calibri" pitchFamily="34" charset="-120"/>
               </a:rPr>
-              <a:t>Sacar del armado interno las 32 carpetas retenidas</a:t>
+              <a:t>Sacar del armado interno las 27 carpetas retenidas</a:t>
             </a:r>
             <a:endParaRPr lang="en-US" sz="1400" dirty="0"/>
           </a:p>
@@ -19893,7 +19893,7 @@
                 <a:ea typeface="Calibri" pitchFamily="34" charset="-122"/>
                 <a:cs typeface="Calibri" pitchFamily="34" charset="-120"/>
               </a:rPr>
-              <a:t>15 están en preparación y 17 sin iniciar. Solo 63 de 95 (66,3%) llegaron al cliente; 6 volvieron rechazadas y hay que rearmarlas.</a:t>
+              <a:t>16 están en preparación y 11 sin iniciar. Solo 68 de 95 (71,6%) llegaron al cliente; 7 volvieron rechazadas y hay que rearmarlas.</a:t>
             </a:r>
             <a:endParaRPr lang="en-US" sz="1100" dirty="0"/>
           </a:p>
@@ -20074,7 +20074,7 @@
                 <a:ea typeface="Calibri" pitchFamily="34" charset="-122"/>
                 <a:cs typeface="Calibri" pitchFamily="34" charset="-120"/>
               </a:rPr>
-              <a:t>Fuente: REPORTE_GERENCIAL + Listado de Puntos Punch Consolidado · Corte 29-09-2026 · Atrasos al 12-10-2026</a:t>
+              <a:t>Fuente: REPORTE_GERENCIAL + Listado de Puntos Punch Consolidado · Corte 13-10-2026 · Atrasos al 12-10-2026</a:t>
             </a:r>
             <a:endParaRPr lang="en-US" sz="850" dirty="0"/>
           </a:p>

--- a/panel_control_TOP_P1/Panel_Control_TOP_P1.pptx
+++ b/panel_control_TOP_P1/Panel_Control_TOP_P1.pptx
@@ -687,10 +687,10 @@
               <c:numCache>
                 <c:ptCount val="3"/>
                 <c:pt idx="0">
-                  <c:v>1611</c:v>
+                  <c:v>1914</c:v>
                 </c:pt>
                 <c:pt idx="1">
-                  <c:v>483</c:v>
+                  <c:v>268</c:v>
                 </c:pt>
                 <c:pt idx="2">
                   <c:v>0</c:v>
@@ -850,22 +850,22 @@
                 <c:formatCode>General</c:formatCode>
                 <c:ptCount val="6"/>
                 <c:pt idx="0">
-                  <c:v>110</c:v>
+                  <c:v>104</c:v>
                 </c:pt>
                 <c:pt idx="1">
-                  <c:v>89</c:v>
+                  <c:v>70</c:v>
                 </c:pt>
                 <c:pt idx="2">
-                  <c:v>27</c:v>
+                  <c:v>19</c:v>
                 </c:pt>
                 <c:pt idx="3">
                   <c:v>15</c:v>
                 </c:pt>
                 <c:pt idx="4">
-                  <c:v>10</c:v>
+                  <c:v>6</c:v>
                 </c:pt>
                 <c:pt idx="5">
-                  <c:v>9</c:v>
+                  <c:v>8</c:v>
                 </c:pt>
               </c:numCache>
             </c:numRef>
@@ -952,13 +952,13 @@
                 <c:formatCode>General</c:formatCode>
                 <c:ptCount val="6"/>
                 <c:pt idx="0">
-                  <c:v>93</c:v>
+                  <c:v>70</c:v>
                 </c:pt>
                 <c:pt idx="1">
-                  <c:v>27</c:v>
+                  <c:v>33</c:v>
                 </c:pt>
                 <c:pt idx="2">
-                  <c:v>30</c:v>
+                  <c:v>20</c:v>
                 </c:pt>
                 <c:pt idx="3">
                   <c:v>3</c:v>
@@ -1340,13 +1340,13 @@
               <c:numCache>
                 <c:ptCount val="3"/>
                 <c:pt idx="0">
-                  <c:v>1224</c:v>
+                  <c:v>1341</c:v>
                 </c:pt>
                 <c:pt idx="1">
-                  <c:v>260</c:v>
+                  <c:v>222</c:v>
                 </c:pt>
                 <c:pt idx="2">
-                  <c:v>156</c:v>
+                  <c:v>129</c:v>
                 </c:pt>
               </c:numCache>
             </c:numRef>
@@ -2736,19 +2736,19 @@
                 <c:formatCode>General</c:formatCode>
                 <c:ptCount val="5"/>
                 <c:pt idx="0">
-                  <c:v>6</c:v>
+                  <c:v>5</c:v>
                 </c:pt>
                 <c:pt idx="1">
-                  <c:v>15</c:v>
+                  <c:v>12</c:v>
                 </c:pt>
                 <c:pt idx="2">
                   <c:v>4</c:v>
                 </c:pt>
                 <c:pt idx="3">
-                  <c:v>3</c:v>
+                  <c:v>2</c:v>
                 </c:pt>
                 <c:pt idx="4">
-                  <c:v>6</c:v>
+                  <c:v>2</c:v>
                 </c:pt>
               </c:numCache>
             </c:numRef>
@@ -2835,16 +2835,16 @@
                   <c:v>130</c:v>
                 </c:pt>
                 <c:pt idx="1">
-                  <c:v>56</c:v>
+                  <c:v>57</c:v>
                 </c:pt>
                 <c:pt idx="2">
                   <c:v>13</c:v>
                 </c:pt>
                 <c:pt idx="3">
-                  <c:v>12</c:v>
+                  <c:v>10</c:v>
                 </c:pt>
                 <c:pt idx="4">
-                  <c:v>7</c:v>
+                  <c:v>3</c:v>
                 </c:pt>
               </c:numCache>
             </c:numRef>
@@ -3591,7 +3591,7 @@
                 <c:formatCode>General</c:formatCode>
                 <c:ptCount val="4"/>
                 <c:pt idx="0">
-                  <c:v>16</c:v>
+                  <c:v>10</c:v>
                 </c:pt>
                 <c:pt idx="1">
                   <c:v/>
@@ -3771,7 +3771,7 @@
                 <c:formatCode>General</c:formatCode>
                 <c:ptCount val="4"/>
                 <c:pt idx="0">
-                  <c:v>15</c:v>
+                  <c:v>21</c:v>
                 </c:pt>
                 <c:pt idx="1">
                   <c:v>7</c:v>
@@ -4127,22 +4127,22 @@
                 <c:ptCount val="6"/>
                 <c:lvl>
                   <c:pt idx="0">
+                    <c:v>Instrum. y Control</c:v>
+                  </c:pt>
+                  <c:pt idx="1">
                     <c:v>Eléctrica</c:v>
                   </c:pt>
-                  <c:pt idx="1">
+                  <c:pt idx="2">
                     <c:v>Piping</c:v>
-                  </c:pt>
-                  <c:pt idx="2">
-                    <c:v>Instrum. y Control</c:v>
                   </c:pt>
                   <c:pt idx="3">
                     <c:v>Mecánica</c:v>
                   </c:pt>
                   <c:pt idx="4">
-                    <c:v>Obras Civiles</c:v>
+                    <c:v>Estructura</c:v>
                   </c:pt>
                   <c:pt idx="5">
-                    <c:v>Estructura</c:v>
+                    <c:v>Obras Civiles</c:v>
                   </c:pt>
                 </c:lvl>
               </c:multiLvlStrCache>
@@ -4155,22 +4155,22 @@
                 <c:formatCode>General</c:formatCode>
                 <c:ptCount val="6"/>
                 <c:pt idx="0">
-                  <c:v>106</c:v>
+                  <c:v>64</c:v>
                 </c:pt>
                 <c:pt idx="1">
-                  <c:v>81</c:v>
+                  <c:v>54</c:v>
                 </c:pt>
                 <c:pt idx="2">
-                  <c:v>97</c:v>
+                  <c:v>26</c:v>
                 </c:pt>
                 <c:pt idx="3">
-                  <c:v>40</c:v>
+                  <c:v>2</c:v>
                 </c:pt>
                 <c:pt idx="4">
                   <c:v/>
                 </c:pt>
                 <c:pt idx="5">
-                  <c:v>1</c:v>
+                  <c:v/>
                 </c:pt>
               </c:numCache>
             </c:numRef>
@@ -4229,22 +4229,22 @@
                 <c:ptCount val="6"/>
                 <c:lvl>
                   <c:pt idx="0">
+                    <c:v>Instrum. y Control</c:v>
+                  </c:pt>
+                  <c:pt idx="1">
                     <c:v>Eléctrica</c:v>
                   </c:pt>
-                  <c:pt idx="1">
+                  <c:pt idx="2">
                     <c:v>Piping</c:v>
-                  </c:pt>
-                  <c:pt idx="2">
-                    <c:v>Instrum. y Control</c:v>
                   </c:pt>
                   <c:pt idx="3">
                     <c:v>Mecánica</c:v>
                   </c:pt>
                   <c:pt idx="4">
-                    <c:v>Obras Civiles</c:v>
+                    <c:v>Estructura</c:v>
                   </c:pt>
                   <c:pt idx="5">
-                    <c:v>Estructura</c:v>
+                    <c:v>Obras Civiles</c:v>
                   </c:pt>
                 </c:lvl>
               </c:multiLvlStrCache>
@@ -4257,22 +4257,22 @@
                 <c:formatCode>General</c:formatCode>
                 <c:ptCount val="6"/>
                 <c:pt idx="0">
-                  <c:v>47</c:v>
+                  <c:v>36</c:v>
                 </c:pt>
                 <c:pt idx="1">
-                  <c:v>45</c:v>
+                  <c:v>44</c:v>
                 </c:pt>
                 <c:pt idx="2">
-                  <c:v>22</c:v>
+                  <c:v>28</c:v>
                 </c:pt>
                 <c:pt idx="3">
-                  <c:v>15</c:v>
+                  <c:v>5</c:v>
                 </c:pt>
                 <c:pt idx="4">
-                  <c:v>16</c:v>
+                  <c:v>6</c:v>
                 </c:pt>
                 <c:pt idx="5">
-                  <c:v>13</c:v>
+                  <c:v>3</c:v>
                 </c:pt>
               </c:numCache>
             </c:numRef>
@@ -7141,7 +7141,7 @@
                 <a:ea typeface="Cambria" pitchFamily="34" charset="-122"/>
                 <a:cs typeface="Cambria" pitchFamily="34" charset="-120"/>
               </a:rPr>
-              <a:t>74,6%</a:t>
+              <a:t>79,3%</a:t>
             </a:r>
             <a:endParaRPr lang="en-US" sz="3400" dirty="0"/>
           </a:p>
@@ -7258,7 +7258,7 @@
                 <a:ea typeface="Calibri" pitchFamily="34" charset="-122"/>
                 <a:cs typeface="Calibri" pitchFamily="34" charset="-120"/>
               </a:rPr>
-              <a:t>Fuente: REPORTE_GERENCIAL + Listado de Puntos Punch Consolidado · Corte 13-10-2026 · Atrasos al 12-10-2026</a:t>
+              <a:t>Fuente: REPORTE_GERENCIAL + Listado de Puntos Punch Consolidado · Corte 13-10-2026 · Atrasos al 19-10-2026</a:t>
             </a:r>
             <a:endParaRPr lang="en-US" sz="850" dirty="0"/>
           </a:p>
@@ -7551,7 +7551,7 @@
                 <a:ea typeface="Calibri" pitchFamily="34" charset="-122"/>
                 <a:cs typeface="Calibri" pitchFamily="34" charset="-120"/>
               </a:rPr>
-              <a:t>Recuperar los 34 DT atrasados</a:t>
+              <a:t>Recuperar los 25 DT atrasados</a:t>
             </a:r>
             <a:endParaRPr lang="en-US" sz="1350" dirty="0"/>
           </a:p>
@@ -7593,7 +7593,7 @@
                 <a:ea typeface="Calibri" pitchFamily="34" charset="-122"/>
                 <a:cs typeface="Calibri" pitchFamily="34" charset="-120"/>
               </a:rPr>
-              <a:t>25 son P2 y 6 son P1. La mediana de atraso es de 38 días y 7 superan los 90 días.</a:t>
+              <a:t>10 son P2 y 8 son P1. La mediana de atraso es de 75 días y 6 superan los 90 días.</a:t>
             </a:r>
             <a:endParaRPr lang="en-US" sz="1100" dirty="0"/>
           </a:p>
@@ -7877,7 +7877,7 @@
                 <a:ea typeface="Calibri" pitchFamily="34" charset="-122"/>
                 <a:cs typeface="Calibri" pitchFamily="34" charset="-120"/>
               </a:rPr>
-              <a:t>De 50 DT levantados en P4 no se ha cerrado ninguno (4%). P3 tampoco despega: 31,4% de cierre.</a:t>
+              <a:t>De 50 DT levantados en P4 no se ha cerrado ninguno (4%). P3 tampoco despega: 30,5% de cierre.</a:t>
             </a:r>
             <a:endParaRPr lang="en-US" sz="1100" dirty="0"/>
           </a:p>
@@ -8019,7 +8019,7 @@
                 <a:ea typeface="Calibri" pitchFamily="34" charset="-122"/>
                 <a:cs typeface="Calibri" pitchFamily="34" charset="-120"/>
               </a:rPr>
-              <a:t>Concentra 106 de los 252 DT abiertos (42,1%), con 0 atrasados. Además hay 3 carpetas bajo 80% de avance que conviene cerrar en paralelo.</a:t>
+              <a:t>Concentra 106 de los 238 DT abiertos (44,5%), con 0 atrasados. Además hay 3 carpetas bajo 80% de avance que conviene cerrar en paralelo.</a:t>
             </a:r>
             <a:endParaRPr lang="en-US" sz="1100" dirty="0"/>
           </a:p>
@@ -8058,7 +8058,7 @@
                 <a:ea typeface="Calibri" pitchFamily="34" charset="-122"/>
                 <a:cs typeface="Calibri" pitchFamily="34" charset="-120"/>
               </a:rPr>
-              <a:t>Fuente: STATUS_SUBSISTEMAS_TALABRE + Detalle_de_Terminaciones · 218 subsistemas · 2.175 DT · Atrasos al 12-10-2026</a:t>
+              <a:t>Fuente: STATUS_SUBSISTEMAS_TALABRE + Detalle_de_Terminaciones · 218 subsistemas · 2.181 DT · Atrasos al 19-10-2026</a:t>
             </a:r>
             <a:endParaRPr lang="en-US" sz="850" dirty="0"/>
           </a:p>
@@ -8411,7 +8411,7 @@
                 <a:ea typeface="Calibri" pitchFamily="34" charset="-122"/>
                 <a:cs typeface="Calibri" pitchFamily="34" charset="-120"/>
               </a:rPr>
-              <a:t>136 subsistemas en 4 áreas (2000 · 3000 · 4000 · 8000) · 3.175 detalles de terminación levantados.</a:t>
+              <a:t>136 subsistemas en 4 áreas (2000 · 3000 · 4000 · 8000) · 3.314 detalles de terminación levantados.</a:t>
             </a:r>
             <a:endParaRPr lang="en-US" sz="1350" dirty="0"/>
           </a:p>
@@ -8704,7 +8704,7 @@
                 <a:ea typeface="Cambria" pitchFamily="34" charset="-122"/>
                 <a:cs typeface="Cambria" pitchFamily="34" charset="-120"/>
               </a:rPr>
-              <a:t>76,9%</a:t>
+              <a:t>87,7%</a:t>
             </a:r>
             <a:endParaRPr lang="en-US" sz="3400" dirty="0"/>
           </a:p>
@@ -8782,7 +8782,7 @@
                 <a:ea typeface="Calibri" pitchFamily="34" charset="-122"/>
                 <a:cs typeface="Calibri" pitchFamily="34" charset="-120"/>
               </a:rPr>
-              <a:t>Corte: 13-10-2026   ·   Corte anterior: 01-10-2026</a:t>
+              <a:t>Corte: 19-10-2026   ·   Corte anterior: 13-10-2026</a:t>
             </a:r>
             <a:endParaRPr lang="en-US" sz="1100" dirty="0"/>
           </a:p>
@@ -8821,7 +8821,7 @@
                 <a:ea typeface="Calibri" pitchFamily="34" charset="-122"/>
                 <a:cs typeface="Calibri" pitchFamily="34" charset="-120"/>
               </a:rPr>
-              <a:t>Fuente: Estatus_Resumen_General_QAQC.xlsx · Corte 13-10-2026 · Áreas 2000/3000/4000/8000</a:t>
+              <a:t>Fuente: Estatus_Resumen_General_QAQC.xlsx · Corte 19-10-2026 · Áreas 2000/3000/4000/8000</a:t>
             </a:r>
             <a:endParaRPr lang="en-US" sz="850" dirty="0"/>
           </a:p>
@@ -9447,13 +9447,13 @@
             <a:r>
               <a:rPr lang="en-US" sz="900" b="1" dirty="0">
                 <a:solidFill>
-                  <a:srgbClr val="1F7A44"/>
-                </a:solidFill>
-                <a:latin typeface="Calibri" pitchFamily="34" charset="0"/>
-                <a:ea typeface="Calibri" pitchFamily="34" charset="-122"/>
-                <a:cs typeface="Calibri" pitchFamily="34" charset="-120"/>
-              </a:rPr>
-              <a:t>▲ +29 vs. corte anterior</a:t>
+                  <a:srgbClr val="56606E"/>
+                </a:solidFill>
+                <a:latin typeface="Calibri" pitchFamily="34" charset="0"/>
+                <a:ea typeface="Calibri" pitchFamily="34" charset="-122"/>
+                <a:cs typeface="Calibri" pitchFamily="34" charset="-120"/>
+              </a:rPr>
+              <a:t>= sin cambio vs. corte anterior</a:t>
             </a:r>
             <a:endParaRPr lang="en-US" sz="900" dirty="0"/>
           </a:p>
@@ -9663,7 +9663,7 @@
                 <a:ea typeface="Calibri" pitchFamily="34" charset="-122"/>
                 <a:cs typeface="Calibri" pitchFamily="34" charset="-120"/>
               </a:rPr>
-              <a:t>0 aprobadas · 24 rechazadas · 21 en revisión · 1 observadas</a:t>
+              <a:t>0 aprobadas · 30 rechazadas · 15 en revisión · 1 observadas</a:t>
             </a:r>
             <a:endParaRPr lang="en-US" sz="950" dirty="0"/>
           </a:p>
@@ -9696,13 +9696,13 @@
             <a:r>
               <a:rPr lang="en-US" sz="900" b="1" dirty="0">
                 <a:solidFill>
-                  <a:srgbClr val="1F7A44"/>
-                </a:solidFill>
-                <a:latin typeface="Calibri" pitchFamily="34" charset="0"/>
-                <a:ea typeface="Calibri" pitchFamily="34" charset="-122"/>
-                <a:cs typeface="Calibri" pitchFamily="34" charset="-120"/>
-              </a:rPr>
-              <a:t>▲ +6 vs. corte anterior</a:t>
+                  <a:srgbClr val="56606E"/>
+                </a:solidFill>
+                <a:latin typeface="Calibri" pitchFamily="34" charset="0"/>
+                <a:ea typeface="Calibri" pitchFamily="34" charset="-122"/>
+                <a:cs typeface="Calibri" pitchFamily="34" charset="-120"/>
+              </a:rPr>
+              <a:t>= sin cambio vs. corte anterior</a:t>
             </a:r>
             <a:endParaRPr lang="en-US" sz="900" dirty="0"/>
           </a:p>
@@ -9795,7 +9795,7 @@
                 <a:ea typeface="Cambria" pitchFamily="34" charset="-122"/>
                 <a:cs typeface="Cambria" pitchFamily="34" charset="-120"/>
               </a:rPr>
-              <a:t>76,9%</a:t>
+              <a:t>87,7%</a:t>
             </a:r>
             <a:endParaRPr lang="en-US" sz="4000" dirty="0"/>
           </a:p>
@@ -9834,7 +9834,7 @@
                 <a:ea typeface="Calibri" pitchFamily="34" charset="-122"/>
                 <a:cs typeface="Calibri" pitchFamily="34" charset="-120"/>
               </a:rPr>
-              <a:t>1.611/2.094</a:t>
+              <a:t>1.914/2.182</a:t>
             </a:r>
             <a:endParaRPr lang="en-US" sz="1400" dirty="0"/>
           </a:p>
@@ -9912,7 +9912,7 @@
                 <a:ea typeface="Calibri" pitchFamily="34" charset="-122"/>
                 <a:cs typeface="Calibri" pitchFamily="34" charset="-120"/>
               </a:rPr>
-              <a:t>483 abiertos · 325 vencidos</a:t>
+              <a:t>268 abiertos · 146 vencidos</a:t>
             </a:r>
             <a:endParaRPr lang="en-US" sz="950" dirty="0"/>
           </a:p>
@@ -9951,7 +9951,7 @@
                 <a:ea typeface="Calibri" pitchFamily="34" charset="-122"/>
                 <a:cs typeface="Calibri" pitchFamily="34" charset="-120"/>
               </a:rPr>
-              <a:t>▲ +137 vs. corte anterior</a:t>
+              <a:t>▲ +303 vs. corte anterior</a:t>
             </a:r>
             <a:endParaRPr lang="en-US" sz="900" dirty="0"/>
           </a:p>
@@ -10153,7 +10153,7 @@
                 <a:ea typeface="Calibri" pitchFamily="34" charset="-122"/>
                 <a:cs typeface="Calibri" pitchFamily="34" charset="-120"/>
               </a:rPr>
-              <a:t>Las carpetas TOP siguen sin aprobaciones.  </a:t>
+              <a:t>Las carpetas TOP siguen sin aprobaciones y suben los rechazos.  </a:t>
             </a:r>
             <a:pPr indent="0" marL="0">
               <a:lnSpc>
@@ -10170,7 +10170,7 @@
                 <a:ea typeface="Calibri" pitchFamily="34" charset="-122"/>
                 <a:cs typeface="Calibri" pitchFamily="34" charset="-120"/>
               </a:rPr>
-              <a:t>46 entregadas de 136 (33,8%) y 0 aprobadas; 24 rechazadas.</a:t>
+              <a:t>46 entregadas de 136 (33,8%) y 0 aprobadas; las rechazadas pasaron de 24 a 30.</a:t>
             </a:r>
             <a:endParaRPr lang="en-US" sz="1250" dirty="0"/>
           </a:p>
@@ -10249,7 +10249,7 @@
                 <a:ea typeface="Calibri" pitchFamily="34" charset="-122"/>
                 <a:cs typeface="Calibri" pitchFamily="34" charset="-120"/>
               </a:rPr>
-              <a:t>+137 P1 cerrado desde el corte anterior; 483 abiertos, de los cuales 325 superaron su fecha de vencimiento. El área 3000 concentra 440 (91,1%).</a:t>
+              <a:t>+303 P1 cerrado desde el corte anterior; 268 abiertos, de los cuales 146 superaron su fecha de vencimiento. El área 3000 concentra 260 (97%).</a:t>
             </a:r>
             <a:endParaRPr lang="en-US" sz="1250" dirty="0"/>
           </a:p>
@@ -10288,7 +10288,7 @@
                 <a:ea typeface="Calibri" pitchFamily="34" charset="-122"/>
                 <a:cs typeface="Calibri" pitchFamily="34" charset="-120"/>
               </a:rPr>
-              <a:t>Fuente: Estatus_Resumen_General_QAQC.xlsx · Corte 13-10-2026 · Áreas 2000/3000/4000/8000</a:t>
+              <a:t>Fuente: Estatus_Resumen_General_QAQC.xlsx · Corte 19-10-2026 · Áreas 2000/3000/4000/8000</a:t>
             </a:r>
             <a:endParaRPr lang="en-US" sz="850" dirty="0"/>
           </a:p>
@@ -11407,7 +11407,7 @@
                 <a:ea typeface="Calibri" pitchFamily="34" charset="-122"/>
                 <a:cs typeface="Calibri" pitchFamily="34" charset="-120"/>
               </a:rPr>
-              <a:t>61,4%</a:t>
+              <a:t>78,8%</a:t>
             </a:r>
             <a:endParaRPr lang="en-US" sz="1300" dirty="0"/>
           </a:p>
@@ -11446,7 +11446,7 @@
                 <a:ea typeface="Calibri" pitchFamily="34" charset="-122"/>
                 <a:cs typeface="Calibri" pitchFamily="34" charset="-120"/>
               </a:rPr>
-              <a:t>440 (301)</a:t>
+              <a:t>260 (140)</a:t>
             </a:r>
             <a:endParaRPr lang="en-US" sz="1300" dirty="0"/>
           </a:p>
@@ -11764,7 +11764,7 @@
                 <a:ea typeface="Calibri" pitchFamily="34" charset="-122"/>
                 <a:cs typeface="Calibri" pitchFamily="34" charset="-120"/>
               </a:rPr>
-              <a:t>88,8%</a:t>
+              <a:t>97,8%</a:t>
             </a:r>
             <a:endParaRPr lang="en-US" sz="1300" dirty="0"/>
           </a:p>
@@ -11803,7 +11803,7 @@
                 <a:ea typeface="Calibri" pitchFamily="34" charset="-122"/>
                 <a:cs typeface="Calibri" pitchFamily="34" charset="-120"/>
               </a:rPr>
-              <a:t>41 (22)</a:t>
+              <a:t>8 (6)</a:t>
             </a:r>
             <a:endParaRPr lang="en-US" sz="1300" dirty="0"/>
           </a:p>
@@ -11826,7 +11826,7 @@
             </a:avLst>
           </a:prstGeom>
           <a:solidFill>
-            <a:srgbClr val="E0A32E"/>
+            <a:srgbClr val="2E9E5B"/>
           </a:solidFill>
           <a:ln/>
         </p:spPr>
@@ -11864,7 +11864,7 @@
                 <a:ea typeface="Calibri" pitchFamily="34" charset="-122"/>
                 <a:cs typeface="Calibri" pitchFamily="34" charset="-120"/>
               </a:rPr>
-              <a:t>Atención</a:t>
+              <a:t>Al día</a:t>
             </a:r>
             <a:endParaRPr lang="en-US" sz="1050" dirty="0"/>
           </a:p>
@@ -12141,7 +12141,7 @@
                 <a:ea typeface="Calibri" pitchFamily="34" charset="-122"/>
                 <a:cs typeface="Calibri" pitchFamily="34" charset="-120"/>
               </a:rPr>
-              <a:t>85,7%</a:t>
+              <a:t>100%</a:t>
             </a:r>
             <a:endParaRPr lang="en-US" sz="1300" dirty="0"/>
           </a:p>
@@ -12180,7 +12180,7 @@
                 <a:ea typeface="Calibri" pitchFamily="34" charset="-122"/>
                 <a:cs typeface="Calibri" pitchFamily="34" charset="-120"/>
               </a:rPr>
-              <a:t>2 (2)</a:t>
+              <a:t>0 (0)</a:t>
             </a:r>
             <a:endParaRPr lang="en-US" sz="1300" dirty="0"/>
           </a:p>
@@ -12203,7 +12203,7 @@
             </a:avLst>
           </a:prstGeom>
           <a:solidFill>
-            <a:srgbClr val="E0A32E"/>
+            <a:srgbClr val="2E9E5B"/>
           </a:solidFill>
           <a:ln/>
         </p:spPr>
@@ -12241,7 +12241,7 @@
                 <a:ea typeface="Calibri" pitchFamily="34" charset="-122"/>
                 <a:cs typeface="Calibri" pitchFamily="34" charset="-120"/>
               </a:rPr>
-              <a:t>Atención</a:t>
+              <a:t>Al día</a:t>
             </a:r>
             <a:endParaRPr lang="en-US" sz="1050" dirty="0"/>
           </a:p>
@@ -12342,7 +12342,7 @@
                 <a:ea typeface="Calibri" pitchFamily="34" charset="-122"/>
                 <a:cs typeface="Calibri" pitchFamily="34" charset="-120"/>
               </a:rPr>
-              <a:t>Fuente: Estatus_Resumen_General_QAQC.xlsx · Corte 13-10-2026 · Áreas 2000/3000/4000/8000</a:t>
+              <a:t>Fuente: Estatus_Resumen_General_QAQC.xlsx · Corte 19-10-2026 · Áreas 2000/3000/4000/8000</a:t>
             </a:r>
             <a:endParaRPr lang="en-US" sz="850" dirty="0"/>
           </a:p>
@@ -12986,7 +12986,7 @@
                 <a:ea typeface="Calibri" pitchFamily="34" charset="-122"/>
                 <a:cs typeface="Calibri" pitchFamily="34" charset="-120"/>
               </a:rPr>
-              <a:t>Fuente: Estatus_Resumen_General_QAQC.xlsx · Corte 13-10-2026 · Áreas 2000/3000/4000/8000</a:t>
+              <a:t>Fuente: Estatus_Resumen_General_QAQC.xlsx · Corte 19-10-2026 · Áreas 2000/3000/4000/8000</a:t>
             </a:r>
             <a:endParaRPr lang="en-US" sz="850" dirty="0"/>
           </a:p>
@@ -13237,7 +13237,7 @@
                 <a:ea typeface="Calibri" pitchFamily="34" charset="-122"/>
                 <a:cs typeface="Calibri" pitchFamily="34" charset="-120"/>
               </a:rPr>
-              <a:t>46 carpetas entregadas de 136 (33,8%). Ninguna aprobada aún: el flujo se acumula en revisión y hay 24 rechazos que requieren rearmado.</a:t>
+              <a:t>46 carpetas entregadas de 136 (33,8%). Ninguna aprobada aún: el flujo se acumula en revisión y hay 30 rechazos que requieren rearmado.</a:t>
             </a:r>
             <a:endParaRPr lang="en-US" sz="1350" dirty="0"/>
           </a:p>
@@ -13414,45 +13414,6 @@
         </p:nvSpPr>
         <p:spPr>
           <a:xfrm>
-            <a:off x="9509760" y="2450592"/>
-            <a:ext cx="914400" cy="566928"/>
-          </a:xfrm>
-          <a:prstGeom prst="rect">
-            <a:avLst/>
-          </a:prstGeom>
-          <a:noFill/>
-          <a:ln/>
-        </p:spPr>
-        <p:txBody>
-          <a:bodyPr wrap="square" lIns="0" tIns="0" rIns="0" bIns="0" rtlCol="0" anchor="ctr"/>
-          <a:lstStyle/>
-          <a:p>
-            <a:pPr algn="r" indent="0" marL="0">
-              <a:buNone/>
-            </a:pPr>
-            <a:r>
-              <a:rPr lang="en-US" sz="950" b="1" dirty="0">
-                <a:solidFill>
-                  <a:srgbClr val="1F7A44"/>
-                </a:solidFill>
-                <a:latin typeface="Calibri" pitchFamily="34" charset="0"/>
-                <a:ea typeface="Calibri" pitchFamily="34" charset="-122"/>
-                <a:cs typeface="Calibri" pitchFamily="34" charset="-120"/>
-              </a:rPr>
-              <a:t>▲ +6</a:t>
-            </a:r>
-            <a:endParaRPr lang="en-US" sz="950" dirty="0"/>
-          </a:p>
-        </p:txBody>
-      </p:sp>
-      <p:sp>
-        <p:nvSpPr>
-          <p:cNvPr id="13" name="Text 9"/>
-          <p:cNvSpPr/>
-          <p:nvPr/>
-        </p:nvSpPr>
-        <p:spPr>
-          <a:xfrm>
             <a:off x="10469880" y="2450592"/>
             <a:ext cx="868680" cy="566928"/>
           </a:xfrm>
@@ -13486,7 +13447,7 @@
       </p:sp>
       <p:sp>
         <p:nvSpPr>
-          <p:cNvPr id="14" name="Shape 10"/>
+          <p:cNvPr id="13" name="Shape 9"/>
           <p:cNvSpPr/>
           <p:nvPr/>
         </p:nvSpPr>
@@ -13508,7 +13469,7 @@
       </p:sp>
       <p:sp>
         <p:nvSpPr>
-          <p:cNvPr id="15" name="Shape 11"/>
+          <p:cNvPr id="14" name="Shape 10"/>
           <p:cNvSpPr/>
           <p:nvPr/>
         </p:nvSpPr>
@@ -13528,7 +13489,7 @@
       </p:sp>
       <p:sp>
         <p:nvSpPr>
-          <p:cNvPr id="16" name="Text 12"/>
+          <p:cNvPr id="15" name="Text 11"/>
           <p:cNvSpPr/>
           <p:nvPr/>
         </p:nvSpPr>
@@ -13567,7 +13528,7 @@
       </p:sp>
       <p:sp>
         <p:nvSpPr>
-          <p:cNvPr id="17" name="Text 13"/>
+          <p:cNvPr id="16" name="Text 12"/>
           <p:cNvSpPr/>
           <p:nvPr/>
         </p:nvSpPr>
@@ -13592,13 +13553,13 @@
             <a:r>
               <a:rPr lang="en-US" sz="950" b="1" dirty="0">
                 <a:solidFill>
-                  <a:srgbClr val="1F7A44"/>
-                </a:solidFill>
-                <a:latin typeface="Calibri" pitchFamily="34" charset="0"/>
-                <a:ea typeface="Calibri" pitchFamily="34" charset="-122"/>
-                <a:cs typeface="Calibri" pitchFamily="34" charset="-120"/>
-              </a:rPr>
-              <a:t>▲ +6</a:t>
+                  <a:srgbClr val="C0392B"/>
+                </a:solidFill>
+                <a:latin typeface="Calibri" pitchFamily="34" charset="0"/>
+                <a:ea typeface="Calibri" pitchFamily="34" charset="-122"/>
+                <a:cs typeface="Calibri" pitchFamily="34" charset="-120"/>
+              </a:rPr>
+              <a:t>▼ -6</a:t>
             </a:r>
             <a:endParaRPr lang="en-US" sz="950" dirty="0"/>
           </a:p>
@@ -13606,7 +13567,7 @@
       </p:sp>
       <p:sp>
         <p:nvSpPr>
-          <p:cNvPr id="18" name="Text 14"/>
+          <p:cNvPr id="17" name="Text 13"/>
           <p:cNvSpPr/>
           <p:nvPr/>
         </p:nvSpPr>
@@ -13637,7 +13598,7 @@
                 <a:ea typeface="Cambria" pitchFamily="34" charset="-122"/>
                 <a:cs typeface="Cambria" pitchFamily="34" charset="-120"/>
               </a:rPr>
-              <a:t>21</a:t>
+              <a:t>15</a:t>
             </a:r>
             <a:endParaRPr lang="en-US" sz="2200" dirty="0"/>
           </a:p>
@@ -13645,7 +13606,7 @@
       </p:sp>
       <p:sp>
         <p:nvSpPr>
-          <p:cNvPr id="19" name="Shape 15"/>
+          <p:cNvPr id="18" name="Shape 14"/>
           <p:cNvSpPr/>
           <p:nvPr/>
         </p:nvSpPr>
@@ -13667,7 +13628,7 @@
       </p:sp>
       <p:sp>
         <p:nvSpPr>
-          <p:cNvPr id="20" name="Shape 16"/>
+          <p:cNvPr id="19" name="Shape 15"/>
           <p:cNvSpPr/>
           <p:nvPr/>
         </p:nvSpPr>
@@ -13687,7 +13648,7 @@
       </p:sp>
       <p:sp>
         <p:nvSpPr>
-          <p:cNvPr id="21" name="Text 17"/>
+          <p:cNvPr id="20" name="Text 16"/>
           <p:cNvSpPr/>
           <p:nvPr/>
         </p:nvSpPr>
@@ -13726,7 +13687,7 @@
       </p:sp>
       <p:sp>
         <p:nvSpPr>
-          <p:cNvPr id="22" name="Text 18"/>
+          <p:cNvPr id="21" name="Text 17"/>
           <p:cNvSpPr/>
           <p:nvPr/>
         </p:nvSpPr>
@@ -13765,7 +13726,7 @@
       </p:sp>
       <p:sp>
         <p:nvSpPr>
-          <p:cNvPr id="23" name="Shape 19"/>
+          <p:cNvPr id="22" name="Shape 18"/>
           <p:cNvSpPr/>
           <p:nvPr/>
         </p:nvSpPr>
@@ -13787,7 +13748,7 @@
       </p:sp>
       <p:sp>
         <p:nvSpPr>
-          <p:cNvPr id="24" name="Shape 20"/>
+          <p:cNvPr id="23" name="Shape 19"/>
           <p:cNvSpPr/>
           <p:nvPr/>
         </p:nvSpPr>
@@ -13807,7 +13768,7 @@
       </p:sp>
       <p:sp>
         <p:nvSpPr>
-          <p:cNvPr id="25" name="Text 21"/>
+          <p:cNvPr id="24" name="Text 20"/>
           <p:cNvSpPr/>
           <p:nvPr/>
         </p:nvSpPr>
@@ -13841,6 +13802,45 @@
               <a:t>Rechazadas</a:t>
             </a:r>
             <a:endParaRPr lang="en-US" sz="1250" dirty="0"/>
+          </a:p>
+        </p:txBody>
+      </p:sp>
+      <p:sp>
+        <p:nvSpPr>
+          <p:cNvPr id="25" name="Text 21"/>
+          <p:cNvSpPr/>
+          <p:nvPr/>
+        </p:nvSpPr>
+        <p:spPr>
+          <a:xfrm>
+            <a:off x="9509760" y="4315968"/>
+            <a:ext cx="914400" cy="566928"/>
+          </a:xfrm>
+          <a:prstGeom prst="rect">
+            <a:avLst/>
+          </a:prstGeom>
+          <a:noFill/>
+          <a:ln/>
+        </p:spPr>
+        <p:txBody>
+          <a:bodyPr wrap="square" lIns="0" tIns="0" rIns="0" bIns="0" rtlCol="0" anchor="ctr"/>
+          <a:lstStyle/>
+          <a:p>
+            <a:pPr algn="r" indent="0" marL="0">
+              <a:buNone/>
+            </a:pPr>
+            <a:r>
+              <a:rPr lang="en-US" sz="950" b="1" dirty="0">
+                <a:solidFill>
+                  <a:srgbClr val="C0392B"/>
+                </a:solidFill>
+                <a:latin typeface="Calibri" pitchFamily="34" charset="0"/>
+                <a:ea typeface="Calibri" pitchFamily="34" charset="-122"/>
+                <a:cs typeface="Calibri" pitchFamily="34" charset="-120"/>
+              </a:rPr>
+              <a:t>▲ +6</a:t>
+            </a:r>
+            <a:endParaRPr lang="en-US" sz="950" dirty="0"/>
           </a:p>
         </p:txBody>
       </p:sp>
@@ -13877,7 +13877,7 @@
                 <a:ea typeface="Cambria" pitchFamily="34" charset="-122"/>
                 <a:cs typeface="Cambria" pitchFamily="34" charset="-120"/>
               </a:rPr>
-              <a:t>24</a:t>
+              <a:t>30</a:t>
             </a:r>
             <a:endParaRPr lang="en-US" sz="2200" dirty="0"/>
           </a:p>
@@ -14075,7 +14075,7 @@
                 <a:ea typeface="Calibri" pitchFamily="34" charset="-122"/>
                 <a:cs typeface="Calibri" pitchFamily="34" charset="-120"/>
               </a:rPr>
-              <a:t>Fuente: Estatus_Resumen_General_QAQC.xlsx · Corte 13-10-2026 · Áreas 2000/3000/4000/8000</a:t>
+              <a:t>Fuente: Estatus_Resumen_General_QAQC.xlsx · Corte 19-10-2026 · Áreas 2000/3000/4000/8000</a:t>
             </a:r>
             <a:endParaRPr lang="en-US" sz="850" dirty="0"/>
           </a:p>
@@ -14326,7 +14326,7 @@
                 <a:ea typeface="Calibri" pitchFamily="34" charset="-122"/>
                 <a:cs typeface="Calibri" pitchFamily="34" charset="-120"/>
               </a:rPr>
-              <a:t>2.094 P1 levantados; 76,9% cerrados. El pendiente se concentra en Eléctrica, Piping, Instrumentación y Control, y físicamente en el área 3000.</a:t>
+              <a:t>2.182 P1 levantados; 87,7% cerrados. El pendiente se concentra en Instrumentación y Control, Eléctrica, Piping, y físicamente en el área 3000.</a:t>
             </a:r>
             <a:endParaRPr lang="en-US" sz="1350" dirty="0"/>
           </a:p>
@@ -14458,7 +14458,7 @@
                 <a:ea typeface="Cambria" pitchFamily="34" charset="-122"/>
                 <a:cs typeface="Cambria" pitchFamily="34" charset="-120"/>
               </a:rPr>
-              <a:t>76,9%</a:t>
+              <a:t>87,7%</a:t>
             </a:r>
             <a:endParaRPr lang="en-US" sz="1900" dirty="0"/>
           </a:p>
@@ -14573,7 +14573,7 @@
                 <a:ea typeface="Calibri" pitchFamily="34" charset="-122"/>
                 <a:cs typeface="Calibri" pitchFamily="34" charset="-120"/>
               </a:rPr>
-              <a:t>1.611</a:t>
+              <a:t>1.914</a:t>
             </a:r>
             <a:endParaRPr lang="en-US" sz="1100" dirty="0"/>
           </a:p>
@@ -14671,7 +14671,7 @@
                 <a:ea typeface="Calibri" pitchFamily="34" charset="-122"/>
                 <a:cs typeface="Calibri" pitchFamily="34" charset="-120"/>
               </a:rPr>
-              <a:t>483</a:t>
+              <a:t>268</a:t>
             </a:r>
             <a:endParaRPr lang="en-US" sz="1100" dirty="0"/>
           </a:p>
@@ -14852,7 +14852,7 @@
                 <a:ea typeface="Calibri" pitchFamily="34" charset="-122"/>
                 <a:cs typeface="Calibri" pitchFamily="34" charset="-120"/>
               </a:rPr>
-              <a:t>440 de 483 P1 abiertos (91,1%) están en el área 3000. Áreas 2000 sobre 90% de cierre.</a:t>
+              <a:t>260 de 268 P1 abiertos (97%) están en el área 3000. Áreas 2000 y 4000 y 8000 sobre 90% de cierre.</a:t>
             </a:r>
             <a:endParaRPr lang="en-US" sz="1150" dirty="0"/>
           </a:p>
@@ -14891,7 +14891,7 @@
                 <a:ea typeface="Calibri" pitchFamily="34" charset="-122"/>
                 <a:cs typeface="Calibri" pitchFamily="34" charset="-120"/>
               </a:rPr>
-              <a:t>Fuente: Estatus_Resumen_General_QAQC.xlsx · Corte 13-10-2026 · Áreas 2000/3000/4000/8000</a:t>
+              <a:t>Fuente: Estatus_Resumen_General_QAQC.xlsx · Corte 19-10-2026 · Áreas 2000/3000/4000/8000</a:t>
             </a:r>
             <a:endParaRPr lang="en-US" sz="850" dirty="0"/>
           </a:p>
@@ -15265,7 +15265,7 @@
                 <a:ea typeface="Calibri" pitchFamily="34" charset="-122"/>
                 <a:cs typeface="Calibri" pitchFamily="34" charset="-120"/>
               </a:rPr>
-              <a:t>0 aprobadas de 136. Priorizar el cierre de las 21 en revisión y el rearmado de las 24 rechazadas para convertir entregas en aprobaciones.</a:t>
+              <a:t>0 aprobadas de 136. Priorizar el cierre de las 15 en revisión y el rearmado de las 30 rechazadas para convertir entregas en aprobaciones.</a:t>
             </a:r>
             <a:endParaRPr lang="en-US" sz="1150" dirty="0"/>
           </a:p>
@@ -15407,7 +15407,7 @@
                 <a:ea typeface="Calibri" pitchFamily="34" charset="-122"/>
                 <a:cs typeface="Calibri" pitchFamily="34" charset="-120"/>
               </a:rPr>
-              <a:t>440 P1 abiertos (91,1% del total) y 0 caminatas 100% pendientes. Es la ruta crítica: sin esta área no mejora ningún indicador global.</a:t>
+              <a:t>260 P1 abiertos (97% del total) y 0 caminatas 100% pendientes. Es la ruta crítica: sin esta área no mejora ningún indicador global.</a:t>
             </a:r>
             <a:endParaRPr lang="en-US" sz="1150" dirty="0"/>
           </a:p>
@@ -15507,7 +15507,7 @@
                 <a:ea typeface="Calibri" pitchFamily="34" charset="-122"/>
                 <a:cs typeface="Calibri" pitchFamily="34" charset="-120"/>
               </a:rPr>
-              <a:t>Recuperar los 325 P1 vencidos</a:t>
+              <a:t>Recuperar los 146 P1 vencidos</a:t>
             </a:r>
             <a:endParaRPr lang="en-US" sz="1500" dirty="0"/>
           </a:p>
@@ -15549,7 +15549,7 @@
                 <a:ea typeface="Calibri" pitchFamily="34" charset="-122"/>
                 <a:cs typeface="Calibri" pitchFamily="34" charset="-120"/>
               </a:rPr>
-              <a:t>67,3% de los P1 abiertos superó su fecha de vencimiento. Foco en Eléctrica (106), Instrumentación y Control (97), Piping (81).</a:t>
+              <a:t>54,5% de los P1 abiertos superó su fecha de vencimiento. Foco en Instrumentación y Control (64), Eléctrica (54), Piping (26).</a:t>
             </a:r>
             <a:endParaRPr lang="en-US" sz="1150" dirty="0"/>
           </a:p>
@@ -15730,7 +15730,7 @@
                 <a:ea typeface="Calibri" pitchFamily="34" charset="-122"/>
                 <a:cs typeface="Calibri" pitchFamily="34" charset="-120"/>
               </a:rPr>
-              <a:t>Fuente: Estatus_Resumen_General_QAQC.xlsx · Corte 13-10-2026 · Áreas 2000/3000/4000/8000</a:t>
+              <a:t>Fuente: Estatus_Resumen_General_QAQC.xlsx · Corte 19-10-2026 · Áreas 2000/3000/4000/8000</a:t>
             </a:r>
             <a:endParaRPr lang="en-US" sz="850" dirty="0"/>
           </a:p>
@@ -16674,7 +16674,7 @@
                 <a:ea typeface="Cambria" pitchFamily="34" charset="-122"/>
                 <a:cs typeface="Cambria" pitchFamily="34" charset="-120"/>
               </a:rPr>
-              <a:t>74,6%</a:t>
+              <a:t>79,3%</a:t>
             </a:r>
             <a:endParaRPr lang="en-US" sz="3800" dirty="0"/>
           </a:p>
@@ -16713,7 +16713,7 @@
                 <a:ea typeface="Calibri" pitchFamily="34" charset="-122"/>
                 <a:cs typeface="Calibri" pitchFamily="34" charset="-120"/>
               </a:rPr>
-              <a:t>1.224/1.640</a:t>
+              <a:t>1.341/1.692</a:t>
             </a:r>
             <a:endParaRPr lang="en-US" sz="1400" dirty="0"/>
           </a:p>
@@ -16794,7 +16794,7 @@
                 <a:ea typeface="Calibri" pitchFamily="34" charset="-122"/>
                 <a:cs typeface="Calibri" pitchFamily="34" charset="-120"/>
               </a:rPr>
-              <a:t>416 abiertos · 260 atrasados</a:t>
+              <a:t>351 abiertos · 222 atrasados</a:t>
             </a:r>
             <a:endParaRPr lang="en-US" sz="950" dirty="0"/>
           </a:p>
@@ -16934,7 +16934,7 @@
                 <a:ea typeface="Calibri" pitchFamily="34" charset="-122"/>
                 <a:cs typeface="Calibri" pitchFamily="34" charset="-120"/>
               </a:rPr>
-              <a:t>1.925 de 2.605 ítems cerrados (73,9%); de los 680 abiertos, 440 ya pasaron su fecha requerida de cierre (64,7%).</a:t>
+              <a:t>2.114 de 2.715 ítems cerrados (77,9%); de los 601 abiertos, 385 ya pasaron su fecha requerida de cierre (64,1%).</a:t>
             </a:r>
             <a:endParaRPr lang="en-US" sz="1150" dirty="0"/>
           </a:p>
@@ -17171,7 +17171,7 @@
                 <a:ea typeface="Calibri" pitchFamily="34" charset="-122"/>
                 <a:cs typeface="Calibri" pitchFamily="34" charset="-120"/>
               </a:rPr>
-              <a:t>203 de los 416 P1 abiertos (48,8%), con 110 atrasados.</a:t>
+              <a:t>174 de los 351 P1 abiertos (49,6%), con 104 atrasados.</a:t>
             </a:r>
             <a:endParaRPr lang="en-US" sz="1150" dirty="0"/>
           </a:p>
@@ -17210,7 +17210,7 @@
                 <a:ea typeface="Calibri" pitchFamily="34" charset="-122"/>
                 <a:cs typeface="Calibri" pitchFamily="34" charset="-120"/>
               </a:rPr>
-              <a:t>Fuente: REPORTE_GERENCIAL + Listado de Puntos Punch Consolidado · Corte 13-10-2026 · Atrasos al 12-10-2026</a:t>
+              <a:t>Fuente: REPORTE_GERENCIAL + Listado de Puntos Punch Consolidado · Corte 13-10-2026 · Atrasos al 19-10-2026</a:t>
             </a:r>
             <a:endParaRPr lang="en-US" sz="850" dirty="0"/>
           </a:p>
@@ -18419,7 +18419,7 @@
                 <a:ea typeface="Calibri" pitchFamily="34" charset="-122"/>
                 <a:cs typeface="Calibri" pitchFamily="34" charset="-120"/>
               </a:rPr>
-              <a:t>Fuente: REPORTE_GERENCIAL + Listado de Puntos Punch Consolidado · Corte 13-10-2026 · Atrasos al 12-10-2026</a:t>
+              <a:t>Fuente: REPORTE_GERENCIAL + Listado de Puntos Punch Consolidado · Corte 13-10-2026 · Atrasos al 19-10-2026</a:t>
             </a:r>
             <a:endParaRPr lang="en-US" sz="850" dirty="0"/>
           </a:p>
@@ -18670,7 +18670,7 @@
                 <a:ea typeface="Calibri" pitchFamily="34" charset="-122"/>
                 <a:cs typeface="Calibri" pitchFamily="34" charset="-120"/>
               </a:rPr>
-              <a:t>1.640 P1 levantados; 74,6% cerrados. Atrasado = ítem abierto cuya fecha requerida de cierre ya venció al 12-10-2026.</a:t>
+              <a:t>1.692 P1 levantados; 79,3% cerrados. Atrasado = ítem abierto cuya fecha requerida de cierre ya venció al 19-10-2026.</a:t>
             </a:r>
             <a:endParaRPr lang="en-US" sz="1350" dirty="0"/>
           </a:p>
@@ -18802,7 +18802,7 @@
                 <a:ea typeface="Cambria" pitchFamily="34" charset="-122"/>
                 <a:cs typeface="Cambria" pitchFamily="34" charset="-120"/>
               </a:rPr>
-              <a:t>74,6%</a:t>
+              <a:t>79,3%</a:t>
             </a:r>
             <a:endParaRPr lang="en-US" sz="1900" dirty="0"/>
           </a:p>
@@ -18917,7 +18917,7 @@
                 <a:ea typeface="Calibri" pitchFamily="34" charset="-122"/>
                 <a:cs typeface="Calibri" pitchFamily="34" charset="-120"/>
               </a:rPr>
-              <a:t>1.224</a:t>
+              <a:t>1.341</a:t>
             </a:r>
             <a:endParaRPr lang="en-US" sz="1100" dirty="0"/>
           </a:p>
@@ -19015,7 +19015,7 @@
                 <a:ea typeface="Calibri" pitchFamily="34" charset="-122"/>
                 <a:cs typeface="Calibri" pitchFamily="34" charset="-120"/>
               </a:rPr>
-              <a:t>260</a:t>
+              <a:t>222</a:t>
             </a:r>
             <a:endParaRPr lang="en-US" sz="1100" dirty="0"/>
           </a:p>
@@ -19113,7 +19113,7 @@
                 <a:ea typeface="Calibri" pitchFamily="34" charset="-122"/>
                 <a:cs typeface="Calibri" pitchFamily="34" charset="-120"/>
               </a:rPr>
-              <a:t>156</a:t>
+              <a:t>129</a:t>
             </a:r>
             <a:endParaRPr lang="en-US" sz="1100" dirty="0"/>
           </a:p>
@@ -19196,7 +19196,7 @@
                 <a:ea typeface="Calibri" pitchFamily="34" charset="-122"/>
                 <a:cs typeface="Calibri" pitchFamily="34" charset="-120"/>
               </a:rPr>
-              <a:t>Mediana de 12 días vencidos; el más antiguo lleva 155. 266 entre 1-30 días, 92 entre 31-90 días, 82 entre 91-180 días.</a:t>
+              <a:t>Mediana de 19 días vencidos; el más antiguo lleva 162. 212 entre 1-30 días, 96 entre 31-90 días, 77 entre 91-180 días.</a:t>
             </a:r>
             <a:endParaRPr lang="en-US" sz="1150" dirty="0"/>
           </a:p>
@@ -19235,7 +19235,7 @@
                 <a:ea typeface="Calibri" pitchFamily="34" charset="-122"/>
                 <a:cs typeface="Calibri" pitchFamily="34" charset="-120"/>
               </a:rPr>
-              <a:t>Fuente: REPORTE_GERENCIAL + Listado de Puntos Punch Consolidado · Corte 13-10-2026 · Atrasos al 12-10-2026</a:t>
+              <a:t>Fuente: REPORTE_GERENCIAL + Listado de Puntos Punch Consolidado · Corte 13-10-2026 · Atrasos al 19-10-2026</a:t>
             </a:r>
             <a:endParaRPr lang="en-US" sz="850" dirty="0"/>
           </a:p>
@@ -19567,7 +19567,7 @@
                 <a:ea typeface="Calibri" pitchFamily="34" charset="-122"/>
                 <a:cs typeface="Calibri" pitchFamily="34" charset="-120"/>
               </a:rPr>
-              <a:t>Recuperar los 440 ítems atrasados</a:t>
+              <a:t>Recuperar los 385 ítems atrasados</a:t>
             </a:r>
             <a:endParaRPr lang="en-US" sz="1400" dirty="0"/>
           </a:p>
@@ -19609,7 +19609,7 @@
                 <a:ea typeface="Calibri" pitchFamily="34" charset="-122"/>
                 <a:cs typeface="Calibri" pitchFamily="34" charset="-120"/>
               </a:rPr>
-              <a:t>64,7% de los 680 abiertos ya venció su fecha requerida. Foco en Piping (110), Eléctrica (89), Mecánica (27).</a:t>
+              <a:t>64,1% de los 601 abiertos ya venció su fecha requerida. Foco en Piping (104), Eléctrica (70), Mecánica (19).</a:t>
             </a:r>
             <a:endParaRPr lang="en-US" sz="1100" dirty="0"/>
           </a:p>
@@ -20035,7 +20035,7 @@
                 <a:ea typeface="Calibri" pitchFamily="34" charset="-122"/>
                 <a:cs typeface="Calibri" pitchFamily="34" charset="-120"/>
               </a:rPr>
-              <a:t>Concentra 367 P1 abiertos y 211 atrasados sobre 74 subsistemas. Es la ruta crítica del proyecto.</a:t>
+              <a:t>Concentra 302 P1 abiertos y 173 atrasados sobre 74 subsistemas. Es la ruta crítica del proyecto.</a:t>
             </a:r>
             <a:endParaRPr lang="en-US" sz="1100" dirty="0"/>
           </a:p>
@@ -20074,7 +20074,7 @@
                 <a:ea typeface="Calibri" pitchFamily="34" charset="-122"/>
                 <a:cs typeface="Calibri" pitchFamily="34" charset="-120"/>
               </a:rPr>
-              <a:t>Fuente: REPORTE_GERENCIAL + Listado de Puntos Punch Consolidado · Corte 13-10-2026 · Atrasos al 12-10-2026</a:t>
+              <a:t>Fuente: REPORTE_GERENCIAL + Listado de Puntos Punch Consolidado · Corte 13-10-2026 · Atrasos al 19-10-2026</a:t>
             </a:r>
             <a:endParaRPr lang="en-US" sz="850" dirty="0"/>
           </a:p>
@@ -20427,7 +20427,7 @@
                 <a:ea typeface="Calibri" pitchFamily="34" charset="-122"/>
                 <a:cs typeface="Calibri" pitchFamily="34" charset="-120"/>
               </a:rPr>
-              <a:t>Contrato 4600029355 · 218 subsistemas en 9 áreas · 2.175 detalles de terminación levantados.</a:t>
+              <a:t>Contrato 4600029355 · 218 subsistemas en 9 áreas · 2.181 detalles de terminación levantados.</a:t>
             </a:r>
             <a:endParaRPr lang="en-US" sz="1350" dirty="0"/>
           </a:p>
@@ -20700,7 +20700,7 @@
                 <a:ea typeface="Cambria" pitchFamily="34" charset="-122"/>
                 <a:cs typeface="Cambria" pitchFamily="34" charset="-120"/>
               </a:rPr>
-              <a:t>97,9%</a:t>
+              <a:t>98,9%</a:t>
             </a:r>
             <a:endParaRPr lang="en-US" sz="3400" dirty="0"/>
           </a:p>
@@ -20778,7 +20778,7 @@
                 <a:ea typeface="Calibri" pitchFamily="34" charset="-122"/>
                 <a:cs typeface="Calibri" pitchFamily="34" charset="-120"/>
               </a:rPr>
-              <a:t>Atrasos calculados al 12-10-2026</a:t>
+              <a:t>Atrasos calculados al 19-10-2026</a:t>
             </a:r>
             <a:endParaRPr lang="en-US" sz="1100" dirty="0"/>
           </a:p>
@@ -20817,7 +20817,7 @@
                 <a:ea typeface="Calibri" pitchFamily="34" charset="-122"/>
                 <a:cs typeface="Calibri" pitchFamily="34" charset="-120"/>
               </a:rPr>
-              <a:t>Fuente: STATUS_SUBSISTEMAS_TALABRE + Detalle_de_Terminaciones · 218 subsistemas · 2.175 DT · Atrasos al 12-10-2026</a:t>
+              <a:t>Fuente: STATUS_SUBSISTEMAS_TALABRE + Detalle_de_Terminaciones · 218 subsistemas · 2.181 DT · Atrasos al 19-10-2026</a:t>
             </a:r>
             <a:endParaRPr lang="en-US" sz="850" dirty="0"/>
           </a:p>
@@ -21761,7 +21761,7 @@
                 <a:ea typeface="Calibri" pitchFamily="34" charset="-122"/>
                 <a:cs typeface="Calibri" pitchFamily="34" charset="-120"/>
               </a:rPr>
-              <a:t>429/440</a:t>
+              <a:t>433/444</a:t>
             </a:r>
             <a:endParaRPr lang="en-US" sz="1300" dirty="0"/>
           </a:p>
@@ -21842,7 +21842,7 @@
                 <a:ea typeface="Calibri" pitchFamily="34" charset="-122"/>
                 <a:cs typeface="Calibri" pitchFamily="34" charset="-120"/>
               </a:rPr>
-              <a:t>11 abiertos · 6 atrasados</a:t>
+              <a:t>11 abiertos · 8 atrasados</a:t>
             </a:r>
             <a:endParaRPr lang="en-US" sz="950" dirty="0"/>
           </a:p>
@@ -21982,7 +21982,7 @@
                 <a:ea typeface="Calibri" pitchFamily="34" charset="-122"/>
                 <a:cs typeface="Calibri" pitchFamily="34" charset="-120"/>
               </a:rPr>
-              <a:t>97,5% de cierre en P1 (11 abiertos), pero 241 DT abiertos entre P2, P3 y P4 sobre un total de 252.</a:t>
+              <a:t>97,5% de cierre en P1 (11 abiertos), pero 227 DT abiertos entre P2, P3 y P4 sobre un total de 238.</a:t>
             </a:r>
             <a:endParaRPr lang="en-US" sz="1150" dirty="0"/>
           </a:p>
@@ -22061,7 +22061,7 @@
                 <a:ea typeface="Calibri" pitchFamily="34" charset="-122"/>
                 <a:cs typeface="Calibri" pitchFamily="34" charset="-120"/>
               </a:rPr>
-              <a:t>34 DT con la fecha de compromiso vencida; mediana de 38 días y el más antiguo lleva 207. Los 209 abiertos sin fecha de compromiso no se cuentan como atrasados.</a:t>
+              <a:t>25 DT con la fecha de compromiso vencida; mediana de 75 días y el más antiguo lleva 214. Los 210 abiertos sin fecha de compromiso no se cuentan como atrasados.</a:t>
             </a:r>
             <a:endParaRPr lang="en-US" sz="1150" dirty="0"/>
           </a:p>
@@ -22258,7 +22258,7 @@
                 <a:ea typeface="Calibri" pitchFamily="34" charset="-122"/>
                 <a:cs typeface="Calibri" pitchFamily="34" charset="-120"/>
               </a:rPr>
-              <a:t>Fuente: STATUS_SUBSISTEMAS_TALABRE + Detalle_de_Terminaciones · 218 subsistemas · 2.175 DT · Atrasos al 12-10-2026</a:t>
+              <a:t>Fuente: STATUS_SUBSISTEMAS_TALABRE + Detalle_de_Terminaciones · 218 subsistemas · 2.181 DT · Atrasos al 19-10-2026</a:t>
             </a:r>
             <a:endParaRPr lang="en-US" sz="850" dirty="0"/>
           </a:p>
@@ -22580,7 +22580,7 @@
                 <a:ea typeface="Calibri" pitchFamily="34" charset="-122"/>
                 <a:cs typeface="Calibri" pitchFamily="34" charset="-120"/>
               </a:rPr>
-              <a:t>Fuente: STATUS_SUBSISTEMAS_TALABRE + Detalle_de_Terminaciones · 218 subsistemas · 2.175 DT · Atrasos al 12-10-2026</a:t>
+              <a:t>Fuente: STATUS_SUBSISTEMAS_TALABRE + Detalle_de_Terminaciones · 218 subsistemas · 2.181 DT · Atrasos al 19-10-2026</a:t>
             </a:r>
             <a:endParaRPr lang="en-US" sz="850" dirty="0"/>
           </a:p>
@@ -22831,7 +22831,7 @@
                 <a:ea typeface="Calibri" pitchFamily="34" charset="-122"/>
                 <a:cs typeface="Calibri" pitchFamily="34" charset="-120"/>
               </a:rPr>
-              <a:t>2.175 DT levantados; 88,4% cerrados. Atrasado = DT abierto cuya fecha de compromiso de cierre ya venció al 12-10-2026.</a:t>
+              <a:t>2.181 DT levantados; 89,1% cerrados. Atrasado = DT abierto cuya fecha de compromiso de cierre ya venció al 19-10-2026.</a:t>
             </a:r>
             <a:endParaRPr lang="en-US" sz="1350" dirty="0"/>
           </a:p>
@@ -22986,7 +22986,7 @@
                 <a:ea typeface="Calibri" pitchFamily="34" charset="-122"/>
                 <a:cs typeface="Calibri" pitchFamily="34" charset="-120"/>
               </a:rPr>
-              <a:t>429/440</a:t>
+              <a:t>433/444</a:t>
             </a:r>
             <a:endParaRPr lang="en-US" sz="1050" dirty="0"/>
           </a:p>
@@ -23143,7 +23143,7 @@
                 <a:ea typeface="Calibri" pitchFamily="34" charset="-122"/>
                 <a:cs typeface="Calibri" pitchFamily="34" charset="-120"/>
               </a:rPr>
-              <a:t>1.408/1.437</a:t>
+              <a:t>1.425/1.435</a:t>
             </a:r>
             <a:endParaRPr lang="en-US" sz="1050" dirty="0"/>
           </a:p>
@@ -23182,7 +23182,7 @@
                 <a:ea typeface="Calibri" pitchFamily="34" charset="-122"/>
                 <a:cs typeface="Calibri" pitchFamily="34" charset="-120"/>
               </a:rPr>
-              <a:t>98%</a:t>
+              <a:t>99,3%</a:t>
             </a:r>
             <a:endParaRPr lang="en-US" sz="1100" dirty="0"/>
           </a:p>
@@ -23217,7 +23217,7 @@
         <p:spPr>
           <a:xfrm>
             <a:off x="7936992" y="3200400"/>
-            <a:ext cx="3494837" cy="118872"/>
+            <a:ext cx="3541197" cy="118872"/>
           </a:xfrm>
           <a:prstGeom prst="rect">
             <a:avLst/>
@@ -23300,7 +23300,7 @@
                 <a:ea typeface="Calibri" pitchFamily="34" charset="-122"/>
                 <a:cs typeface="Calibri" pitchFamily="34" charset="-120"/>
               </a:rPr>
-              <a:t>75/239</a:t>
+              <a:t>74/243</a:t>
             </a:r>
             <a:endParaRPr lang="en-US" sz="1050" dirty="0"/>
           </a:p>
@@ -23339,7 +23339,7 @@
                 <a:ea typeface="Calibri" pitchFamily="34" charset="-122"/>
                 <a:cs typeface="Calibri" pitchFamily="34" charset="-120"/>
               </a:rPr>
-              <a:t>31,4%</a:t>
+              <a:t>30,5%</a:t>
             </a:r>
             <a:endParaRPr lang="en-US" sz="1100" dirty="0"/>
           </a:p>
@@ -23374,7 +23374,7 @@
         <p:spPr>
           <a:xfrm>
             <a:off x="7936992" y="3712464"/>
-            <a:ext cx="1119774" cy="118872"/>
+            <a:ext cx="1087679" cy="118872"/>
           </a:xfrm>
           <a:prstGeom prst="rect">
             <a:avLst/>
@@ -23776,7 +23776,7 @@
                 <a:ea typeface="Calibri" pitchFamily="34" charset="-122"/>
                 <a:cs typeface="Calibri" pitchFamily="34" charset="-120"/>
               </a:rPr>
-              <a:t>Mediana de 38 días vencidos; el más antiguo lleva 207. 17 entre 1-30 días, 10 entre 31-90 días, 5 entre 91-180 días, 2 entre &gt;180 días.</a:t>
+              <a:t>Mediana de 75 días vencidos; el más antiguo lleva 214. 12 entre 1-30 días, 7 entre 31-90 días, 5 entre 91-180 días, 1 entre &gt;180 días.</a:t>
             </a:r>
             <a:endParaRPr lang="en-US" sz="1150" dirty="0"/>
           </a:p>
@@ -23815,7 +23815,7 @@
                 <a:ea typeface="Calibri" pitchFamily="34" charset="-122"/>
                 <a:cs typeface="Calibri" pitchFamily="34" charset="-120"/>
               </a:rPr>
-              <a:t>Fuente: STATUS_SUBSISTEMAS_TALABRE + Detalle_de_Terminaciones · 218 subsistemas · 2.175 DT · Atrasos al 12-10-2026</a:t>
+              <a:t>Fuente: STATUS_SUBSISTEMAS_TALABRE + Detalle_de_Terminaciones · 218 subsistemas · 2.181 DT · Atrasos al 19-10-2026</a:t>
             </a:r>
             <a:endParaRPr lang="en-US" sz="850" dirty="0"/>
           </a:p>

--- a/panel_control_TOP_P1/Panel_Control_TOP_P1.pptx
+++ b/panel_control_TOP_P1/Panel_Control_TOP_P1.pptx
@@ -687,10 +687,10 @@
               <c:numCache>
                 <c:ptCount val="3"/>
                 <c:pt idx="0">
-                  <c:v>1914</c:v>
+                  <c:v>2039</c:v>
                 </c:pt>
                 <c:pt idx="1">
-                  <c:v>268</c:v>
+                  <c:v>143</c:v>
                 </c:pt>
                 <c:pt idx="2">
                   <c:v>0</c:v>
@@ -850,22 +850,22 @@
                 <c:formatCode>General</c:formatCode>
                 <c:ptCount val="6"/>
                 <c:pt idx="0">
-                  <c:v>104</c:v>
+                  <c:v>103</c:v>
                 </c:pt>
                 <c:pt idx="1">
                   <c:v>70</c:v>
                 </c:pt>
                 <c:pt idx="2">
-                  <c:v>19</c:v>
+                  <c:v>13</c:v>
                 </c:pt>
                 <c:pt idx="3">
-                  <c:v>15</c:v>
+                  <c:v>14</c:v>
                 </c:pt>
                 <c:pt idx="4">
                   <c:v>6</c:v>
                 </c:pt>
                 <c:pt idx="5">
-                  <c:v>8</c:v>
+                  <c:v>6</c:v>
                 </c:pt>
               </c:numCache>
             </c:numRef>
@@ -952,16 +952,16 @@
                 <c:formatCode>General</c:formatCode>
                 <c:ptCount val="6"/>
                 <c:pt idx="0">
-                  <c:v>70</c:v>
+                  <c:v>66</c:v>
                 </c:pt>
                 <c:pt idx="1">
-                  <c:v>33</c:v>
+                  <c:v>10</c:v>
                 </c:pt>
                 <c:pt idx="2">
-                  <c:v>20</c:v>
+                  <c:v>18</c:v>
                 </c:pt>
                 <c:pt idx="3">
-                  <c:v>3</c:v>
+                  <c:v>2</c:v>
                 </c:pt>
                 <c:pt idx="4">
                   <c:v>3</c:v>
@@ -1340,13 +1340,13 @@
               <c:numCache>
                 <c:ptCount val="3"/>
                 <c:pt idx="0">
-                  <c:v>1341</c:v>
+                  <c:v>1412</c:v>
                 </c:pt>
                 <c:pt idx="1">
-                  <c:v>222</c:v>
+                  <c:v>212</c:v>
                 </c:pt>
                 <c:pt idx="2">
-                  <c:v>129</c:v>
+                  <c:v>99</c:v>
                 </c:pt>
               </c:numCache>
             </c:numRef>
@@ -3597,7 +3597,7 @@
                   <c:v/>
                 </c:pt>
                 <c:pt idx="2">
-                  <c:v>5</c:v>
+                  <c:v>8</c:v>
                 </c:pt>
                 <c:pt idx="3">
                   <c:v/>
@@ -3867,7 +3867,7 @@
                   <c:v>69</c:v>
                 </c:pt>
                 <c:pt idx="2">
-                  <c:v>15</c:v>
+                  <c:v>12</c:v>
                 </c:pt>
                 <c:pt idx="3">
                   <c:v>2</c:v>
@@ -4136,10 +4136,10 @@
                     <c:v>Piping</c:v>
                   </c:pt>
                   <c:pt idx="3">
-                    <c:v>Mecánica</c:v>
+                    <c:v>Estructura</c:v>
                   </c:pt>
                   <c:pt idx="4">
-                    <c:v>Estructura</c:v>
+                    <c:v>Mecánica</c:v>
                   </c:pt>
                   <c:pt idx="5">
                     <c:v>Obras Civiles</c:v>
@@ -4155,19 +4155,19 @@
                 <c:formatCode>General</c:formatCode>
                 <c:ptCount val="6"/>
                 <c:pt idx="0">
-                  <c:v>64</c:v>
+                  <c:v>39</c:v>
                 </c:pt>
                 <c:pt idx="1">
-                  <c:v>54</c:v>
+                  <c:v>33</c:v>
                 </c:pt>
                 <c:pt idx="2">
-                  <c:v>26</c:v>
+                  <c:v>10</c:v>
                 </c:pt>
                 <c:pt idx="3">
                   <c:v>2</c:v>
                 </c:pt>
                 <c:pt idx="4">
-                  <c:v/>
+                  <c:v>2</c:v>
                 </c:pt>
                 <c:pt idx="5">
                   <c:v/>
@@ -4238,10 +4238,10 @@
                     <c:v>Piping</c:v>
                   </c:pt>
                   <c:pt idx="3">
-                    <c:v>Mecánica</c:v>
+                    <c:v>Estructura</c:v>
                   </c:pt>
                   <c:pt idx="4">
-                    <c:v>Estructura</c:v>
+                    <c:v>Mecánica</c:v>
                   </c:pt>
                   <c:pt idx="5">
                     <c:v>Obras Civiles</c:v>
@@ -4257,19 +4257,19 @@
                 <c:formatCode>General</c:formatCode>
                 <c:ptCount val="6"/>
                 <c:pt idx="0">
-                  <c:v>36</c:v>
+                  <c:v>27</c:v>
                 </c:pt>
                 <c:pt idx="1">
-                  <c:v>44</c:v>
+                  <c:v>16</c:v>
                 </c:pt>
                 <c:pt idx="2">
-                  <c:v>28</c:v>
+                  <c:v>6</c:v>
                 </c:pt>
                 <c:pt idx="3">
-                  <c:v>5</c:v>
+                  <c:v>4</c:v>
                 </c:pt>
                 <c:pt idx="4">
-                  <c:v>6</c:v>
+                  <c:v>1</c:v>
                 </c:pt>
                 <c:pt idx="5">
                   <c:v>3</c:v>
@@ -6613,7 +6613,7 @@
       </p:grpSpPr>
       <p:pic>
         <p:nvPicPr>
-          <p:cNvPr id="2" name="Image 0" descr="/workspace/dashboard-hseq/panel_control_TOP_P1/besalco_logo.png">    </p:cNvPr>
+          <p:cNvPr id="2" name="Image 0" descr="/home/user/dashboard-hseq/panel_control_TOP_P1/besalco_logo.png">    </p:cNvPr>
           <p:cNvPicPr>
             <a:picLocks noChangeAspect="1"/>
           </p:cNvPicPr>
@@ -7063,7 +7063,7 @@
                 <a:ea typeface="Cambria" pitchFamily="34" charset="-122"/>
                 <a:cs typeface="Cambria" pitchFamily="34" charset="-120"/>
               </a:rPr>
-              <a:t>71,6%</a:t>
+              <a:t>74,7%</a:t>
             </a:r>
             <a:endParaRPr lang="en-US" sz="3400" dirty="0"/>
           </a:p>
@@ -7141,7 +7141,7 @@
                 <a:ea typeface="Cambria" pitchFamily="34" charset="-122"/>
                 <a:cs typeface="Cambria" pitchFamily="34" charset="-120"/>
               </a:rPr>
-              <a:t>79,3%</a:t>
+              <a:t>82%</a:t>
             </a:r>
             <a:endParaRPr lang="en-US" sz="3400" dirty="0"/>
           </a:p>
@@ -7219,7 +7219,7 @@
                 <a:ea typeface="Calibri" pitchFamily="34" charset="-122"/>
                 <a:cs typeface="Calibri" pitchFamily="34" charset="-120"/>
               </a:rPr>
-              <a:t>Corte: 13-10-2026</a:t>
+              <a:t>Corte: 20-10-2026</a:t>
             </a:r>
             <a:endParaRPr lang="en-US" sz="1100" dirty="0"/>
           </a:p>
@@ -7258,7 +7258,7 @@
                 <a:ea typeface="Calibri" pitchFamily="34" charset="-122"/>
                 <a:cs typeface="Calibri" pitchFamily="34" charset="-120"/>
               </a:rPr>
-              <a:t>Fuente: REPORTE_GERENCIAL + Listado de Puntos Punch Consolidado · Corte 13-10-2026 · Atrasos al 19-10-2026</a:t>
+              <a:t>Fuente: REPORTE_GERENCIAL + Listado de Puntos Punch Consolidado · Corte 20-10-2026 · Atrasos al 26-10-2026</a:t>
             </a:r>
             <a:endParaRPr lang="en-US" sz="850" dirty="0"/>
           </a:p>
@@ -7337,7 +7337,7 @@
       </p:grpSpPr>
       <p:pic>
         <p:nvPicPr>
-          <p:cNvPr id="2" name="Image 0" descr="/workspace/dashboard-hseq/panel_control_TOP_P1/besalco_logo.png">    </p:cNvPr>
+          <p:cNvPr id="2" name="Image 0" descr="/home/user/dashboard-hseq/panel_control_TOP_P1/besalco_logo.png">    </p:cNvPr>
           <p:cNvPicPr>
             <a:picLocks noChangeAspect="1"/>
           </p:cNvPicPr>
@@ -8216,7 +8216,7 @@
       </p:sp>
       <p:pic>
         <p:nvPicPr>
-          <p:cNvPr id="4" name="Image 0" descr="/workspace/dashboard-hseq/panel_control_TOP_P1/besalco_logo.png">    </p:cNvPr>
+          <p:cNvPr id="4" name="Image 0" descr="/home/user/dashboard-hseq/panel_control_TOP_P1/besalco_logo.png">    </p:cNvPr>
           <p:cNvPicPr>
             <a:picLocks noChangeAspect="1"/>
           </p:cNvPicPr>
@@ -8626,7 +8626,7 @@
                 <a:ea typeface="Cambria" pitchFamily="34" charset="-122"/>
                 <a:cs typeface="Cambria" pitchFamily="34" charset="-120"/>
               </a:rPr>
-              <a:t>33,8%</a:t>
+              <a:t>36%</a:t>
             </a:r>
             <a:endParaRPr lang="en-US" sz="3400" dirty="0"/>
           </a:p>
@@ -8704,7 +8704,7 @@
                 <a:ea typeface="Cambria" pitchFamily="34" charset="-122"/>
                 <a:cs typeface="Cambria" pitchFamily="34" charset="-120"/>
               </a:rPr>
-              <a:t>87,7%</a:t>
+              <a:t>93,4%</a:t>
             </a:r>
             <a:endParaRPr lang="en-US" sz="3400" dirty="0"/>
           </a:p>
@@ -8782,7 +8782,7 @@
                 <a:ea typeface="Calibri" pitchFamily="34" charset="-122"/>
                 <a:cs typeface="Calibri" pitchFamily="34" charset="-120"/>
               </a:rPr>
-              <a:t>Corte: 19-10-2026   ·   Corte anterior: 13-10-2026</a:t>
+              <a:t>Corte: 26-10-2026   ·   Corte anterior: 19-10-2026</a:t>
             </a:r>
             <a:endParaRPr lang="en-US" sz="1100" dirty="0"/>
           </a:p>
@@ -8821,7 +8821,7 @@
                 <a:ea typeface="Calibri" pitchFamily="34" charset="-122"/>
                 <a:cs typeface="Calibri" pitchFamily="34" charset="-120"/>
               </a:rPr>
-              <a:t>Fuente: Estatus_Resumen_General_QAQC.xlsx · Corte 19-10-2026 · Áreas 2000/3000/4000/8000</a:t>
+              <a:t>Fuente: Estatus_Resumen_General_QAQC.xlsx · Corte 26-10-2026 · Áreas 2000/3000/4000/8000</a:t>
             </a:r>
             <a:endParaRPr lang="en-US" sz="850" dirty="0"/>
           </a:p>
@@ -8900,7 +8900,7 @@
       </p:grpSpPr>
       <p:pic>
         <p:nvPicPr>
-          <p:cNvPr id="2" name="Image 0" descr="/workspace/dashboard-hseq/panel_control_TOP_P1/besalco_logo.png">    </p:cNvPr>
+          <p:cNvPr id="2" name="Image 0" descr="/home/user/dashboard-hseq/panel_control_TOP_P1/besalco_logo.png">    </p:cNvPr>
           <p:cNvPicPr>
             <a:picLocks noChangeAspect="1"/>
           </p:cNvPicPr>
@@ -9546,7 +9546,7 @@
                 <a:ea typeface="Cambria" pitchFamily="34" charset="-122"/>
                 <a:cs typeface="Cambria" pitchFamily="34" charset="-120"/>
               </a:rPr>
-              <a:t>33,8%</a:t>
+              <a:t>36%</a:t>
             </a:r>
             <a:endParaRPr lang="en-US" sz="4000" dirty="0"/>
           </a:p>
@@ -9585,7 +9585,7 @@
                 <a:ea typeface="Calibri" pitchFamily="34" charset="-122"/>
                 <a:cs typeface="Calibri" pitchFamily="34" charset="-120"/>
               </a:rPr>
-              <a:t>46/136</a:t>
+              <a:t>49/136</a:t>
             </a:r>
             <a:endParaRPr lang="en-US" sz="1400" dirty="0"/>
           </a:p>
@@ -9663,7 +9663,7 @@
                 <a:ea typeface="Calibri" pitchFamily="34" charset="-122"/>
                 <a:cs typeface="Calibri" pitchFamily="34" charset="-120"/>
               </a:rPr>
-              <a:t>0 aprobadas · 30 rechazadas · 15 en revisión · 1 observadas</a:t>
+              <a:t>0 aprobadas · 30 rechazadas · 18 en revisión · 1 observadas</a:t>
             </a:r>
             <a:endParaRPr lang="en-US" sz="950" dirty="0"/>
           </a:p>
@@ -9696,13 +9696,13 @@
             <a:r>
               <a:rPr lang="en-US" sz="900" b="1" dirty="0">
                 <a:solidFill>
-                  <a:srgbClr val="56606E"/>
-                </a:solidFill>
-                <a:latin typeface="Calibri" pitchFamily="34" charset="0"/>
-                <a:ea typeface="Calibri" pitchFamily="34" charset="-122"/>
-                <a:cs typeface="Calibri" pitchFamily="34" charset="-120"/>
-              </a:rPr>
-              <a:t>= sin cambio vs. corte anterior</a:t>
+                  <a:srgbClr val="1F7A44"/>
+                </a:solidFill>
+                <a:latin typeface="Calibri" pitchFamily="34" charset="0"/>
+                <a:ea typeface="Calibri" pitchFamily="34" charset="-122"/>
+                <a:cs typeface="Calibri" pitchFamily="34" charset="-120"/>
+              </a:rPr>
+              <a:t>▲ +3 vs. corte anterior</a:t>
             </a:r>
             <a:endParaRPr lang="en-US" sz="900" dirty="0"/>
           </a:p>
@@ -9795,7 +9795,7 @@
                 <a:ea typeface="Cambria" pitchFamily="34" charset="-122"/>
                 <a:cs typeface="Cambria" pitchFamily="34" charset="-120"/>
               </a:rPr>
-              <a:t>87,7%</a:t>
+              <a:t>93,4%</a:t>
             </a:r>
             <a:endParaRPr lang="en-US" sz="4000" dirty="0"/>
           </a:p>
@@ -9834,7 +9834,7 @@
                 <a:ea typeface="Calibri" pitchFamily="34" charset="-122"/>
                 <a:cs typeface="Calibri" pitchFamily="34" charset="-120"/>
               </a:rPr>
-              <a:t>1.914/2.182</a:t>
+              <a:t>2.039/2.182</a:t>
             </a:r>
             <a:endParaRPr lang="en-US" sz="1400" dirty="0"/>
           </a:p>
@@ -9912,7 +9912,7 @@
                 <a:ea typeface="Calibri" pitchFamily="34" charset="-122"/>
                 <a:cs typeface="Calibri" pitchFamily="34" charset="-120"/>
               </a:rPr>
-              <a:t>268 abiertos · 146 vencidos</a:t>
+              <a:t>143 abiertos · 86 vencidos</a:t>
             </a:r>
             <a:endParaRPr lang="en-US" sz="950" dirty="0"/>
           </a:p>
@@ -9951,7 +9951,7 @@
                 <a:ea typeface="Calibri" pitchFamily="34" charset="-122"/>
                 <a:cs typeface="Calibri" pitchFamily="34" charset="-120"/>
               </a:rPr>
-              <a:t>▲ +303 vs. corte anterior</a:t>
+              <a:t>▲ +125 vs. corte anterior</a:t>
             </a:r>
             <a:endParaRPr lang="en-US" sz="900" dirty="0"/>
           </a:p>
@@ -10153,7 +10153,7 @@
                 <a:ea typeface="Calibri" pitchFamily="34" charset="-122"/>
                 <a:cs typeface="Calibri" pitchFamily="34" charset="-120"/>
               </a:rPr>
-              <a:t>Las carpetas TOP siguen sin aprobaciones y suben los rechazos.  </a:t>
+              <a:t>Las carpetas TOP siguen sin aprobaciones.  </a:t>
             </a:r>
             <a:pPr indent="0" marL="0">
               <a:lnSpc>
@@ -10170,7 +10170,7 @@
                 <a:ea typeface="Calibri" pitchFamily="34" charset="-122"/>
                 <a:cs typeface="Calibri" pitchFamily="34" charset="-120"/>
               </a:rPr>
-              <a:t>46 entregadas de 136 (33,8%) y 0 aprobadas; las rechazadas pasaron de 24 a 30.</a:t>
+              <a:t>49 entregadas de 136 (36%) y 0 aprobadas; 30 rechazadas.</a:t>
             </a:r>
             <a:endParaRPr lang="en-US" sz="1250" dirty="0"/>
           </a:p>
@@ -10249,7 +10249,7 @@
                 <a:ea typeface="Calibri" pitchFamily="34" charset="-122"/>
                 <a:cs typeface="Calibri" pitchFamily="34" charset="-120"/>
               </a:rPr>
-              <a:t>+303 P1 cerrado desde el corte anterior; 268 abiertos, de los cuales 146 superaron su fecha de vencimiento. El área 3000 concentra 260 (97%).</a:t>
+              <a:t>+125 P1 cerrado desde el corte anterior; 143 abiertos, de los cuales 86 superaron su fecha de vencimiento. El área 3000 concentra 143 (100%).</a:t>
             </a:r>
             <a:endParaRPr lang="en-US" sz="1250" dirty="0"/>
           </a:p>
@@ -10288,7 +10288,7 @@
                 <a:ea typeface="Calibri" pitchFamily="34" charset="-122"/>
                 <a:cs typeface="Calibri" pitchFamily="34" charset="-120"/>
               </a:rPr>
-              <a:t>Fuente: Estatus_Resumen_General_QAQC.xlsx · Corte 19-10-2026 · Áreas 2000/3000/4000/8000</a:t>
+              <a:t>Fuente: Estatus_Resumen_General_QAQC.xlsx · Corte 26-10-2026 · Áreas 2000/3000/4000/8000</a:t>
             </a:r>
             <a:endParaRPr lang="en-US" sz="850" dirty="0"/>
           </a:p>
@@ -10406,7 +10406,7 @@
       </p:grpSpPr>
       <p:pic>
         <p:nvPicPr>
-          <p:cNvPr id="2" name="Image 0" descr="/workspace/dashboard-hseq/panel_control_TOP_P1/besalco_logo.png">    </p:cNvPr>
+          <p:cNvPr id="2" name="Image 0" descr="/home/user/dashboard-hseq/panel_control_TOP_P1/besalco_logo.png">    </p:cNvPr>
           <p:cNvPicPr>
             <a:picLocks noChangeAspect="1"/>
           </p:cNvPicPr>
@@ -11407,7 +11407,7 @@
                 <a:ea typeface="Calibri" pitchFamily="34" charset="-122"/>
                 <a:cs typeface="Calibri" pitchFamily="34" charset="-120"/>
               </a:rPr>
-              <a:t>78,8%</a:t>
+              <a:t>88,4%</a:t>
             </a:r>
             <a:endParaRPr lang="en-US" sz="1300" dirty="0"/>
           </a:p>
@@ -11446,7 +11446,7 @@
                 <a:ea typeface="Calibri" pitchFamily="34" charset="-122"/>
                 <a:cs typeface="Calibri" pitchFamily="34" charset="-120"/>
               </a:rPr>
-              <a:t>260 (140)</a:t>
+              <a:t>143 (86)</a:t>
             </a:r>
             <a:endParaRPr lang="en-US" sz="1300" dirty="0"/>
           </a:p>
@@ -11725,7 +11725,7 @@
                 <a:ea typeface="Calibri" pitchFamily="34" charset="-122"/>
                 <a:cs typeface="Calibri" pitchFamily="34" charset="-120"/>
               </a:rPr>
-              <a:t>7/22 · 31,8%</a:t>
+              <a:t>10/22 · 45,5%</a:t>
             </a:r>
             <a:endParaRPr lang="en-US" sz="1300" dirty="0"/>
           </a:p>
@@ -11764,7 +11764,7 @@
                 <a:ea typeface="Calibri" pitchFamily="34" charset="-122"/>
                 <a:cs typeface="Calibri" pitchFamily="34" charset="-120"/>
               </a:rPr>
-              <a:t>97,8%</a:t>
+              <a:t>100%</a:t>
             </a:r>
             <a:endParaRPr lang="en-US" sz="1300" dirty="0"/>
           </a:p>
@@ -11803,7 +11803,7 @@
                 <a:ea typeface="Calibri" pitchFamily="34" charset="-122"/>
                 <a:cs typeface="Calibri" pitchFamily="34" charset="-120"/>
               </a:rPr>
-              <a:t>8 (6)</a:t>
+              <a:t>0 (0)</a:t>
             </a:r>
             <a:endParaRPr lang="en-US" sz="1300" dirty="0"/>
           </a:p>
@@ -12342,7 +12342,7 @@
                 <a:ea typeface="Calibri" pitchFamily="34" charset="-122"/>
                 <a:cs typeface="Calibri" pitchFamily="34" charset="-120"/>
               </a:rPr>
-              <a:t>Fuente: Estatus_Resumen_General_QAQC.xlsx · Corte 19-10-2026 · Áreas 2000/3000/4000/8000</a:t>
+              <a:t>Fuente: Estatus_Resumen_General_QAQC.xlsx · Corte 26-10-2026 · Áreas 2000/3000/4000/8000</a:t>
             </a:r>
             <a:endParaRPr lang="en-US" sz="850" dirty="0"/>
           </a:p>
@@ -12460,7 +12460,7 @@
       </p:grpSpPr>
       <p:pic>
         <p:nvPicPr>
-          <p:cNvPr id="2" name="Image 0" descr="/workspace/dashboard-hseq/panel_control_TOP_P1/besalco_logo.png">    </p:cNvPr>
+          <p:cNvPr id="2" name="Image 0" descr="/home/user/dashboard-hseq/panel_control_TOP_P1/besalco_logo.png">    </p:cNvPr>
           <p:cNvPicPr>
             <a:picLocks noChangeAspect="1"/>
           </p:cNvPicPr>
@@ -12986,7 +12986,7 @@
                 <a:ea typeface="Calibri" pitchFamily="34" charset="-122"/>
                 <a:cs typeface="Calibri" pitchFamily="34" charset="-120"/>
               </a:rPr>
-              <a:t>Fuente: Estatus_Resumen_General_QAQC.xlsx · Corte 19-10-2026 · Áreas 2000/3000/4000/8000</a:t>
+              <a:t>Fuente: Estatus_Resumen_General_QAQC.xlsx · Corte 26-10-2026 · Áreas 2000/3000/4000/8000</a:t>
             </a:r>
             <a:endParaRPr lang="en-US" sz="850" dirty="0"/>
           </a:p>
@@ -13104,7 +13104,7 @@
       </p:grpSpPr>
       <p:pic>
         <p:nvPicPr>
-          <p:cNvPr id="2" name="Image 0" descr="/workspace/dashboard-hseq/panel_control_TOP_P1/besalco_logo.png">    </p:cNvPr>
+          <p:cNvPr id="2" name="Image 0" descr="/home/user/dashboard-hseq/panel_control_TOP_P1/besalco_logo.png">    </p:cNvPr>
           <p:cNvPicPr>
             <a:picLocks noChangeAspect="1"/>
           </p:cNvPicPr>
@@ -13237,7 +13237,7 @@
                 <a:ea typeface="Calibri" pitchFamily="34" charset="-122"/>
                 <a:cs typeface="Calibri" pitchFamily="34" charset="-120"/>
               </a:rPr>
-              <a:t>46 carpetas entregadas de 136 (33,8%). Ninguna aprobada aún: el flujo se acumula en revisión y hay 30 rechazos que requieren rearmado.</a:t>
+              <a:t>49 carpetas entregadas de 136 (36%). Ninguna aprobada aún: el flujo se acumula en revisión y hay 30 rechazos que requieren rearmado.</a:t>
             </a:r>
             <a:endParaRPr lang="en-US" sz="1350" dirty="0"/>
           </a:p>
@@ -13414,6 +13414,45 @@
         </p:nvSpPr>
         <p:spPr>
           <a:xfrm>
+            <a:off x="9509760" y="2450592"/>
+            <a:ext cx="914400" cy="566928"/>
+          </a:xfrm>
+          <a:prstGeom prst="rect">
+            <a:avLst/>
+          </a:prstGeom>
+          <a:noFill/>
+          <a:ln/>
+        </p:spPr>
+        <p:txBody>
+          <a:bodyPr wrap="square" lIns="0" tIns="0" rIns="0" bIns="0" rtlCol="0" anchor="ctr"/>
+          <a:lstStyle/>
+          <a:p>
+            <a:pPr algn="r" indent="0" marL="0">
+              <a:buNone/>
+            </a:pPr>
+            <a:r>
+              <a:rPr lang="en-US" sz="950" b="1" dirty="0">
+                <a:solidFill>
+                  <a:srgbClr val="1F7A44"/>
+                </a:solidFill>
+                <a:latin typeface="Calibri" pitchFamily="34" charset="0"/>
+                <a:ea typeface="Calibri" pitchFamily="34" charset="-122"/>
+                <a:cs typeface="Calibri" pitchFamily="34" charset="-120"/>
+              </a:rPr>
+              <a:t>▲ +3</a:t>
+            </a:r>
+            <a:endParaRPr lang="en-US" sz="950" dirty="0"/>
+          </a:p>
+        </p:txBody>
+      </p:sp>
+      <p:sp>
+        <p:nvSpPr>
+          <p:cNvPr id="13" name="Text 9"/>
+          <p:cNvSpPr/>
+          <p:nvPr/>
+        </p:nvSpPr>
+        <p:spPr>
+          <a:xfrm>
             <a:off x="10469880" y="2450592"/>
             <a:ext cx="868680" cy="566928"/>
           </a:xfrm>
@@ -13439,7 +13478,7 @@
                 <a:ea typeface="Cambria" pitchFamily="34" charset="-122"/>
                 <a:cs typeface="Cambria" pitchFamily="34" charset="-120"/>
               </a:rPr>
-              <a:t>46</a:t>
+              <a:t>49</a:t>
             </a:r>
             <a:endParaRPr lang="en-US" sz="2200" dirty="0"/>
           </a:p>
@@ -13447,7 +13486,7 @@
       </p:sp>
       <p:sp>
         <p:nvSpPr>
-          <p:cNvPr id="13" name="Shape 9"/>
+          <p:cNvPr id="14" name="Shape 10"/>
           <p:cNvSpPr/>
           <p:nvPr/>
         </p:nvSpPr>
@@ -13469,7 +13508,7 @@
       </p:sp>
       <p:sp>
         <p:nvSpPr>
-          <p:cNvPr id="14" name="Shape 10"/>
+          <p:cNvPr id="15" name="Shape 11"/>
           <p:cNvSpPr/>
           <p:nvPr/>
         </p:nvSpPr>
@@ -13489,7 +13528,7 @@
       </p:sp>
       <p:sp>
         <p:nvSpPr>
-          <p:cNvPr id="15" name="Text 11"/>
+          <p:cNvPr id="16" name="Text 12"/>
           <p:cNvSpPr/>
           <p:nvPr/>
         </p:nvSpPr>
@@ -13528,7 +13567,7 @@
       </p:sp>
       <p:sp>
         <p:nvSpPr>
-          <p:cNvPr id="16" name="Text 12"/>
+          <p:cNvPr id="17" name="Text 13"/>
           <p:cNvSpPr/>
           <p:nvPr/>
         </p:nvSpPr>
@@ -13553,13 +13592,13 @@
             <a:r>
               <a:rPr lang="en-US" sz="950" b="1" dirty="0">
                 <a:solidFill>
-                  <a:srgbClr val="C0392B"/>
-                </a:solidFill>
-                <a:latin typeface="Calibri" pitchFamily="34" charset="0"/>
-                <a:ea typeface="Calibri" pitchFamily="34" charset="-122"/>
-                <a:cs typeface="Calibri" pitchFamily="34" charset="-120"/>
-              </a:rPr>
-              <a:t>▼ -6</a:t>
+                  <a:srgbClr val="1F7A44"/>
+                </a:solidFill>
+                <a:latin typeface="Calibri" pitchFamily="34" charset="0"/>
+                <a:ea typeface="Calibri" pitchFamily="34" charset="-122"/>
+                <a:cs typeface="Calibri" pitchFamily="34" charset="-120"/>
+              </a:rPr>
+              <a:t>▲ +3</a:t>
             </a:r>
             <a:endParaRPr lang="en-US" sz="950" dirty="0"/>
           </a:p>
@@ -13567,7 +13606,7 @@
       </p:sp>
       <p:sp>
         <p:nvSpPr>
-          <p:cNvPr id="17" name="Text 13"/>
+          <p:cNvPr id="18" name="Text 14"/>
           <p:cNvSpPr/>
           <p:nvPr/>
         </p:nvSpPr>
@@ -13598,7 +13637,7 @@
                 <a:ea typeface="Cambria" pitchFamily="34" charset="-122"/>
                 <a:cs typeface="Cambria" pitchFamily="34" charset="-120"/>
               </a:rPr>
-              <a:t>15</a:t>
+              <a:t>18</a:t>
             </a:r>
             <a:endParaRPr lang="en-US" sz="2200" dirty="0"/>
           </a:p>
@@ -13606,7 +13645,7 @@
       </p:sp>
       <p:sp>
         <p:nvSpPr>
-          <p:cNvPr id="18" name="Shape 14"/>
+          <p:cNvPr id="19" name="Shape 15"/>
           <p:cNvSpPr/>
           <p:nvPr/>
         </p:nvSpPr>
@@ -13628,7 +13667,7 @@
       </p:sp>
       <p:sp>
         <p:nvSpPr>
-          <p:cNvPr id="19" name="Shape 15"/>
+          <p:cNvPr id="20" name="Shape 16"/>
           <p:cNvSpPr/>
           <p:nvPr/>
         </p:nvSpPr>
@@ -13648,7 +13687,7 @@
       </p:sp>
       <p:sp>
         <p:nvSpPr>
-          <p:cNvPr id="20" name="Text 16"/>
+          <p:cNvPr id="21" name="Text 17"/>
           <p:cNvSpPr/>
           <p:nvPr/>
         </p:nvSpPr>
@@ -13687,7 +13726,7 @@
       </p:sp>
       <p:sp>
         <p:nvSpPr>
-          <p:cNvPr id="21" name="Text 17"/>
+          <p:cNvPr id="22" name="Text 18"/>
           <p:cNvSpPr/>
           <p:nvPr/>
         </p:nvSpPr>
@@ -13726,7 +13765,7 @@
       </p:sp>
       <p:sp>
         <p:nvSpPr>
-          <p:cNvPr id="22" name="Shape 18"/>
+          <p:cNvPr id="23" name="Shape 19"/>
           <p:cNvSpPr/>
           <p:nvPr/>
         </p:nvSpPr>
@@ -13748,7 +13787,7 @@
       </p:sp>
       <p:sp>
         <p:nvSpPr>
-          <p:cNvPr id="23" name="Shape 19"/>
+          <p:cNvPr id="24" name="Shape 20"/>
           <p:cNvSpPr/>
           <p:nvPr/>
         </p:nvSpPr>
@@ -13768,7 +13807,7 @@
       </p:sp>
       <p:sp>
         <p:nvSpPr>
-          <p:cNvPr id="24" name="Text 20"/>
+          <p:cNvPr id="25" name="Text 21"/>
           <p:cNvSpPr/>
           <p:nvPr/>
         </p:nvSpPr>
@@ -13802,45 +13841,6 @@
               <a:t>Rechazadas</a:t>
             </a:r>
             <a:endParaRPr lang="en-US" sz="1250" dirty="0"/>
-          </a:p>
-        </p:txBody>
-      </p:sp>
-      <p:sp>
-        <p:nvSpPr>
-          <p:cNvPr id="25" name="Text 21"/>
-          <p:cNvSpPr/>
-          <p:nvPr/>
-        </p:nvSpPr>
-        <p:spPr>
-          <a:xfrm>
-            <a:off x="9509760" y="4315968"/>
-            <a:ext cx="914400" cy="566928"/>
-          </a:xfrm>
-          <a:prstGeom prst="rect">
-            <a:avLst/>
-          </a:prstGeom>
-          <a:noFill/>
-          <a:ln/>
-        </p:spPr>
-        <p:txBody>
-          <a:bodyPr wrap="square" lIns="0" tIns="0" rIns="0" bIns="0" rtlCol="0" anchor="ctr"/>
-          <a:lstStyle/>
-          <a:p>
-            <a:pPr algn="r" indent="0" marL="0">
-              <a:buNone/>
-            </a:pPr>
-            <a:r>
-              <a:rPr lang="en-US" sz="950" b="1" dirty="0">
-                <a:solidFill>
-                  <a:srgbClr val="C0392B"/>
-                </a:solidFill>
-                <a:latin typeface="Calibri" pitchFamily="34" charset="0"/>
-                <a:ea typeface="Calibri" pitchFamily="34" charset="-122"/>
-                <a:cs typeface="Calibri" pitchFamily="34" charset="-120"/>
-              </a:rPr>
-              <a:t>▲ +6</a:t>
-            </a:r>
-            <a:endParaRPr lang="en-US" sz="950" dirty="0"/>
           </a:p>
         </p:txBody>
       </p:sp>
@@ -14075,7 +14075,7 @@
                 <a:ea typeface="Calibri" pitchFamily="34" charset="-122"/>
                 <a:cs typeface="Calibri" pitchFamily="34" charset="-120"/>
               </a:rPr>
-              <a:t>Fuente: Estatus_Resumen_General_QAQC.xlsx · Corte 19-10-2026 · Áreas 2000/3000/4000/8000</a:t>
+              <a:t>Fuente: Estatus_Resumen_General_QAQC.xlsx · Corte 26-10-2026 · Áreas 2000/3000/4000/8000</a:t>
             </a:r>
             <a:endParaRPr lang="en-US" sz="850" dirty="0"/>
           </a:p>
@@ -14193,7 +14193,7 @@
       </p:grpSpPr>
       <p:pic>
         <p:nvPicPr>
-          <p:cNvPr id="2" name="Image 0" descr="/workspace/dashboard-hseq/panel_control_TOP_P1/besalco_logo.png">    </p:cNvPr>
+          <p:cNvPr id="2" name="Image 0" descr="/home/user/dashboard-hseq/panel_control_TOP_P1/besalco_logo.png">    </p:cNvPr>
           <p:cNvPicPr>
             <a:picLocks noChangeAspect="1"/>
           </p:cNvPicPr>
@@ -14326,7 +14326,7 @@
                 <a:ea typeface="Calibri" pitchFamily="34" charset="-122"/>
                 <a:cs typeface="Calibri" pitchFamily="34" charset="-120"/>
               </a:rPr>
-              <a:t>2.182 P1 levantados; 87,7% cerrados. El pendiente se concentra en Instrumentación y Control, Eléctrica, Piping, y físicamente en el área 3000.</a:t>
+              <a:t>2.182 P1 levantados; 93,4% cerrados. El pendiente se concentra en Instrumentación y Control, Eléctrica, Piping, y físicamente en el área 3000.</a:t>
             </a:r>
             <a:endParaRPr lang="en-US" sz="1350" dirty="0"/>
           </a:p>
@@ -14458,7 +14458,7 @@
                 <a:ea typeface="Cambria" pitchFamily="34" charset="-122"/>
                 <a:cs typeface="Cambria" pitchFamily="34" charset="-120"/>
               </a:rPr>
-              <a:t>87,7%</a:t>
+              <a:t>93,4%</a:t>
             </a:r>
             <a:endParaRPr lang="en-US" sz="1900" dirty="0"/>
           </a:p>
@@ -14573,7 +14573,7 @@
                 <a:ea typeface="Calibri" pitchFamily="34" charset="-122"/>
                 <a:cs typeface="Calibri" pitchFamily="34" charset="-120"/>
               </a:rPr>
-              <a:t>1.914</a:t>
+              <a:t>2.039</a:t>
             </a:r>
             <a:endParaRPr lang="en-US" sz="1100" dirty="0"/>
           </a:p>
@@ -14671,7 +14671,7 @@
                 <a:ea typeface="Calibri" pitchFamily="34" charset="-122"/>
                 <a:cs typeface="Calibri" pitchFamily="34" charset="-120"/>
               </a:rPr>
-              <a:t>268</a:t>
+              <a:t>143</a:t>
             </a:r>
             <a:endParaRPr lang="en-US" sz="1100" dirty="0"/>
           </a:p>
@@ -14852,7 +14852,7 @@
                 <a:ea typeface="Calibri" pitchFamily="34" charset="-122"/>
                 <a:cs typeface="Calibri" pitchFamily="34" charset="-120"/>
               </a:rPr>
-              <a:t>260 de 268 P1 abiertos (97%) están en el área 3000. Áreas 2000 y 4000 y 8000 sobre 90% de cierre.</a:t>
+              <a:t>143 de 143 P1 abiertos (100%) están en el área 3000. Áreas 2000 y 4000 y 8000 sobre 90% de cierre.</a:t>
             </a:r>
             <a:endParaRPr lang="en-US" sz="1150" dirty="0"/>
           </a:p>
@@ -14891,7 +14891,7 @@
                 <a:ea typeface="Calibri" pitchFamily="34" charset="-122"/>
                 <a:cs typeface="Calibri" pitchFamily="34" charset="-120"/>
               </a:rPr>
-              <a:t>Fuente: Estatus_Resumen_General_QAQC.xlsx · Corte 19-10-2026 · Áreas 2000/3000/4000/8000</a:t>
+              <a:t>Fuente: Estatus_Resumen_General_QAQC.xlsx · Corte 26-10-2026 · Áreas 2000/3000/4000/8000</a:t>
             </a:r>
             <a:endParaRPr lang="en-US" sz="850" dirty="0"/>
           </a:p>
@@ -15009,7 +15009,7 @@
       </p:grpSpPr>
       <p:pic>
         <p:nvPicPr>
-          <p:cNvPr id="2" name="Image 0" descr="/workspace/dashboard-hseq/panel_control_TOP_P1/besalco_logo.png">    </p:cNvPr>
+          <p:cNvPr id="2" name="Image 0" descr="/home/user/dashboard-hseq/panel_control_TOP_P1/besalco_logo.png">    </p:cNvPr>
           <p:cNvPicPr>
             <a:picLocks noChangeAspect="1"/>
           </p:cNvPicPr>
@@ -15265,7 +15265,7 @@
                 <a:ea typeface="Calibri" pitchFamily="34" charset="-122"/>
                 <a:cs typeface="Calibri" pitchFamily="34" charset="-120"/>
               </a:rPr>
-              <a:t>0 aprobadas de 136. Priorizar el cierre de las 15 en revisión y el rearmado de las 30 rechazadas para convertir entregas en aprobaciones.</a:t>
+              <a:t>0 aprobadas de 136. Priorizar el cierre de las 18 en revisión y el rearmado de las 30 rechazadas para convertir entregas en aprobaciones.</a:t>
             </a:r>
             <a:endParaRPr lang="en-US" sz="1150" dirty="0"/>
           </a:p>
@@ -15407,7 +15407,7 @@
                 <a:ea typeface="Calibri" pitchFamily="34" charset="-122"/>
                 <a:cs typeface="Calibri" pitchFamily="34" charset="-120"/>
               </a:rPr>
-              <a:t>260 P1 abiertos (97% del total) y 0 caminatas 100% pendientes. Es la ruta crítica: sin esta área no mejora ningún indicador global.</a:t>
+              <a:t>143 P1 abiertos (100% del total) y 0 caminatas 100% pendientes. Es la ruta crítica: sin esta área no mejora ningún indicador global.</a:t>
             </a:r>
             <a:endParaRPr lang="en-US" sz="1150" dirty="0"/>
           </a:p>
@@ -15507,7 +15507,7 @@
                 <a:ea typeface="Calibri" pitchFamily="34" charset="-122"/>
                 <a:cs typeface="Calibri" pitchFamily="34" charset="-120"/>
               </a:rPr>
-              <a:t>Recuperar los 146 P1 vencidos</a:t>
+              <a:t>Recuperar los 86 P1 vencidos</a:t>
             </a:r>
             <a:endParaRPr lang="en-US" sz="1500" dirty="0"/>
           </a:p>
@@ -15549,7 +15549,7 @@
                 <a:ea typeface="Calibri" pitchFamily="34" charset="-122"/>
                 <a:cs typeface="Calibri" pitchFamily="34" charset="-120"/>
               </a:rPr>
-              <a:t>54,5% de los P1 abiertos superó su fecha de vencimiento. Foco en Instrumentación y Control (64), Eléctrica (54), Piping (26).</a:t>
+              <a:t>60,1% de los P1 abiertos superó su fecha de vencimiento. Foco en Instrumentación y Control (39), Eléctrica (33), Piping (10).</a:t>
             </a:r>
             <a:endParaRPr lang="en-US" sz="1150" dirty="0"/>
           </a:p>
@@ -15730,7 +15730,7 @@
                 <a:ea typeface="Calibri" pitchFamily="34" charset="-122"/>
                 <a:cs typeface="Calibri" pitchFamily="34" charset="-120"/>
               </a:rPr>
-              <a:t>Fuente: Estatus_Resumen_General_QAQC.xlsx · Corte 19-10-2026 · Áreas 2000/3000/4000/8000</a:t>
+              <a:t>Fuente: Estatus_Resumen_General_QAQC.xlsx · Corte 26-10-2026 · Áreas 2000/3000/4000/8000</a:t>
             </a:r>
             <a:endParaRPr lang="en-US" sz="850" dirty="0"/>
           </a:p>
@@ -15848,7 +15848,7 @@
       </p:grpSpPr>
       <p:pic>
         <p:nvPicPr>
-          <p:cNvPr id="2" name="Image 0" descr="/workspace/dashboard-hseq/panel_control_TOP_P1/besalco_logo.png">    </p:cNvPr>
+          <p:cNvPr id="2" name="Image 0" descr="/home/user/dashboard-hseq/panel_control_TOP_P1/besalco_logo.png">    </p:cNvPr>
           <p:cNvPicPr>
             <a:picLocks noChangeAspect="1"/>
           </p:cNvPicPr>
@@ -16461,7 +16461,7 @@
                 <a:ea typeface="Cambria" pitchFamily="34" charset="-122"/>
                 <a:cs typeface="Cambria" pitchFamily="34" charset="-120"/>
               </a:rPr>
-              <a:t>71,6%</a:t>
+              <a:t>74,7%</a:t>
             </a:r>
             <a:endParaRPr lang="en-US" sz="3800" dirty="0"/>
           </a:p>
@@ -16500,7 +16500,7 @@
                 <a:ea typeface="Calibri" pitchFamily="34" charset="-122"/>
                 <a:cs typeface="Calibri" pitchFamily="34" charset="-120"/>
               </a:rPr>
-              <a:t>68/95</a:t>
+              <a:t>71/95</a:t>
             </a:r>
             <a:endParaRPr lang="en-US" sz="1400" dirty="0"/>
           </a:p>
@@ -16581,7 +16581,7 @@
                 <a:ea typeface="Calibri" pitchFamily="34" charset="-122"/>
                 <a:cs typeface="Calibri" pitchFamily="34" charset="-120"/>
               </a:rPr>
-              <a:t>51 aprobadas · 10 en revisión · 7 rechazadas</a:t>
+              <a:t>56 aprobadas · 8 en revisión · 7 rechazadas</a:t>
             </a:r>
             <a:endParaRPr lang="en-US" sz="950" dirty="0"/>
           </a:p>
@@ -16674,7 +16674,7 @@
                 <a:ea typeface="Cambria" pitchFamily="34" charset="-122"/>
                 <a:cs typeface="Cambria" pitchFamily="34" charset="-120"/>
               </a:rPr>
-              <a:t>79,3%</a:t>
+              <a:t>82%</a:t>
             </a:r>
             <a:endParaRPr lang="en-US" sz="3800" dirty="0"/>
           </a:p>
@@ -16713,7 +16713,7 @@
                 <a:ea typeface="Calibri" pitchFamily="34" charset="-122"/>
                 <a:cs typeface="Calibri" pitchFamily="34" charset="-120"/>
               </a:rPr>
-              <a:t>1.341/1.692</a:t>
+              <a:t>1.412/1.723</a:t>
             </a:r>
             <a:endParaRPr lang="en-US" sz="1400" dirty="0"/>
           </a:p>
@@ -16794,7 +16794,7 @@
                 <a:ea typeface="Calibri" pitchFamily="34" charset="-122"/>
                 <a:cs typeface="Calibri" pitchFamily="34" charset="-120"/>
               </a:rPr>
-              <a:t>351 abiertos · 222 atrasados</a:t>
+              <a:t>311 abiertos · 212 atrasados</a:t>
             </a:r>
             <a:endParaRPr lang="en-US" sz="950" dirty="0"/>
           </a:p>
@@ -16934,7 +16934,7 @@
                 <a:ea typeface="Calibri" pitchFamily="34" charset="-122"/>
                 <a:cs typeface="Calibri" pitchFamily="34" charset="-120"/>
               </a:rPr>
-              <a:t>2.114 de 2.715 ítems cerrados (77,9%); de los 601 abiertos, 385 ya pasaron su fecha requerida de cierre (64,1%).</a:t>
+              <a:t>2.210 de 2.748 ítems cerrados (80,4%); de los 538 abiertos, 370 ya pasaron su fecha requerida de cierre (68,8%).</a:t>
             </a:r>
             <a:endParaRPr lang="en-US" sz="1150" dirty="0"/>
           </a:p>
@@ -17075,7 +17075,7 @@
                 <a:ea typeface="Calibri" pitchFamily="34" charset="-122"/>
                 <a:cs typeface="Calibri" pitchFamily="34" charset="-120"/>
               </a:rPr>
-              <a:t>Las carpetas están a 71,6% de entrega y el cuello está en el armado interno.  </a:t>
+              <a:t>Las carpetas están a 74,7% de entrega y el cuello está en el armado interno.  </a:t>
             </a:r>
             <a:pPr indent="0" marL="0">
               <a:lnSpc>
@@ -17092,7 +17092,7 @@
                 <a:ea typeface="Calibri" pitchFamily="34" charset="-122"/>
                 <a:cs typeface="Calibri" pitchFamily="34" charset="-120"/>
               </a:rPr>
-              <a:t>68 entregadas de 95: 51 aprobadas, 10 en revisión y 7 rechazadas. Quedan 16 en preparación y 11 sin iniciar.</a:t>
+              <a:t>71 entregadas de 95: 56 aprobadas, 8 en revisión y 7 rechazadas. Quedan 13 en preparación y 11 sin iniciar.</a:t>
             </a:r>
             <a:endParaRPr lang="en-US" sz="1150" dirty="0"/>
           </a:p>
@@ -17171,7 +17171,7 @@
                 <a:ea typeface="Calibri" pitchFamily="34" charset="-122"/>
                 <a:cs typeface="Calibri" pitchFamily="34" charset="-120"/>
               </a:rPr>
-              <a:t>174 de los 351 P1 abiertos (49,6%), con 104 atrasados.</a:t>
+              <a:t>169 de los 311 P1 abiertos (54,3%), con 103 atrasados.</a:t>
             </a:r>
             <a:endParaRPr lang="en-US" sz="1150" dirty="0"/>
           </a:p>
@@ -17210,7 +17210,7 @@
                 <a:ea typeface="Calibri" pitchFamily="34" charset="-122"/>
                 <a:cs typeface="Calibri" pitchFamily="34" charset="-120"/>
               </a:rPr>
-              <a:t>Fuente: REPORTE_GERENCIAL + Listado de Puntos Punch Consolidado · Corte 13-10-2026 · Atrasos al 19-10-2026</a:t>
+              <a:t>Fuente: REPORTE_GERENCIAL + Listado de Puntos Punch Consolidado · Corte 20-10-2026 · Atrasos al 26-10-2026</a:t>
             </a:r>
             <a:endParaRPr lang="en-US" sz="850" dirty="0"/>
           </a:p>
@@ -17328,7 +17328,7 @@
       </p:grpSpPr>
       <p:pic>
         <p:nvPicPr>
-          <p:cNvPr id="2" name="Image 0" descr="/workspace/dashboard-hseq/panel_control_TOP_P1/besalco_logo.png">    </p:cNvPr>
+          <p:cNvPr id="2" name="Image 0" descr="/home/user/dashboard-hseq/panel_control_TOP_P1/besalco_logo.png">    </p:cNvPr>
           <p:cNvPicPr>
             <a:picLocks noChangeAspect="1"/>
           </p:cNvPicPr>
@@ -17663,7 +17663,7 @@
                 <a:ea typeface="Calibri" pitchFamily="34" charset="-122"/>
                 <a:cs typeface="Calibri" pitchFamily="34" charset="-120"/>
               </a:rPr>
-              <a:t>53,7%</a:t>
+              <a:t>58,9%</a:t>
             </a:r>
             <a:endParaRPr lang="en-US" sz="1100" dirty="0"/>
           </a:p>
@@ -17702,7 +17702,7 @@
                 <a:ea typeface="Cambria" pitchFamily="34" charset="-122"/>
                 <a:cs typeface="Cambria" pitchFamily="34" charset="-120"/>
               </a:rPr>
-              <a:t>51</a:t>
+              <a:t>56</a:t>
             </a:r>
             <a:endParaRPr lang="en-US" sz="2200" dirty="0"/>
           </a:p>
@@ -17822,7 +17822,7 @@
                 <a:ea typeface="Calibri" pitchFamily="34" charset="-122"/>
                 <a:cs typeface="Calibri" pitchFamily="34" charset="-120"/>
               </a:rPr>
-              <a:t>10,5%</a:t>
+              <a:t>8,4%</a:t>
             </a:r>
             <a:endParaRPr lang="en-US" sz="1100" dirty="0"/>
           </a:p>
@@ -17861,7 +17861,7 @@
                 <a:ea typeface="Cambria" pitchFamily="34" charset="-122"/>
                 <a:cs typeface="Cambria" pitchFamily="34" charset="-120"/>
               </a:rPr>
-              <a:t>10</a:t>
+              <a:t>8</a:t>
             </a:r>
             <a:endParaRPr lang="en-US" sz="2200" dirty="0"/>
           </a:p>
@@ -18140,7 +18140,7 @@
                 <a:ea typeface="Calibri" pitchFamily="34" charset="-122"/>
                 <a:cs typeface="Calibri" pitchFamily="34" charset="-120"/>
               </a:rPr>
-              <a:t>16,8%</a:t>
+              <a:t>13,7%</a:t>
             </a:r>
             <a:endParaRPr lang="en-US" sz="1100" dirty="0"/>
           </a:p>
@@ -18179,7 +18179,7 @@
                 <a:ea typeface="Cambria" pitchFamily="34" charset="-122"/>
                 <a:cs typeface="Cambria" pitchFamily="34" charset="-120"/>
               </a:rPr>
-              <a:t>16</a:t>
+              <a:t>13</a:t>
             </a:r>
             <a:endParaRPr lang="en-US" sz="2200" dirty="0"/>
           </a:p>
@@ -18380,7 +18380,7 @@
                 <a:ea typeface="Calibri" pitchFamily="34" charset="-122"/>
                 <a:cs typeface="Calibri" pitchFamily="34" charset="-120"/>
               </a:rPr>
-              <a:t>68 carpetas ya están en manos del cliente (71,6%) y 52 subsistemas tienen tarjeta verde. El grueso del pendiente todavía no sale de Besalco.</a:t>
+              <a:t>71 carpetas ya están en manos del cliente (74,7%) y 56 subsistemas tienen tarjeta verde. El grueso del pendiente todavía no sale de Besalco.</a:t>
             </a:r>
             <a:endParaRPr lang="en-US" sz="1000" dirty="0"/>
           </a:p>
@@ -18419,7 +18419,7 @@
                 <a:ea typeface="Calibri" pitchFamily="34" charset="-122"/>
                 <a:cs typeface="Calibri" pitchFamily="34" charset="-120"/>
               </a:rPr>
-              <a:t>Fuente: REPORTE_GERENCIAL + Listado de Puntos Punch Consolidado · Corte 13-10-2026 · Atrasos al 19-10-2026</a:t>
+              <a:t>Fuente: REPORTE_GERENCIAL + Listado de Puntos Punch Consolidado · Corte 20-10-2026 · Atrasos al 26-10-2026</a:t>
             </a:r>
             <a:endParaRPr lang="en-US" sz="850" dirty="0"/>
           </a:p>
@@ -18537,7 +18537,7 @@
       </p:grpSpPr>
       <p:pic>
         <p:nvPicPr>
-          <p:cNvPr id="2" name="Image 0" descr="/workspace/dashboard-hseq/panel_control_TOP_P1/besalco_logo.png">    </p:cNvPr>
+          <p:cNvPr id="2" name="Image 0" descr="/home/user/dashboard-hseq/panel_control_TOP_P1/besalco_logo.png">    </p:cNvPr>
           <p:cNvPicPr>
             <a:picLocks noChangeAspect="1"/>
           </p:cNvPicPr>
@@ -18670,7 +18670,7 @@
                 <a:ea typeface="Calibri" pitchFamily="34" charset="-122"/>
                 <a:cs typeface="Calibri" pitchFamily="34" charset="-120"/>
               </a:rPr>
-              <a:t>1.692 P1 levantados; 79,3% cerrados. Atrasado = ítem abierto cuya fecha requerida de cierre ya venció al 19-10-2026.</a:t>
+              <a:t>1.723 P1 levantados; 82% cerrados. Atrasado = ítem abierto cuya fecha requerida de cierre ya venció al 26-10-2026.</a:t>
             </a:r>
             <a:endParaRPr lang="en-US" sz="1350" dirty="0"/>
           </a:p>
@@ -18802,7 +18802,7 @@
                 <a:ea typeface="Cambria" pitchFamily="34" charset="-122"/>
                 <a:cs typeface="Cambria" pitchFamily="34" charset="-120"/>
               </a:rPr>
-              <a:t>79,3%</a:t>
+              <a:t>82%</a:t>
             </a:r>
             <a:endParaRPr lang="en-US" sz="1900" dirty="0"/>
           </a:p>
@@ -18917,7 +18917,7 @@
                 <a:ea typeface="Calibri" pitchFamily="34" charset="-122"/>
                 <a:cs typeface="Calibri" pitchFamily="34" charset="-120"/>
               </a:rPr>
-              <a:t>1.341</a:t>
+              <a:t>1.412</a:t>
             </a:r>
             <a:endParaRPr lang="en-US" sz="1100" dirty="0"/>
           </a:p>
@@ -19015,7 +19015,7 @@
                 <a:ea typeface="Calibri" pitchFamily="34" charset="-122"/>
                 <a:cs typeface="Calibri" pitchFamily="34" charset="-120"/>
               </a:rPr>
-              <a:t>222</a:t>
+              <a:t>212</a:t>
             </a:r>
             <a:endParaRPr lang="en-US" sz="1100" dirty="0"/>
           </a:p>
@@ -19113,7 +19113,7 @@
                 <a:ea typeface="Calibri" pitchFamily="34" charset="-122"/>
                 <a:cs typeface="Calibri" pitchFamily="34" charset="-120"/>
               </a:rPr>
-              <a:t>129</a:t>
+              <a:t>99</a:t>
             </a:r>
             <a:endParaRPr lang="en-US" sz="1100" dirty="0"/>
           </a:p>
@@ -19196,7 +19196,7 @@
                 <a:ea typeface="Calibri" pitchFamily="34" charset="-122"/>
                 <a:cs typeface="Calibri" pitchFamily="34" charset="-120"/>
               </a:rPr>
-              <a:t>Mediana de 19 días vencidos; el más antiguo lleva 162. 212 entre 1-30 días, 96 entre 31-90 días, 77 entre 91-180 días.</a:t>
+              <a:t>Mediana de 26 días vencidos; el más antiguo lleva 169. 190 entre 1-30 días, 104 entre 31-90 días, 76 entre 91-180 días.</a:t>
             </a:r>
             <a:endParaRPr lang="en-US" sz="1150" dirty="0"/>
           </a:p>
@@ -19235,7 +19235,7 @@
                 <a:ea typeface="Calibri" pitchFamily="34" charset="-122"/>
                 <a:cs typeface="Calibri" pitchFamily="34" charset="-120"/>
               </a:rPr>
-              <a:t>Fuente: REPORTE_GERENCIAL + Listado de Puntos Punch Consolidado · Corte 13-10-2026 · Atrasos al 19-10-2026</a:t>
+              <a:t>Fuente: REPORTE_GERENCIAL + Listado de Puntos Punch Consolidado · Corte 20-10-2026 · Atrasos al 26-10-2026</a:t>
             </a:r>
             <a:endParaRPr lang="en-US" sz="850" dirty="0"/>
           </a:p>
@@ -19353,7 +19353,7 @@
       </p:grpSpPr>
       <p:pic>
         <p:nvPicPr>
-          <p:cNvPr id="2" name="Image 0" descr="/workspace/dashboard-hseq/panel_control_TOP_P1/besalco_logo.png">    </p:cNvPr>
+          <p:cNvPr id="2" name="Image 0" descr="/home/user/dashboard-hseq/panel_control_TOP_P1/besalco_logo.png">    </p:cNvPr>
           <p:cNvPicPr>
             <a:picLocks noChangeAspect="1"/>
           </p:cNvPicPr>
@@ -19567,7 +19567,7 @@
                 <a:ea typeface="Calibri" pitchFamily="34" charset="-122"/>
                 <a:cs typeface="Calibri" pitchFamily="34" charset="-120"/>
               </a:rPr>
-              <a:t>Recuperar los 385 ítems atrasados</a:t>
+              <a:t>Recuperar los 370 ítems atrasados</a:t>
             </a:r>
             <a:endParaRPr lang="en-US" sz="1400" dirty="0"/>
           </a:p>
@@ -19609,7 +19609,7 @@
                 <a:ea typeface="Calibri" pitchFamily="34" charset="-122"/>
                 <a:cs typeface="Calibri" pitchFamily="34" charset="-120"/>
               </a:rPr>
-              <a:t>64,1% de los 601 abiertos ya venció su fecha requerida. Foco en Piping (104), Eléctrica (70), Mecánica (19).</a:t>
+              <a:t>68,8% de los 538 abiertos ya venció su fecha requerida. Foco en Piping (103), Eléctrica (70), Mecánica (13).</a:t>
             </a:r>
             <a:endParaRPr lang="en-US" sz="1100" dirty="0"/>
           </a:p>
@@ -19851,7 +19851,7 @@
                 <a:ea typeface="Calibri" pitchFamily="34" charset="-122"/>
                 <a:cs typeface="Calibri" pitchFamily="34" charset="-120"/>
               </a:rPr>
-              <a:t>Sacar del armado interno las 27 carpetas retenidas</a:t>
+              <a:t>Sacar del armado interno las 24 carpetas retenidas</a:t>
             </a:r>
             <a:endParaRPr lang="en-US" sz="1400" dirty="0"/>
           </a:p>
@@ -19893,7 +19893,7 @@
                 <a:ea typeface="Calibri" pitchFamily="34" charset="-122"/>
                 <a:cs typeface="Calibri" pitchFamily="34" charset="-120"/>
               </a:rPr>
-              <a:t>16 están en preparación y 11 sin iniciar. Solo 68 de 95 (71,6%) llegaron al cliente; 7 volvieron rechazadas y hay que rearmarlas.</a:t>
+              <a:t>13 están en preparación y 11 sin iniciar. Solo 71 de 95 (74,7%) llegaron al cliente; 7 volvieron rechazadas y hay que rearmarlas.</a:t>
             </a:r>
             <a:endParaRPr lang="en-US" sz="1100" dirty="0"/>
           </a:p>
@@ -20035,7 +20035,7 @@
                 <a:ea typeface="Calibri" pitchFamily="34" charset="-122"/>
                 <a:cs typeface="Calibri" pitchFamily="34" charset="-120"/>
               </a:rPr>
-              <a:t>Concentra 302 P1 abiertos y 173 atrasados sobre 74 subsistemas. Es la ruta crítica del proyecto.</a:t>
+              <a:t>Concentra 262 P1 abiertos y 163 atrasados sobre 74 subsistemas. Es la ruta crítica del proyecto.</a:t>
             </a:r>
             <a:endParaRPr lang="en-US" sz="1100" dirty="0"/>
           </a:p>
@@ -20074,7 +20074,7 @@
                 <a:ea typeface="Calibri" pitchFamily="34" charset="-122"/>
                 <a:cs typeface="Calibri" pitchFamily="34" charset="-120"/>
               </a:rPr>
-              <a:t>Fuente: REPORTE_GERENCIAL + Listado de Puntos Punch Consolidado · Corte 13-10-2026 · Atrasos al 19-10-2026</a:t>
+              <a:t>Fuente: REPORTE_GERENCIAL + Listado de Puntos Punch Consolidado · Corte 20-10-2026 · Atrasos al 26-10-2026</a:t>
             </a:r>
             <a:endParaRPr lang="en-US" sz="850" dirty="0"/>
           </a:p>
@@ -20192,7 +20192,7 @@
       </p:grpSpPr>
       <p:pic>
         <p:nvPicPr>
-          <p:cNvPr id="2" name="Image 0" descr="/workspace/dashboard-hseq/panel_control_TOP_P1/besalco_logo.png">    </p:cNvPr>
+          <p:cNvPr id="2" name="Image 0" descr="/home/user/dashboard-hseq/panel_control_TOP_P1/besalco_logo.png">    </p:cNvPr>
           <p:cNvPicPr>
             <a:picLocks noChangeAspect="1"/>
           </p:cNvPicPr>
@@ -20896,7 +20896,7 @@
       </p:grpSpPr>
       <p:pic>
         <p:nvPicPr>
-          <p:cNvPr id="2" name="Image 0" descr="/workspace/dashboard-hseq/panel_control_TOP_P1/besalco_logo.png">    </p:cNvPr>
+          <p:cNvPr id="2" name="Image 0" descr="/home/user/dashboard-hseq/panel_control_TOP_P1/besalco_logo.png">    </p:cNvPr>
           <p:cNvPicPr>
             <a:picLocks noChangeAspect="1"/>
           </p:cNvPicPr>
@@ -22376,7 +22376,7 @@
       </p:grpSpPr>
       <p:pic>
         <p:nvPicPr>
-          <p:cNvPr id="2" name="Image 0" descr="/workspace/dashboard-hseq/panel_control_TOP_P1/besalco_logo.png">    </p:cNvPr>
+          <p:cNvPr id="2" name="Image 0" descr="/home/user/dashboard-hseq/panel_control_TOP_P1/besalco_logo.png">    </p:cNvPr>
           <p:cNvPicPr>
             <a:picLocks noChangeAspect="1"/>
           </p:cNvPicPr>
@@ -22698,7 +22698,7 @@
       </p:grpSpPr>
       <p:pic>
         <p:nvPicPr>
-          <p:cNvPr id="2" name="Image 0" descr="/workspace/dashboard-hseq/panel_control_TOP_P1/besalco_logo.png">    </p:cNvPr>
+          <p:cNvPr id="2" name="Image 0" descr="/home/user/dashboard-hseq/panel_control_TOP_P1/besalco_logo.png">    </p:cNvPr>
           <p:cNvPicPr>
             <a:picLocks noChangeAspect="1"/>
           </p:cNvPicPr>

--- a/panel_control_TOP_P1/Panel_Control_TOP_P1.pptx
+++ b/panel_control_TOP_P1/Panel_Control_TOP_P1.pptx
@@ -2736,16 +2736,16 @@
                 <c:formatCode>General</c:formatCode>
                 <c:ptCount val="5"/>
                 <c:pt idx="0">
-                  <c:v>5</c:v>
+                  <c:v>1</c:v>
                 </c:pt>
                 <c:pt idx="1">
-                  <c:v>12</c:v>
+                  <c:v>4</c:v>
                 </c:pt>
                 <c:pt idx="2">
-                  <c:v>4</c:v>
+                  <c:v>2</c:v>
                 </c:pt>
                 <c:pt idx="3">
-                  <c:v>2</c:v>
+                  <c:v/>
                 </c:pt>
                 <c:pt idx="4">
                   <c:v>2</c:v>
@@ -2841,7 +2841,7 @@
                   <c:v>13</c:v>
                 </c:pt>
                 <c:pt idx="3">
-                  <c:v>10</c:v>
+                  <c:v>7</c:v>
                 </c:pt>
                 <c:pt idx="4">
                   <c:v>3</c:v>
@@ -7551,7 +7551,7 @@
                 <a:ea typeface="Calibri" pitchFamily="34" charset="-122"/>
                 <a:cs typeface="Calibri" pitchFamily="34" charset="-120"/>
               </a:rPr>
-              <a:t>Recuperar los 25 DT atrasados</a:t>
+              <a:t>Recuperar los 9 DT atrasados</a:t>
             </a:r>
             <a:endParaRPr lang="en-US" sz="1350" dirty="0"/>
           </a:p>
@@ -7593,7 +7593,7 @@
                 <a:ea typeface="Calibri" pitchFamily="34" charset="-122"/>
                 <a:cs typeface="Calibri" pitchFamily="34" charset="-120"/>
               </a:rPr>
-              <a:t>10 son P2 y 8 son P1. La mediana de atraso es de 75 días y 6 superan los 90 días.</a:t>
+              <a:t>1 son P2 y 0 son P1. La mediana de atraso es de 87 días y 4 superan los 90 días.</a:t>
             </a:r>
             <a:endParaRPr lang="en-US" sz="1100" dirty="0"/>
           </a:p>
@@ -7877,7 +7877,7 @@
                 <a:ea typeface="Calibri" pitchFamily="34" charset="-122"/>
                 <a:cs typeface="Calibri" pitchFamily="34" charset="-120"/>
               </a:rPr>
-              <a:t>De 50 DT levantados en P4 no se ha cerrado ninguno (4%). P3 tampoco despega: 30,5% de cierre.</a:t>
+              <a:t>De 50 DT levantados en P4 no se ha cerrado ninguno (4%). P3 tampoco despega: 30,3% de cierre.</a:t>
             </a:r>
             <a:endParaRPr lang="en-US" sz="1100" dirty="0"/>
           </a:p>
@@ -8019,7 +8019,7 @@
                 <a:ea typeface="Calibri" pitchFamily="34" charset="-122"/>
                 <a:cs typeface="Calibri" pitchFamily="34" charset="-120"/>
               </a:rPr>
-              <a:t>Concentra 106 de los 238 DT abiertos (44,5%), con 0 atrasados. Además hay 3 carpetas bajo 80% de avance que conviene cerrar en paralelo.</a:t>
+              <a:t>Concentra 106 de los 219 DT abiertos (48,4%), con 0 atrasados. Además hay 3 carpetas bajo 80% de avance que conviene cerrar en paralelo.</a:t>
             </a:r>
             <a:endParaRPr lang="en-US" sz="1100" dirty="0"/>
           </a:p>
@@ -8058,7 +8058,7 @@
                 <a:ea typeface="Calibri" pitchFamily="34" charset="-122"/>
                 <a:cs typeface="Calibri" pitchFamily="34" charset="-120"/>
               </a:rPr>
-              <a:t>Fuente: STATUS_SUBSISTEMAS_TALABRE + Detalle_de_Terminaciones · 218 subsistemas · 2.181 DT · Atrasos al 19-10-2026</a:t>
+              <a:t>Fuente: STATUS_SUBSISTEMAS_TALABRE + Detalle_de_Terminaciones · 218 subsistemas · 2.181 DT · Atrasos al 26-10-2026</a:t>
             </a:r>
             <a:endParaRPr lang="en-US" sz="850" dirty="0"/>
           </a:p>
@@ -20700,7 +20700,7 @@
                 <a:ea typeface="Cambria" pitchFamily="34" charset="-122"/>
                 <a:cs typeface="Cambria" pitchFamily="34" charset="-120"/>
               </a:rPr>
-              <a:t>98,9%</a:t>
+              <a:t>99,9%</a:t>
             </a:r>
             <a:endParaRPr lang="en-US" sz="3400" dirty="0"/>
           </a:p>
@@ -20778,7 +20778,7 @@
                 <a:ea typeface="Calibri" pitchFamily="34" charset="-122"/>
                 <a:cs typeface="Calibri" pitchFamily="34" charset="-120"/>
               </a:rPr>
-              <a:t>Atrasos calculados al 19-10-2026</a:t>
+              <a:t>Atrasos calculados al 26-10-2026</a:t>
             </a:r>
             <a:endParaRPr lang="en-US" sz="1100" dirty="0"/>
           </a:p>
@@ -20817,7 +20817,7 @@
                 <a:ea typeface="Calibri" pitchFamily="34" charset="-122"/>
                 <a:cs typeface="Calibri" pitchFamily="34" charset="-120"/>
               </a:rPr>
-              <a:t>Fuente: STATUS_SUBSISTEMAS_TALABRE + Detalle_de_Terminaciones · 218 subsistemas · 2.181 DT · Atrasos al 19-10-2026</a:t>
+              <a:t>Fuente: STATUS_SUBSISTEMAS_TALABRE + Detalle_de_Terminaciones · 218 subsistemas · 2.181 DT · Atrasos al 26-10-2026</a:t>
             </a:r>
             <a:endParaRPr lang="en-US" sz="850" dirty="0"/>
           </a:p>
@@ -21722,7 +21722,7 @@
                 <a:ea typeface="Cambria" pitchFamily="34" charset="-122"/>
                 <a:cs typeface="Cambria" pitchFamily="34" charset="-120"/>
               </a:rPr>
-              <a:t>97,5%</a:t>
+              <a:t>100%</a:t>
             </a:r>
             <a:endParaRPr lang="en-US" sz="3800" dirty="0"/>
           </a:p>
@@ -21761,7 +21761,7 @@
                 <a:ea typeface="Calibri" pitchFamily="34" charset="-122"/>
                 <a:cs typeface="Calibri" pitchFamily="34" charset="-120"/>
               </a:rPr>
-              <a:t>433/444</a:t>
+              <a:t>444/444</a:t>
             </a:r>
             <a:endParaRPr lang="en-US" sz="1300" dirty="0"/>
           </a:p>
@@ -21842,7 +21842,7 @@
                 <a:ea typeface="Calibri" pitchFamily="34" charset="-122"/>
                 <a:cs typeface="Calibri" pitchFamily="34" charset="-120"/>
               </a:rPr>
-              <a:t>11 abiertos · 8 atrasados</a:t>
+              <a:t>0 abiertos · 0 atrasados</a:t>
             </a:r>
             <a:endParaRPr lang="en-US" sz="950" dirty="0"/>
           </a:p>
@@ -21982,7 +21982,7 @@
                 <a:ea typeface="Calibri" pitchFamily="34" charset="-122"/>
                 <a:cs typeface="Calibri" pitchFamily="34" charset="-120"/>
               </a:rPr>
-              <a:t>97,5% de cierre en P1 (11 abiertos), pero 227 DT abiertos entre P2, P3 y P4 sobre un total de 238.</a:t>
+              <a:t>100% de cierre en P1 (0 abiertos), pero 219 DT abiertos entre P2, P3 y P4 sobre un total de 219.</a:t>
             </a:r>
             <a:endParaRPr lang="en-US" sz="1150" dirty="0"/>
           </a:p>
@@ -22061,7 +22061,7 @@
                 <a:ea typeface="Calibri" pitchFamily="34" charset="-122"/>
                 <a:cs typeface="Calibri" pitchFamily="34" charset="-120"/>
               </a:rPr>
-              <a:t>25 DT con la fecha de compromiso vencida; mediana de 75 días y el más antiguo lleva 214. Los 210 abiertos sin fecha de compromiso no se cuentan como atrasados.</a:t>
+              <a:t>9 DT con la fecha de compromiso vencida; mediana de 87 días y el más antiguo lleva 122. Los 210 abiertos sin fecha de compromiso no se cuentan como atrasados.</a:t>
             </a:r>
             <a:endParaRPr lang="en-US" sz="1150" dirty="0"/>
           </a:p>
@@ -22258,7 +22258,7 @@
                 <a:ea typeface="Calibri" pitchFamily="34" charset="-122"/>
                 <a:cs typeface="Calibri" pitchFamily="34" charset="-120"/>
               </a:rPr>
-              <a:t>Fuente: STATUS_SUBSISTEMAS_TALABRE + Detalle_de_Terminaciones · 218 subsistemas · 2.181 DT · Atrasos al 19-10-2026</a:t>
+              <a:t>Fuente: STATUS_SUBSISTEMAS_TALABRE + Detalle_de_Terminaciones · 218 subsistemas · 2.181 DT · Atrasos al 26-10-2026</a:t>
             </a:r>
             <a:endParaRPr lang="en-US" sz="850" dirty="0"/>
           </a:p>
@@ -22580,7 +22580,7 @@
                 <a:ea typeface="Calibri" pitchFamily="34" charset="-122"/>
                 <a:cs typeface="Calibri" pitchFamily="34" charset="-120"/>
               </a:rPr>
-              <a:t>Fuente: STATUS_SUBSISTEMAS_TALABRE + Detalle_de_Terminaciones · 218 subsistemas · 2.181 DT · Atrasos al 19-10-2026</a:t>
+              <a:t>Fuente: STATUS_SUBSISTEMAS_TALABRE + Detalle_de_Terminaciones · 218 subsistemas · 2.181 DT · Atrasos al 26-10-2026</a:t>
             </a:r>
             <a:endParaRPr lang="en-US" sz="850" dirty="0"/>
           </a:p>
@@ -22831,7 +22831,7 @@
                 <a:ea typeface="Calibri" pitchFamily="34" charset="-122"/>
                 <a:cs typeface="Calibri" pitchFamily="34" charset="-120"/>
               </a:rPr>
-              <a:t>2.181 DT levantados; 89,1% cerrados. Atrasado = DT abierto cuya fecha de compromiso de cierre ya venció al 19-10-2026.</a:t>
+              <a:t>2.181 DT levantados; 90% cerrados. Atrasado = DT abierto cuya fecha de compromiso de cierre ya venció al 26-10-2026.</a:t>
             </a:r>
             <a:endParaRPr lang="en-US" sz="1350" dirty="0"/>
           </a:p>
@@ -22986,7 +22986,7 @@
                 <a:ea typeface="Calibri" pitchFamily="34" charset="-122"/>
                 <a:cs typeface="Calibri" pitchFamily="34" charset="-120"/>
               </a:rPr>
-              <a:t>433/444</a:t>
+              <a:t>444/444</a:t>
             </a:r>
             <a:endParaRPr lang="en-US" sz="1050" dirty="0"/>
           </a:p>
@@ -23025,7 +23025,7 @@
                 <a:ea typeface="Calibri" pitchFamily="34" charset="-122"/>
                 <a:cs typeface="Calibri" pitchFamily="34" charset="-120"/>
               </a:rPr>
-              <a:t>97,5%</a:t>
+              <a:t>100%</a:t>
             </a:r>
             <a:endParaRPr lang="en-US" sz="1100" dirty="0"/>
           </a:p>
@@ -23060,7 +23060,7 @@
         <p:spPr>
           <a:xfrm>
             <a:off x="7936992" y="2688336"/>
-            <a:ext cx="3477006" cy="118872"/>
+            <a:ext cx="3566160" cy="118872"/>
           </a:xfrm>
           <a:prstGeom prst="rect">
             <a:avLst/>
@@ -23143,7 +23143,7 @@
                 <a:ea typeface="Calibri" pitchFamily="34" charset="-122"/>
                 <a:cs typeface="Calibri" pitchFamily="34" charset="-120"/>
               </a:rPr>
-              <a:t>1.425/1.435</a:t>
+              <a:t>1.433/1.434</a:t>
             </a:r>
             <a:endParaRPr lang="en-US" sz="1050" dirty="0"/>
           </a:p>
@@ -23182,7 +23182,7 @@
                 <a:ea typeface="Calibri" pitchFamily="34" charset="-122"/>
                 <a:cs typeface="Calibri" pitchFamily="34" charset="-120"/>
               </a:rPr>
-              <a:t>99,3%</a:t>
+              <a:t>99,9%</a:t>
             </a:r>
             <a:endParaRPr lang="en-US" sz="1100" dirty="0"/>
           </a:p>
@@ -23217,7 +23217,7 @@
         <p:spPr>
           <a:xfrm>
             <a:off x="7936992" y="3200400"/>
-            <a:ext cx="3541197" cy="118872"/>
+            <a:ext cx="3562594" cy="118872"/>
           </a:xfrm>
           <a:prstGeom prst="rect">
             <a:avLst/>
@@ -23300,7 +23300,7 @@
                 <a:ea typeface="Calibri" pitchFamily="34" charset="-122"/>
                 <a:cs typeface="Calibri" pitchFamily="34" charset="-120"/>
               </a:rPr>
-              <a:t>74/243</a:t>
+              <a:t>74/244</a:t>
             </a:r>
             <a:endParaRPr lang="en-US" sz="1050" dirty="0"/>
           </a:p>
@@ -23339,7 +23339,7 @@
                 <a:ea typeface="Calibri" pitchFamily="34" charset="-122"/>
                 <a:cs typeface="Calibri" pitchFamily="34" charset="-120"/>
               </a:rPr>
-              <a:t>30,5%</a:t>
+              <a:t>30,3%</a:t>
             </a:r>
             <a:endParaRPr lang="en-US" sz="1100" dirty="0"/>
           </a:p>
@@ -23374,7 +23374,7 @@
         <p:spPr>
           <a:xfrm>
             <a:off x="7936992" y="3712464"/>
-            <a:ext cx="1087679" cy="118872"/>
+            <a:ext cx="1080546" cy="118872"/>
           </a:xfrm>
           <a:prstGeom prst="rect">
             <a:avLst/>
@@ -23776,7 +23776,7 @@
                 <a:ea typeface="Calibri" pitchFamily="34" charset="-122"/>
                 <a:cs typeface="Calibri" pitchFamily="34" charset="-120"/>
               </a:rPr>
-              <a:t>Mediana de 75 días vencidos; el más antiguo lleva 214. 12 entre 1-30 días, 7 entre 31-90 días, 5 entre 91-180 días, 1 entre &gt;180 días.</a:t>
+              <a:t>Mediana de 87 días vencidos; el más antiguo lleva 122. 2 entre 1-30 días, 3 entre 31-90 días, 4 entre 91-180 días.</a:t>
             </a:r>
             <a:endParaRPr lang="en-US" sz="1150" dirty="0"/>
           </a:p>
@@ -23815,7 +23815,7 @@
                 <a:ea typeface="Calibri" pitchFamily="34" charset="-122"/>
                 <a:cs typeface="Calibri" pitchFamily="34" charset="-120"/>
               </a:rPr>
-              <a:t>Fuente: STATUS_SUBSISTEMAS_TALABRE + Detalle_de_Terminaciones · 218 subsistemas · 2.181 DT · Atrasos al 19-10-2026</a:t>
+              <a:t>Fuente: STATUS_SUBSISTEMAS_TALABRE + Detalle_de_Terminaciones · 218 subsistemas · 2.181 DT · Atrasos al 26-10-2026</a:t>
             </a:r>
             <a:endParaRPr lang="en-US" sz="850" dirty="0"/>
           </a:p>
